--- a/ATMOS_A0_native.pptx
+++ b/ATMOS_A0_native.pptx
@@ -7,7 +7,7 @@
   <p:sldIdLst>
     <p:sldId id="256" r:id="rId7"/>
   </p:sldIdLst>
-  <p:sldSz cx="20116800" cy="10515600" type="screen4x3"/>
+  <p:sldSz cx="21031200" cy="10058400" type="screen4x3"/>
   <p:notesSz cx="6858000" cy="9144000"/>
   <p:defaultTextStyle>
     <a:defPPr>
@@ -3097,7 +3097,7 @@
         <p:spPr>
           <a:xfrm>
             <a:off x="457200" y="457200"/>
-            <a:ext cx="17373600" cy="9372600"/>
+            <a:ext cx="18379440" cy="8503920"/>
           </a:xfrm>
           <a:prstGeom prst="rect">
             <a:avLst/>
@@ -3141,7 +3141,7 @@
         <p:spPr>
           <a:xfrm>
             <a:off x="5486400" y="45720"/>
-            <a:ext cx="9144000" cy="365760"/>
+            <a:ext cx="10058400" cy="365760"/>
           </a:xfrm>
           <a:prstGeom prst="rect">
             <a:avLst/>
@@ -3175,8 +3175,8 @@
         </p:nvSpPr>
         <p:spPr>
           <a:xfrm>
-            <a:off x="15179040" y="54864"/>
-            <a:ext cx="2560320" cy="274320"/>
+            <a:off x="15910559" y="64008"/>
+            <a:ext cx="2926080" cy="274320"/>
           </a:xfrm>
           <a:prstGeom prst="rect">
             <a:avLst/>
@@ -3210,7 +3210,7 @@
         </p:nvSpPr>
         <p:spPr>
           <a:xfrm>
-            <a:off x="17373600" y="10104120"/>
+            <a:off x="18288000" y="9646920"/>
             <a:ext cx="2560320" cy="274320"/>
           </a:xfrm>
           <a:prstGeom prst="rect">
@@ -3605,7 +3605,7 @@
         </p:nvSpPr>
         <p:spPr>
           <a:xfrm>
-            <a:off x="14447520" y="2743200"/>
+            <a:off x="13898880" y="2743200"/>
             <a:ext cx="2377440" cy="1188720"/>
           </a:xfrm>
           <a:prstGeom prst="rect">
@@ -3660,7 +3660,7 @@
         </p:nvSpPr>
         <p:spPr>
           <a:xfrm>
-            <a:off x="16276320" y="3621024"/>
+            <a:off x="15727680" y="3621024"/>
             <a:ext cx="457200" cy="256032"/>
           </a:xfrm>
           <a:prstGeom prst="rect">
@@ -3695,7 +3695,7 @@
         </p:nvSpPr>
         <p:spPr>
           <a:xfrm>
-            <a:off x="14447520" y="6675120"/>
+            <a:off x="15727680" y="6675120"/>
             <a:ext cx="2377440" cy="1188720"/>
           </a:xfrm>
           <a:prstGeom prst="rect">
@@ -3750,7 +3750,7 @@
         </p:nvSpPr>
         <p:spPr>
           <a:xfrm>
-            <a:off x="16276320" y="7552944"/>
+            <a:off x="17556480" y="7552944"/>
             <a:ext cx="457200" cy="256032"/>
           </a:xfrm>
           <a:prstGeom prst="rect">
@@ -3780,13 +3780,16 @@
       <p:cxnSp>
         <p:nvCxnSpPr>
           <p:cNvPr id="18" name="Connector 17"/>
-          <p:cNvCxnSpPr/>
+          <p:cNvCxnSpPr>
+            <a:stCxn id="6" idx="1"/>
+            <a:endCxn id="8" idx="3"/>
+          </p:cNvCxnSpPr>
           <p:nvPr/>
         </p:nvCxnSpPr>
         <p:spPr>
           <a:xfrm>
-            <a:off x="4572000" y="5349240"/>
-            <a:ext cx="548640" cy="0"/>
+            <a:off x="2194560" y="5349240"/>
+            <a:ext cx="5303520" cy="0"/>
           </a:xfrm>
           <a:prstGeom prst="line">
             <a:avLst/>
@@ -3816,13 +3819,16 @@
       <p:cxnSp>
         <p:nvCxnSpPr>
           <p:cNvPr id="19" name="Connector 18"/>
-          <p:cNvCxnSpPr/>
+          <p:cNvCxnSpPr>
+            <a:stCxn id="8" idx="1"/>
+            <a:endCxn id="10" idx="3"/>
+          </p:cNvCxnSpPr>
           <p:nvPr/>
         </p:nvCxnSpPr>
         <p:spPr>
           <a:xfrm>
-            <a:off x="7498079" y="5349240"/>
-            <a:ext cx="548641" cy="0"/>
+            <a:off x="5120640" y="5349240"/>
+            <a:ext cx="5303520" cy="0"/>
           </a:xfrm>
           <a:prstGeom prst="line">
             <a:avLst/>
@@ -3852,13 +3858,16 @@
       <p:cxnSp>
         <p:nvCxnSpPr>
           <p:cNvPr id="20" name="Connector 19"/>
-          <p:cNvCxnSpPr/>
+          <p:cNvCxnSpPr>
+            <a:stCxn id="10" idx="1"/>
+            <a:endCxn id="12" idx="3"/>
+          </p:cNvCxnSpPr>
           <p:nvPr/>
         </p:nvCxnSpPr>
         <p:spPr>
           <a:xfrm>
-            <a:off x="10424160" y="5349240"/>
-            <a:ext cx="548640" cy="0"/>
+            <a:off x="8046720" y="5349240"/>
+            <a:ext cx="5303520" cy="0"/>
           </a:xfrm>
           <a:prstGeom prst="line">
             <a:avLst/>
@@ -3888,21 +3897,25 @@
       <p:cxnSp>
         <p:nvCxnSpPr>
           <p:cNvPr id="21" name="Connector 20"/>
-          <p:cNvCxnSpPr/>
+          <p:cNvCxnSpPr>
+            <a:stCxn id="12" idx="1"/>
+            <a:endCxn id="14" idx="3"/>
+          </p:cNvCxnSpPr>
           <p:nvPr/>
         </p:nvCxnSpPr>
         <p:spPr>
-          <a:xfrm>
-            <a:off x="13350240" y="5120640"/>
-            <a:ext cx="548640" cy="0"/>
-          </a:xfrm>
-          <a:prstGeom prst="line">
+          <a:xfrm flipV="1">
+            <a:off x="10972800" y="3337560"/>
+            <a:ext cx="5303520" cy="2011680"/>
+          </a:xfrm>
+          <a:prstGeom prst="bentConnector3">
             <a:avLst/>
           </a:prstGeom>
           <a:ln w="19050">
             <a:solidFill>
               <a:srgbClr val="000000"/>
             </a:solidFill>
+            <a:tailEnd type="triangle" w="med" len="med"/>
           </a:ln>
         </p:spPr>
         <p:style>
@@ -3923,21 +3936,238 @@
       <p:cxnSp>
         <p:nvCxnSpPr>
           <p:cNvPr id="22" name="Connector 21"/>
-          <p:cNvCxnSpPr/>
+          <p:cNvCxnSpPr>
+            <a:stCxn id="12" idx="1"/>
+            <a:endCxn id="16" idx="3"/>
+          </p:cNvCxnSpPr>
           <p:nvPr/>
         </p:nvCxnSpPr>
         <p:spPr>
-          <a:xfrm flipV="1">
-            <a:off x="13898880" y="3337560"/>
-            <a:ext cx="0" cy="1783080"/>
-          </a:xfrm>
-          <a:prstGeom prst="line">
+          <a:xfrm>
+            <a:off x="10972800" y="5349240"/>
+            <a:ext cx="7132320" cy="1920240"/>
+          </a:xfrm>
+          <a:prstGeom prst="bentConnector3">
             <a:avLst/>
           </a:prstGeom>
           <a:ln w="19050">
             <a:solidFill>
               <a:srgbClr val="000000"/>
             </a:solidFill>
+            <a:tailEnd type="triangle" w="med" len="med"/>
+          </a:ln>
+        </p:spPr>
+        <p:style>
+          <a:lnRef idx="2">
+            <a:schemeClr val="accent1"/>
+          </a:lnRef>
+          <a:fillRef idx="0">
+            <a:schemeClr val="accent1"/>
+          </a:fillRef>
+          <a:effectRef idx="1">
+            <a:schemeClr val="accent1"/>
+          </a:effectRef>
+          <a:fontRef idx="minor">
+            <a:schemeClr val="tx1"/>
+          </a:fontRef>
+        </p:style>
+      </p:cxnSp>
+      <p:sp>
+        <p:nvSpPr>
+          <p:cNvPr id="23" name="TextBox 22"/>
+          <p:cNvSpPr txBox="1"/>
+          <p:nvPr/>
+        </p:nvSpPr>
+        <p:spPr>
+          <a:xfrm>
+            <a:off x="3566160" y="4160520"/>
+            <a:ext cx="2560320" cy="457200"/>
+          </a:xfrm>
+          <a:prstGeom prst="rect">
+            <a:avLst/>
+          </a:prstGeom>
+          <a:noFill/>
+        </p:spPr>
+        <p:txBody>
+          <a:bodyPr wrap="square" anchor="t" lIns="12700" rIns="12700" tIns="12700" bIns="12700">
+            <a:spAutoFit/>
+          </a:bodyPr>
+          <a:lstStyle/>
+          <a:p>
+            <a:pPr algn="ctr"/>
+            <a:r>
+              <a:rPr sz="900" b="0">
+                <a:solidFill>
+                  <a:srgbClr val="000000"/>
+                </a:solidFill>
+                <a:latin typeface="Arial"/>
+              </a:rPr>
+              <a:t>F1 Time/Geo-Tagged, Quality-Checked Observations (IER-03)</a:t>
+            </a:r>
+          </a:p>
+        </p:txBody>
+      </p:sp>
+      <p:sp>
+        <p:nvSpPr>
+          <p:cNvPr id="24" name="TextBox 23"/>
+          <p:cNvSpPr txBox="1"/>
+          <p:nvPr/>
+        </p:nvSpPr>
+        <p:spPr>
+          <a:xfrm>
+            <a:off x="6492240" y="3977639"/>
+            <a:ext cx="2560320" cy="457200"/>
+          </a:xfrm>
+          <a:prstGeom prst="rect">
+            <a:avLst/>
+          </a:prstGeom>
+          <a:noFill/>
+        </p:spPr>
+        <p:txBody>
+          <a:bodyPr wrap="square" anchor="t" lIns="12700" rIns="12700" tIns="12700" bIns="12700">
+            <a:spAutoFit/>
+          </a:bodyPr>
+          <a:lstStyle/>
+          <a:p>
+            <a:pPr algn="ctr"/>
+            <a:r>
+              <a:rPr sz="900" b="0">
+                <a:solidFill>
+                  <a:srgbClr val="000000"/>
+                </a:solidFill>
+                <a:latin typeface="Arial"/>
+              </a:rPr>
+              <a:t>F2 Local Micro-Weather State Estimate (IER-05)</a:t>
+            </a:r>
+          </a:p>
+        </p:txBody>
+      </p:sp>
+      <p:sp>
+        <p:nvSpPr>
+          <p:cNvPr id="25" name="TextBox 24"/>
+          <p:cNvSpPr txBox="1"/>
+          <p:nvPr/>
+        </p:nvSpPr>
+        <p:spPr>
+          <a:xfrm>
+            <a:off x="8686800" y="4160520"/>
+            <a:ext cx="2377440" cy="457200"/>
+          </a:xfrm>
+          <a:prstGeom prst="rect">
+            <a:avLst/>
+          </a:prstGeom>
+          <a:noFill/>
+        </p:spPr>
+        <p:txBody>
+          <a:bodyPr wrap="square" anchor="t" lIns="12700" rIns="12700" tIns="12700" bIns="12700">
+            <a:spAutoFit/>
+          </a:bodyPr>
+          <a:lstStyle/>
+          <a:p>
+            <a:pPr algn="ctr"/>
+            <a:r>
+              <a:rPr sz="900" b="0">
+                <a:solidFill>
+                  <a:srgbClr val="000000"/>
+                </a:solidFill>
+                <a:latin typeface="Arial"/>
+              </a:rPr>
+              <a:t>F3 Confidence Bounds &amp; Risk Envelopes (IER-09)</a:t>
+            </a:r>
+          </a:p>
+        </p:txBody>
+      </p:sp>
+      <p:sp>
+        <p:nvSpPr>
+          <p:cNvPr id="26" name="TextBox 25"/>
+          <p:cNvSpPr txBox="1"/>
+          <p:nvPr/>
+        </p:nvSpPr>
+        <p:spPr>
+          <a:xfrm>
+            <a:off x="12527280" y="2148840"/>
+            <a:ext cx="2103120" cy="457200"/>
+          </a:xfrm>
+          <a:prstGeom prst="rect">
+            <a:avLst/>
+          </a:prstGeom>
+          <a:noFill/>
+        </p:spPr>
+        <p:txBody>
+          <a:bodyPr wrap="square" anchor="t" lIns="12700" rIns="12700" tIns="12700" bIns="12700">
+            <a:spAutoFit/>
+          </a:bodyPr>
+          <a:lstStyle/>
+          <a:p>
+            <a:pPr algn="l"/>
+            <a:r>
+              <a:rPr sz="900" b="0">
+                <a:solidFill>
+                  <a:srgbClr val="000000"/>
+                </a:solidFill>
+                <a:latin typeface="Arial"/>
+              </a:rPr>
+              <a:t>F4 Federated Weather Context / COWP State</a:t>
+            </a:r>
+          </a:p>
+        </p:txBody>
+      </p:sp>
+      <p:sp>
+        <p:nvSpPr>
+          <p:cNvPr id="27" name="TextBox 26"/>
+          <p:cNvSpPr txBox="1"/>
+          <p:nvPr/>
+        </p:nvSpPr>
+        <p:spPr>
+          <a:xfrm>
+            <a:off x="9692640" y="6537960"/>
+            <a:ext cx="2377440" cy="457200"/>
+          </a:xfrm>
+          <a:prstGeom prst="rect">
+            <a:avLst/>
+          </a:prstGeom>
+          <a:noFill/>
+        </p:spPr>
+        <p:txBody>
+          <a:bodyPr wrap="square" anchor="t" lIns="12700" rIns="12700" tIns="12700" bIns="12700">
+            <a:spAutoFit/>
+          </a:bodyPr>
+          <a:lstStyle/>
+          <a:p>
+            <a:pPr algn="l"/>
+            <a:r>
+              <a:rPr sz="900" b="0">
+                <a:solidFill>
+                  <a:srgbClr val="000000"/>
+                </a:solidFill>
+                <a:latin typeface="Arial"/>
+              </a:rPr>
+              <a:t>F5 Federated Weather Context / COWP State</a:t>
+            </a:r>
+          </a:p>
+        </p:txBody>
+      </p:sp>
+      <p:cxnSp>
+        <p:nvCxnSpPr>
+          <p:cNvPr id="28" name="Connector 27"/>
+          <p:cNvCxnSpPr>
+            <a:endCxn id="6" idx="3"/>
+          </p:cNvCxnSpPr>
+          <p:nvPr/>
+        </p:nvCxnSpPr>
+        <p:spPr>
+          <a:xfrm>
+            <a:off x="457200" y="5029200"/>
+            <a:ext cx="4114800" cy="320040"/>
+          </a:xfrm>
+          <a:prstGeom prst="bentConnector3">
+            <a:avLst/>
+          </a:prstGeom>
+          <a:ln w="19050">
+            <a:solidFill>
+              <a:srgbClr val="000000"/>
+            </a:solidFill>
+            <a:tailEnd type="triangle" w="med" len="med"/>
           </a:ln>
         </p:spPr>
         <p:style>
@@ -3957,16 +4187,18 @@
       </p:cxnSp>
       <p:cxnSp>
         <p:nvCxnSpPr>
-          <p:cNvPr id="23" name="Connector 22"/>
-          <p:cNvCxnSpPr/>
+          <p:cNvPr id="29" name="Connector 28"/>
+          <p:cNvCxnSpPr>
+            <a:endCxn id="6" idx="3"/>
+          </p:cNvCxnSpPr>
           <p:nvPr/>
         </p:nvCxnSpPr>
         <p:spPr>
-          <a:xfrm>
-            <a:off x="13898880" y="3337560"/>
-            <a:ext cx="548640" cy="0"/>
-          </a:xfrm>
-          <a:prstGeom prst="line">
+          <a:xfrm flipV="1">
+            <a:off x="457200" y="5349240"/>
+            <a:ext cx="4114800" cy="320040"/>
+          </a:xfrm>
+          <a:prstGeom prst="bentConnector3">
             <a:avLst/>
           </a:prstGeom>
           <a:ln w="19050">
@@ -3993,14 +4225,16 @@
       </p:cxnSp>
       <p:cxnSp>
         <p:nvCxnSpPr>
-          <p:cNvPr id="24" name="Connector 23"/>
-          <p:cNvCxnSpPr/>
+          <p:cNvPr id="30" name="Connector 29"/>
+          <p:cNvCxnSpPr>
+            <a:endCxn id="14" idx="3"/>
+          </p:cNvCxnSpPr>
           <p:nvPr/>
         </p:nvCxnSpPr>
         <p:spPr>
           <a:xfrm>
-            <a:off x="13350240" y="5577840"/>
-            <a:ext cx="548640" cy="0"/>
+            <a:off x="457200" y="3337560"/>
+            <a:ext cx="15819120" cy="0"/>
           </a:xfrm>
           <a:prstGeom prst="line">
             <a:avLst/>
@@ -4009,6 +4243,7 @@
             <a:solidFill>
               <a:srgbClr val="000000"/>
             </a:solidFill>
+            <a:tailEnd type="triangle" w="med" len="med"/>
           </a:ln>
         </p:spPr>
         <p:style>
@@ -4028,14 +4263,16 @@
       </p:cxnSp>
       <p:cxnSp>
         <p:nvCxnSpPr>
-          <p:cNvPr id="25" name="Connector 24"/>
-          <p:cNvCxnSpPr/>
+          <p:cNvPr id="31" name="Connector 30"/>
+          <p:cNvCxnSpPr>
+            <a:endCxn id="16" idx="3"/>
+          </p:cNvCxnSpPr>
           <p:nvPr/>
         </p:nvCxnSpPr>
         <p:spPr>
           <a:xfrm>
-            <a:off x="13898880" y="5577840"/>
-            <a:ext cx="0" cy="1691640"/>
+            <a:off x="457200" y="7269480"/>
+            <a:ext cx="17647920" cy="0"/>
           </a:xfrm>
           <a:prstGeom prst="line">
             <a:avLst/>
@@ -4044,6 +4281,7 @@
             <a:solidFill>
               <a:srgbClr val="000000"/>
             </a:solidFill>
+            <a:tailEnd type="triangle" w="med" len="med"/>
           </a:ln>
         </p:spPr>
         <p:style>
@@ -4061,52 +4299,16 @@
           </a:fontRef>
         </p:style>
       </p:cxnSp>
-      <p:cxnSp>
-        <p:nvCxnSpPr>
-          <p:cNvPr id="26" name="Connector 25"/>
-          <p:cNvCxnSpPr/>
-          <p:nvPr/>
-        </p:nvCxnSpPr>
-        <p:spPr>
-          <a:xfrm>
-            <a:off x="13898880" y="7269480"/>
-            <a:ext cx="548640" cy="0"/>
-          </a:xfrm>
-          <a:prstGeom prst="line">
-            <a:avLst/>
-          </a:prstGeom>
-          <a:ln w="19050">
-            <a:solidFill>
-              <a:srgbClr val="000000"/>
-            </a:solidFill>
-            <a:tailEnd type="triangle" w="med" len="med"/>
-          </a:ln>
-        </p:spPr>
-        <p:style>
-          <a:lnRef idx="2">
-            <a:schemeClr val="accent1"/>
-          </a:lnRef>
-          <a:fillRef idx="0">
-            <a:schemeClr val="accent1"/>
-          </a:fillRef>
-          <a:effectRef idx="1">
-            <a:schemeClr val="accent1"/>
-          </a:effectRef>
-          <a:fontRef idx="minor">
-            <a:schemeClr val="tx1"/>
-          </a:fontRef>
-        </p:style>
-      </p:cxnSp>
-      <p:sp>
-        <p:nvSpPr>
-          <p:cNvPr id="27" name="TextBox 26"/>
+      <p:sp>
+        <p:nvSpPr>
+          <p:cNvPr id="32" name="TextBox 31"/>
           <p:cNvSpPr txBox="1"/>
           <p:nvPr/>
         </p:nvSpPr>
         <p:spPr>
           <a:xfrm>
-            <a:off x="3566160" y="4160520"/>
-            <a:ext cx="2560320" cy="457200"/>
+            <a:off x="548640" y="4681728"/>
+            <a:ext cx="1554480" cy="365760"/>
           </a:xfrm>
           <a:prstGeom prst="rect">
             <a:avLst/>
@@ -4119,7 +4321,7 @@
           </a:bodyPr>
           <a:lstStyle/>
           <a:p>
-            <a:pPr algn="ctr"/>
+            <a:pPr algn="l"/>
             <a:r>
               <a:rPr sz="900" b="0">
                 <a:solidFill>
@@ -4127,21 +4329,21 @@
                 </a:solidFill>
                 <a:latin typeface="Arial"/>
               </a:rPr>
-              <a:t>F1 Time/Geo-Tagged, Quality-Checked Observations (IER-03)</a:t>
-            </a:r>
-          </a:p>
-        </p:txBody>
-      </p:sp>
-      <p:sp>
-        <p:nvSpPr>
-          <p:cNvPr id="28" name="TextBox 27"/>
+              <a:t>I1 Collocated Atmospheric Observations</a:t>
+            </a:r>
+          </a:p>
+        </p:txBody>
+      </p:sp>
+      <p:sp>
+        <p:nvSpPr>
+          <p:cNvPr id="33" name="TextBox 32"/>
           <p:cNvSpPr txBox="1"/>
           <p:nvPr/>
         </p:nvSpPr>
         <p:spPr>
           <a:xfrm>
-            <a:off x="6492240" y="3977639"/>
-            <a:ext cx="2560320" cy="457200"/>
+            <a:off x="548640" y="5715000"/>
+            <a:ext cx="1554480" cy="365760"/>
           </a:xfrm>
           <a:prstGeom prst="rect">
             <a:avLst/>
@@ -4154,7 +4356,7 @@
           </a:bodyPr>
           <a:lstStyle/>
           <a:p>
-            <a:pPr algn="ctr"/>
+            <a:pPr algn="l"/>
             <a:r>
               <a:rPr sz="900" b="0">
                 <a:solidFill>
@@ -4162,21 +4364,21 @@
                 </a:solidFill>
                 <a:latin typeface="Arial"/>
               </a:rPr>
-              <a:t>F2 Local Micro-Weather State Estimate (IER-05)</a:t>
-            </a:r>
-          </a:p>
-        </p:txBody>
-      </p:sp>
-      <p:sp>
-        <p:nvSpPr>
-          <p:cNvPr id="29" name="TextBox 28"/>
+              <a:t>I2 Peer Platform Weather Observations</a:t>
+            </a:r>
+          </a:p>
+        </p:txBody>
+      </p:sp>
+      <p:sp>
+        <p:nvSpPr>
+          <p:cNvPr id="34" name="TextBox 33"/>
           <p:cNvSpPr txBox="1"/>
           <p:nvPr/>
         </p:nvSpPr>
         <p:spPr>
           <a:xfrm>
-            <a:off x="9418320" y="4160520"/>
-            <a:ext cx="2560320" cy="457200"/>
+            <a:off x="548640" y="3017520"/>
+            <a:ext cx="2651760" cy="310896"/>
           </a:xfrm>
           <a:prstGeom prst="rect">
             <a:avLst/>
@@ -4189,7 +4391,7 @@
           </a:bodyPr>
           <a:lstStyle/>
           <a:p>
-            <a:pPr algn="ctr"/>
+            <a:pPr algn="l"/>
             <a:r>
               <a:rPr sz="900" b="0">
                 <a:solidFill>
@@ -4197,91 +4399,23 @@
                 </a:solidFill>
                 <a:latin typeface="Arial"/>
               </a:rPr>
-              <a:t>F3 Confidence Bounds &amp; Risk Envelopes (IER-09)</a:t>
-            </a:r>
-          </a:p>
-        </p:txBody>
-      </p:sp>
-      <p:sp>
-        <p:nvSpPr>
-          <p:cNvPr id="30" name="TextBox 29"/>
-          <p:cNvSpPr txBox="1"/>
-          <p:nvPr/>
-        </p:nvSpPr>
-        <p:spPr>
-          <a:xfrm>
-            <a:off x="13258800" y="2286000"/>
-            <a:ext cx="2103120" cy="457200"/>
-          </a:xfrm>
-          <a:prstGeom prst="rect">
-            <a:avLst/>
-          </a:prstGeom>
-          <a:noFill/>
-        </p:spPr>
-        <p:txBody>
-          <a:bodyPr wrap="square" anchor="t" lIns="12700" rIns="12700" tIns="12700" bIns="12700">
-            <a:spAutoFit/>
-          </a:bodyPr>
-          <a:lstStyle/>
-          <a:p>
-            <a:pPr algn="l"/>
-            <a:r>
-              <a:rPr sz="900" b="0">
-                <a:solidFill>
-                  <a:srgbClr val="000000"/>
-                </a:solidFill>
-                <a:latin typeface="Arial"/>
-              </a:rPr>
-              <a:t>F4 Federated Weather Context / COWP State</a:t>
-            </a:r>
-          </a:p>
-        </p:txBody>
-      </p:sp>
-      <p:sp>
-        <p:nvSpPr>
-          <p:cNvPr id="31" name="TextBox 30"/>
-          <p:cNvSpPr txBox="1"/>
-          <p:nvPr/>
-        </p:nvSpPr>
-        <p:spPr>
-          <a:xfrm>
-            <a:off x="14447520" y="6236208"/>
-            <a:ext cx="2194560" cy="411480"/>
-          </a:xfrm>
-          <a:prstGeom prst="rect">
-            <a:avLst/>
-          </a:prstGeom>
-          <a:noFill/>
-        </p:spPr>
-        <p:txBody>
-          <a:bodyPr wrap="square" anchor="t" lIns="12700" rIns="12700" tIns="12700" bIns="12700">
-            <a:spAutoFit/>
-          </a:bodyPr>
-          <a:lstStyle/>
-          <a:p>
-            <a:pPr algn="l"/>
-            <a:r>
-              <a:rPr sz="900" b="0">
-                <a:solidFill>
-                  <a:srgbClr val="000000"/>
-                </a:solidFill>
-                <a:latin typeface="Arial"/>
-              </a:rPr>
-              <a:t>F5 Federated Weather Context / COWP State</a:t>
+              <a:t>I3 Mission Weather Threshold Definitions</a:t>
             </a:r>
           </a:p>
         </p:txBody>
       </p:sp>
       <p:cxnSp>
         <p:nvCxnSpPr>
-          <p:cNvPr id="32" name="Connector 31"/>
-          <p:cNvCxnSpPr/>
+          <p:cNvPr id="35" name="Connector 34"/>
+          <p:cNvCxnSpPr>
+            <a:endCxn id="12" idx="0"/>
+          </p:cNvCxnSpPr>
           <p:nvPr/>
         </p:nvCxnSpPr>
         <p:spPr>
           <a:xfrm>
-            <a:off x="457200" y="5120640"/>
-            <a:ext cx="1737360" cy="0"/>
+            <a:off x="12161520" y="457200"/>
+            <a:ext cx="0" cy="4297680"/>
           </a:xfrm>
           <a:prstGeom prst="line">
             <a:avLst/>
@@ -4291,112 +4425,6 @@
               <a:srgbClr val="000000"/>
             </a:solidFill>
             <a:tailEnd type="triangle" w="med" len="med"/>
-          </a:ln>
-        </p:spPr>
-        <p:style>
-          <a:lnRef idx="2">
-            <a:schemeClr val="accent1"/>
-          </a:lnRef>
-          <a:fillRef idx="0">
-            <a:schemeClr val="accent1"/>
-          </a:fillRef>
-          <a:effectRef idx="1">
-            <a:schemeClr val="accent1"/>
-          </a:effectRef>
-          <a:fontRef idx="minor">
-            <a:schemeClr val="tx1"/>
-          </a:fontRef>
-        </p:style>
-      </p:cxnSp>
-      <p:cxnSp>
-        <p:nvCxnSpPr>
-          <p:cNvPr id="33" name="Connector 32"/>
-          <p:cNvCxnSpPr/>
-          <p:nvPr/>
-        </p:nvCxnSpPr>
-        <p:spPr>
-          <a:xfrm>
-            <a:off x="457200" y="5577840"/>
-            <a:ext cx="1737360" cy="0"/>
-          </a:xfrm>
-          <a:prstGeom prst="line">
-            <a:avLst/>
-          </a:prstGeom>
-          <a:ln w="19050">
-            <a:solidFill>
-              <a:srgbClr val="000000"/>
-            </a:solidFill>
-            <a:tailEnd type="triangle" w="med" len="med"/>
-          </a:ln>
-        </p:spPr>
-        <p:style>
-          <a:lnRef idx="2">
-            <a:schemeClr val="accent1"/>
-          </a:lnRef>
-          <a:fillRef idx="0">
-            <a:schemeClr val="accent1"/>
-          </a:fillRef>
-          <a:effectRef idx="1">
-            <a:schemeClr val="accent1"/>
-          </a:effectRef>
-          <a:fontRef idx="minor">
-            <a:schemeClr val="tx1"/>
-          </a:fontRef>
-        </p:style>
-      </p:cxnSp>
-      <p:cxnSp>
-        <p:nvCxnSpPr>
-          <p:cNvPr id="34" name="Connector 33"/>
-          <p:cNvCxnSpPr/>
-          <p:nvPr/>
-        </p:nvCxnSpPr>
-        <p:spPr>
-          <a:xfrm>
-            <a:off x="457200" y="8961120"/>
-            <a:ext cx="13533120" cy="0"/>
-          </a:xfrm>
-          <a:prstGeom prst="line">
-            <a:avLst/>
-          </a:prstGeom>
-          <a:ln w="19050">
-            <a:solidFill>
-              <a:srgbClr val="000000"/>
-            </a:solidFill>
-          </a:ln>
-        </p:spPr>
-        <p:style>
-          <a:lnRef idx="2">
-            <a:schemeClr val="accent1"/>
-          </a:lnRef>
-          <a:fillRef idx="0">
-            <a:schemeClr val="accent1"/>
-          </a:fillRef>
-          <a:effectRef idx="1">
-            <a:schemeClr val="accent1"/>
-          </a:effectRef>
-          <a:fontRef idx="minor">
-            <a:schemeClr val="tx1"/>
-          </a:fontRef>
-        </p:style>
-      </p:cxnSp>
-      <p:cxnSp>
-        <p:nvCxnSpPr>
-          <p:cNvPr id="35" name="Connector 34"/>
-          <p:cNvCxnSpPr/>
-          <p:nvPr/>
-        </p:nvCxnSpPr>
-        <p:spPr>
-          <a:xfrm flipV="1">
-            <a:off x="13716000" y="3520440"/>
-            <a:ext cx="0" cy="5440680"/>
-          </a:xfrm>
-          <a:prstGeom prst="line">
-            <a:avLst/>
-          </a:prstGeom>
-          <a:ln w="19050">
-            <a:solidFill>
-              <a:srgbClr val="000000"/>
-            </a:solidFill>
           </a:ln>
         </p:spPr>
         <p:style>
@@ -4417,15 +4445,17 @@
       <p:cxnSp>
         <p:nvCxnSpPr>
           <p:cNvPr id="36" name="Connector 35"/>
-          <p:cNvCxnSpPr/>
+          <p:cNvCxnSpPr>
+            <a:endCxn id="12" idx="0"/>
+          </p:cNvCxnSpPr>
           <p:nvPr/>
         </p:nvCxnSpPr>
         <p:spPr>
           <a:xfrm>
-            <a:off x="13716000" y="3520440"/>
-            <a:ext cx="731520" cy="0"/>
-          </a:xfrm>
-          <a:prstGeom prst="line">
+            <a:off x="11521440" y="457200"/>
+            <a:ext cx="640080" cy="4297680"/>
+          </a:xfrm>
+          <a:prstGeom prst="bentConnector3">
             <a:avLst/>
           </a:prstGeom>
           <a:ln w="19050">
@@ -4453,13 +4483,15 @@
       <p:cxnSp>
         <p:nvCxnSpPr>
           <p:cNvPr id="37" name="Connector 36"/>
-          <p:cNvCxnSpPr/>
+          <p:cNvCxnSpPr>
+            <a:endCxn id="16" idx="0"/>
+          </p:cNvCxnSpPr>
           <p:nvPr/>
         </p:nvCxnSpPr>
         <p:spPr>
-          <a:xfrm flipV="1">
-            <a:off x="13990320" y="7406640"/>
-            <a:ext cx="0" cy="1554480"/>
+          <a:xfrm>
+            <a:off x="16916400" y="457200"/>
+            <a:ext cx="0" cy="6217920"/>
           </a:xfrm>
           <a:prstGeom prst="line">
             <a:avLst/>
@@ -4468,6 +4500,7 @@
             <a:solidFill>
               <a:srgbClr val="000000"/>
             </a:solidFill>
+            <a:tailEnd type="triangle" w="med" len="med"/>
           </a:ln>
         </p:spPr>
         <p:style>
@@ -4488,154 +4521,15 @@
       <p:cxnSp>
         <p:nvCxnSpPr>
           <p:cNvPr id="38" name="Connector 37"/>
-          <p:cNvCxnSpPr/>
+          <p:cNvCxnSpPr>
+            <a:endCxn id="14" idx="0"/>
+          </p:cNvCxnSpPr>
           <p:nvPr/>
         </p:nvCxnSpPr>
         <p:spPr>
           <a:xfrm>
-            <a:off x="13990320" y="7406640"/>
-            <a:ext cx="457200" cy="0"/>
-          </a:xfrm>
-          <a:prstGeom prst="line">
-            <a:avLst/>
-          </a:prstGeom>
-          <a:ln w="19050">
-            <a:solidFill>
-              <a:srgbClr val="000000"/>
-            </a:solidFill>
-            <a:tailEnd type="triangle" w="med" len="med"/>
-          </a:ln>
-        </p:spPr>
-        <p:style>
-          <a:lnRef idx="2">
-            <a:schemeClr val="accent1"/>
-          </a:lnRef>
-          <a:fillRef idx="0">
-            <a:schemeClr val="accent1"/>
-          </a:fillRef>
-          <a:effectRef idx="1">
-            <a:schemeClr val="accent1"/>
-          </a:effectRef>
-          <a:fontRef idx="minor">
-            <a:schemeClr val="tx1"/>
-          </a:fontRef>
-        </p:style>
-      </p:cxnSp>
-      <p:sp>
-        <p:nvSpPr>
-          <p:cNvPr id="39" name="TextBox 38"/>
-          <p:cNvSpPr txBox="1"/>
-          <p:nvPr/>
-        </p:nvSpPr>
-        <p:spPr>
-          <a:xfrm>
-            <a:off x="502920" y="4736592"/>
-            <a:ext cx="1691640" cy="365760"/>
-          </a:xfrm>
-          <a:prstGeom prst="rect">
-            <a:avLst/>
-          </a:prstGeom>
-          <a:noFill/>
-        </p:spPr>
-        <p:txBody>
-          <a:bodyPr wrap="square" anchor="t" lIns="12700" rIns="12700" tIns="12700" bIns="12700">
-            <a:spAutoFit/>
-          </a:bodyPr>
-          <a:lstStyle/>
-          <a:p>
-            <a:pPr algn="l"/>
-            <a:r>
-              <a:rPr sz="900" b="0">
-                <a:solidFill>
-                  <a:srgbClr val="000000"/>
-                </a:solidFill>
-                <a:latin typeface="Arial"/>
-              </a:rPr>
-              <a:t>I1 Collocated Atmospheric Observations</a:t>
-            </a:r>
-          </a:p>
-        </p:txBody>
-      </p:sp>
-      <p:sp>
-        <p:nvSpPr>
-          <p:cNvPr id="40" name="TextBox 39"/>
-          <p:cNvSpPr txBox="1"/>
-          <p:nvPr/>
-        </p:nvSpPr>
-        <p:spPr>
-          <a:xfrm>
-            <a:off x="502920" y="5596128"/>
-            <a:ext cx="1691640" cy="365760"/>
-          </a:xfrm>
-          <a:prstGeom prst="rect">
-            <a:avLst/>
-          </a:prstGeom>
-          <a:noFill/>
-        </p:spPr>
-        <p:txBody>
-          <a:bodyPr wrap="square" anchor="t" lIns="12700" rIns="12700" tIns="12700" bIns="12700">
-            <a:spAutoFit/>
-          </a:bodyPr>
-          <a:lstStyle/>
-          <a:p>
-            <a:pPr algn="l"/>
-            <a:r>
-              <a:rPr sz="900" b="0">
-                <a:solidFill>
-                  <a:srgbClr val="000000"/>
-                </a:solidFill>
-                <a:latin typeface="Arial"/>
-              </a:rPr>
-              <a:t>I2 Peer Platform Weather Observations</a:t>
-            </a:r>
-          </a:p>
-        </p:txBody>
-      </p:sp>
-      <p:sp>
-        <p:nvSpPr>
-          <p:cNvPr id="41" name="TextBox 40"/>
-          <p:cNvSpPr txBox="1"/>
-          <p:nvPr/>
-        </p:nvSpPr>
-        <p:spPr>
-          <a:xfrm>
-            <a:off x="502920" y="8613648"/>
-            <a:ext cx="2651760" cy="310896"/>
-          </a:xfrm>
-          <a:prstGeom prst="rect">
-            <a:avLst/>
-          </a:prstGeom>
-          <a:noFill/>
-        </p:spPr>
-        <p:txBody>
-          <a:bodyPr wrap="square" anchor="t" lIns="12700" rIns="12700" tIns="12700" bIns="12700">
-            <a:spAutoFit/>
-          </a:bodyPr>
-          <a:lstStyle/>
-          <a:p>
-            <a:pPr algn="l"/>
-            <a:r>
-              <a:rPr sz="900" b="0">
-                <a:solidFill>
-                  <a:srgbClr val="000000"/>
-                </a:solidFill>
-                <a:latin typeface="Arial"/>
-              </a:rPr>
-              <a:t>I3 Mission Weather Threshold Definitions</a:t>
-            </a:r>
-          </a:p>
-        </p:txBody>
-      </p:sp>
-      <p:cxnSp>
-        <p:nvCxnSpPr>
-          <p:cNvPr id="42" name="Connector 41"/>
-          <p:cNvCxnSpPr/>
-          <p:nvPr/>
-        </p:nvCxnSpPr>
-        <p:spPr>
-          <a:xfrm>
-            <a:off x="12161520" y="457200"/>
-            <a:ext cx="0" cy="4297680"/>
+            <a:off x="15087600" y="457200"/>
+            <a:ext cx="0" cy="2286000"/>
           </a:xfrm>
           <a:prstGeom prst="line">
             <a:avLst/>
@@ -4664,22 +4558,168 @@
       </p:cxnSp>
       <p:cxnSp>
         <p:nvCxnSpPr>
-          <p:cNvPr id="43" name="Connector 42"/>
-          <p:cNvCxnSpPr/>
+          <p:cNvPr id="39" name="Connector 38"/>
+          <p:cNvCxnSpPr>
+            <a:endCxn id="16" idx="0"/>
+          </p:cNvCxnSpPr>
           <p:nvPr/>
         </p:nvCxnSpPr>
         <p:spPr>
-          <a:xfrm>
-            <a:off x="11521440" y="457200"/>
-            <a:ext cx="0" cy="457200"/>
-          </a:xfrm>
-          <a:prstGeom prst="line">
+          <a:xfrm flipH="1">
+            <a:off x="16916400" y="457200"/>
+            <a:ext cx="365760" cy="6217920"/>
+          </a:xfrm>
+          <a:prstGeom prst="bentConnector3">
             <a:avLst/>
           </a:prstGeom>
           <a:ln w="19050">
             <a:solidFill>
               <a:srgbClr val="000000"/>
             </a:solidFill>
+            <a:tailEnd type="triangle" w="med" len="med"/>
+          </a:ln>
+        </p:spPr>
+        <p:style>
+          <a:lnRef idx="2">
+            <a:schemeClr val="accent1"/>
+          </a:lnRef>
+          <a:fillRef idx="0">
+            <a:schemeClr val="accent1"/>
+          </a:fillRef>
+          <a:effectRef idx="1">
+            <a:schemeClr val="accent1"/>
+          </a:effectRef>
+          <a:fontRef idx="minor">
+            <a:schemeClr val="tx1"/>
+          </a:fontRef>
+        </p:style>
+      </p:cxnSp>
+      <p:sp>
+        <p:nvSpPr>
+          <p:cNvPr id="40" name="TextBox 39"/>
+          <p:cNvSpPr txBox="1"/>
+          <p:nvPr/>
+        </p:nvSpPr>
+        <p:spPr>
+          <a:xfrm>
+            <a:off x="9418320" y="118872"/>
+            <a:ext cx="2194560" cy="310896"/>
+          </a:xfrm>
+          <a:prstGeom prst="rect">
+            <a:avLst/>
+          </a:prstGeom>
+          <a:noFill/>
+        </p:spPr>
+        <p:txBody>
+          <a:bodyPr wrap="square" anchor="t" lIns="12700" rIns="12700" tIns="12700" bIns="12700">
+            <a:spAutoFit/>
+          </a:bodyPr>
+          <a:lstStyle/>
+          <a:p>
+            <a:pPr algn="ctr"/>
+            <a:r>
+              <a:rPr sz="900" b="0">
+                <a:solidFill>
+                  <a:srgbClr val="000000"/>
+                </a:solidFill>
+                <a:latin typeface="Arial"/>
+              </a:rPr>
+              <a:t>C2 OPSEC / classification guidance</a:t>
+            </a:r>
+          </a:p>
+        </p:txBody>
+      </p:sp>
+      <p:sp>
+        <p:nvSpPr>
+          <p:cNvPr id="41" name="TextBox 40"/>
+          <p:cNvSpPr txBox="1"/>
+          <p:nvPr/>
+        </p:nvSpPr>
+        <p:spPr>
+          <a:xfrm>
+            <a:off x="11795760" y="118872"/>
+            <a:ext cx="2377440" cy="310896"/>
+          </a:xfrm>
+          <a:prstGeom prst="rect">
+            <a:avLst/>
+          </a:prstGeom>
+          <a:noFill/>
+        </p:spPr>
+        <p:txBody>
+          <a:bodyPr wrap="square" anchor="t" lIns="12700" rIns="12700" tIns="12700" bIns="12700">
+            <a:spAutoFit/>
+          </a:bodyPr>
+          <a:lstStyle/>
+          <a:p>
+            <a:pPr algn="ctr"/>
+            <a:r>
+              <a:rPr sz="900" b="0">
+                <a:solidFill>
+                  <a:srgbClr val="000000"/>
+                </a:solidFill>
+                <a:latin typeface="Arial"/>
+              </a:rPr>
+              <a:t>C3 Network availability and DDS QoS policies</a:t>
+            </a:r>
+          </a:p>
+        </p:txBody>
+      </p:sp>
+      <p:sp>
+        <p:nvSpPr>
+          <p:cNvPr id="42" name="TextBox 41"/>
+          <p:cNvSpPr txBox="1"/>
+          <p:nvPr/>
+        </p:nvSpPr>
+        <p:spPr>
+          <a:xfrm>
+            <a:off x="14538960" y="118872"/>
+            <a:ext cx="2743200" cy="310896"/>
+          </a:xfrm>
+          <a:prstGeom prst="rect">
+            <a:avLst/>
+          </a:prstGeom>
+          <a:noFill/>
+        </p:spPr>
+        <p:txBody>
+          <a:bodyPr wrap="square" anchor="t" lIns="12700" rIns="12700" tIns="12700" bIns="12700">
+            <a:spAutoFit/>
+          </a:bodyPr>
+          <a:lstStyle/>
+          <a:p>
+            <a:pPr algn="ctr"/>
+            <a:r>
+              <a:rPr sz="900" b="0">
+                <a:solidFill>
+                  <a:srgbClr val="000000"/>
+                </a:solidFill>
+                <a:latin typeface="Arial"/>
+              </a:rPr>
+              <a:t>C1 Mission objectives and operational constraints</a:t>
+            </a:r>
+          </a:p>
+        </p:txBody>
+      </p:sp>
+      <p:cxnSp>
+        <p:nvCxnSpPr>
+          <p:cNvPr id="43" name="Connector 42"/>
+          <p:cNvCxnSpPr>
+            <a:stCxn id="12" idx="1"/>
+          </p:cNvCxnSpPr>
+          <p:nvPr/>
+        </p:nvCxnSpPr>
+        <p:spPr>
+          <a:xfrm>
+            <a:off x="10972800" y="5349240"/>
+            <a:ext cx="7863840" cy="0"/>
+          </a:xfrm>
+          <a:prstGeom prst="line">
+            <a:avLst/>
+          </a:prstGeom>
+          <a:ln w="19050">
+            <a:solidFill>
+              <a:srgbClr val="000000"/>
+            </a:solidFill>
+            <a:tailEnd type="triangle" w="med" len="med"/>
           </a:ln>
         </p:spPr>
         <p:style>
@@ -4700,13 +4740,15 @@
       <p:cxnSp>
         <p:nvCxnSpPr>
           <p:cNvPr id="44" name="Connector 43"/>
-          <p:cNvCxnSpPr/>
+          <p:cNvCxnSpPr>
+            <a:stCxn id="14" idx="1"/>
+          </p:cNvCxnSpPr>
           <p:nvPr/>
         </p:nvCxnSpPr>
         <p:spPr>
           <a:xfrm>
-            <a:off x="11521440" y="914400"/>
-            <a:ext cx="0" cy="3840480"/>
+            <a:off x="13898880" y="3337560"/>
+            <a:ext cx="4937760" cy="0"/>
           </a:xfrm>
           <a:prstGeom prst="line">
             <a:avLst/>
@@ -4736,13 +4778,15 @@
       <p:cxnSp>
         <p:nvCxnSpPr>
           <p:cNvPr id="45" name="Connector 44"/>
-          <p:cNvCxnSpPr/>
+          <p:cNvCxnSpPr>
+            <a:stCxn id="16" idx="1"/>
+          </p:cNvCxnSpPr>
           <p:nvPr/>
         </p:nvCxnSpPr>
         <p:spPr>
           <a:xfrm>
-            <a:off x="11521440" y="914400"/>
-            <a:ext cx="5852160" cy="0"/>
+            <a:off x="15727680" y="7269480"/>
+            <a:ext cx="3108960" cy="0"/>
           </a:xfrm>
           <a:prstGeom prst="line">
             <a:avLst/>
@@ -4751,6 +4795,7 @@
             <a:solidFill>
               <a:srgbClr val="000000"/>
             </a:solidFill>
+            <a:tailEnd type="triangle" w="med" len="med"/>
           </a:ln>
         </p:spPr>
         <p:style>
@@ -4768,86 +4813,123 @@
           </a:fontRef>
         </p:style>
       </p:cxnSp>
+      <p:sp>
+        <p:nvSpPr>
+          <p:cNvPr id="46" name="TextBox 45"/>
+          <p:cNvSpPr txBox="1"/>
+          <p:nvPr/>
+        </p:nvSpPr>
+        <p:spPr>
+          <a:xfrm>
+            <a:off x="18928080" y="5120640"/>
+            <a:ext cx="2011680" cy="457200"/>
+          </a:xfrm>
+          <a:prstGeom prst="rect">
+            <a:avLst/>
+          </a:prstGeom>
+          <a:noFill/>
+        </p:spPr>
+        <p:txBody>
+          <a:bodyPr wrap="square" anchor="t" lIns="12700" rIns="12700" tIns="12700" bIns="12700">
+            <a:spAutoFit/>
+          </a:bodyPr>
+          <a:lstStyle/>
+          <a:p>
+            <a:pPr algn="l"/>
+            <a:r>
+              <a:rPr sz="900" b="0">
+                <a:solidFill>
+                  <a:srgbClr val="000000"/>
+                </a:solidFill>
+                <a:latin typeface="Arial"/>
+              </a:rPr>
+              <a:t>O1 Fused COWP State</a:t>
+            </a:r>
+          </a:p>
+        </p:txBody>
+      </p:sp>
+      <p:sp>
+        <p:nvSpPr>
+          <p:cNvPr id="47" name="TextBox 46"/>
+          <p:cNvSpPr txBox="1"/>
+          <p:nvPr/>
+        </p:nvSpPr>
+        <p:spPr>
+          <a:xfrm>
+            <a:off x="18928080" y="3108960"/>
+            <a:ext cx="2011680" cy="457200"/>
+          </a:xfrm>
+          <a:prstGeom prst="rect">
+            <a:avLst/>
+          </a:prstGeom>
+          <a:noFill/>
+        </p:spPr>
+        <p:txBody>
+          <a:bodyPr wrap="square" anchor="t" lIns="12700" rIns="12700" tIns="12700" bIns="12700">
+            <a:spAutoFit/>
+          </a:bodyPr>
+          <a:lstStyle/>
+          <a:p>
+            <a:pPr algn="l"/>
+            <a:r>
+              <a:rPr sz="900" b="0">
+                <a:solidFill>
+                  <a:srgbClr val="000000"/>
+                </a:solidFill>
+                <a:latin typeface="Arial"/>
+              </a:rPr>
+              <a:t>O3 Weather State Change Notifications</a:t>
+            </a:r>
+          </a:p>
+        </p:txBody>
+      </p:sp>
+      <p:sp>
+        <p:nvSpPr>
+          <p:cNvPr id="48" name="TextBox 47"/>
+          <p:cNvSpPr txBox="1"/>
+          <p:nvPr/>
+        </p:nvSpPr>
+        <p:spPr>
+          <a:xfrm>
+            <a:off x="18928080" y="7040880"/>
+            <a:ext cx="2011680" cy="457200"/>
+          </a:xfrm>
+          <a:prstGeom prst="rect">
+            <a:avLst/>
+          </a:prstGeom>
+          <a:noFill/>
+        </p:spPr>
+        <p:txBody>
+          <a:bodyPr wrap="square" anchor="t" lIns="12700" rIns="12700" tIns="12700" bIns="12700">
+            <a:spAutoFit/>
+          </a:bodyPr>
+          <a:lstStyle/>
+          <a:p>
+            <a:pPr algn="l"/>
+            <a:r>
+              <a:rPr sz="900" b="0">
+                <a:solidFill>
+                  <a:srgbClr val="000000"/>
+                </a:solidFill>
+                <a:latin typeface="Arial"/>
+              </a:rPr>
+              <a:t>O2 Mission-Tailored COWP Excerpts</a:t>
+            </a:r>
+          </a:p>
+        </p:txBody>
+      </p:sp>
       <p:cxnSp>
         <p:nvCxnSpPr>
-          <p:cNvPr id="46" name="Connector 45"/>
-          <p:cNvCxnSpPr/>
+          <p:cNvPr id="49" name="Connector 48"/>
+          <p:cNvCxnSpPr>
+            <a:endCxn id="6" idx="2"/>
+          </p:cNvCxnSpPr>
           <p:nvPr/>
         </p:nvCxnSpPr>
         <p:spPr>
-          <a:xfrm>
-            <a:off x="17373600" y="914400"/>
-            <a:ext cx="0" cy="4389120"/>
-          </a:xfrm>
-          <a:prstGeom prst="line">
-            <a:avLst/>
-          </a:prstGeom>
-          <a:ln w="19050">
-            <a:solidFill>
-              <a:srgbClr val="000000"/>
-            </a:solidFill>
-          </a:ln>
-        </p:spPr>
-        <p:style>
-          <a:lnRef idx="2">
-            <a:schemeClr val="accent1"/>
-          </a:lnRef>
-          <a:fillRef idx="0">
-            <a:schemeClr val="accent1"/>
-          </a:fillRef>
-          <a:effectRef idx="1">
-            <a:schemeClr val="accent1"/>
-          </a:effectRef>
-          <a:fontRef idx="minor">
-            <a:schemeClr val="tx1"/>
-          </a:fontRef>
-        </p:style>
-      </p:cxnSp>
-      <p:cxnSp>
-        <p:nvCxnSpPr>
-          <p:cNvPr id="47" name="Connector 46"/>
-          <p:cNvCxnSpPr/>
-          <p:nvPr/>
-        </p:nvCxnSpPr>
-        <p:spPr>
-          <a:xfrm flipH="1">
-            <a:off x="15910559" y="5303520"/>
-            <a:ext cx="1463041" cy="0"/>
-          </a:xfrm>
-          <a:prstGeom prst="line">
-            <a:avLst/>
-          </a:prstGeom>
-          <a:ln w="19050">
-            <a:solidFill>
-              <a:srgbClr val="000000"/>
-            </a:solidFill>
-          </a:ln>
-        </p:spPr>
-        <p:style>
-          <a:lnRef idx="2">
-            <a:schemeClr val="accent1"/>
-          </a:lnRef>
-          <a:fillRef idx="0">
-            <a:schemeClr val="accent1"/>
-          </a:fillRef>
-          <a:effectRef idx="1">
-            <a:schemeClr val="accent1"/>
-          </a:effectRef>
-          <a:fontRef idx="minor">
-            <a:schemeClr val="tx1"/>
-          </a:fontRef>
-        </p:style>
-      </p:cxnSp>
-      <p:cxnSp>
-        <p:nvCxnSpPr>
-          <p:cNvPr id="48" name="Connector 47"/>
-          <p:cNvCxnSpPr/>
-          <p:nvPr/>
-        </p:nvCxnSpPr>
-        <p:spPr>
-          <a:xfrm>
-            <a:off x="15910559" y="5303520"/>
-            <a:ext cx="0" cy="1371600"/>
+          <a:xfrm flipV="1">
+            <a:off x="3383280" y="5943600"/>
+            <a:ext cx="0" cy="3017520"/>
           </a:xfrm>
           <a:prstGeom prst="line">
             <a:avLst/>
@@ -4857,41 +4939,6 @@
               <a:srgbClr val="000000"/>
             </a:solidFill>
             <a:tailEnd type="triangle" w="med" len="med"/>
-          </a:ln>
-        </p:spPr>
-        <p:style>
-          <a:lnRef idx="2">
-            <a:schemeClr val="accent1"/>
-          </a:lnRef>
-          <a:fillRef idx="0">
-            <a:schemeClr val="accent1"/>
-          </a:fillRef>
-          <a:effectRef idx="1">
-            <a:schemeClr val="accent1"/>
-          </a:effectRef>
-          <a:fontRef idx="minor">
-            <a:schemeClr val="tx1"/>
-          </a:fontRef>
-        </p:style>
-      </p:cxnSp>
-      <p:cxnSp>
-        <p:nvCxnSpPr>
-          <p:cNvPr id="49" name="Connector 48"/>
-          <p:cNvCxnSpPr/>
-          <p:nvPr/>
-        </p:nvCxnSpPr>
-        <p:spPr>
-          <a:xfrm>
-            <a:off x="15636240" y="457200"/>
-            <a:ext cx="0" cy="365760"/>
-          </a:xfrm>
-          <a:prstGeom prst="line">
-            <a:avLst/>
-          </a:prstGeom>
-          <a:ln w="19050">
-            <a:solidFill>
-              <a:srgbClr val="000000"/>
-            </a:solidFill>
           </a:ln>
         </p:spPr>
         <p:style>
@@ -4912,13 +4959,15 @@
       <p:cxnSp>
         <p:nvCxnSpPr>
           <p:cNvPr id="50" name="Connector 49"/>
-          <p:cNvCxnSpPr/>
+          <p:cNvCxnSpPr>
+            <a:endCxn id="8" idx="2"/>
+          </p:cNvCxnSpPr>
           <p:nvPr/>
         </p:nvCxnSpPr>
         <p:spPr>
-          <a:xfrm>
-            <a:off x="15636240" y="822960"/>
-            <a:ext cx="0" cy="1920240"/>
+          <a:xfrm flipH="1" flipV="1">
+            <a:off x="6309360" y="5943600"/>
+            <a:ext cx="0" cy="3017520"/>
           </a:xfrm>
           <a:prstGeom prst="line">
             <a:avLst/>
@@ -4948,13 +4997,15 @@
       <p:cxnSp>
         <p:nvCxnSpPr>
           <p:cNvPr id="51" name="Connector 50"/>
-          <p:cNvCxnSpPr/>
+          <p:cNvCxnSpPr>
+            <a:endCxn id="10" idx="2"/>
+          </p:cNvCxnSpPr>
           <p:nvPr/>
         </p:nvCxnSpPr>
         <p:spPr>
-          <a:xfrm>
-            <a:off x="15636240" y="822960"/>
-            <a:ext cx="2011680" cy="0"/>
+          <a:xfrm flipV="1">
+            <a:off x="9235440" y="5943600"/>
+            <a:ext cx="0" cy="3017520"/>
           </a:xfrm>
           <a:prstGeom prst="line">
             <a:avLst/>
@@ -4963,6 +5014,7 @@
             <a:solidFill>
               <a:srgbClr val="000000"/>
             </a:solidFill>
+            <a:tailEnd type="triangle" w="med" len="med"/>
           </a:ln>
         </p:spPr>
         <p:style>
@@ -4983,13 +5035,15 @@
       <p:cxnSp>
         <p:nvCxnSpPr>
           <p:cNvPr id="52" name="Connector 51"/>
-          <p:cNvCxnSpPr/>
+          <p:cNvCxnSpPr>
+            <a:endCxn id="12" idx="2"/>
+          </p:cNvCxnSpPr>
           <p:nvPr/>
         </p:nvCxnSpPr>
         <p:spPr>
-          <a:xfrm>
-            <a:off x="17647920" y="822960"/>
-            <a:ext cx="0" cy="4846320"/>
+          <a:xfrm flipV="1">
+            <a:off x="12161520" y="5943600"/>
+            <a:ext cx="0" cy="3017520"/>
           </a:xfrm>
           <a:prstGeom prst="line">
             <a:avLst/>
@@ -4998,6 +5052,7 @@
             <a:solidFill>
               <a:srgbClr val="000000"/>
             </a:solidFill>
+            <a:tailEnd type="triangle" w="med" len="med"/>
           </a:ln>
         </p:spPr>
         <p:style>
@@ -5018,13 +5073,15 @@
       <p:cxnSp>
         <p:nvCxnSpPr>
           <p:cNvPr id="53" name="Connector 52"/>
-          <p:cNvCxnSpPr/>
+          <p:cNvCxnSpPr>
+            <a:endCxn id="14" idx="2"/>
+          </p:cNvCxnSpPr>
           <p:nvPr/>
         </p:nvCxnSpPr>
         <p:spPr>
-          <a:xfrm flipH="1">
-            <a:off x="16276320" y="5669280"/>
-            <a:ext cx="1371600" cy="0"/>
+          <a:xfrm flipV="1">
+            <a:off x="15087600" y="3931920"/>
+            <a:ext cx="0" cy="5029200"/>
           </a:xfrm>
           <a:prstGeom prst="line">
             <a:avLst/>
@@ -5033,6 +5090,7 @@
             <a:solidFill>
               <a:srgbClr val="000000"/>
             </a:solidFill>
+            <a:tailEnd type="triangle" w="med" len="med"/>
           </a:ln>
         </p:spPr>
         <p:style>
@@ -5053,13 +5111,15 @@
       <p:cxnSp>
         <p:nvCxnSpPr>
           <p:cNvPr id="54" name="Connector 53"/>
-          <p:cNvCxnSpPr/>
+          <p:cNvCxnSpPr>
+            <a:endCxn id="16" idx="2"/>
+          </p:cNvCxnSpPr>
           <p:nvPr/>
         </p:nvCxnSpPr>
         <p:spPr>
-          <a:xfrm>
-            <a:off x="16276320" y="5669280"/>
-            <a:ext cx="0" cy="1005840"/>
+          <a:xfrm flipV="1">
+            <a:off x="16916400" y="7863840"/>
+            <a:ext cx="0" cy="1097280"/>
           </a:xfrm>
           <a:prstGeom prst="line">
             <a:avLst/>
@@ -5069,146 +5129,6 @@
               <a:srgbClr val="000000"/>
             </a:solidFill>
             <a:tailEnd type="triangle" w="med" len="med"/>
-          </a:ln>
-        </p:spPr>
-        <p:style>
-          <a:lnRef idx="2">
-            <a:schemeClr val="accent1"/>
-          </a:lnRef>
-          <a:fillRef idx="0">
-            <a:schemeClr val="accent1"/>
-          </a:fillRef>
-          <a:effectRef idx="1">
-            <a:schemeClr val="accent1"/>
-          </a:effectRef>
-          <a:fontRef idx="minor">
-            <a:schemeClr val="tx1"/>
-          </a:fontRef>
-        </p:style>
-      </p:cxnSp>
-      <p:sp>
-        <p:nvSpPr>
-          <p:cNvPr id="55" name="TextBox 54"/>
-          <p:cNvSpPr txBox="1"/>
-          <p:nvPr/>
-        </p:nvSpPr>
-        <p:spPr>
-          <a:xfrm>
-            <a:off x="9235440" y="137160"/>
-            <a:ext cx="2103120" cy="548640"/>
-          </a:xfrm>
-          <a:prstGeom prst="rect">
-            <a:avLst/>
-          </a:prstGeom>
-          <a:noFill/>
-        </p:spPr>
-        <p:txBody>
-          <a:bodyPr wrap="square" anchor="t" lIns="12700" rIns="12700" tIns="12700" bIns="12700">
-            <a:spAutoFit/>
-          </a:bodyPr>
-          <a:lstStyle/>
-          <a:p>
-            <a:pPr algn="ctr"/>
-            <a:r>
-              <a:rPr sz="900" b="0">
-                <a:solidFill>
-                  <a:srgbClr val="000000"/>
-                </a:solidFill>
-                <a:latin typeface="Arial"/>
-              </a:rPr>
-              <a:t>C2 OPSEC / classification guidance</a:t>
-            </a:r>
-          </a:p>
-        </p:txBody>
-      </p:sp>
-      <p:sp>
-        <p:nvSpPr>
-          <p:cNvPr id="56" name="TextBox 55"/>
-          <p:cNvSpPr txBox="1"/>
-          <p:nvPr/>
-        </p:nvSpPr>
-        <p:spPr>
-          <a:xfrm>
-            <a:off x="12527280" y="137160"/>
-            <a:ext cx="2103120" cy="548640"/>
-          </a:xfrm>
-          <a:prstGeom prst="rect">
-            <a:avLst/>
-          </a:prstGeom>
-          <a:noFill/>
-        </p:spPr>
-        <p:txBody>
-          <a:bodyPr wrap="square" anchor="t" lIns="12700" rIns="12700" tIns="12700" bIns="12700">
-            <a:spAutoFit/>
-          </a:bodyPr>
-          <a:lstStyle/>
-          <a:p>
-            <a:pPr algn="ctr"/>
-            <a:r>
-              <a:rPr sz="900" b="0">
-                <a:solidFill>
-                  <a:srgbClr val="000000"/>
-                </a:solidFill>
-                <a:latin typeface="Arial"/>
-              </a:rPr>
-              <a:t>C3 Network availability and DDS QoS policies</a:t>
-            </a:r>
-          </a:p>
-        </p:txBody>
-      </p:sp>
-      <p:sp>
-        <p:nvSpPr>
-          <p:cNvPr id="57" name="TextBox 56"/>
-          <p:cNvSpPr txBox="1"/>
-          <p:nvPr/>
-        </p:nvSpPr>
-        <p:spPr>
-          <a:xfrm>
-            <a:off x="16002000" y="137160"/>
-            <a:ext cx="2103120" cy="548640"/>
-          </a:xfrm>
-          <a:prstGeom prst="rect">
-            <a:avLst/>
-          </a:prstGeom>
-          <a:noFill/>
-        </p:spPr>
-        <p:txBody>
-          <a:bodyPr wrap="square" anchor="t" lIns="12700" rIns="12700" tIns="12700" bIns="12700">
-            <a:spAutoFit/>
-          </a:bodyPr>
-          <a:lstStyle/>
-          <a:p>
-            <a:pPr algn="ctr"/>
-            <a:r>
-              <a:rPr sz="900" b="0">
-                <a:solidFill>
-                  <a:srgbClr val="000000"/>
-                </a:solidFill>
-                <a:latin typeface="Arial"/>
-              </a:rPr>
-              <a:t>C1 Mission objectives and operational constraints</a:t>
-            </a:r>
-          </a:p>
-        </p:txBody>
-      </p:sp>
-      <p:cxnSp>
-        <p:nvCxnSpPr>
-          <p:cNvPr id="58" name="Connector 57"/>
-          <p:cNvCxnSpPr/>
-          <p:nvPr/>
-        </p:nvCxnSpPr>
-        <p:spPr>
-          <a:xfrm>
-            <a:off x="13350240" y="4937760"/>
-            <a:ext cx="182880" cy="0"/>
-          </a:xfrm>
-          <a:prstGeom prst="line">
-            <a:avLst/>
-          </a:prstGeom>
-          <a:ln w="19050">
-            <a:solidFill>
-              <a:srgbClr val="000000"/>
-            </a:solidFill>
           </a:ln>
         </p:spPr>
         <p:style>
@@ -5228,22 +5148,25 @@
       </p:cxnSp>
       <p:cxnSp>
         <p:nvCxnSpPr>
-          <p:cNvPr id="59" name="Connector 58"/>
-          <p:cNvCxnSpPr/>
+          <p:cNvPr id="55" name="Connector 54"/>
+          <p:cNvCxnSpPr>
+            <a:endCxn id="8" idx="2"/>
+          </p:cNvCxnSpPr>
           <p:nvPr/>
         </p:nvCxnSpPr>
         <p:spPr>
-          <a:xfrm flipV="1">
-            <a:off x="13533120" y="1828800"/>
-            <a:ext cx="0" cy="3108960"/>
-          </a:xfrm>
-          <a:prstGeom prst="line">
+          <a:xfrm flipH="1" flipV="1">
+            <a:off x="6309360" y="5943600"/>
+            <a:ext cx="365760" cy="3017520"/>
+          </a:xfrm>
+          <a:prstGeom prst="bentConnector3">
             <a:avLst/>
           </a:prstGeom>
           <a:ln w="19050">
             <a:solidFill>
               <a:srgbClr val="000000"/>
             </a:solidFill>
+            <a:tailEnd type="triangle" w="med" len="med"/>
           </a:ln>
         </p:spPr>
         <p:style>
@@ -5263,16 +5186,18 @@
       </p:cxnSp>
       <p:cxnSp>
         <p:nvCxnSpPr>
-          <p:cNvPr id="60" name="Connector 59"/>
-          <p:cNvCxnSpPr/>
+          <p:cNvPr id="56" name="Connector 55"/>
+          <p:cNvCxnSpPr>
+            <a:endCxn id="10" idx="2"/>
+          </p:cNvCxnSpPr>
           <p:nvPr/>
         </p:nvCxnSpPr>
         <p:spPr>
-          <a:xfrm>
-            <a:off x="13533120" y="1828800"/>
-            <a:ext cx="4297680" cy="0"/>
-          </a:xfrm>
-          <a:prstGeom prst="line">
+          <a:xfrm flipH="1" flipV="1">
+            <a:off x="9235440" y="5943600"/>
+            <a:ext cx="365760" cy="3017520"/>
+          </a:xfrm>
+          <a:prstGeom prst="bentConnector3">
             <a:avLst/>
           </a:prstGeom>
           <a:ln w="19050">
@@ -5299,16 +5224,18 @@
       </p:cxnSp>
       <p:cxnSp>
         <p:nvCxnSpPr>
-          <p:cNvPr id="61" name="Connector 60"/>
-          <p:cNvCxnSpPr/>
+          <p:cNvPr id="57" name="Connector 56"/>
+          <p:cNvCxnSpPr>
+            <a:endCxn id="12" idx="2"/>
+          </p:cNvCxnSpPr>
           <p:nvPr/>
         </p:nvCxnSpPr>
         <p:spPr>
-          <a:xfrm>
-            <a:off x="16824960" y="3337560"/>
-            <a:ext cx="1005840" cy="0"/>
-          </a:xfrm>
-          <a:prstGeom prst="line">
+          <a:xfrm flipH="1" flipV="1">
+            <a:off x="12161520" y="5943600"/>
+            <a:ext cx="365760" cy="3017520"/>
+          </a:xfrm>
+          <a:prstGeom prst="bentConnector3">
             <a:avLst/>
           </a:prstGeom>
           <a:ln w="19050">
@@ -5335,16 +5262,18 @@
       </p:cxnSp>
       <p:cxnSp>
         <p:nvCxnSpPr>
-          <p:cNvPr id="62" name="Connector 61"/>
-          <p:cNvCxnSpPr/>
+          <p:cNvPr id="58" name="Connector 57"/>
+          <p:cNvCxnSpPr>
+            <a:endCxn id="16" idx="2"/>
+          </p:cNvCxnSpPr>
           <p:nvPr/>
         </p:nvCxnSpPr>
         <p:spPr>
-          <a:xfrm>
-            <a:off x="16824960" y="7269480"/>
-            <a:ext cx="1005840" cy="0"/>
-          </a:xfrm>
-          <a:prstGeom prst="line">
+          <a:xfrm flipH="1" flipV="1">
+            <a:off x="16916400" y="7863840"/>
+            <a:ext cx="365760" cy="1097280"/>
+          </a:xfrm>
+          <a:prstGeom prst="bentConnector3">
             <a:avLst/>
           </a:prstGeom>
           <a:ln w="19050">
@@ -5371,759 +5300,14 @@
       </p:cxnSp>
       <p:sp>
         <p:nvSpPr>
-          <p:cNvPr id="63" name="TextBox 62"/>
+          <p:cNvPr id="59" name="TextBox 58"/>
           <p:cNvSpPr txBox="1"/>
           <p:nvPr/>
         </p:nvSpPr>
         <p:spPr>
           <a:xfrm>
-            <a:off x="17967960" y="1627632"/>
-            <a:ext cx="2057400" cy="457200"/>
-          </a:xfrm>
-          <a:prstGeom prst="rect">
-            <a:avLst/>
-          </a:prstGeom>
-          <a:noFill/>
-        </p:spPr>
-        <p:txBody>
-          <a:bodyPr wrap="square" anchor="t" lIns="12700" rIns="12700" tIns="12700" bIns="12700">
-            <a:spAutoFit/>
-          </a:bodyPr>
-          <a:lstStyle/>
-          <a:p>
-            <a:pPr algn="l"/>
-            <a:r>
-              <a:rPr sz="900" b="0">
-                <a:solidFill>
-                  <a:srgbClr val="000000"/>
-                </a:solidFill>
-                <a:latin typeface="Arial"/>
-              </a:rPr>
-              <a:t>O1 Fused COWP State</a:t>
-            </a:r>
-          </a:p>
-        </p:txBody>
-      </p:sp>
-      <p:sp>
-        <p:nvSpPr>
-          <p:cNvPr id="64" name="TextBox 63"/>
-          <p:cNvSpPr txBox="1"/>
-          <p:nvPr/>
-        </p:nvSpPr>
-        <p:spPr>
-          <a:xfrm>
-            <a:off x="17967960" y="3127248"/>
-            <a:ext cx="2057400" cy="457200"/>
-          </a:xfrm>
-          <a:prstGeom prst="rect">
-            <a:avLst/>
-          </a:prstGeom>
-          <a:noFill/>
-        </p:spPr>
-        <p:txBody>
-          <a:bodyPr wrap="square" anchor="t" lIns="12700" rIns="12700" tIns="12700" bIns="12700">
-            <a:spAutoFit/>
-          </a:bodyPr>
-          <a:lstStyle/>
-          <a:p>
-            <a:pPr algn="l"/>
-            <a:r>
-              <a:rPr sz="900" b="0">
-                <a:solidFill>
-                  <a:srgbClr val="000000"/>
-                </a:solidFill>
-                <a:latin typeface="Arial"/>
-              </a:rPr>
-              <a:t>O3 Weather State Change Notifications</a:t>
-            </a:r>
-          </a:p>
-        </p:txBody>
-      </p:sp>
-      <p:sp>
-        <p:nvSpPr>
-          <p:cNvPr id="65" name="TextBox 64"/>
-          <p:cNvSpPr txBox="1"/>
-          <p:nvPr/>
-        </p:nvSpPr>
-        <p:spPr>
-          <a:xfrm>
-            <a:off x="17967960" y="7059168"/>
-            <a:ext cx="2057400" cy="457200"/>
-          </a:xfrm>
-          <a:prstGeom prst="rect">
-            <a:avLst/>
-          </a:prstGeom>
-          <a:noFill/>
-        </p:spPr>
-        <p:txBody>
-          <a:bodyPr wrap="square" anchor="t" lIns="12700" rIns="12700" tIns="12700" bIns="12700">
-            <a:spAutoFit/>
-          </a:bodyPr>
-          <a:lstStyle/>
-          <a:p>
-            <a:pPr algn="l"/>
-            <a:r>
-              <a:rPr sz="900" b="0">
-                <a:solidFill>
-                  <a:srgbClr val="000000"/>
-                </a:solidFill>
-                <a:latin typeface="Arial"/>
-              </a:rPr>
-              <a:t>O2 Mission-Tailored COWP Excerpts</a:t>
-            </a:r>
-          </a:p>
-        </p:txBody>
-      </p:sp>
-      <p:cxnSp>
-        <p:nvCxnSpPr>
-          <p:cNvPr id="66" name="Connector 65"/>
-          <p:cNvCxnSpPr/>
-          <p:nvPr/>
-        </p:nvCxnSpPr>
-        <p:spPr>
-          <a:xfrm flipV="1">
-            <a:off x="2743200" y="8412480"/>
-            <a:ext cx="0" cy="1417320"/>
-          </a:xfrm>
-          <a:prstGeom prst="line">
-            <a:avLst/>
-          </a:prstGeom>
-          <a:ln w="19050">
-            <a:solidFill>
-              <a:srgbClr val="000000"/>
-            </a:solidFill>
-          </a:ln>
-        </p:spPr>
-        <p:style>
-          <a:lnRef idx="2">
-            <a:schemeClr val="accent1"/>
-          </a:lnRef>
-          <a:fillRef idx="0">
-            <a:schemeClr val="accent1"/>
-          </a:fillRef>
-          <a:effectRef idx="1">
-            <a:schemeClr val="accent1"/>
-          </a:effectRef>
-          <a:fontRef idx="minor">
-            <a:schemeClr val="tx1"/>
-          </a:fontRef>
-        </p:style>
-      </p:cxnSp>
-      <p:cxnSp>
-        <p:nvCxnSpPr>
-          <p:cNvPr id="67" name="Connector 66"/>
-          <p:cNvCxnSpPr/>
-          <p:nvPr/>
-        </p:nvCxnSpPr>
-        <p:spPr>
-          <a:xfrm>
-            <a:off x="2560320" y="8412480"/>
-            <a:ext cx="13075920" cy="0"/>
-          </a:xfrm>
-          <a:prstGeom prst="line">
-            <a:avLst/>
-          </a:prstGeom>
-          <a:ln w="19050">
-            <a:solidFill>
-              <a:srgbClr val="000000"/>
-            </a:solidFill>
-          </a:ln>
-        </p:spPr>
-        <p:style>
-          <a:lnRef idx="2">
-            <a:schemeClr val="accent1"/>
-          </a:lnRef>
-          <a:fillRef idx="0">
-            <a:schemeClr val="accent1"/>
-          </a:fillRef>
-          <a:effectRef idx="1">
-            <a:schemeClr val="accent1"/>
-          </a:effectRef>
-          <a:fontRef idx="minor">
-            <a:schemeClr val="tx1"/>
-          </a:fontRef>
-        </p:style>
-      </p:cxnSp>
-      <p:cxnSp>
-        <p:nvCxnSpPr>
-          <p:cNvPr id="68" name="Connector 67"/>
-          <p:cNvCxnSpPr/>
-          <p:nvPr/>
-        </p:nvCxnSpPr>
-        <p:spPr>
-          <a:xfrm flipV="1">
-            <a:off x="2743200" y="5943600"/>
-            <a:ext cx="0" cy="2468880"/>
-          </a:xfrm>
-          <a:prstGeom prst="line">
-            <a:avLst/>
-          </a:prstGeom>
-          <a:ln w="19050">
-            <a:solidFill>
-              <a:srgbClr val="000000"/>
-            </a:solidFill>
-            <a:tailEnd type="triangle" w="med" len="med"/>
-          </a:ln>
-        </p:spPr>
-        <p:style>
-          <a:lnRef idx="2">
-            <a:schemeClr val="accent1"/>
-          </a:lnRef>
-          <a:fillRef idx="0">
-            <a:schemeClr val="accent1"/>
-          </a:fillRef>
-          <a:effectRef idx="1">
-            <a:schemeClr val="accent1"/>
-          </a:effectRef>
-          <a:fontRef idx="minor">
-            <a:schemeClr val="tx1"/>
-          </a:fontRef>
-        </p:style>
-      </p:cxnSp>
-      <p:cxnSp>
-        <p:nvCxnSpPr>
-          <p:cNvPr id="69" name="Connector 68"/>
-          <p:cNvCxnSpPr/>
-          <p:nvPr/>
-        </p:nvCxnSpPr>
-        <p:spPr>
-          <a:xfrm flipV="1">
-            <a:off x="5852160" y="5943600"/>
-            <a:ext cx="0" cy="2468880"/>
-          </a:xfrm>
-          <a:prstGeom prst="line">
-            <a:avLst/>
-          </a:prstGeom>
-          <a:ln w="19050">
-            <a:solidFill>
-              <a:srgbClr val="000000"/>
-            </a:solidFill>
-            <a:tailEnd type="triangle" w="med" len="med"/>
-          </a:ln>
-        </p:spPr>
-        <p:style>
-          <a:lnRef idx="2">
-            <a:schemeClr val="accent1"/>
-          </a:lnRef>
-          <a:fillRef idx="0">
-            <a:schemeClr val="accent1"/>
-          </a:fillRef>
-          <a:effectRef idx="1">
-            <a:schemeClr val="accent1"/>
-          </a:effectRef>
-          <a:fontRef idx="minor">
-            <a:schemeClr val="tx1"/>
-          </a:fontRef>
-        </p:style>
-      </p:cxnSp>
-      <p:cxnSp>
-        <p:nvCxnSpPr>
-          <p:cNvPr id="70" name="Connector 69"/>
-          <p:cNvCxnSpPr/>
-          <p:nvPr/>
-        </p:nvCxnSpPr>
-        <p:spPr>
-          <a:xfrm flipV="1">
-            <a:off x="8778240" y="5943600"/>
-            <a:ext cx="0" cy="2468880"/>
-          </a:xfrm>
-          <a:prstGeom prst="line">
-            <a:avLst/>
-          </a:prstGeom>
-          <a:ln w="19050">
-            <a:solidFill>
-              <a:srgbClr val="000000"/>
-            </a:solidFill>
-            <a:tailEnd type="triangle" w="med" len="med"/>
-          </a:ln>
-        </p:spPr>
-        <p:style>
-          <a:lnRef idx="2">
-            <a:schemeClr val="accent1"/>
-          </a:lnRef>
-          <a:fillRef idx="0">
-            <a:schemeClr val="accent1"/>
-          </a:fillRef>
-          <a:effectRef idx="1">
-            <a:schemeClr val="accent1"/>
-          </a:effectRef>
-          <a:fontRef idx="minor">
-            <a:schemeClr val="tx1"/>
-          </a:fontRef>
-        </p:style>
-      </p:cxnSp>
-      <p:cxnSp>
-        <p:nvCxnSpPr>
-          <p:cNvPr id="71" name="Connector 70"/>
-          <p:cNvCxnSpPr/>
-          <p:nvPr/>
-        </p:nvCxnSpPr>
-        <p:spPr>
-          <a:xfrm flipV="1">
-            <a:off x="11704320" y="5943600"/>
-            <a:ext cx="0" cy="2468880"/>
-          </a:xfrm>
-          <a:prstGeom prst="line">
-            <a:avLst/>
-          </a:prstGeom>
-          <a:ln w="19050">
-            <a:solidFill>
-              <a:srgbClr val="000000"/>
-            </a:solidFill>
-            <a:tailEnd type="triangle" w="med" len="med"/>
-          </a:ln>
-        </p:spPr>
-        <p:style>
-          <a:lnRef idx="2">
-            <a:schemeClr val="accent1"/>
-          </a:lnRef>
-          <a:fillRef idx="0">
-            <a:schemeClr val="accent1"/>
-          </a:fillRef>
-          <a:effectRef idx="1">
-            <a:schemeClr val="accent1"/>
-          </a:effectRef>
-          <a:fontRef idx="minor">
-            <a:schemeClr val="tx1"/>
-          </a:fontRef>
-        </p:style>
-      </p:cxnSp>
-      <p:cxnSp>
-        <p:nvCxnSpPr>
-          <p:cNvPr id="72" name="Connector 71"/>
-          <p:cNvCxnSpPr/>
-          <p:nvPr/>
-        </p:nvCxnSpPr>
-        <p:spPr>
-          <a:xfrm flipV="1">
-            <a:off x="15179040" y="7863840"/>
-            <a:ext cx="0" cy="548640"/>
-          </a:xfrm>
-          <a:prstGeom prst="line">
-            <a:avLst/>
-          </a:prstGeom>
-          <a:ln w="19050">
-            <a:solidFill>
-              <a:srgbClr val="000000"/>
-            </a:solidFill>
-            <a:tailEnd type="triangle" w="med" len="med"/>
-          </a:ln>
-        </p:spPr>
-        <p:style>
-          <a:lnRef idx="2">
-            <a:schemeClr val="accent1"/>
-          </a:lnRef>
-          <a:fillRef idx="0">
-            <a:schemeClr val="accent1"/>
-          </a:fillRef>
-          <a:effectRef idx="1">
-            <a:schemeClr val="accent1"/>
-          </a:effectRef>
-          <a:fontRef idx="minor">
-            <a:schemeClr val="tx1"/>
-          </a:fontRef>
-        </p:style>
-      </p:cxnSp>
-      <p:cxnSp>
-        <p:nvCxnSpPr>
-          <p:cNvPr id="73" name="Connector 72"/>
-          <p:cNvCxnSpPr/>
-          <p:nvPr/>
-        </p:nvCxnSpPr>
-        <p:spPr>
-          <a:xfrm flipV="1">
-            <a:off x="14081760" y="4480560"/>
-            <a:ext cx="0" cy="3931920"/>
-          </a:xfrm>
-          <a:prstGeom prst="line">
-            <a:avLst/>
-          </a:prstGeom>
-          <a:ln w="19050">
-            <a:solidFill>
-              <a:srgbClr val="000000"/>
-            </a:solidFill>
-          </a:ln>
-        </p:spPr>
-        <p:style>
-          <a:lnRef idx="2">
-            <a:schemeClr val="accent1"/>
-          </a:lnRef>
-          <a:fillRef idx="0">
-            <a:schemeClr val="accent1"/>
-          </a:fillRef>
-          <a:effectRef idx="1">
-            <a:schemeClr val="accent1"/>
-          </a:effectRef>
-          <a:fontRef idx="minor">
-            <a:schemeClr val="tx1"/>
-          </a:fontRef>
-        </p:style>
-      </p:cxnSp>
-      <p:cxnSp>
-        <p:nvCxnSpPr>
-          <p:cNvPr id="74" name="Connector 73"/>
-          <p:cNvCxnSpPr/>
-          <p:nvPr/>
-        </p:nvCxnSpPr>
-        <p:spPr>
-          <a:xfrm>
-            <a:off x="14081760" y="4480560"/>
-            <a:ext cx="1554480" cy="0"/>
-          </a:xfrm>
-          <a:prstGeom prst="line">
-            <a:avLst/>
-          </a:prstGeom>
-          <a:ln w="19050">
-            <a:solidFill>
-              <a:srgbClr val="000000"/>
-            </a:solidFill>
-          </a:ln>
-        </p:spPr>
-        <p:style>
-          <a:lnRef idx="2">
-            <a:schemeClr val="accent1"/>
-          </a:lnRef>
-          <a:fillRef idx="0">
-            <a:schemeClr val="accent1"/>
-          </a:fillRef>
-          <a:effectRef idx="1">
-            <a:schemeClr val="accent1"/>
-          </a:effectRef>
-          <a:fontRef idx="minor">
-            <a:schemeClr val="tx1"/>
-          </a:fontRef>
-        </p:style>
-      </p:cxnSp>
-      <p:cxnSp>
-        <p:nvCxnSpPr>
-          <p:cNvPr id="75" name="Connector 74"/>
-          <p:cNvCxnSpPr/>
-          <p:nvPr/>
-        </p:nvCxnSpPr>
-        <p:spPr>
-          <a:xfrm flipV="1">
-            <a:off x="15636240" y="3931920"/>
-            <a:ext cx="0" cy="548640"/>
-          </a:xfrm>
-          <a:prstGeom prst="line">
-            <a:avLst/>
-          </a:prstGeom>
-          <a:ln w="19050">
-            <a:solidFill>
-              <a:srgbClr val="000000"/>
-            </a:solidFill>
-            <a:tailEnd type="triangle" w="med" len="med"/>
-          </a:ln>
-        </p:spPr>
-        <p:style>
-          <a:lnRef idx="2">
-            <a:schemeClr val="accent1"/>
-          </a:lnRef>
-          <a:fillRef idx="0">
-            <a:schemeClr val="accent1"/>
-          </a:fillRef>
-          <a:effectRef idx="1">
-            <a:schemeClr val="accent1"/>
-          </a:effectRef>
-          <a:fontRef idx="minor">
-            <a:schemeClr val="tx1"/>
-          </a:fontRef>
-        </p:style>
-      </p:cxnSp>
-      <p:cxnSp>
-        <p:nvCxnSpPr>
-          <p:cNvPr id="76" name="Connector 75"/>
-          <p:cNvCxnSpPr/>
-          <p:nvPr/>
-        </p:nvCxnSpPr>
-        <p:spPr>
-          <a:xfrm flipV="1">
-            <a:off x="6400800" y="8778240"/>
-            <a:ext cx="0" cy="1051560"/>
-          </a:xfrm>
-          <a:prstGeom prst="line">
-            <a:avLst/>
-          </a:prstGeom>
-          <a:ln w="19050">
-            <a:solidFill>
-              <a:srgbClr val="000000"/>
-            </a:solidFill>
-          </a:ln>
-        </p:spPr>
-        <p:style>
-          <a:lnRef idx="2">
-            <a:schemeClr val="accent1"/>
-          </a:lnRef>
-          <a:fillRef idx="0">
-            <a:schemeClr val="accent1"/>
-          </a:fillRef>
-          <a:effectRef idx="1">
-            <a:schemeClr val="accent1"/>
-          </a:effectRef>
-          <a:fontRef idx="minor">
-            <a:schemeClr val="tx1"/>
-          </a:fontRef>
-        </p:style>
-      </p:cxnSp>
-      <p:cxnSp>
-        <p:nvCxnSpPr>
-          <p:cNvPr id="77" name="Connector 76"/>
-          <p:cNvCxnSpPr/>
-          <p:nvPr/>
-        </p:nvCxnSpPr>
-        <p:spPr>
-          <a:xfrm>
-            <a:off x="6217920" y="8778240"/>
-            <a:ext cx="2194560" cy="0"/>
-          </a:xfrm>
-          <a:prstGeom prst="line">
-            <a:avLst/>
-          </a:prstGeom>
-          <a:ln w="19050">
-            <a:solidFill>
-              <a:srgbClr val="000000"/>
-            </a:solidFill>
-          </a:ln>
-        </p:spPr>
-        <p:style>
-          <a:lnRef idx="2">
-            <a:schemeClr val="accent1"/>
-          </a:lnRef>
-          <a:fillRef idx="0">
-            <a:schemeClr val="accent1"/>
-          </a:fillRef>
-          <a:effectRef idx="1">
-            <a:schemeClr val="accent1"/>
-          </a:effectRef>
-          <a:fontRef idx="minor">
-            <a:schemeClr val="tx1"/>
-          </a:fontRef>
-        </p:style>
-      </p:cxnSp>
-      <p:cxnSp>
-        <p:nvCxnSpPr>
-          <p:cNvPr id="78" name="Connector 77"/>
-          <p:cNvCxnSpPr/>
-          <p:nvPr/>
-        </p:nvCxnSpPr>
-        <p:spPr>
-          <a:xfrm flipV="1">
-            <a:off x="6217920" y="5943600"/>
-            <a:ext cx="0" cy="2834640"/>
-          </a:xfrm>
-          <a:prstGeom prst="line">
-            <a:avLst/>
-          </a:prstGeom>
-          <a:ln w="19050">
-            <a:solidFill>
-              <a:srgbClr val="000000"/>
-            </a:solidFill>
-            <a:tailEnd type="triangle" w="med" len="med"/>
-          </a:ln>
-        </p:spPr>
-        <p:style>
-          <a:lnRef idx="2">
-            <a:schemeClr val="accent1"/>
-          </a:lnRef>
-          <a:fillRef idx="0">
-            <a:schemeClr val="accent1"/>
-          </a:fillRef>
-          <a:effectRef idx="1">
-            <a:schemeClr val="accent1"/>
-          </a:effectRef>
-          <a:fontRef idx="minor">
-            <a:schemeClr val="tx1"/>
-          </a:fontRef>
-        </p:style>
-      </p:cxnSp>
-      <p:cxnSp>
-        <p:nvCxnSpPr>
-          <p:cNvPr id="79" name="Connector 78"/>
-          <p:cNvCxnSpPr/>
-          <p:nvPr/>
-        </p:nvCxnSpPr>
-        <p:spPr>
-          <a:xfrm flipV="1">
-            <a:off x="8412480" y="5943600"/>
-            <a:ext cx="0" cy="2834640"/>
-          </a:xfrm>
-          <a:prstGeom prst="line">
-            <a:avLst/>
-          </a:prstGeom>
-          <a:ln w="19050">
-            <a:solidFill>
-              <a:srgbClr val="000000"/>
-            </a:solidFill>
-            <a:tailEnd type="triangle" w="med" len="med"/>
-          </a:ln>
-        </p:spPr>
-        <p:style>
-          <a:lnRef idx="2">
-            <a:schemeClr val="accent1"/>
-          </a:lnRef>
-          <a:fillRef idx="0">
-            <a:schemeClr val="accent1"/>
-          </a:fillRef>
-          <a:effectRef idx="1">
-            <a:schemeClr val="accent1"/>
-          </a:effectRef>
-          <a:fontRef idx="minor">
-            <a:schemeClr val="tx1"/>
-          </a:fontRef>
-        </p:style>
-      </p:cxnSp>
-      <p:cxnSp>
-        <p:nvCxnSpPr>
-          <p:cNvPr id="80" name="Connector 79"/>
-          <p:cNvCxnSpPr/>
-          <p:nvPr/>
-        </p:nvCxnSpPr>
-        <p:spPr>
-          <a:xfrm flipV="1">
-            <a:off x="12801600" y="9144000"/>
-            <a:ext cx="0" cy="685800"/>
-          </a:xfrm>
-          <a:prstGeom prst="line">
-            <a:avLst/>
-          </a:prstGeom>
-          <a:ln w="19050">
-            <a:solidFill>
-              <a:srgbClr val="000000"/>
-            </a:solidFill>
-          </a:ln>
-        </p:spPr>
-        <p:style>
-          <a:lnRef idx="2">
-            <a:schemeClr val="accent1"/>
-          </a:lnRef>
-          <a:fillRef idx="0">
-            <a:schemeClr val="accent1"/>
-          </a:fillRef>
-          <a:effectRef idx="1">
-            <a:schemeClr val="accent1"/>
-          </a:effectRef>
-          <a:fontRef idx="minor">
-            <a:schemeClr val="tx1"/>
-          </a:fontRef>
-        </p:style>
-      </p:cxnSp>
-      <p:cxnSp>
-        <p:nvCxnSpPr>
-          <p:cNvPr id="81" name="Connector 80"/>
-          <p:cNvCxnSpPr/>
-          <p:nvPr/>
-        </p:nvCxnSpPr>
-        <p:spPr>
-          <a:xfrm>
-            <a:off x="12435840" y="9144000"/>
-            <a:ext cx="3108960" cy="0"/>
-          </a:xfrm>
-          <a:prstGeom prst="line">
-            <a:avLst/>
-          </a:prstGeom>
-          <a:ln w="19050">
-            <a:solidFill>
-              <a:srgbClr val="000000"/>
-            </a:solidFill>
-          </a:ln>
-        </p:spPr>
-        <p:style>
-          <a:lnRef idx="2">
-            <a:schemeClr val="accent1"/>
-          </a:lnRef>
-          <a:fillRef idx="0">
-            <a:schemeClr val="accent1"/>
-          </a:fillRef>
-          <a:effectRef idx="1">
-            <a:schemeClr val="accent1"/>
-          </a:effectRef>
-          <a:fontRef idx="minor">
-            <a:schemeClr val="tx1"/>
-          </a:fontRef>
-        </p:style>
-      </p:cxnSp>
-      <p:cxnSp>
-        <p:nvCxnSpPr>
-          <p:cNvPr id="82" name="Connector 81"/>
-          <p:cNvCxnSpPr/>
-          <p:nvPr/>
-        </p:nvCxnSpPr>
-        <p:spPr>
-          <a:xfrm flipV="1">
-            <a:off x="12435840" y="5943600"/>
-            <a:ext cx="0" cy="3200400"/>
-          </a:xfrm>
-          <a:prstGeom prst="line">
-            <a:avLst/>
-          </a:prstGeom>
-          <a:ln w="19050">
-            <a:solidFill>
-              <a:srgbClr val="000000"/>
-            </a:solidFill>
-            <a:tailEnd type="triangle" w="med" len="med"/>
-          </a:ln>
-        </p:spPr>
-        <p:style>
-          <a:lnRef idx="2">
-            <a:schemeClr val="accent1"/>
-          </a:lnRef>
-          <a:fillRef idx="0">
-            <a:schemeClr val="accent1"/>
-          </a:fillRef>
-          <a:effectRef idx="1">
-            <a:schemeClr val="accent1"/>
-          </a:effectRef>
-          <a:fontRef idx="minor">
-            <a:schemeClr val="tx1"/>
-          </a:fontRef>
-        </p:style>
-      </p:cxnSp>
-      <p:cxnSp>
-        <p:nvCxnSpPr>
-          <p:cNvPr id="83" name="Connector 82"/>
-          <p:cNvCxnSpPr/>
-          <p:nvPr/>
-        </p:nvCxnSpPr>
-        <p:spPr>
-          <a:xfrm flipV="1">
-            <a:off x="15544800" y="7863840"/>
-            <a:ext cx="0" cy="1280160"/>
-          </a:xfrm>
-          <a:prstGeom prst="line">
-            <a:avLst/>
-          </a:prstGeom>
-          <a:ln w="19050">
-            <a:solidFill>
-              <a:srgbClr val="000000"/>
-            </a:solidFill>
-            <a:tailEnd type="triangle" w="med" len="med"/>
-          </a:ln>
-        </p:spPr>
-        <p:style>
-          <a:lnRef idx="2">
-            <a:schemeClr val="accent1"/>
-          </a:lnRef>
-          <a:fillRef idx="0">
-            <a:schemeClr val="accent1"/>
-          </a:fillRef>
-          <a:effectRef idx="1">
-            <a:schemeClr val="accent1"/>
-          </a:effectRef>
-          <a:fontRef idx="minor">
-            <a:schemeClr val="tx1"/>
-          </a:fontRef>
-        </p:style>
-      </p:cxnSp>
-      <p:sp>
-        <p:nvSpPr>
-          <p:cNvPr id="84" name="TextBox 83"/>
-          <p:cNvSpPr txBox="1"/>
-          <p:nvPr/>
-        </p:nvSpPr>
-        <p:spPr>
-          <a:xfrm>
-            <a:off x="1645920" y="9893808"/>
-            <a:ext cx="2743200" cy="292608"/>
+            <a:off x="1828800" y="9070848"/>
+            <a:ext cx="2926080" cy="292608"/>
           </a:xfrm>
           <a:prstGeom prst="rect">
             <a:avLst/>
@@ -6151,13 +5335,13 @@
       </p:sp>
       <p:sp>
         <p:nvSpPr>
-          <p:cNvPr id="85" name="TextBox 84"/>
+          <p:cNvPr id="60" name="TextBox 59"/>
           <p:cNvSpPr txBox="1"/>
           <p:nvPr/>
         </p:nvSpPr>
         <p:spPr>
           <a:xfrm>
-            <a:off x="5303520" y="9893808"/>
+            <a:off x="5486400" y="9070848"/>
             <a:ext cx="2743200" cy="292608"/>
           </a:xfrm>
           <a:prstGeom prst="rect">
@@ -6186,13 +5370,13 @@
       </p:sp>
       <p:sp>
         <p:nvSpPr>
-          <p:cNvPr id="86" name="TextBox 85"/>
+          <p:cNvPr id="61" name="TextBox 60"/>
           <p:cNvSpPr txBox="1"/>
           <p:nvPr/>
         </p:nvSpPr>
         <p:spPr>
           <a:xfrm>
-            <a:off x="11521440" y="9893808"/>
+            <a:off x="11521440" y="9070848"/>
             <a:ext cx="3108960" cy="292608"/>
           </a:xfrm>
           <a:prstGeom prst="rect">

--- a/ATMOS_A0_native.pptx
+++ b/ATMOS_A0_native.pptx
@@ -7,7 +7,7 @@
   <p:sldIdLst>
     <p:sldId id="256" r:id="rId7"/>
   </p:sldIdLst>
-  <p:sldSz cx="21945600" cy="11430000" type="screen4x3"/>
+  <p:sldSz cx="10058400" cy="7772400" type="screen4x3"/>
   <p:notesSz cx="6858000" cy="9144000"/>
   <p:defaultTextStyle>
     <a:defPPr>
@@ -3096,13 +3096,199 @@
         </p:nvSpPr>
         <p:spPr>
           <a:xfrm>
-            <a:off x="457200" y="1005840"/>
-            <a:ext cx="19202400" cy="9784080"/>
+            <a:off x="274320" y="274320"/>
+            <a:ext cx="9509760" cy="7223760"/>
           </a:xfrm>
           <a:prstGeom prst="rect">
             <a:avLst/>
           </a:prstGeom>
           <a:noFill/>
+          <a:ln w="12700">
+            <a:solidFill>
+              <a:srgbClr val="000000"/>
+            </a:solidFill>
+          </a:ln>
+          <a:effectLst/>
+        </p:spPr>
+        <p:style>
+          <a:lnRef idx="1">
+            <a:schemeClr val="accent1"/>
+          </a:lnRef>
+          <a:fillRef idx="3">
+            <a:schemeClr val="accent1"/>
+          </a:fillRef>
+          <a:effectRef idx="2">
+            <a:schemeClr val="accent1"/>
+          </a:effectRef>
+          <a:fontRef idx="minor">
+            <a:schemeClr val="lt1"/>
+          </a:fontRef>
+        </p:style>
+        <p:txBody>
+          <a:bodyPr rtlCol="0" anchor="ctr"/>
+          <a:lstStyle/>
+          <a:p>
+            <a:pPr algn="ctr"/>
+          </a:p>
+        </p:txBody>
+      </p:sp>
+      <p:sp>
+        <p:nvSpPr>
+          <p:cNvPr id="3" name="TextBox 2"/>
+          <p:cNvSpPr txBox="1"/>
+          <p:nvPr/>
+        </p:nvSpPr>
+        <p:spPr>
+          <a:xfrm>
+            <a:off x="274320" y="310896"/>
+            <a:ext cx="9509760" cy="292608"/>
+          </a:xfrm>
+          <a:prstGeom prst="rect">
+            <a:avLst/>
+          </a:prstGeom>
+          <a:noFill/>
+        </p:spPr>
+        <p:txBody>
+          <a:bodyPr wrap="square" anchor="t" lIns="0" rIns="0" tIns="0" bIns="0">
+            <a:spAutoFit/>
+          </a:bodyPr>
+          <a:lstStyle/>
+          <a:p>
+            <a:pPr algn="ctr"/>
+            <a:r>
+              <a:rPr sz="1400" b="1">
+                <a:solidFill>
+                  <a:srgbClr val="000000"/>
+                </a:solidFill>
+                <a:latin typeface="Arial"/>
+              </a:rPr>
+              <a:t>A0 — Decompose Conduct Air-Focused Weather Exploitation Operations</a:t>
+            </a:r>
+          </a:p>
+        </p:txBody>
+      </p:sp>
+      <p:sp>
+        <p:nvSpPr>
+          <p:cNvPr id="4" name="TextBox 3"/>
+          <p:cNvSpPr txBox="1"/>
+          <p:nvPr/>
+        </p:nvSpPr>
+        <p:spPr>
+          <a:xfrm>
+            <a:off x="384048" y="640080"/>
+            <a:ext cx="6035040" cy="201168"/>
+          </a:xfrm>
+          <a:prstGeom prst="rect">
+            <a:avLst/>
+          </a:prstGeom>
+          <a:noFill/>
+        </p:spPr>
+        <p:txBody>
+          <a:bodyPr wrap="square" anchor="t" lIns="0" rIns="0" tIns="0" bIns="0">
+            <a:spAutoFit/>
+          </a:bodyPr>
+          <a:lstStyle/>
+          <a:p>
+            <a:pPr algn="l"/>
+            <a:r>
+              <a:rPr sz="1000" b="0">
+                <a:solidFill>
+                  <a:srgbClr val="000000"/>
+                </a:solidFill>
+                <a:latin typeface="Arial"/>
+              </a:rPr>
+              <a:t>Parent: A-0 Conduct Air-Focused Weather Exploitation Operations</a:t>
+            </a:r>
+          </a:p>
+        </p:txBody>
+      </p:sp>
+      <p:sp>
+        <p:nvSpPr>
+          <p:cNvPr id="5" name="TextBox 4"/>
+          <p:cNvSpPr txBox="1"/>
+          <p:nvPr/>
+        </p:nvSpPr>
+        <p:spPr>
+          <a:xfrm>
+            <a:off x="7680960" y="640080"/>
+            <a:ext cx="2011680" cy="201168"/>
+          </a:xfrm>
+          <a:prstGeom prst="rect">
+            <a:avLst/>
+          </a:prstGeom>
+          <a:noFill/>
+        </p:spPr>
+        <p:txBody>
+          <a:bodyPr wrap="square" anchor="t" lIns="0" rIns="0" tIns="0" bIns="0">
+            <a:spAutoFit/>
+          </a:bodyPr>
+          <a:lstStyle/>
+          <a:p>
+            <a:pPr algn="r"/>
+            <a:r>
+              <a:rPr sz="1000" b="0">
+                <a:solidFill>
+                  <a:srgbClr val="000000"/>
+                </a:solidFill>
+                <a:latin typeface="Arial"/>
+              </a:rPr>
+              <a:t>Distribution Statement C</a:t>
+            </a:r>
+          </a:p>
+        </p:txBody>
+      </p:sp>
+      <p:sp>
+        <p:nvSpPr>
+          <p:cNvPr id="6" name="TextBox 5"/>
+          <p:cNvSpPr txBox="1"/>
+          <p:nvPr/>
+        </p:nvSpPr>
+        <p:spPr>
+          <a:xfrm>
+            <a:off x="8229600" y="7242048"/>
+            <a:ext cx="1444752" cy="201168"/>
+          </a:xfrm>
+          <a:prstGeom prst="rect">
+            <a:avLst/>
+          </a:prstGeom>
+          <a:noFill/>
+        </p:spPr>
+        <p:txBody>
+          <a:bodyPr wrap="square" anchor="t" lIns="0" rIns="0" tIns="0" bIns="0">
+            <a:spAutoFit/>
+          </a:bodyPr>
+          <a:lstStyle/>
+          <a:p>
+            <a:pPr algn="r"/>
+            <a:r>
+              <a:rPr sz="1000" b="0">
+                <a:solidFill>
+                  <a:srgbClr val="000000"/>
+                </a:solidFill>
+                <a:latin typeface="Arial"/>
+              </a:rPr>
+              <a:t>Node: A0</a:t>
+            </a:r>
+          </a:p>
+        </p:txBody>
+      </p:sp>
+      <p:sp>
+        <p:nvSpPr>
+          <p:cNvPr id="7" name="Rectangle 6"/>
+          <p:cNvSpPr/>
+          <p:nvPr/>
+        </p:nvSpPr>
+        <p:spPr>
+          <a:xfrm>
+            <a:off x="640080" y="3429000"/>
+            <a:ext cx="1417320" cy="960120"/>
+          </a:xfrm>
+          <a:prstGeom prst="rect">
+            <a:avLst/>
+          </a:prstGeom>
+          <a:solidFill>
+            <a:srgbClr val="FFFFFF"/>
+          </a:solidFill>
           <a:ln w="15875">
             <a:solidFill>
               <a:srgbClr val="000000"/>
@@ -3125,196 +3311,10 @@
           </a:fontRef>
         </p:style>
         <p:txBody>
-          <a:bodyPr rtlCol="0" anchor="ctr"/>
+          <a:bodyPr rtlCol="0" anchor="ctr" wrap="square" lIns="36576" rIns="36576" tIns="36576" bIns="36576"/>
           <a:lstStyle/>
           <a:p>
             <a:pPr algn="ctr"/>
-          </a:p>
-        </p:txBody>
-      </p:sp>
-      <p:sp>
-        <p:nvSpPr>
-          <p:cNvPr id="3" name="TextBox 2"/>
-          <p:cNvSpPr txBox="1"/>
-          <p:nvPr/>
-        </p:nvSpPr>
-        <p:spPr>
-          <a:xfrm>
-            <a:off x="6400800" y="201168"/>
-            <a:ext cx="9144000" cy="411480"/>
-          </a:xfrm>
-          <a:prstGeom prst="rect">
-            <a:avLst/>
-          </a:prstGeom>
-          <a:noFill/>
-        </p:spPr>
-        <p:txBody>
-          <a:bodyPr wrap="square" anchor="t" lIns="12700" rIns="12700" tIns="12700" bIns="12700">
-            <a:spAutoFit/>
-          </a:bodyPr>
-          <a:lstStyle/>
-          <a:p>
-            <a:pPr algn="ctr"/>
-            <a:r>
-              <a:rPr sz="1800" b="1">
-                <a:solidFill>
-                  <a:srgbClr val="000000"/>
-                </a:solidFill>
-                <a:latin typeface="Arial"/>
-              </a:rPr>
-              <a:t>A0 — Decompose Conduct Air-Focused Weather Exploitation Operations</a:t>
-            </a:r>
-          </a:p>
-        </p:txBody>
-      </p:sp>
-      <p:sp>
-        <p:nvSpPr>
-          <p:cNvPr id="4" name="TextBox 3"/>
-          <p:cNvSpPr txBox="1"/>
-          <p:nvPr/>
-        </p:nvSpPr>
-        <p:spPr>
-          <a:xfrm>
-            <a:off x="16093440" y="237744"/>
-            <a:ext cx="3474720" cy="274320"/>
-          </a:xfrm>
-          <a:prstGeom prst="rect">
-            <a:avLst/>
-          </a:prstGeom>
-          <a:noFill/>
-        </p:spPr>
-        <p:txBody>
-          <a:bodyPr wrap="square" anchor="t" lIns="12700" rIns="12700" tIns="12700" bIns="12700">
-            <a:spAutoFit/>
-          </a:bodyPr>
-          <a:lstStyle/>
-          <a:p>
-            <a:pPr algn="r"/>
-            <a:r>
-              <a:rPr sz="1200" b="0">
-                <a:solidFill>
-                  <a:srgbClr val="000000"/>
-                </a:solidFill>
-                <a:latin typeface="Arial"/>
-              </a:rPr>
-              <a:t>Distribution Statement C</a:t>
-            </a:r>
-          </a:p>
-        </p:txBody>
-      </p:sp>
-      <p:sp>
-        <p:nvSpPr>
-          <p:cNvPr id="5" name="TextBox 4"/>
-          <p:cNvSpPr txBox="1"/>
-          <p:nvPr/>
-        </p:nvSpPr>
-        <p:spPr>
-          <a:xfrm>
-            <a:off x="17830800" y="10442448"/>
-            <a:ext cx="1737360" cy="274320"/>
-          </a:xfrm>
-          <a:prstGeom prst="rect">
-            <a:avLst/>
-          </a:prstGeom>
-          <a:noFill/>
-        </p:spPr>
-        <p:txBody>
-          <a:bodyPr wrap="square" anchor="t" lIns="12700" rIns="12700" tIns="12700" bIns="12700">
-            <a:spAutoFit/>
-          </a:bodyPr>
-          <a:lstStyle/>
-          <a:p>
-            <a:pPr algn="r"/>
-            <a:r>
-              <a:rPr sz="1200" b="1">
-                <a:solidFill>
-                  <a:srgbClr val="000000"/>
-                </a:solidFill>
-                <a:latin typeface="Arial"/>
-              </a:rPr>
-              <a:t>Node: A0</a:t>
-            </a:r>
-          </a:p>
-        </p:txBody>
-      </p:sp>
-      <p:sp>
-        <p:nvSpPr>
-          <p:cNvPr id="6" name="Rectangle 5"/>
-          <p:cNvSpPr/>
-          <p:nvPr/>
-        </p:nvSpPr>
-        <p:spPr>
-          <a:xfrm>
-            <a:off x="2194560" y="4754880"/>
-            <a:ext cx="2377440" cy="1188720"/>
-          </a:xfrm>
-          <a:prstGeom prst="rect">
-            <a:avLst/>
-          </a:prstGeom>
-          <a:solidFill>
-            <a:srgbClr val="FFFFFF"/>
-          </a:solidFill>
-          <a:ln w="25400">
-            <a:solidFill>
-              <a:srgbClr val="000000"/>
-            </a:solidFill>
-          </a:ln>
-          <a:effectLst/>
-        </p:spPr>
-        <p:style>
-          <a:lnRef idx="1">
-            <a:schemeClr val="accent1"/>
-          </a:lnRef>
-          <a:fillRef idx="3">
-            <a:schemeClr val="accent1"/>
-          </a:fillRef>
-          <a:effectRef idx="2">
-            <a:schemeClr val="accent1"/>
-          </a:effectRef>
-          <a:fontRef idx="minor">
-            <a:schemeClr val="lt1"/>
-          </a:fontRef>
-        </p:style>
-        <p:txBody>
-          <a:bodyPr rtlCol="0" anchor="ctr" wrap="square"/>
-          <a:lstStyle/>
-          <a:p>
-            <a:pPr algn="ctr"/>
-            <a:r>
-              <a:rPr sz="1200" b="1">
-                <a:solidFill>
-                  <a:srgbClr val="000000"/>
-                </a:solidFill>
-                <a:latin typeface="Arial"/>
-              </a:rPr>
-              <a:t>Acquire Micro-Weather Observations</a:t>
-            </a:r>
-          </a:p>
-        </p:txBody>
-      </p:sp>
-      <p:sp>
-        <p:nvSpPr>
-          <p:cNvPr id="7" name="TextBox 6"/>
-          <p:cNvSpPr txBox="1"/>
-          <p:nvPr/>
-        </p:nvSpPr>
-        <p:spPr>
-          <a:xfrm>
-            <a:off x="4069080" y="5632704"/>
-            <a:ext cx="411480" cy="256032"/>
-          </a:xfrm>
-          <a:prstGeom prst="rect">
-            <a:avLst/>
-          </a:prstGeom>
-          <a:noFill/>
-        </p:spPr>
-        <p:txBody>
-          <a:bodyPr wrap="square" anchor="b" lIns="12700" rIns="12700" tIns="12700" bIns="12700">
-            <a:spAutoFit/>
-          </a:bodyPr>
-          <a:lstStyle/>
-          <a:p>
-            <a:pPr algn="r"/>
             <a:r>
               <a:rPr sz="1100" b="1">
                 <a:solidFill>
@@ -3325,6 +3325,18 @@
               <a:t>A1</a:t>
             </a:r>
           </a:p>
+          <a:p>
+            <a:pPr algn="ctr"/>
+            <a:r>
+              <a:rPr sz="1000">
+                <a:solidFill>
+                  <a:srgbClr val="000000"/>
+                </a:solidFill>
+                <a:latin typeface="Arial"/>
+              </a:rPr>
+              <a:t>Acquire Micro-Weather Observations</a:t>
+            </a:r>
+          </a:p>
         </p:txBody>
       </p:sp>
       <p:sp>
@@ -3335,8 +3347,8 @@
         </p:nvSpPr>
         <p:spPr>
           <a:xfrm>
-            <a:off x="5212080" y="4754880"/>
-            <a:ext cx="2377440" cy="1188720"/>
+            <a:off x="2514600" y="1828800"/>
+            <a:ext cx="1417320" cy="960120"/>
           </a:xfrm>
           <a:prstGeom prst="rect">
             <a:avLst/>
@@ -3344,7 +3356,7 @@
           <a:solidFill>
             <a:srgbClr val="FFFFFF"/>
           </a:solidFill>
-          <a:ln w="25400">
+          <a:ln w="15875">
             <a:solidFill>
               <a:srgbClr val="000000"/>
             </a:solidFill>
@@ -3366,45 +3378,10 @@
           </a:fontRef>
         </p:style>
         <p:txBody>
-          <a:bodyPr rtlCol="0" anchor="ctr" wrap="square"/>
+          <a:bodyPr rtlCol="0" anchor="ctr" wrap="square" lIns="36576" rIns="36576" tIns="36576" bIns="36576"/>
           <a:lstStyle/>
           <a:p>
             <a:pPr algn="ctr"/>
-            <a:r>
-              <a:rPr sz="1200" b="1">
-                <a:solidFill>
-                  <a:srgbClr val="000000"/>
-                </a:solidFill>
-                <a:latin typeface="Arial"/>
-              </a:rPr>
-              <a:t>Generate Local Weather State</a:t>
-            </a:r>
-          </a:p>
-        </p:txBody>
-      </p:sp>
-      <p:sp>
-        <p:nvSpPr>
-          <p:cNvPr id="9" name="TextBox 8"/>
-          <p:cNvSpPr txBox="1"/>
-          <p:nvPr/>
-        </p:nvSpPr>
-        <p:spPr>
-          <a:xfrm>
-            <a:off x="7086600" y="5632704"/>
-            <a:ext cx="411480" cy="256032"/>
-          </a:xfrm>
-          <a:prstGeom prst="rect">
-            <a:avLst/>
-          </a:prstGeom>
-          <a:noFill/>
-        </p:spPr>
-        <p:txBody>
-          <a:bodyPr wrap="square" anchor="b" lIns="12700" rIns="12700" tIns="12700" bIns="12700">
-            <a:spAutoFit/>
-          </a:bodyPr>
-          <a:lstStyle/>
-          <a:p>
-            <a:pPr algn="r"/>
             <a:r>
               <a:rPr sz="1100" b="1">
                 <a:solidFill>
@@ -3415,18 +3392,30 @@
               <a:t>A2</a:t>
             </a:r>
           </a:p>
-        </p:txBody>
-      </p:sp>
-      <p:sp>
-        <p:nvSpPr>
-          <p:cNvPr id="10" name="Rectangle 9"/>
+          <a:p>
+            <a:pPr algn="ctr"/>
+            <a:r>
+              <a:rPr sz="1000">
+                <a:solidFill>
+                  <a:srgbClr val="000000"/>
+                </a:solidFill>
+                <a:latin typeface="Arial"/>
+              </a:rPr>
+              <a:t>Generate Local Weather State</a:t>
+            </a:r>
+          </a:p>
+        </p:txBody>
+      </p:sp>
+      <p:sp>
+        <p:nvSpPr>
+          <p:cNvPr id="9" name="Rectangle 8"/>
           <p:cNvSpPr/>
           <p:nvPr/>
         </p:nvSpPr>
         <p:spPr>
           <a:xfrm>
-            <a:off x="8229600" y="4754880"/>
-            <a:ext cx="2377440" cy="1188720"/>
+            <a:off x="4069080" y="4983480"/>
+            <a:ext cx="1417320" cy="960120"/>
           </a:xfrm>
           <a:prstGeom prst="rect">
             <a:avLst/>
@@ -3434,7 +3423,7 @@
           <a:solidFill>
             <a:srgbClr val="FFFFFF"/>
           </a:solidFill>
-          <a:ln w="25400">
+          <a:ln w="15875">
             <a:solidFill>
               <a:srgbClr val="000000"/>
             </a:solidFill>
@@ -3456,45 +3445,10 @@
           </a:fontRef>
         </p:style>
         <p:txBody>
-          <a:bodyPr rtlCol="0" anchor="ctr" wrap="square"/>
+          <a:bodyPr rtlCol="0" anchor="ctr" wrap="square" lIns="36576" rIns="36576" tIns="36576" bIns="36576"/>
           <a:lstStyle/>
           <a:p>
             <a:pPr algn="ctr"/>
-            <a:r>
-              <a:rPr sz="1200" b="1">
-                <a:solidFill>
-                  <a:srgbClr val="000000"/>
-                </a:solidFill>
-                <a:latin typeface="Arial"/>
-              </a:rPr>
-              <a:t>Quantify Uncertainty</a:t>
-            </a:r>
-          </a:p>
-        </p:txBody>
-      </p:sp>
-      <p:sp>
-        <p:nvSpPr>
-          <p:cNvPr id="11" name="TextBox 10"/>
-          <p:cNvSpPr txBox="1"/>
-          <p:nvPr/>
-        </p:nvSpPr>
-        <p:spPr>
-          <a:xfrm>
-            <a:off x="10104119" y="5632704"/>
-            <a:ext cx="411480" cy="256032"/>
-          </a:xfrm>
-          <a:prstGeom prst="rect">
-            <a:avLst/>
-          </a:prstGeom>
-          <a:noFill/>
-        </p:spPr>
-        <p:txBody>
-          <a:bodyPr wrap="square" anchor="b" lIns="12700" rIns="12700" tIns="12700" bIns="12700">
-            <a:spAutoFit/>
-          </a:bodyPr>
-          <a:lstStyle/>
-          <a:p>
-            <a:pPr algn="r"/>
             <a:r>
               <a:rPr sz="1100" b="1">
                 <a:solidFill>
@@ -3505,18 +3459,30 @@
               <a:t>A3</a:t>
             </a:r>
           </a:p>
-        </p:txBody>
-      </p:sp>
-      <p:sp>
-        <p:nvSpPr>
-          <p:cNvPr id="12" name="Rectangle 11"/>
+          <a:p>
+            <a:pPr algn="ctr"/>
+            <a:r>
+              <a:rPr sz="1000">
+                <a:solidFill>
+                  <a:srgbClr val="000000"/>
+                </a:solidFill>
+                <a:latin typeface="Arial"/>
+              </a:rPr>
+              <a:t>Quantify Uncertainty</a:t>
+            </a:r>
+          </a:p>
+        </p:txBody>
+      </p:sp>
+      <p:sp>
+        <p:nvSpPr>
+          <p:cNvPr id="10" name="Rectangle 9"/>
           <p:cNvSpPr/>
           <p:nvPr/>
         </p:nvSpPr>
         <p:spPr>
           <a:xfrm>
-            <a:off x="11247120" y="4754880"/>
-            <a:ext cx="2560320" cy="1188720"/>
+            <a:off x="5532120" y="3429000"/>
+            <a:ext cx="1371600" cy="960120"/>
           </a:xfrm>
           <a:prstGeom prst="rect">
             <a:avLst/>
@@ -3524,7 +3490,7 @@
           <a:solidFill>
             <a:srgbClr val="FFFFFF"/>
           </a:solidFill>
-          <a:ln w="25400">
+          <a:ln w="15875">
             <a:solidFill>
               <a:srgbClr val="000000"/>
             </a:solidFill>
@@ -3546,45 +3512,10 @@
           </a:fontRef>
         </p:style>
         <p:txBody>
-          <a:bodyPr rtlCol="0" anchor="ctr" wrap="square"/>
+          <a:bodyPr rtlCol="0" anchor="ctr" wrap="square" lIns="36576" rIns="36576" tIns="36576" bIns="36576"/>
           <a:lstStyle/>
           <a:p>
             <a:pPr algn="ctr"/>
-            <a:r>
-              <a:rPr sz="1200" b="1">
-                <a:solidFill>
-                  <a:srgbClr val="000000"/>
-                </a:solidFill>
-                <a:latin typeface="Arial"/>
-              </a:rPr>
-              <a:t>Federate and Maintain Federated Weather Context</a:t>
-            </a:r>
-          </a:p>
-        </p:txBody>
-      </p:sp>
-      <p:sp>
-        <p:nvSpPr>
-          <p:cNvPr id="13" name="TextBox 12"/>
-          <p:cNvSpPr txBox="1"/>
-          <p:nvPr/>
-        </p:nvSpPr>
-        <p:spPr>
-          <a:xfrm>
-            <a:off x="13304520" y="5632704"/>
-            <a:ext cx="411480" cy="256032"/>
-          </a:xfrm>
-          <a:prstGeom prst="rect">
-            <a:avLst/>
-          </a:prstGeom>
-          <a:noFill/>
-        </p:spPr>
-        <p:txBody>
-          <a:bodyPr wrap="square" anchor="b" lIns="12700" rIns="12700" tIns="12700" bIns="12700">
-            <a:spAutoFit/>
-          </a:bodyPr>
-          <a:lstStyle/>
-          <a:p>
-            <a:pPr algn="r"/>
             <a:r>
               <a:rPr sz="1100" b="1">
                 <a:solidFill>
@@ -3595,18 +3526,30 @@
               <a:t>A4</a:t>
             </a:r>
           </a:p>
-        </p:txBody>
-      </p:sp>
-      <p:sp>
-        <p:nvSpPr>
-          <p:cNvPr id="14" name="Rectangle 13"/>
+          <a:p>
+            <a:pPr algn="ctr"/>
+            <a:r>
+              <a:rPr sz="1000">
+                <a:solidFill>
+                  <a:srgbClr val="000000"/>
+                </a:solidFill>
+                <a:latin typeface="Arial"/>
+              </a:rPr>
+              <a:t>Federate and Maintain Federated Weather Context</a:t>
+            </a:r>
+          </a:p>
+        </p:txBody>
+      </p:sp>
+      <p:sp>
+        <p:nvSpPr>
+          <p:cNvPr id="11" name="Rectangle 10"/>
           <p:cNvSpPr/>
           <p:nvPr/>
         </p:nvSpPr>
         <p:spPr>
           <a:xfrm>
-            <a:off x="16276320" y="2743200"/>
-            <a:ext cx="2743200" cy="1188720"/>
+            <a:off x="7132320" y="1828800"/>
+            <a:ext cx="1325880" cy="960120"/>
           </a:xfrm>
           <a:prstGeom prst="rect">
             <a:avLst/>
@@ -3614,7 +3557,7 @@
           <a:solidFill>
             <a:srgbClr val="FFFFFF"/>
           </a:solidFill>
-          <a:ln w="25400">
+          <a:ln w="15875">
             <a:solidFill>
               <a:srgbClr val="000000"/>
             </a:solidFill>
@@ -3636,45 +3579,10 @@
           </a:fontRef>
         </p:style>
         <p:txBody>
-          <a:bodyPr rtlCol="0" anchor="ctr" wrap="square"/>
+          <a:bodyPr rtlCol="0" anchor="ctr" wrap="square" lIns="36576" rIns="36576" tIns="36576" bIns="36576"/>
           <a:lstStyle/>
           <a:p>
             <a:pPr algn="ctr"/>
-            <a:r>
-              <a:rPr sz="1200" b="1">
-                <a:solidFill>
-                  <a:srgbClr val="000000"/>
-                </a:solidFill>
-                <a:latin typeface="Arial"/>
-              </a:rPr>
-              <a:t>Detect Threshold Crossings (Descriptive Support)</a:t>
-            </a:r>
-          </a:p>
-        </p:txBody>
-      </p:sp>
-      <p:sp>
-        <p:nvSpPr>
-          <p:cNvPr id="15" name="TextBox 14"/>
-          <p:cNvSpPr txBox="1"/>
-          <p:nvPr/>
-        </p:nvSpPr>
-        <p:spPr>
-          <a:xfrm>
-            <a:off x="18516600" y="3621024"/>
-            <a:ext cx="411480" cy="256032"/>
-          </a:xfrm>
-          <a:prstGeom prst="rect">
-            <a:avLst/>
-          </a:prstGeom>
-          <a:noFill/>
-        </p:spPr>
-        <p:txBody>
-          <a:bodyPr wrap="square" anchor="b" lIns="12700" rIns="12700" tIns="12700" bIns="12700">
-            <a:spAutoFit/>
-          </a:bodyPr>
-          <a:lstStyle/>
-          <a:p>
-            <a:pPr algn="r"/>
             <a:r>
               <a:rPr sz="1100" b="1">
                 <a:solidFill>
@@ -3685,18 +3593,30 @@
               <a:t>A5</a:t>
             </a:r>
           </a:p>
-        </p:txBody>
-      </p:sp>
-      <p:sp>
-        <p:nvSpPr>
-          <p:cNvPr id="16" name="Rectangle 15"/>
+          <a:p>
+            <a:pPr algn="ctr"/>
+            <a:r>
+              <a:rPr sz="1000">
+                <a:solidFill>
+                  <a:srgbClr val="000000"/>
+                </a:solidFill>
+                <a:latin typeface="Arial"/>
+              </a:rPr>
+              <a:t>Detect Threshold Crossings (Descriptive Support)</a:t>
+            </a:r>
+          </a:p>
+        </p:txBody>
+      </p:sp>
+      <p:sp>
+        <p:nvSpPr>
+          <p:cNvPr id="12" name="Rectangle 11"/>
           <p:cNvSpPr/>
           <p:nvPr/>
         </p:nvSpPr>
         <p:spPr>
           <a:xfrm>
-            <a:off x="16276320" y="6766560"/>
-            <a:ext cx="2743200" cy="1188720"/>
+            <a:off x="7589520" y="4983480"/>
+            <a:ext cx="1325880" cy="960120"/>
           </a:xfrm>
           <a:prstGeom prst="rect">
             <a:avLst/>
@@ -3704,7 +3624,7 @@
           <a:solidFill>
             <a:srgbClr val="FFFFFF"/>
           </a:solidFill>
-          <a:ln w="25400">
+          <a:ln w="15875">
             <a:solidFill>
               <a:srgbClr val="000000"/>
             </a:solidFill>
@@ -3726,45 +3646,10 @@
           </a:fontRef>
         </p:style>
         <p:txBody>
-          <a:bodyPr rtlCol="0" anchor="ctr" wrap="square"/>
+          <a:bodyPr rtlCol="0" anchor="ctr" wrap="square" lIns="36576" rIns="36576" tIns="36576" bIns="36576"/>
           <a:lstStyle/>
           <a:p>
             <a:pPr algn="ctr"/>
-            <a:r>
-              <a:rPr sz="1200" b="1">
-                <a:solidFill>
-                  <a:srgbClr val="000000"/>
-                </a:solidFill>
-                <a:latin typeface="Arial"/>
-              </a:rPr>
-              <a:t>Produce Mission-Tailored Weather Context</a:t>
-            </a:r>
-          </a:p>
-        </p:txBody>
-      </p:sp>
-      <p:sp>
-        <p:nvSpPr>
-          <p:cNvPr id="17" name="TextBox 16"/>
-          <p:cNvSpPr txBox="1"/>
-          <p:nvPr/>
-        </p:nvSpPr>
-        <p:spPr>
-          <a:xfrm>
-            <a:off x="18516600" y="7644384"/>
-            <a:ext cx="411480" cy="256032"/>
-          </a:xfrm>
-          <a:prstGeom prst="rect">
-            <a:avLst/>
-          </a:prstGeom>
-          <a:noFill/>
-        </p:spPr>
-        <p:txBody>
-          <a:bodyPr wrap="square" anchor="b" lIns="12700" rIns="12700" tIns="12700" bIns="12700">
-            <a:spAutoFit/>
-          </a:bodyPr>
-          <a:lstStyle/>
-          <a:p>
-            <a:pPr algn="r"/>
             <a:r>
               <a:rPr sz="1100" b="1">
                 <a:solidFill>
@@ -3775,28 +3660,125 @@
               <a:t>A6</a:t>
             </a:r>
           </a:p>
+          <a:p>
+            <a:pPr algn="ctr"/>
+            <a:r>
+              <a:rPr sz="1000">
+                <a:solidFill>
+                  <a:srgbClr val="000000"/>
+                </a:solidFill>
+                <a:latin typeface="Arial"/>
+              </a:rPr>
+              <a:t>Produce Mission-Tailored Weather Context</a:t>
+            </a:r>
+          </a:p>
+        </p:txBody>
+      </p:sp>
+      <p:sp>
+        <p:nvSpPr>
+          <p:cNvPr id="13" name="Oval 12"/>
+          <p:cNvSpPr/>
+          <p:nvPr/>
+        </p:nvSpPr>
+        <p:spPr>
+          <a:xfrm>
+            <a:off x="621792" y="3727551"/>
+            <a:ext cx="36576" cy="36576"/>
+          </a:xfrm>
+          <a:prstGeom prst="ellipse">
+            <a:avLst/>
+          </a:prstGeom>
+          <a:noFill/>
+          <a:ln>
+            <a:noFill/>
+          </a:ln>
+          <a:effectLst/>
+        </p:spPr>
+        <p:style>
+          <a:lnRef idx="1">
+            <a:schemeClr val="accent1"/>
+          </a:lnRef>
+          <a:fillRef idx="3">
+            <a:schemeClr val="accent1"/>
+          </a:fillRef>
+          <a:effectRef idx="2">
+            <a:schemeClr val="accent1"/>
+          </a:effectRef>
+          <a:fontRef idx="minor">
+            <a:schemeClr val="lt1"/>
+          </a:fontRef>
+        </p:style>
+        <p:txBody>
+          <a:bodyPr rtlCol="0" anchor="ctr"/>
+          <a:lstStyle/>
+          <a:p>
+            <a:pPr algn="ctr"/>
+          </a:p>
+        </p:txBody>
+      </p:sp>
+      <p:sp>
+        <p:nvSpPr>
+          <p:cNvPr id="14" name="Oval 13"/>
+          <p:cNvSpPr/>
+          <p:nvPr/>
+        </p:nvSpPr>
+        <p:spPr>
+          <a:xfrm>
+            <a:off x="621792" y="4053992"/>
+            <a:ext cx="36576" cy="36576"/>
+          </a:xfrm>
+          <a:prstGeom prst="ellipse">
+            <a:avLst/>
+          </a:prstGeom>
+          <a:noFill/>
+          <a:ln>
+            <a:noFill/>
+          </a:ln>
+          <a:effectLst/>
+        </p:spPr>
+        <p:style>
+          <a:lnRef idx="1">
+            <a:schemeClr val="accent1"/>
+          </a:lnRef>
+          <a:fillRef idx="3">
+            <a:schemeClr val="accent1"/>
+          </a:fillRef>
+          <a:effectRef idx="2">
+            <a:schemeClr val="accent1"/>
+          </a:effectRef>
+          <a:fontRef idx="minor">
+            <a:schemeClr val="lt1"/>
+          </a:fontRef>
+        </p:style>
+        <p:txBody>
+          <a:bodyPr rtlCol="0" anchor="ctr"/>
+          <a:lstStyle/>
+          <a:p>
+            <a:pPr algn="ctr"/>
+          </a:p>
         </p:txBody>
       </p:sp>
       <p:cxnSp>
         <p:nvCxnSpPr>
-          <p:cNvPr id="18" name="Connector 17"/>
+          <p:cNvPr id="15" name="Connector 14"/>
           <p:cNvCxnSpPr/>
           <p:nvPr/>
         </p:nvCxnSpPr>
         <p:spPr>
           <a:xfrm>
-            <a:off x="4572000" y="5349240"/>
-            <a:ext cx="640080" cy="0"/>
-          </a:xfrm>
-          <a:prstGeom prst="line">
-            <a:avLst/>
-          </a:prstGeom>
-          <a:ln w="19050">
+            <a:off x="502920" y="3745839"/>
+            <a:ext cx="137160" cy="0"/>
+          </a:xfrm>
+          <a:prstGeom prst="bentConnector3">
+            <a:avLst/>
+          </a:prstGeom>
+          <a:ln w="12700">
             <a:solidFill>
               <a:srgbClr val="000000"/>
             </a:solidFill>
             <a:tailEnd type="triangle" w="med" len="med"/>
           </a:ln>
+          <a:effectLst/>
         </p:spPr>
         <p:style>
           <a:lnRef idx="2">
@@ -3813,26 +3795,62 @@
           </a:fontRef>
         </p:style>
       </p:cxnSp>
+      <p:sp>
+        <p:nvSpPr>
+          <p:cNvPr id="16" name="TextBox 15"/>
+          <p:cNvSpPr txBox="1"/>
+          <p:nvPr/>
+        </p:nvSpPr>
+        <p:spPr>
+          <a:xfrm>
+            <a:off x="365760" y="3471519"/>
+            <a:ext cx="1463040" cy="246888"/>
+          </a:xfrm>
+          <a:prstGeom prst="rect">
+            <a:avLst/>
+          </a:prstGeom>
+          <a:noFill/>
+        </p:spPr>
+        <p:txBody>
+          <a:bodyPr wrap="square" anchor="t" lIns="0" rIns="0" tIns="0" bIns="0">
+            <a:spAutoFit/>
+          </a:bodyPr>
+          <a:lstStyle/>
+          <a:p>
+            <a:pPr algn="l"/>
+            <a:r>
+              <a:rPr sz="1000" b="0">
+                <a:solidFill>
+                  <a:srgbClr val="000000"/>
+                </a:solidFill>
+                <a:latin typeface="Arial"/>
+              </a:rPr>
+              <a:t>I1 Collocated Atmospheric Observations</a:t>
+            </a:r>
+          </a:p>
+        </p:txBody>
+      </p:sp>
       <p:cxnSp>
         <p:nvCxnSpPr>
-          <p:cNvPr id="19" name="Connector 18"/>
+          <p:cNvPr id="17" name="Connector 16"/>
           <p:cNvCxnSpPr/>
           <p:nvPr/>
         </p:nvCxnSpPr>
         <p:spPr>
           <a:xfrm>
-            <a:off x="7589520" y="5349240"/>
-            <a:ext cx="640080" cy="0"/>
-          </a:xfrm>
-          <a:prstGeom prst="line">
-            <a:avLst/>
-          </a:prstGeom>
-          <a:ln w="19050">
+            <a:off x="502920" y="4072280"/>
+            <a:ext cx="137160" cy="0"/>
+          </a:xfrm>
+          <a:prstGeom prst="bentConnector3">
+            <a:avLst/>
+          </a:prstGeom>
+          <a:ln w="12700">
             <a:solidFill>
               <a:srgbClr val="000000"/>
             </a:solidFill>
             <a:tailEnd type="triangle" w="med" len="med"/>
           </a:ln>
+          <a:effectLst/>
         </p:spPr>
         <p:style>
           <a:lnRef idx="2">
@@ -3849,26 +3867,146 @@
           </a:fontRef>
         </p:style>
       </p:cxnSp>
+      <p:sp>
+        <p:nvSpPr>
+          <p:cNvPr id="18" name="TextBox 17"/>
+          <p:cNvSpPr txBox="1"/>
+          <p:nvPr/>
+        </p:nvSpPr>
+        <p:spPr>
+          <a:xfrm>
+            <a:off x="365760" y="4108856"/>
+            <a:ext cx="1463040" cy="246888"/>
+          </a:xfrm>
+          <a:prstGeom prst="rect">
+            <a:avLst/>
+          </a:prstGeom>
+          <a:noFill/>
+        </p:spPr>
+        <p:txBody>
+          <a:bodyPr wrap="square" anchor="t" lIns="0" rIns="0" tIns="0" bIns="0">
+            <a:spAutoFit/>
+          </a:bodyPr>
+          <a:lstStyle/>
+          <a:p>
+            <a:pPr algn="l"/>
+            <a:r>
+              <a:rPr sz="1000" b="0">
+                <a:solidFill>
+                  <a:srgbClr val="000000"/>
+                </a:solidFill>
+                <a:latin typeface="Arial"/>
+              </a:rPr>
+              <a:t>I2 Peer Platform Weather Observations</a:t>
+            </a:r>
+          </a:p>
+        </p:txBody>
+      </p:sp>
+      <p:sp>
+        <p:nvSpPr>
+          <p:cNvPr id="19" name="Oval 18"/>
+          <p:cNvSpPr/>
+          <p:nvPr/>
+        </p:nvSpPr>
+        <p:spPr>
+          <a:xfrm>
+            <a:off x="2039112" y="3890772"/>
+            <a:ext cx="36576" cy="36576"/>
+          </a:xfrm>
+          <a:prstGeom prst="ellipse">
+            <a:avLst/>
+          </a:prstGeom>
+          <a:noFill/>
+          <a:ln>
+            <a:noFill/>
+          </a:ln>
+          <a:effectLst/>
+        </p:spPr>
+        <p:style>
+          <a:lnRef idx="1">
+            <a:schemeClr val="accent1"/>
+          </a:lnRef>
+          <a:fillRef idx="3">
+            <a:schemeClr val="accent1"/>
+          </a:fillRef>
+          <a:effectRef idx="2">
+            <a:schemeClr val="accent1"/>
+          </a:effectRef>
+          <a:fontRef idx="minor">
+            <a:schemeClr val="lt1"/>
+          </a:fontRef>
+        </p:style>
+        <p:txBody>
+          <a:bodyPr rtlCol="0" anchor="ctr"/>
+          <a:lstStyle/>
+          <a:p>
+            <a:pPr algn="ctr"/>
+          </a:p>
+        </p:txBody>
+      </p:sp>
+      <p:sp>
+        <p:nvSpPr>
+          <p:cNvPr id="20" name="Oval 19"/>
+          <p:cNvSpPr/>
+          <p:nvPr/>
+        </p:nvSpPr>
+        <p:spPr>
+          <a:xfrm>
+            <a:off x="2496312" y="2290572"/>
+            <a:ext cx="36576" cy="36576"/>
+          </a:xfrm>
+          <a:prstGeom prst="ellipse">
+            <a:avLst/>
+          </a:prstGeom>
+          <a:noFill/>
+          <a:ln>
+            <a:noFill/>
+          </a:ln>
+          <a:effectLst/>
+        </p:spPr>
+        <p:style>
+          <a:lnRef idx="1">
+            <a:schemeClr val="accent1"/>
+          </a:lnRef>
+          <a:fillRef idx="3">
+            <a:schemeClr val="accent1"/>
+          </a:fillRef>
+          <a:effectRef idx="2">
+            <a:schemeClr val="accent1"/>
+          </a:effectRef>
+          <a:fontRef idx="minor">
+            <a:schemeClr val="lt1"/>
+          </a:fontRef>
+        </p:style>
+        <p:txBody>
+          <a:bodyPr rtlCol="0" anchor="ctr"/>
+          <a:lstStyle/>
+          <a:p>
+            <a:pPr algn="ctr"/>
+          </a:p>
+        </p:txBody>
+      </p:sp>
       <p:cxnSp>
         <p:nvCxnSpPr>
-          <p:cNvPr id="20" name="Connector 19"/>
+          <p:cNvPr id="21" name="Connector 20"/>
           <p:cNvCxnSpPr/>
           <p:nvPr/>
         </p:nvCxnSpPr>
         <p:spPr>
-          <a:xfrm>
-            <a:off x="10607040" y="5349240"/>
-            <a:ext cx="640080" cy="0"/>
-          </a:xfrm>
-          <a:prstGeom prst="line">
-            <a:avLst/>
-          </a:prstGeom>
-          <a:ln w="19050">
+          <a:xfrm flipV="1">
+            <a:off x="2057400" y="2308860"/>
+            <a:ext cx="457200" cy="1600200"/>
+          </a:xfrm>
+          <a:prstGeom prst="bentConnector3">
+            <a:avLst/>
+          </a:prstGeom>
+          <a:ln w="12700">
             <a:solidFill>
               <a:srgbClr val="000000"/>
             </a:solidFill>
             <a:tailEnd type="triangle" w="med" len="med"/>
           </a:ln>
+          <a:effectLst/>
         </p:spPr>
         <p:style>
           <a:lnRef idx="2">
@@ -3885,25 +4023,188 @@
           </a:fontRef>
         </p:style>
       </p:cxnSp>
+      <p:sp>
+        <p:nvSpPr>
+          <p:cNvPr id="22" name="TextBox 21"/>
+          <p:cNvSpPr txBox="1"/>
+          <p:nvPr/>
+        </p:nvSpPr>
+        <p:spPr>
+          <a:xfrm>
+            <a:off x="2084831" y="2633472"/>
+            <a:ext cx="1417320" cy="246888"/>
+          </a:xfrm>
+          <a:prstGeom prst="rect">
+            <a:avLst/>
+          </a:prstGeom>
+          <a:noFill/>
+        </p:spPr>
+        <p:txBody>
+          <a:bodyPr wrap="square" anchor="t" lIns="0" rIns="0" tIns="0" bIns="0">
+            <a:spAutoFit/>
+          </a:bodyPr>
+          <a:lstStyle/>
+          <a:p>
+            <a:pPr algn="l"/>
+            <a:r>
+              <a:rPr sz="1000" b="0">
+                <a:solidFill>
+                  <a:srgbClr val="000000"/>
+                </a:solidFill>
+                <a:latin typeface="Arial"/>
+              </a:rPr>
+              <a:t>Quality-Checked Observations</a:t>
+            </a:r>
+          </a:p>
+        </p:txBody>
+      </p:sp>
+      <p:sp>
+        <p:nvSpPr>
+          <p:cNvPr id="23" name="Oval 22"/>
+          <p:cNvSpPr/>
+          <p:nvPr/>
+        </p:nvSpPr>
+        <p:spPr>
+          <a:xfrm>
+            <a:off x="3913632" y="2444191"/>
+            <a:ext cx="36576" cy="36576"/>
+          </a:xfrm>
+          <a:prstGeom prst="ellipse">
+            <a:avLst/>
+          </a:prstGeom>
+          <a:noFill/>
+          <a:ln>
+            <a:noFill/>
+          </a:ln>
+          <a:effectLst/>
+        </p:spPr>
+        <p:style>
+          <a:lnRef idx="1">
+            <a:schemeClr val="accent1"/>
+          </a:lnRef>
+          <a:fillRef idx="3">
+            <a:schemeClr val="accent1"/>
+          </a:fillRef>
+          <a:effectRef idx="2">
+            <a:schemeClr val="accent1"/>
+          </a:effectRef>
+          <a:fontRef idx="minor">
+            <a:schemeClr val="lt1"/>
+          </a:fontRef>
+        </p:style>
+        <p:txBody>
+          <a:bodyPr rtlCol="0" anchor="ctr"/>
+          <a:lstStyle/>
+          <a:p>
+            <a:pPr algn="ctr"/>
+          </a:p>
+        </p:txBody>
+      </p:sp>
+      <p:sp>
+        <p:nvSpPr>
+          <p:cNvPr id="24" name="Oval 23"/>
+          <p:cNvSpPr/>
+          <p:nvPr/>
+        </p:nvSpPr>
+        <p:spPr>
+          <a:xfrm>
+            <a:off x="3913632" y="2136952"/>
+            <a:ext cx="36576" cy="36576"/>
+          </a:xfrm>
+          <a:prstGeom prst="ellipse">
+            <a:avLst/>
+          </a:prstGeom>
+          <a:noFill/>
+          <a:ln>
+            <a:noFill/>
+          </a:ln>
+          <a:effectLst/>
+        </p:spPr>
+        <p:style>
+          <a:lnRef idx="1">
+            <a:schemeClr val="accent1"/>
+          </a:lnRef>
+          <a:fillRef idx="3">
+            <a:schemeClr val="accent1"/>
+          </a:fillRef>
+          <a:effectRef idx="2">
+            <a:schemeClr val="accent1"/>
+          </a:effectRef>
+          <a:fontRef idx="minor">
+            <a:schemeClr val="lt1"/>
+          </a:fontRef>
+        </p:style>
+        <p:txBody>
+          <a:bodyPr rtlCol="0" anchor="ctr"/>
+          <a:lstStyle/>
+          <a:p>
+            <a:pPr algn="ctr"/>
+          </a:p>
+        </p:txBody>
+      </p:sp>
+      <p:sp>
+        <p:nvSpPr>
+          <p:cNvPr id="25" name="Oval 24"/>
+          <p:cNvSpPr/>
+          <p:nvPr/>
+        </p:nvSpPr>
+        <p:spPr>
+          <a:xfrm>
+            <a:off x="4050792" y="5445252"/>
+            <a:ext cx="36576" cy="36576"/>
+          </a:xfrm>
+          <a:prstGeom prst="ellipse">
+            <a:avLst/>
+          </a:prstGeom>
+          <a:noFill/>
+          <a:ln>
+            <a:noFill/>
+          </a:ln>
+          <a:effectLst/>
+        </p:spPr>
+        <p:style>
+          <a:lnRef idx="1">
+            <a:schemeClr val="accent1"/>
+          </a:lnRef>
+          <a:fillRef idx="3">
+            <a:schemeClr val="accent1"/>
+          </a:fillRef>
+          <a:effectRef idx="2">
+            <a:schemeClr val="accent1"/>
+          </a:effectRef>
+          <a:fontRef idx="minor">
+            <a:schemeClr val="lt1"/>
+          </a:fontRef>
+        </p:style>
+        <p:txBody>
+          <a:bodyPr rtlCol="0" anchor="ctr"/>
+          <a:lstStyle/>
+          <a:p>
+            <a:pPr algn="ctr"/>
+          </a:p>
+        </p:txBody>
+      </p:sp>
       <p:cxnSp>
         <p:nvCxnSpPr>
-          <p:cNvPr id="21" name="Connector 20"/>
+          <p:cNvPr id="26" name="Connector 25"/>
           <p:cNvCxnSpPr/>
           <p:nvPr/>
         </p:nvCxnSpPr>
         <p:spPr>
           <a:xfrm>
-            <a:off x="13807440" y="5074920"/>
-            <a:ext cx="457200" cy="0"/>
-          </a:xfrm>
-          <a:prstGeom prst="line">
-            <a:avLst/>
-          </a:prstGeom>
-          <a:ln w="19050">
+            <a:off x="3931920" y="2462479"/>
+            <a:ext cx="137160" cy="3001061"/>
+          </a:xfrm>
+          <a:prstGeom prst="bentConnector3">
+            <a:avLst/>
+          </a:prstGeom>
+          <a:ln w="12700">
             <a:solidFill>
               <a:srgbClr val="000000"/>
             </a:solidFill>
+            <a:tailEnd type="triangle" w="med" len="med"/>
           </a:ln>
+          <a:effectLst/>
         </p:spPr>
         <p:style>
           <a:lnRef idx="2">
@@ -3920,25 +4221,104 @@
           </a:fontRef>
         </p:style>
       </p:cxnSp>
+      <p:sp>
+        <p:nvSpPr>
+          <p:cNvPr id="27" name="TextBox 26"/>
+          <p:cNvSpPr txBox="1"/>
+          <p:nvPr/>
+        </p:nvSpPr>
+        <p:spPr>
+          <a:xfrm>
+            <a:off x="3246120" y="4160520"/>
+            <a:ext cx="1417320" cy="246888"/>
+          </a:xfrm>
+          <a:prstGeom prst="rect">
+            <a:avLst/>
+          </a:prstGeom>
+          <a:noFill/>
+        </p:spPr>
+        <p:txBody>
+          <a:bodyPr wrap="square" anchor="t" lIns="0" rIns="0" tIns="0" bIns="0">
+            <a:spAutoFit/>
+          </a:bodyPr>
+          <a:lstStyle/>
+          <a:p>
+            <a:pPr algn="l"/>
+            <a:r>
+              <a:rPr sz="1000" b="0">
+                <a:solidFill>
+                  <a:srgbClr val="000000"/>
+                </a:solidFill>
+                <a:latin typeface="Arial"/>
+              </a:rPr>
+              <a:t>Local Weather State</a:t>
+            </a:r>
+          </a:p>
+        </p:txBody>
+      </p:sp>
+      <p:sp>
+        <p:nvSpPr>
+          <p:cNvPr id="28" name="Oval 27"/>
+          <p:cNvSpPr/>
+          <p:nvPr/>
+        </p:nvSpPr>
+        <p:spPr>
+          <a:xfrm>
+            <a:off x="5513832" y="3698748"/>
+            <a:ext cx="36576" cy="36576"/>
+          </a:xfrm>
+          <a:prstGeom prst="ellipse">
+            <a:avLst/>
+          </a:prstGeom>
+          <a:noFill/>
+          <a:ln>
+            <a:noFill/>
+          </a:ln>
+          <a:effectLst/>
+        </p:spPr>
+        <p:style>
+          <a:lnRef idx="1">
+            <a:schemeClr val="accent1"/>
+          </a:lnRef>
+          <a:fillRef idx="3">
+            <a:schemeClr val="accent1"/>
+          </a:fillRef>
+          <a:effectRef idx="2">
+            <a:schemeClr val="accent1"/>
+          </a:effectRef>
+          <a:fontRef idx="minor">
+            <a:schemeClr val="lt1"/>
+          </a:fontRef>
+        </p:style>
+        <p:txBody>
+          <a:bodyPr rtlCol="0" anchor="ctr"/>
+          <a:lstStyle/>
+          <a:p>
+            <a:pPr algn="ctr"/>
+          </a:p>
+        </p:txBody>
+      </p:sp>
       <p:cxnSp>
         <p:nvCxnSpPr>
-          <p:cNvPr id="22" name="Connector 21"/>
+          <p:cNvPr id="29" name="Connector 28"/>
           <p:cNvCxnSpPr/>
           <p:nvPr/>
         </p:nvCxnSpPr>
         <p:spPr>
-          <a:xfrm flipV="1">
-            <a:off x="14264640" y="3337560"/>
-            <a:ext cx="0" cy="1737360"/>
-          </a:xfrm>
-          <a:prstGeom prst="line">
-            <a:avLst/>
-          </a:prstGeom>
-          <a:ln w="19050">
+          <a:xfrm>
+            <a:off x="3931920" y="2155240"/>
+            <a:ext cx="1600200" cy="1561795"/>
+          </a:xfrm>
+          <a:prstGeom prst="bentConnector3">
+            <a:avLst/>
+          </a:prstGeom>
+          <a:ln w="12700">
             <a:solidFill>
               <a:srgbClr val="000000"/>
             </a:solidFill>
+            <a:tailEnd type="triangle" w="med" len="med"/>
           </a:ln>
+          <a:effectLst/>
         </p:spPr>
         <p:style>
           <a:lnRef idx="2">
@@ -3955,26 +4335,146 @@
           </a:fontRef>
         </p:style>
       </p:cxnSp>
+      <p:sp>
+        <p:nvSpPr>
+          <p:cNvPr id="30" name="TextBox 29"/>
+          <p:cNvSpPr txBox="1"/>
+          <p:nvPr/>
+        </p:nvSpPr>
+        <p:spPr>
+          <a:xfrm>
+            <a:off x="4315968" y="2852928"/>
+            <a:ext cx="1325880" cy="365760"/>
+          </a:xfrm>
+          <a:prstGeom prst="rect">
+            <a:avLst/>
+          </a:prstGeom>
+          <a:noFill/>
+        </p:spPr>
+        <p:txBody>
+          <a:bodyPr wrap="square" anchor="t" lIns="0" rIns="0" tIns="0" bIns="0">
+            <a:spAutoFit/>
+          </a:bodyPr>
+          <a:lstStyle/>
+          <a:p>
+            <a:pPr algn="l"/>
+            <a:r>
+              <a:rPr sz="1000" b="0">
+                <a:solidFill>
+                  <a:srgbClr val="000000"/>
+                </a:solidFill>
+                <a:latin typeface="Arial"/>
+              </a:rPr>
+              <a:t>Local Weather State Publication</a:t>
+            </a:r>
+          </a:p>
+        </p:txBody>
+      </p:sp>
+      <p:sp>
+        <p:nvSpPr>
+          <p:cNvPr id="31" name="Oval 30"/>
+          <p:cNvSpPr/>
+          <p:nvPr/>
+        </p:nvSpPr>
+        <p:spPr>
+          <a:xfrm>
+            <a:off x="5468112" y="5445252"/>
+            <a:ext cx="36576" cy="36576"/>
+          </a:xfrm>
+          <a:prstGeom prst="ellipse">
+            <a:avLst/>
+          </a:prstGeom>
+          <a:noFill/>
+          <a:ln>
+            <a:noFill/>
+          </a:ln>
+          <a:effectLst/>
+        </p:spPr>
+        <p:style>
+          <a:lnRef idx="1">
+            <a:schemeClr val="accent1"/>
+          </a:lnRef>
+          <a:fillRef idx="3">
+            <a:schemeClr val="accent1"/>
+          </a:fillRef>
+          <a:effectRef idx="2">
+            <a:schemeClr val="accent1"/>
+          </a:effectRef>
+          <a:fontRef idx="minor">
+            <a:schemeClr val="lt1"/>
+          </a:fontRef>
+        </p:style>
+        <p:txBody>
+          <a:bodyPr rtlCol="0" anchor="ctr"/>
+          <a:lstStyle/>
+          <a:p>
+            <a:pPr algn="ctr"/>
+          </a:p>
+        </p:txBody>
+      </p:sp>
+      <p:sp>
+        <p:nvSpPr>
+          <p:cNvPr id="32" name="Oval 31"/>
+          <p:cNvSpPr/>
+          <p:nvPr/>
+        </p:nvSpPr>
+        <p:spPr>
+          <a:xfrm>
+            <a:off x="5513832" y="4082796"/>
+            <a:ext cx="36576" cy="36576"/>
+          </a:xfrm>
+          <a:prstGeom prst="ellipse">
+            <a:avLst/>
+          </a:prstGeom>
+          <a:noFill/>
+          <a:ln>
+            <a:noFill/>
+          </a:ln>
+          <a:effectLst/>
+        </p:spPr>
+        <p:style>
+          <a:lnRef idx="1">
+            <a:schemeClr val="accent1"/>
+          </a:lnRef>
+          <a:fillRef idx="3">
+            <a:schemeClr val="accent1"/>
+          </a:fillRef>
+          <a:effectRef idx="2">
+            <a:schemeClr val="accent1"/>
+          </a:effectRef>
+          <a:fontRef idx="minor">
+            <a:schemeClr val="lt1"/>
+          </a:fontRef>
+        </p:style>
+        <p:txBody>
+          <a:bodyPr rtlCol="0" anchor="ctr"/>
+          <a:lstStyle/>
+          <a:p>
+            <a:pPr algn="ctr"/>
+          </a:p>
+        </p:txBody>
+      </p:sp>
       <p:cxnSp>
         <p:nvCxnSpPr>
-          <p:cNvPr id="23" name="Connector 22"/>
+          <p:cNvPr id="33" name="Connector 32"/>
           <p:cNvCxnSpPr/>
           <p:nvPr/>
         </p:nvCxnSpPr>
         <p:spPr>
-          <a:xfrm>
-            <a:off x="14264640" y="3337560"/>
-            <a:ext cx="2011680" cy="0"/>
-          </a:xfrm>
-          <a:prstGeom prst="line">
-            <a:avLst/>
-          </a:prstGeom>
-          <a:ln w="19050">
+          <a:xfrm flipV="1">
+            <a:off x="5486400" y="4101083"/>
+            <a:ext cx="45720" cy="1362457"/>
+          </a:xfrm>
+          <a:prstGeom prst="bentConnector3">
+            <a:avLst/>
+          </a:prstGeom>
+          <a:ln w="12700">
             <a:solidFill>
               <a:srgbClr val="000000"/>
             </a:solidFill>
             <a:tailEnd type="triangle" w="med" len="med"/>
           </a:ln>
+          <a:effectLst/>
         </p:spPr>
         <p:style>
           <a:lnRef idx="2">
@@ -3991,25 +4491,230 @@
           </a:fontRef>
         </p:style>
       </p:cxnSp>
+      <p:sp>
+        <p:nvSpPr>
+          <p:cNvPr id="34" name="TextBox 33"/>
+          <p:cNvSpPr txBox="1"/>
+          <p:nvPr/>
+        </p:nvSpPr>
+        <p:spPr>
+          <a:xfrm>
+            <a:off x="4160520" y="5989320"/>
+            <a:ext cx="1463040" cy="365760"/>
+          </a:xfrm>
+          <a:prstGeom prst="rect">
+            <a:avLst/>
+          </a:prstGeom>
+          <a:noFill/>
+        </p:spPr>
+        <p:txBody>
+          <a:bodyPr wrap="square" anchor="t" lIns="0" rIns="0" tIns="0" bIns="0">
+            <a:spAutoFit/>
+          </a:bodyPr>
+          <a:lstStyle/>
+          <a:p>
+            <a:pPr algn="l"/>
+            <a:r>
+              <a:rPr sz="1000" b="0">
+                <a:solidFill>
+                  <a:srgbClr val="000000"/>
+                </a:solidFill>
+                <a:latin typeface="Arial"/>
+              </a:rPr>
+              <a:t>Confidence Bounds &amp; Risk Envelopes</a:t>
+            </a:r>
+          </a:p>
+        </p:txBody>
+      </p:sp>
+      <p:sp>
+        <p:nvSpPr>
+          <p:cNvPr id="35" name="Oval 34"/>
+          <p:cNvSpPr/>
+          <p:nvPr/>
+        </p:nvSpPr>
+        <p:spPr>
+          <a:xfrm>
+            <a:off x="6885432" y="3621938"/>
+            <a:ext cx="36576" cy="36576"/>
+          </a:xfrm>
+          <a:prstGeom prst="ellipse">
+            <a:avLst/>
+          </a:prstGeom>
+          <a:noFill/>
+          <a:ln>
+            <a:noFill/>
+          </a:ln>
+          <a:effectLst/>
+        </p:spPr>
+        <p:style>
+          <a:lnRef idx="1">
+            <a:schemeClr val="accent1"/>
+          </a:lnRef>
+          <a:fillRef idx="3">
+            <a:schemeClr val="accent1"/>
+          </a:fillRef>
+          <a:effectRef idx="2">
+            <a:schemeClr val="accent1"/>
+          </a:effectRef>
+          <a:fontRef idx="minor">
+            <a:schemeClr val="lt1"/>
+          </a:fontRef>
+        </p:style>
+        <p:txBody>
+          <a:bodyPr rtlCol="0" anchor="ctr"/>
+          <a:lstStyle/>
+          <a:p>
+            <a:pPr algn="ctr"/>
+          </a:p>
+        </p:txBody>
+      </p:sp>
+      <p:sp>
+        <p:nvSpPr>
+          <p:cNvPr id="36" name="Oval 35"/>
+          <p:cNvSpPr/>
+          <p:nvPr/>
+        </p:nvSpPr>
+        <p:spPr>
+          <a:xfrm>
+            <a:off x="6885432" y="3890772"/>
+            <a:ext cx="36576" cy="36576"/>
+          </a:xfrm>
+          <a:prstGeom prst="ellipse">
+            <a:avLst/>
+          </a:prstGeom>
+          <a:noFill/>
+          <a:ln>
+            <a:noFill/>
+          </a:ln>
+          <a:effectLst/>
+        </p:spPr>
+        <p:style>
+          <a:lnRef idx="1">
+            <a:schemeClr val="accent1"/>
+          </a:lnRef>
+          <a:fillRef idx="3">
+            <a:schemeClr val="accent1"/>
+          </a:fillRef>
+          <a:effectRef idx="2">
+            <a:schemeClr val="accent1"/>
+          </a:effectRef>
+          <a:fontRef idx="minor">
+            <a:schemeClr val="lt1"/>
+          </a:fontRef>
+        </p:style>
+        <p:txBody>
+          <a:bodyPr rtlCol="0" anchor="ctr"/>
+          <a:lstStyle/>
+          <a:p>
+            <a:pPr algn="ctr"/>
+          </a:p>
+        </p:txBody>
+      </p:sp>
+      <p:sp>
+        <p:nvSpPr>
+          <p:cNvPr id="37" name="Oval 36"/>
+          <p:cNvSpPr/>
+          <p:nvPr/>
+        </p:nvSpPr>
+        <p:spPr>
+          <a:xfrm>
+            <a:off x="6885432" y="4159605"/>
+            <a:ext cx="36576" cy="36576"/>
+          </a:xfrm>
+          <a:prstGeom prst="ellipse">
+            <a:avLst/>
+          </a:prstGeom>
+          <a:noFill/>
+          <a:ln>
+            <a:noFill/>
+          </a:ln>
+          <a:effectLst/>
+        </p:spPr>
+        <p:style>
+          <a:lnRef idx="1">
+            <a:schemeClr val="accent1"/>
+          </a:lnRef>
+          <a:fillRef idx="3">
+            <a:schemeClr val="accent1"/>
+          </a:fillRef>
+          <a:effectRef idx="2">
+            <a:schemeClr val="accent1"/>
+          </a:effectRef>
+          <a:fontRef idx="minor">
+            <a:schemeClr val="lt1"/>
+          </a:fontRef>
+        </p:style>
+        <p:txBody>
+          <a:bodyPr rtlCol="0" anchor="ctr"/>
+          <a:lstStyle/>
+          <a:p>
+            <a:pPr algn="ctr"/>
+          </a:p>
+        </p:txBody>
+      </p:sp>
+      <p:sp>
+        <p:nvSpPr>
+          <p:cNvPr id="38" name="Oval 37"/>
+          <p:cNvSpPr/>
+          <p:nvPr/>
+        </p:nvSpPr>
+        <p:spPr>
+          <a:xfrm>
+            <a:off x="7114032" y="2290572"/>
+            <a:ext cx="36576" cy="36576"/>
+          </a:xfrm>
+          <a:prstGeom prst="ellipse">
+            <a:avLst/>
+          </a:prstGeom>
+          <a:noFill/>
+          <a:ln>
+            <a:noFill/>
+          </a:ln>
+          <a:effectLst/>
+        </p:spPr>
+        <p:style>
+          <a:lnRef idx="1">
+            <a:schemeClr val="accent1"/>
+          </a:lnRef>
+          <a:fillRef idx="3">
+            <a:schemeClr val="accent1"/>
+          </a:fillRef>
+          <a:effectRef idx="2">
+            <a:schemeClr val="accent1"/>
+          </a:effectRef>
+          <a:fontRef idx="minor">
+            <a:schemeClr val="lt1"/>
+          </a:fontRef>
+        </p:style>
+        <p:txBody>
+          <a:bodyPr rtlCol="0" anchor="ctr"/>
+          <a:lstStyle/>
+          <a:p>
+            <a:pPr algn="ctr"/>
+          </a:p>
+        </p:txBody>
+      </p:sp>
       <p:cxnSp>
         <p:nvCxnSpPr>
-          <p:cNvPr id="24" name="Connector 23"/>
+          <p:cNvPr id="39" name="Connector 38"/>
           <p:cNvCxnSpPr/>
           <p:nvPr/>
         </p:nvCxnSpPr>
         <p:spPr>
-          <a:xfrm>
-            <a:off x="13807440" y="5623560"/>
-            <a:ext cx="457200" cy="0"/>
-          </a:xfrm>
-          <a:prstGeom prst="line">
-            <a:avLst/>
-          </a:prstGeom>
-          <a:ln w="19050">
+          <a:xfrm flipV="1">
+            <a:off x="6903720" y="2308860"/>
+            <a:ext cx="228600" cy="1331366"/>
+          </a:xfrm>
+          <a:prstGeom prst="bentConnector3">
+            <a:avLst/>
+          </a:prstGeom>
+          <a:ln w="12700">
             <a:solidFill>
               <a:srgbClr val="000000"/>
             </a:solidFill>
+            <a:tailEnd type="triangle" w="med" len="med"/>
           </a:ln>
+          <a:effectLst/>
         </p:spPr>
         <p:style>
           <a:lnRef idx="2">
@@ -4026,25 +4731,104 @@
           </a:fontRef>
         </p:style>
       </p:cxnSp>
+      <p:sp>
+        <p:nvSpPr>
+          <p:cNvPr id="40" name="TextBox 39"/>
+          <p:cNvSpPr txBox="1"/>
+          <p:nvPr/>
+        </p:nvSpPr>
+        <p:spPr>
+          <a:xfrm>
+            <a:off x="5532120" y="2697480"/>
+            <a:ext cx="1325880" cy="310896"/>
+          </a:xfrm>
+          <a:prstGeom prst="rect">
+            <a:avLst/>
+          </a:prstGeom>
+          <a:noFill/>
+        </p:spPr>
+        <p:txBody>
+          <a:bodyPr wrap="square" anchor="t" lIns="0" rIns="0" tIns="0" bIns="0">
+            <a:spAutoFit/>
+          </a:bodyPr>
+          <a:lstStyle/>
+          <a:p>
+            <a:pPr algn="l"/>
+            <a:r>
+              <a:rPr sz="1000" b="0">
+                <a:solidFill>
+                  <a:srgbClr val="000000"/>
+                </a:solidFill>
+                <a:latin typeface="Arial"/>
+              </a:rPr>
+              <a:t>Federated Weather Context / COWP State</a:t>
+            </a:r>
+          </a:p>
+        </p:txBody>
+      </p:sp>
+      <p:sp>
+        <p:nvSpPr>
+          <p:cNvPr id="41" name="Oval 40"/>
+          <p:cNvSpPr/>
+          <p:nvPr/>
+        </p:nvSpPr>
+        <p:spPr>
+          <a:xfrm>
+            <a:off x="7571232" y="5445252"/>
+            <a:ext cx="36576" cy="36576"/>
+          </a:xfrm>
+          <a:prstGeom prst="ellipse">
+            <a:avLst/>
+          </a:prstGeom>
+          <a:noFill/>
+          <a:ln>
+            <a:noFill/>
+          </a:ln>
+          <a:effectLst/>
+        </p:spPr>
+        <p:style>
+          <a:lnRef idx="1">
+            <a:schemeClr val="accent1"/>
+          </a:lnRef>
+          <a:fillRef idx="3">
+            <a:schemeClr val="accent1"/>
+          </a:fillRef>
+          <a:effectRef idx="2">
+            <a:schemeClr val="accent1"/>
+          </a:effectRef>
+          <a:fontRef idx="minor">
+            <a:schemeClr val="lt1"/>
+          </a:fontRef>
+        </p:style>
+        <p:txBody>
+          <a:bodyPr rtlCol="0" anchor="ctr"/>
+          <a:lstStyle/>
+          <a:p>
+            <a:pPr algn="ctr"/>
+          </a:p>
+        </p:txBody>
+      </p:sp>
       <p:cxnSp>
         <p:nvCxnSpPr>
-          <p:cNvPr id="25" name="Connector 24"/>
+          <p:cNvPr id="42" name="Connector 41"/>
           <p:cNvCxnSpPr/>
           <p:nvPr/>
         </p:nvCxnSpPr>
         <p:spPr>
           <a:xfrm>
-            <a:off x="14264640" y="5623560"/>
-            <a:ext cx="0" cy="1554480"/>
-          </a:xfrm>
-          <a:prstGeom prst="line">
-            <a:avLst/>
-          </a:prstGeom>
-          <a:ln w="19050">
+            <a:off x="6903720" y="4177893"/>
+            <a:ext cx="685800" cy="1285647"/>
+          </a:xfrm>
+          <a:prstGeom prst="bentConnector3">
+            <a:avLst/>
+          </a:prstGeom>
+          <a:ln w="12700">
             <a:solidFill>
               <a:srgbClr val="000000"/>
             </a:solidFill>
+            <a:tailEnd type="triangle" w="med" len="med"/>
           </a:ln>
+          <a:effectLst/>
         </p:spPr>
         <p:style>
           <a:lnRef idx="2">
@@ -4061,26 +4845,104 @@
           </a:fontRef>
         </p:style>
       </p:cxnSp>
+      <p:sp>
+        <p:nvSpPr>
+          <p:cNvPr id="43" name="TextBox 42"/>
+          <p:cNvSpPr txBox="1"/>
+          <p:nvPr/>
+        </p:nvSpPr>
+        <p:spPr>
+          <a:xfrm>
+            <a:off x="5532120" y="4617720"/>
+            <a:ext cx="1325880" cy="310896"/>
+          </a:xfrm>
+          <a:prstGeom prst="rect">
+            <a:avLst/>
+          </a:prstGeom>
+          <a:noFill/>
+        </p:spPr>
+        <p:txBody>
+          <a:bodyPr wrap="square" anchor="t" lIns="0" rIns="0" tIns="0" bIns="0">
+            <a:spAutoFit/>
+          </a:bodyPr>
+          <a:lstStyle/>
+          <a:p>
+            <a:pPr algn="l"/>
+            <a:r>
+              <a:rPr sz="1000" b="0">
+                <a:solidFill>
+                  <a:srgbClr val="000000"/>
+                </a:solidFill>
+                <a:latin typeface="Arial"/>
+              </a:rPr>
+              <a:t>Federated Weather Context / COWP State</a:t>
+            </a:r>
+          </a:p>
+        </p:txBody>
+      </p:sp>
+      <p:sp>
+        <p:nvSpPr>
+          <p:cNvPr id="44" name="Oval 43"/>
+          <p:cNvSpPr/>
+          <p:nvPr/>
+        </p:nvSpPr>
+        <p:spPr>
+          <a:xfrm>
+            <a:off x="6885432" y="3890772"/>
+            <a:ext cx="36576" cy="36576"/>
+          </a:xfrm>
+          <a:prstGeom prst="ellipse">
+            <a:avLst/>
+          </a:prstGeom>
+          <a:noFill/>
+          <a:ln>
+            <a:noFill/>
+          </a:ln>
+          <a:effectLst/>
+        </p:spPr>
+        <p:style>
+          <a:lnRef idx="1">
+            <a:schemeClr val="accent1"/>
+          </a:lnRef>
+          <a:fillRef idx="3">
+            <a:schemeClr val="accent1"/>
+          </a:fillRef>
+          <a:effectRef idx="2">
+            <a:schemeClr val="accent1"/>
+          </a:effectRef>
+          <a:fontRef idx="minor">
+            <a:schemeClr val="lt1"/>
+          </a:fontRef>
+        </p:style>
+        <p:txBody>
+          <a:bodyPr rtlCol="0" anchor="ctr"/>
+          <a:lstStyle/>
+          <a:p>
+            <a:pPr algn="ctr"/>
+          </a:p>
+        </p:txBody>
+      </p:sp>
       <p:cxnSp>
         <p:nvCxnSpPr>
-          <p:cNvPr id="26" name="Connector 25"/>
+          <p:cNvPr id="45" name="Connector 44"/>
           <p:cNvCxnSpPr/>
           <p:nvPr/>
         </p:nvCxnSpPr>
         <p:spPr>
           <a:xfrm>
-            <a:off x="14264640" y="7178040"/>
-            <a:ext cx="2011680" cy="0"/>
-          </a:xfrm>
-          <a:prstGeom prst="line">
-            <a:avLst/>
-          </a:prstGeom>
-          <a:ln w="19050">
+            <a:off x="6903720" y="3909060"/>
+            <a:ext cx="2770632" cy="0"/>
+          </a:xfrm>
+          <a:prstGeom prst="bentConnector3">
+            <a:avLst/>
+          </a:prstGeom>
+          <a:ln w="12700">
             <a:solidFill>
               <a:srgbClr val="000000"/>
             </a:solidFill>
             <a:tailEnd type="triangle" w="med" len="med"/>
           </a:ln>
+          <a:effectLst/>
         </p:spPr>
         <p:style>
           <a:lnRef idx="2">
@@ -4099,14 +4961,14 @@
       </p:cxnSp>
       <p:sp>
         <p:nvSpPr>
-          <p:cNvPr id="27" name="TextBox 26"/>
+          <p:cNvPr id="46" name="TextBox 45"/>
           <p:cNvSpPr txBox="1"/>
           <p:nvPr/>
         </p:nvSpPr>
         <p:spPr>
           <a:xfrm>
-            <a:off x="3703320" y="4160520"/>
-            <a:ext cx="2377440" cy="457200"/>
+            <a:off x="8732520" y="3634740"/>
+            <a:ext cx="914400" cy="246888"/>
           </a:xfrm>
           <a:prstGeom prst="rect">
             <a:avLst/>
@@ -4114,184 +4976,87 @@
           <a:noFill/>
         </p:spPr>
         <p:txBody>
-          <a:bodyPr wrap="square" anchor="t" lIns="12700" rIns="12700" tIns="12700" bIns="12700">
+          <a:bodyPr wrap="square" anchor="t" lIns="0" rIns="0" tIns="0" bIns="0">
             <a:spAutoFit/>
           </a:bodyPr>
           <a:lstStyle/>
           <a:p>
-            <a:pPr algn="ctr"/>
-            <a:r>
-              <a:rPr sz="900" b="0">
+            <a:pPr algn="l"/>
+            <a:r>
+              <a:rPr sz="1000" b="0">
                 <a:solidFill>
                   <a:srgbClr val="000000"/>
                 </a:solidFill>
                 <a:latin typeface="Arial"/>
               </a:rPr>
-              <a:t>F1 Time/Geo-Tagged, Quality-Checked Observations (IER-03)</a:t>
-            </a:r>
-          </a:p>
-        </p:txBody>
-      </p:sp>
-      <p:sp>
-        <p:nvSpPr>
-          <p:cNvPr id="28" name="TextBox 27"/>
-          <p:cNvSpPr txBox="1"/>
-          <p:nvPr/>
-        </p:nvSpPr>
-        <p:spPr>
-          <a:xfrm>
-            <a:off x="6720840" y="3977639"/>
-            <a:ext cx="2377440" cy="457200"/>
-          </a:xfrm>
-          <a:prstGeom prst="rect">
+              <a:t>O1 Fused COWP State</a:t>
+            </a:r>
+          </a:p>
+        </p:txBody>
+      </p:sp>
+      <p:sp>
+        <p:nvSpPr>
+          <p:cNvPr id="47" name="Oval 46"/>
+          <p:cNvSpPr/>
+          <p:nvPr/>
+        </p:nvSpPr>
+        <p:spPr>
+          <a:xfrm>
+            <a:off x="8439912" y="2290572"/>
+            <a:ext cx="36576" cy="36576"/>
+          </a:xfrm>
+          <a:prstGeom prst="ellipse">
             <a:avLst/>
           </a:prstGeom>
           <a:noFill/>
-        </p:spPr>
-        <p:txBody>
-          <a:bodyPr wrap="square" anchor="t" lIns="12700" rIns="12700" tIns="12700" bIns="12700">
-            <a:spAutoFit/>
-          </a:bodyPr>
+          <a:ln>
+            <a:noFill/>
+          </a:ln>
+          <a:effectLst/>
+        </p:spPr>
+        <p:style>
+          <a:lnRef idx="1">
+            <a:schemeClr val="accent1"/>
+          </a:lnRef>
+          <a:fillRef idx="3">
+            <a:schemeClr val="accent1"/>
+          </a:fillRef>
+          <a:effectRef idx="2">
+            <a:schemeClr val="accent1"/>
+          </a:effectRef>
+          <a:fontRef idx="minor">
+            <a:schemeClr val="lt1"/>
+          </a:fontRef>
+        </p:style>
+        <p:txBody>
+          <a:bodyPr rtlCol="0" anchor="ctr"/>
           <a:lstStyle/>
           <a:p>
             <a:pPr algn="ctr"/>
-            <a:r>
-              <a:rPr sz="900" b="0">
-                <a:solidFill>
-                  <a:srgbClr val="000000"/>
-                </a:solidFill>
-                <a:latin typeface="Arial"/>
-              </a:rPr>
-              <a:t>F2 Local Micro-Weather State Estimate (IER-05)</a:t>
-            </a:r>
-          </a:p>
-        </p:txBody>
-      </p:sp>
-      <p:sp>
-        <p:nvSpPr>
-          <p:cNvPr id="29" name="TextBox 28"/>
-          <p:cNvSpPr txBox="1"/>
-          <p:nvPr/>
-        </p:nvSpPr>
-        <p:spPr>
-          <a:xfrm>
-            <a:off x="9692640" y="4160520"/>
-            <a:ext cx="2377440" cy="457200"/>
-          </a:xfrm>
-          <a:prstGeom prst="rect">
-            <a:avLst/>
-          </a:prstGeom>
-          <a:noFill/>
-        </p:spPr>
-        <p:txBody>
-          <a:bodyPr wrap="square" anchor="t" lIns="12700" rIns="12700" tIns="12700" bIns="12700">
-            <a:spAutoFit/>
-          </a:bodyPr>
-          <a:lstStyle/>
-          <a:p>
-            <a:pPr algn="ctr"/>
-            <a:r>
-              <a:rPr sz="900" b="0">
-                <a:solidFill>
-                  <a:srgbClr val="000000"/>
-                </a:solidFill>
-                <a:latin typeface="Arial"/>
-              </a:rPr>
-              <a:t>F3 Confidence Bounds &amp; Risk Envelopes (IER-09)</a:t>
-            </a:r>
-          </a:p>
-        </p:txBody>
-      </p:sp>
-      <p:sp>
-        <p:nvSpPr>
-          <p:cNvPr id="30" name="TextBox 29"/>
-          <p:cNvSpPr txBox="1"/>
-          <p:nvPr/>
-        </p:nvSpPr>
-        <p:spPr>
-          <a:xfrm>
-            <a:off x="12618720" y="2103120"/>
-            <a:ext cx="2103120" cy="411480"/>
-          </a:xfrm>
-          <a:prstGeom prst="rect">
-            <a:avLst/>
-          </a:prstGeom>
-          <a:noFill/>
-        </p:spPr>
-        <p:txBody>
-          <a:bodyPr wrap="square" anchor="t" lIns="12700" rIns="12700" tIns="12700" bIns="12700">
-            <a:spAutoFit/>
-          </a:bodyPr>
-          <a:lstStyle/>
-          <a:p>
-            <a:pPr algn="l"/>
-            <a:r>
-              <a:rPr sz="900" b="0">
-                <a:solidFill>
-                  <a:srgbClr val="000000"/>
-                </a:solidFill>
-                <a:latin typeface="Arial"/>
-              </a:rPr>
-              <a:t>F4 Federated Weather Context / COWP State</a:t>
-            </a:r>
-          </a:p>
-        </p:txBody>
-      </p:sp>
-      <p:sp>
-        <p:nvSpPr>
-          <p:cNvPr id="31" name="TextBox 30"/>
-          <p:cNvSpPr txBox="1"/>
-          <p:nvPr/>
-        </p:nvSpPr>
-        <p:spPr>
-          <a:xfrm>
-            <a:off x="11887200" y="6272784"/>
-            <a:ext cx="1417320" cy="731520"/>
-          </a:xfrm>
-          <a:prstGeom prst="rect">
-            <a:avLst/>
-          </a:prstGeom>
-          <a:noFill/>
-        </p:spPr>
-        <p:txBody>
-          <a:bodyPr wrap="square" anchor="t" lIns="12700" rIns="12700" tIns="12700" bIns="12700">
-            <a:spAutoFit/>
-          </a:bodyPr>
-          <a:lstStyle/>
-          <a:p>
-            <a:pPr algn="l"/>
-            <a:r>
-              <a:rPr sz="900" b="0">
-                <a:solidFill>
-                  <a:srgbClr val="000000"/>
-                </a:solidFill>
-                <a:latin typeface="Arial"/>
-              </a:rPr>
-              <a:t>F5 Federated Weather Context / COWP State</a:t>
-            </a:r>
           </a:p>
         </p:txBody>
       </p:sp>
       <p:cxnSp>
         <p:nvCxnSpPr>
-          <p:cNvPr id="32" name="Connector 31"/>
+          <p:cNvPr id="48" name="Connector 47"/>
           <p:cNvCxnSpPr/>
           <p:nvPr/>
         </p:nvCxnSpPr>
         <p:spPr>
           <a:xfrm>
-            <a:off x="457200" y="5074920"/>
-            <a:ext cx="1737360" cy="0"/>
-          </a:xfrm>
-          <a:prstGeom prst="line">
-            <a:avLst/>
-          </a:prstGeom>
-          <a:ln w="19050">
+            <a:off x="8458200" y="2308860"/>
+            <a:ext cx="1216152" cy="0"/>
+          </a:xfrm>
+          <a:prstGeom prst="bentConnector3">
+            <a:avLst/>
+          </a:prstGeom>
+          <a:ln w="12700">
             <a:solidFill>
               <a:srgbClr val="000000"/>
             </a:solidFill>
             <a:tailEnd type="triangle" w="med" len="med"/>
           </a:ln>
+          <a:effectLst/>
         </p:spPr>
         <p:style>
           <a:lnRef idx="2">
@@ -4308,26 +5073,104 @@
           </a:fontRef>
         </p:style>
       </p:cxnSp>
+      <p:sp>
+        <p:nvSpPr>
+          <p:cNvPr id="49" name="TextBox 48"/>
+          <p:cNvSpPr txBox="1"/>
+          <p:nvPr/>
+        </p:nvSpPr>
+        <p:spPr>
+          <a:xfrm>
+            <a:off x="8942832" y="1595628"/>
+            <a:ext cx="731520" cy="676656"/>
+          </a:xfrm>
+          <a:prstGeom prst="rect">
+            <a:avLst/>
+          </a:prstGeom>
+          <a:noFill/>
+        </p:spPr>
+        <p:txBody>
+          <a:bodyPr wrap="square" anchor="t" lIns="0" rIns="0" tIns="0" bIns="0">
+            <a:spAutoFit/>
+          </a:bodyPr>
+          <a:lstStyle/>
+          <a:p>
+            <a:pPr algn="l"/>
+            <a:r>
+              <a:rPr sz="1000" b="0">
+                <a:solidFill>
+                  <a:srgbClr val="000000"/>
+                </a:solidFill>
+                <a:latin typeface="Arial"/>
+              </a:rPr>
+              <a:t>O3 Weather State Change Notifications</a:t>
+            </a:r>
+          </a:p>
+        </p:txBody>
+      </p:sp>
+      <p:sp>
+        <p:nvSpPr>
+          <p:cNvPr id="50" name="Oval 49"/>
+          <p:cNvSpPr/>
+          <p:nvPr/>
+        </p:nvSpPr>
+        <p:spPr>
+          <a:xfrm>
+            <a:off x="8897112" y="5445252"/>
+            <a:ext cx="36576" cy="36576"/>
+          </a:xfrm>
+          <a:prstGeom prst="ellipse">
+            <a:avLst/>
+          </a:prstGeom>
+          <a:noFill/>
+          <a:ln>
+            <a:noFill/>
+          </a:ln>
+          <a:effectLst/>
+        </p:spPr>
+        <p:style>
+          <a:lnRef idx="1">
+            <a:schemeClr val="accent1"/>
+          </a:lnRef>
+          <a:fillRef idx="3">
+            <a:schemeClr val="accent1"/>
+          </a:fillRef>
+          <a:effectRef idx="2">
+            <a:schemeClr val="accent1"/>
+          </a:effectRef>
+          <a:fontRef idx="minor">
+            <a:schemeClr val="lt1"/>
+          </a:fontRef>
+        </p:style>
+        <p:txBody>
+          <a:bodyPr rtlCol="0" anchor="ctr"/>
+          <a:lstStyle/>
+          <a:p>
+            <a:pPr algn="ctr"/>
+          </a:p>
+        </p:txBody>
+      </p:sp>
       <p:cxnSp>
         <p:nvCxnSpPr>
-          <p:cNvPr id="33" name="Connector 32"/>
+          <p:cNvPr id="51" name="Connector 50"/>
           <p:cNvCxnSpPr/>
           <p:nvPr/>
         </p:nvCxnSpPr>
         <p:spPr>
           <a:xfrm>
-            <a:off x="457200" y="5623560"/>
-            <a:ext cx="1737360" cy="0"/>
-          </a:xfrm>
-          <a:prstGeom prst="line">
-            <a:avLst/>
-          </a:prstGeom>
-          <a:ln w="19050">
+            <a:off x="8915400" y="5463540"/>
+            <a:ext cx="758952" cy="0"/>
+          </a:xfrm>
+          <a:prstGeom prst="bentConnector3">
+            <a:avLst/>
+          </a:prstGeom>
+          <a:ln w="12700">
             <a:solidFill>
               <a:srgbClr val="000000"/>
             </a:solidFill>
             <a:tailEnd type="triangle" w="med" len="med"/>
           </a:ln>
+          <a:effectLst/>
         </p:spPr>
         <p:style>
           <a:lnRef idx="2">
@@ -4344,25 +5187,61 @@
           </a:fontRef>
         </p:style>
       </p:cxnSp>
+      <p:sp>
+        <p:nvSpPr>
+          <p:cNvPr id="52" name="TextBox 51"/>
+          <p:cNvSpPr txBox="1"/>
+          <p:nvPr/>
+        </p:nvSpPr>
+        <p:spPr>
+          <a:xfrm>
+            <a:off x="8979408" y="4750307"/>
+            <a:ext cx="694944" cy="676656"/>
+          </a:xfrm>
+          <a:prstGeom prst="rect">
+            <a:avLst/>
+          </a:prstGeom>
+          <a:noFill/>
+        </p:spPr>
+        <p:txBody>
+          <a:bodyPr wrap="square" anchor="t" lIns="0" rIns="0" tIns="0" bIns="0">
+            <a:spAutoFit/>
+          </a:bodyPr>
+          <a:lstStyle/>
+          <a:p>
+            <a:pPr algn="l"/>
+            <a:r>
+              <a:rPr sz="1000" b="0">
+                <a:solidFill>
+                  <a:srgbClr val="000000"/>
+                </a:solidFill>
+                <a:latin typeface="Arial"/>
+              </a:rPr>
+              <a:t>O2 Mission-Tailored COWP Excerpts</a:t>
+            </a:r>
+          </a:p>
+        </p:txBody>
+      </p:sp>
       <p:cxnSp>
         <p:nvCxnSpPr>
-          <p:cNvPr id="34" name="Connector 33"/>
+          <p:cNvPr id="53" name="Connector 52"/>
           <p:cNvCxnSpPr/>
           <p:nvPr/>
         </p:nvCxnSpPr>
         <p:spPr>
           <a:xfrm>
-            <a:off x="457200" y="8595360"/>
-            <a:ext cx="14173200" cy="0"/>
-          </a:xfrm>
-          <a:prstGeom prst="line">
-            <a:avLst/>
-          </a:prstGeom>
-          <a:ln w="19050">
+            <a:off x="5998464" y="1554480"/>
+            <a:ext cx="2810865" cy="0"/>
+          </a:xfrm>
+          <a:prstGeom prst="bentConnector3">
+            <a:avLst/>
+          </a:prstGeom>
+          <a:ln w="12700">
             <a:solidFill>
               <a:srgbClr val="000000"/>
             </a:solidFill>
           </a:ln>
+          <a:effectLst/>
         </p:spPr>
         <p:style>
           <a:lnRef idx="2">
@@ -4379,25 +5258,69 @@
           </a:fontRef>
         </p:style>
       </p:cxnSp>
+      <p:sp>
+        <p:nvSpPr>
+          <p:cNvPr id="54" name="Oval 53"/>
+          <p:cNvSpPr/>
+          <p:nvPr/>
+        </p:nvSpPr>
+        <p:spPr>
+          <a:xfrm>
+            <a:off x="5980176" y="3410712"/>
+            <a:ext cx="36576" cy="36576"/>
+          </a:xfrm>
+          <a:prstGeom prst="ellipse">
+            <a:avLst/>
+          </a:prstGeom>
+          <a:noFill/>
+          <a:ln>
+            <a:noFill/>
+          </a:ln>
+          <a:effectLst/>
+        </p:spPr>
+        <p:style>
+          <a:lnRef idx="1">
+            <a:schemeClr val="accent1"/>
+          </a:lnRef>
+          <a:fillRef idx="3">
+            <a:schemeClr val="accent1"/>
+          </a:fillRef>
+          <a:effectRef idx="2">
+            <a:schemeClr val="accent1"/>
+          </a:effectRef>
+          <a:fontRef idx="minor">
+            <a:schemeClr val="lt1"/>
+          </a:fontRef>
+        </p:style>
+        <p:txBody>
+          <a:bodyPr rtlCol="0" anchor="ctr"/>
+          <a:lstStyle/>
+          <a:p>
+            <a:pPr algn="ctr"/>
+          </a:p>
+        </p:txBody>
+      </p:sp>
       <p:cxnSp>
         <p:nvCxnSpPr>
-          <p:cNvPr id="35" name="Connector 34"/>
+          <p:cNvPr id="55" name="Connector 54"/>
           <p:cNvCxnSpPr/>
           <p:nvPr/>
         </p:nvCxnSpPr>
         <p:spPr>
-          <a:xfrm flipV="1">
-            <a:off x="14630400" y="3703320"/>
-            <a:ext cx="0" cy="4892040"/>
-          </a:xfrm>
-          <a:prstGeom prst="line">
-            <a:avLst/>
-          </a:prstGeom>
-          <a:ln w="19050">
+          <a:xfrm>
+            <a:off x="5998464" y="1554480"/>
+            <a:ext cx="0" cy="1874520"/>
+          </a:xfrm>
+          <a:prstGeom prst="bentConnector3">
+            <a:avLst/>
+          </a:prstGeom>
+          <a:ln w="12700">
             <a:solidFill>
               <a:srgbClr val="000000"/>
             </a:solidFill>
+            <a:tailEnd type="triangle" w="med" len="med"/>
           </a:ln>
+          <a:effectLst/>
         </p:spPr>
         <p:style>
           <a:lnRef idx="2">
@@ -4414,26 +5337,69 @@
           </a:fontRef>
         </p:style>
       </p:cxnSp>
+      <p:sp>
+        <p:nvSpPr>
+          <p:cNvPr id="56" name="Oval 55"/>
+          <p:cNvSpPr/>
+          <p:nvPr/>
+        </p:nvSpPr>
+        <p:spPr>
+          <a:xfrm>
+            <a:off x="8791041" y="4965192"/>
+            <a:ext cx="36576" cy="36576"/>
+          </a:xfrm>
+          <a:prstGeom prst="ellipse">
+            <a:avLst/>
+          </a:prstGeom>
+          <a:noFill/>
+          <a:ln>
+            <a:noFill/>
+          </a:ln>
+          <a:effectLst/>
+        </p:spPr>
+        <p:style>
+          <a:lnRef idx="1">
+            <a:schemeClr val="accent1"/>
+          </a:lnRef>
+          <a:fillRef idx="3">
+            <a:schemeClr val="accent1"/>
+          </a:fillRef>
+          <a:effectRef idx="2">
+            <a:schemeClr val="accent1"/>
+          </a:effectRef>
+          <a:fontRef idx="minor">
+            <a:schemeClr val="lt1"/>
+          </a:fontRef>
+        </p:style>
+        <p:txBody>
+          <a:bodyPr rtlCol="0" anchor="ctr"/>
+          <a:lstStyle/>
+          <a:p>
+            <a:pPr algn="ctr"/>
+          </a:p>
+        </p:txBody>
+      </p:sp>
       <p:cxnSp>
         <p:nvCxnSpPr>
-          <p:cNvPr id="36" name="Connector 35"/>
+          <p:cNvPr id="57" name="Connector 56"/>
           <p:cNvCxnSpPr/>
           <p:nvPr/>
         </p:nvCxnSpPr>
         <p:spPr>
           <a:xfrm>
-            <a:off x="14630400" y="3703320"/>
-            <a:ext cx="1645920" cy="0"/>
-          </a:xfrm>
-          <a:prstGeom prst="line">
-            <a:avLst/>
-          </a:prstGeom>
-          <a:ln w="19050">
+            <a:off x="8809329" y="1554480"/>
+            <a:ext cx="0" cy="3429000"/>
+          </a:xfrm>
+          <a:prstGeom prst="bentConnector3">
+            <a:avLst/>
+          </a:prstGeom>
+          <a:ln w="12700">
             <a:solidFill>
               <a:srgbClr val="000000"/>
             </a:solidFill>
             <a:tailEnd type="triangle" w="med" len="med"/>
           </a:ln>
+          <a:effectLst/>
         </p:spPr>
         <p:style>
           <a:lnRef idx="2">
@@ -4450,25 +5416,104 @@
           </a:fontRef>
         </p:style>
       </p:cxnSp>
+      <p:sp>
+        <p:nvSpPr>
+          <p:cNvPr id="58" name="TextBox 57"/>
+          <p:cNvSpPr txBox="1"/>
+          <p:nvPr/>
+        </p:nvSpPr>
+        <p:spPr>
+          <a:xfrm>
+            <a:off x="5074920" y="475488"/>
+            <a:ext cx="1371600" cy="402336"/>
+          </a:xfrm>
+          <a:prstGeom prst="rect">
+            <a:avLst/>
+          </a:prstGeom>
+          <a:noFill/>
+        </p:spPr>
+        <p:txBody>
+          <a:bodyPr wrap="square" anchor="t" lIns="0" rIns="0" tIns="0" bIns="0">
+            <a:spAutoFit/>
+          </a:bodyPr>
+          <a:lstStyle/>
+          <a:p>
+            <a:pPr algn="ctr"/>
+            <a:r>
+              <a:rPr sz="1000" b="0">
+                <a:solidFill>
+                  <a:srgbClr val="000000"/>
+                </a:solidFill>
+                <a:latin typeface="Arial"/>
+              </a:rPr>
+              <a:t>C2 OPSEC / classification guidance</a:t>
+            </a:r>
+          </a:p>
+        </p:txBody>
+      </p:sp>
+      <p:sp>
+        <p:nvSpPr>
+          <p:cNvPr id="59" name="Oval 58"/>
+          <p:cNvSpPr/>
+          <p:nvPr/>
+        </p:nvSpPr>
+        <p:spPr>
+          <a:xfrm>
+            <a:off x="6419088" y="3410712"/>
+            <a:ext cx="36576" cy="36576"/>
+          </a:xfrm>
+          <a:prstGeom prst="ellipse">
+            <a:avLst/>
+          </a:prstGeom>
+          <a:noFill/>
+          <a:ln>
+            <a:noFill/>
+          </a:ln>
+          <a:effectLst/>
+        </p:spPr>
+        <p:style>
+          <a:lnRef idx="1">
+            <a:schemeClr val="accent1"/>
+          </a:lnRef>
+          <a:fillRef idx="3">
+            <a:schemeClr val="accent1"/>
+          </a:fillRef>
+          <a:effectRef idx="2">
+            <a:schemeClr val="accent1"/>
+          </a:effectRef>
+          <a:fontRef idx="minor">
+            <a:schemeClr val="lt1"/>
+          </a:fontRef>
+        </p:style>
+        <p:txBody>
+          <a:bodyPr rtlCol="0" anchor="ctr"/>
+          <a:lstStyle/>
+          <a:p>
+            <a:pPr algn="ctr"/>
+          </a:p>
+        </p:txBody>
+      </p:sp>
       <p:cxnSp>
         <p:nvCxnSpPr>
-          <p:cNvPr id="37" name="Connector 36"/>
+          <p:cNvPr id="60" name="Connector 59"/>
           <p:cNvCxnSpPr/>
           <p:nvPr/>
         </p:nvCxnSpPr>
         <p:spPr>
-          <a:xfrm flipV="1">
-            <a:off x="14630400" y="7543800"/>
-            <a:ext cx="0" cy="1051560"/>
-          </a:xfrm>
-          <a:prstGeom prst="line">
-            <a:avLst/>
-          </a:prstGeom>
-          <a:ln w="19050">
+          <a:xfrm>
+            <a:off x="6437376" y="1554480"/>
+            <a:ext cx="0" cy="1874520"/>
+          </a:xfrm>
+          <a:prstGeom prst="bentConnector3">
+            <a:avLst/>
+          </a:prstGeom>
+          <a:ln w="12700">
             <a:solidFill>
               <a:srgbClr val="000000"/>
             </a:solidFill>
+            <a:tailEnd type="triangle" w="med" len="med"/>
           </a:ln>
+          <a:effectLst/>
         </p:spPr>
         <p:style>
           <a:lnRef idx="2">
@@ -4485,26 +5530,104 @@
           </a:fontRef>
         </p:style>
       </p:cxnSp>
+      <p:sp>
+        <p:nvSpPr>
+          <p:cNvPr id="61" name="TextBox 60"/>
+          <p:cNvSpPr txBox="1"/>
+          <p:nvPr/>
+        </p:nvSpPr>
+        <p:spPr>
+          <a:xfrm>
+            <a:off x="5989320" y="914400"/>
+            <a:ext cx="1417320" cy="402336"/>
+          </a:xfrm>
+          <a:prstGeom prst="rect">
+            <a:avLst/>
+          </a:prstGeom>
+          <a:noFill/>
+        </p:spPr>
+        <p:txBody>
+          <a:bodyPr wrap="square" anchor="t" lIns="0" rIns="0" tIns="0" bIns="0">
+            <a:spAutoFit/>
+          </a:bodyPr>
+          <a:lstStyle/>
+          <a:p>
+            <a:pPr algn="ctr"/>
+            <a:r>
+              <a:rPr sz="1000" b="0">
+                <a:solidFill>
+                  <a:srgbClr val="000000"/>
+                </a:solidFill>
+                <a:latin typeface="Arial"/>
+              </a:rPr>
+              <a:t>C3 Network availability and DDS QoS policies</a:t>
+            </a:r>
+          </a:p>
+        </p:txBody>
+      </p:sp>
+      <p:sp>
+        <p:nvSpPr>
+          <p:cNvPr id="62" name="Oval 61"/>
+          <p:cNvSpPr/>
+          <p:nvPr/>
+        </p:nvSpPr>
+        <p:spPr>
+          <a:xfrm>
+            <a:off x="7511796" y="1810512"/>
+            <a:ext cx="36576" cy="36576"/>
+          </a:xfrm>
+          <a:prstGeom prst="ellipse">
+            <a:avLst/>
+          </a:prstGeom>
+          <a:noFill/>
+          <a:ln>
+            <a:noFill/>
+          </a:ln>
+          <a:effectLst/>
+        </p:spPr>
+        <p:style>
+          <a:lnRef idx="1">
+            <a:schemeClr val="accent1"/>
+          </a:lnRef>
+          <a:fillRef idx="3">
+            <a:schemeClr val="accent1"/>
+          </a:fillRef>
+          <a:effectRef idx="2">
+            <a:schemeClr val="accent1"/>
+          </a:effectRef>
+          <a:fontRef idx="minor">
+            <a:schemeClr val="lt1"/>
+          </a:fontRef>
+        </p:style>
+        <p:txBody>
+          <a:bodyPr rtlCol="0" anchor="ctr"/>
+          <a:lstStyle/>
+          <a:p>
+            <a:pPr algn="ctr"/>
+          </a:p>
+        </p:txBody>
+      </p:sp>
       <p:cxnSp>
         <p:nvCxnSpPr>
-          <p:cNvPr id="38" name="Connector 37"/>
+          <p:cNvPr id="63" name="Connector 62"/>
           <p:cNvCxnSpPr/>
           <p:nvPr/>
         </p:nvCxnSpPr>
         <p:spPr>
           <a:xfrm>
-            <a:off x="14630400" y="7543800"/>
-            <a:ext cx="1645920" cy="0"/>
-          </a:xfrm>
-          <a:prstGeom prst="line">
-            <a:avLst/>
-          </a:prstGeom>
-          <a:ln w="19050">
+            <a:off x="7530083" y="1554480"/>
+            <a:ext cx="0" cy="274320"/>
+          </a:xfrm>
+          <a:prstGeom prst="bentConnector3">
+            <a:avLst/>
+          </a:prstGeom>
+          <a:ln w="12700">
             <a:solidFill>
               <a:srgbClr val="000000"/>
             </a:solidFill>
             <a:tailEnd type="triangle" w="med" len="med"/>
           </a:ln>
+          <a:effectLst/>
         </p:spPr>
         <p:style>
           <a:lnRef idx="2">
@@ -4523,14 +5646,14 @@
       </p:cxnSp>
       <p:sp>
         <p:nvSpPr>
-          <p:cNvPr id="39" name="TextBox 38"/>
+          <p:cNvPr id="64" name="TextBox 63"/>
           <p:cNvSpPr txBox="1"/>
           <p:nvPr/>
         </p:nvSpPr>
         <p:spPr>
           <a:xfrm>
-            <a:off x="548640" y="4736592"/>
-            <a:ext cx="1600200" cy="310896"/>
+            <a:off x="6812280" y="475488"/>
+            <a:ext cx="1280160" cy="402336"/>
           </a:xfrm>
           <a:prstGeom prst="rect">
             <a:avLst/>
@@ -4538,84 +5661,14 @@
           <a:noFill/>
         </p:spPr>
         <p:txBody>
-          <a:bodyPr wrap="square" anchor="t" lIns="12700" rIns="12700" tIns="12700" bIns="12700">
+          <a:bodyPr wrap="square" anchor="t" lIns="0" rIns="0" tIns="0" bIns="0">
             <a:spAutoFit/>
           </a:bodyPr>
           <a:lstStyle/>
           <a:p>
-            <a:pPr algn="l"/>
-            <a:r>
-              <a:rPr sz="900" b="0">
-                <a:solidFill>
-                  <a:srgbClr val="000000"/>
-                </a:solidFill>
-                <a:latin typeface="Arial"/>
-              </a:rPr>
-              <a:t>I1 Collocated Atmospheric Observations</a:t>
-            </a:r>
-          </a:p>
-        </p:txBody>
-      </p:sp>
-      <p:sp>
-        <p:nvSpPr>
-          <p:cNvPr id="40" name="TextBox 39"/>
-          <p:cNvSpPr txBox="1"/>
-          <p:nvPr/>
-        </p:nvSpPr>
-        <p:spPr>
-          <a:xfrm>
-            <a:off x="548640" y="5650992"/>
-            <a:ext cx="1600200" cy="310896"/>
-          </a:xfrm>
-          <a:prstGeom prst="rect">
-            <a:avLst/>
-          </a:prstGeom>
-          <a:noFill/>
-        </p:spPr>
-        <p:txBody>
-          <a:bodyPr wrap="square" anchor="t" lIns="12700" rIns="12700" tIns="12700" bIns="12700">
-            <a:spAutoFit/>
-          </a:bodyPr>
-          <a:lstStyle/>
-          <a:p>
-            <a:pPr algn="l"/>
-            <a:r>
-              <a:rPr sz="900" b="0">
-                <a:solidFill>
-                  <a:srgbClr val="000000"/>
-                </a:solidFill>
-                <a:latin typeface="Arial"/>
-              </a:rPr>
-              <a:t>I2 Peer Platform Weather Observations</a:t>
-            </a:r>
-          </a:p>
-        </p:txBody>
-      </p:sp>
-      <p:sp>
-        <p:nvSpPr>
-          <p:cNvPr id="41" name="TextBox 40"/>
-          <p:cNvSpPr txBox="1"/>
-          <p:nvPr/>
-        </p:nvSpPr>
-        <p:spPr>
-          <a:xfrm>
-            <a:off x="548640" y="8275320"/>
-            <a:ext cx="2651760" cy="310896"/>
-          </a:xfrm>
-          <a:prstGeom prst="rect">
-            <a:avLst/>
-          </a:prstGeom>
-          <a:noFill/>
-        </p:spPr>
-        <p:txBody>
-          <a:bodyPr wrap="square" anchor="t" lIns="12700" rIns="12700" tIns="12700" bIns="12700">
-            <a:spAutoFit/>
-          </a:bodyPr>
-          <a:lstStyle/>
-          <a:p>
-            <a:pPr algn="l"/>
-            <a:r>
-              <a:rPr sz="900" b="0">
+            <a:pPr algn="ctr"/>
+            <a:r>
+              <a:rPr sz="1000" b="0">
                 <a:solidFill>
                   <a:srgbClr val="000000"/>
                 </a:solidFill>
@@ -4628,24 +5681,24 @@
       </p:sp>
       <p:cxnSp>
         <p:nvCxnSpPr>
-          <p:cNvPr id="42" name="Connector 41"/>
+          <p:cNvPr id="65" name="Connector 64"/>
           <p:cNvCxnSpPr/>
           <p:nvPr/>
         </p:nvCxnSpPr>
         <p:spPr>
           <a:xfrm>
-            <a:off x="12161520" y="1005840"/>
-            <a:ext cx="0" cy="3749040"/>
-          </a:xfrm>
-          <a:prstGeom prst="line">
-            <a:avLst/>
-          </a:prstGeom>
-          <a:ln w="19050">
+            <a:off x="8060436" y="1682496"/>
+            <a:ext cx="510235" cy="0"/>
+          </a:xfrm>
+          <a:prstGeom prst="bentConnector3">
+            <a:avLst/>
+          </a:prstGeom>
+          <a:ln w="12700">
             <a:solidFill>
               <a:srgbClr val="000000"/>
             </a:solidFill>
-            <a:tailEnd type="triangle" w="med" len="med"/>
           </a:ln>
+          <a:effectLst/>
         </p:spPr>
         <p:style>
           <a:lnRef idx="2">
@@ -4662,25 +5715,69 @@
           </a:fontRef>
         </p:style>
       </p:cxnSp>
+      <p:sp>
+        <p:nvSpPr>
+          <p:cNvPr id="66" name="Oval 65"/>
+          <p:cNvSpPr/>
+          <p:nvPr/>
+        </p:nvSpPr>
+        <p:spPr>
+          <a:xfrm>
+            <a:off x="8042148" y="1810512"/>
+            <a:ext cx="36576" cy="36576"/>
+          </a:xfrm>
+          <a:prstGeom prst="ellipse">
+            <a:avLst/>
+          </a:prstGeom>
+          <a:noFill/>
+          <a:ln>
+            <a:noFill/>
+          </a:ln>
+          <a:effectLst/>
+        </p:spPr>
+        <p:style>
+          <a:lnRef idx="1">
+            <a:schemeClr val="accent1"/>
+          </a:lnRef>
+          <a:fillRef idx="3">
+            <a:schemeClr val="accent1"/>
+          </a:fillRef>
+          <a:effectRef idx="2">
+            <a:schemeClr val="accent1"/>
+          </a:effectRef>
+          <a:fontRef idx="minor">
+            <a:schemeClr val="lt1"/>
+          </a:fontRef>
+        </p:style>
+        <p:txBody>
+          <a:bodyPr rtlCol="0" anchor="ctr"/>
+          <a:lstStyle/>
+          <a:p>
+            <a:pPr algn="ctr"/>
+          </a:p>
+        </p:txBody>
+      </p:sp>
       <p:cxnSp>
         <p:nvCxnSpPr>
-          <p:cNvPr id="43" name="Connector 42"/>
+          <p:cNvPr id="67" name="Connector 66"/>
           <p:cNvCxnSpPr/>
           <p:nvPr/>
         </p:nvCxnSpPr>
         <p:spPr>
           <a:xfrm>
-            <a:off x="12984480" y="1005840"/>
-            <a:ext cx="0" cy="274320"/>
-          </a:xfrm>
-          <a:prstGeom prst="line">
-            <a:avLst/>
-          </a:prstGeom>
-          <a:ln w="19050">
+            <a:off x="8060436" y="1682496"/>
+            <a:ext cx="0" cy="146304"/>
+          </a:xfrm>
+          <a:prstGeom prst="bentConnector3">
+            <a:avLst/>
+          </a:prstGeom>
+          <a:ln w="12700">
             <a:solidFill>
               <a:srgbClr val="000000"/>
             </a:solidFill>
+            <a:tailEnd type="triangle" w="med" len="med"/>
           </a:ln>
+          <a:effectLst/>
         </p:spPr>
         <p:style>
           <a:lnRef idx="2">
@@ -4697,25 +5794,69 @@
           </a:fontRef>
         </p:style>
       </p:cxnSp>
+      <p:sp>
+        <p:nvSpPr>
+          <p:cNvPr id="68" name="Oval 67"/>
+          <p:cNvSpPr/>
+          <p:nvPr/>
+        </p:nvSpPr>
+        <p:spPr>
+          <a:xfrm>
+            <a:off x="8552383" y="4965192"/>
+            <a:ext cx="36576" cy="36576"/>
+          </a:xfrm>
+          <a:prstGeom prst="ellipse">
+            <a:avLst/>
+          </a:prstGeom>
+          <a:noFill/>
+          <a:ln>
+            <a:noFill/>
+          </a:ln>
+          <a:effectLst/>
+        </p:spPr>
+        <p:style>
+          <a:lnRef idx="1">
+            <a:schemeClr val="accent1"/>
+          </a:lnRef>
+          <a:fillRef idx="3">
+            <a:schemeClr val="accent1"/>
+          </a:fillRef>
+          <a:effectRef idx="2">
+            <a:schemeClr val="accent1"/>
+          </a:effectRef>
+          <a:fontRef idx="minor">
+            <a:schemeClr val="lt1"/>
+          </a:fontRef>
+        </p:style>
+        <p:txBody>
+          <a:bodyPr rtlCol="0" anchor="ctr"/>
+          <a:lstStyle/>
+          <a:p>
+            <a:pPr algn="ctr"/>
+          </a:p>
+        </p:txBody>
+      </p:sp>
       <p:cxnSp>
         <p:nvCxnSpPr>
-          <p:cNvPr id="44" name="Connector 43"/>
+          <p:cNvPr id="69" name="Connector 68"/>
           <p:cNvCxnSpPr/>
           <p:nvPr/>
         </p:nvCxnSpPr>
         <p:spPr>
           <a:xfrm>
-            <a:off x="12984480" y="1280160"/>
-            <a:ext cx="2103120" cy="0"/>
-          </a:xfrm>
-          <a:prstGeom prst="line">
-            <a:avLst/>
-          </a:prstGeom>
-          <a:ln w="19050">
+            <a:off x="8570671" y="1682496"/>
+            <a:ext cx="0" cy="3300984"/>
+          </a:xfrm>
+          <a:prstGeom prst="bentConnector3">
+            <a:avLst/>
+          </a:prstGeom>
+          <a:ln w="12700">
             <a:solidFill>
               <a:srgbClr val="000000"/>
             </a:solidFill>
+            <a:tailEnd type="triangle" w="med" len="med"/>
           </a:ln>
+          <a:effectLst/>
         </p:spPr>
         <p:style>
           <a:lnRef idx="2">
@@ -4732,26 +5873,61 @@
           </a:fontRef>
         </p:style>
       </p:cxnSp>
+      <p:sp>
+        <p:nvSpPr>
+          <p:cNvPr id="70" name="TextBox 69"/>
+          <p:cNvSpPr txBox="1"/>
+          <p:nvPr/>
+        </p:nvSpPr>
+        <p:spPr>
+          <a:xfrm>
+            <a:off x="7818120" y="914400"/>
+            <a:ext cx="1325880" cy="402336"/>
+          </a:xfrm>
+          <a:prstGeom prst="rect">
+            <a:avLst/>
+          </a:prstGeom>
+          <a:noFill/>
+        </p:spPr>
+        <p:txBody>
+          <a:bodyPr wrap="square" anchor="t" lIns="0" rIns="0" tIns="0" bIns="0">
+            <a:spAutoFit/>
+          </a:bodyPr>
+          <a:lstStyle/>
+          <a:p>
+            <a:pPr algn="ctr"/>
+            <a:r>
+              <a:rPr sz="1000" b="0">
+                <a:solidFill>
+                  <a:srgbClr val="000000"/>
+                </a:solidFill>
+                <a:latin typeface="Arial"/>
+              </a:rPr>
+              <a:t>C1 Mission objectives and operational constraints</a:t>
+            </a:r>
+          </a:p>
+        </p:txBody>
+      </p:sp>
       <p:cxnSp>
         <p:nvCxnSpPr>
-          <p:cNvPr id="45" name="Connector 44"/>
+          <p:cNvPr id="71" name="Connector 70"/>
           <p:cNvCxnSpPr/>
           <p:nvPr/>
         </p:nvCxnSpPr>
         <p:spPr>
           <a:xfrm>
-            <a:off x="12984480" y="1280160"/>
-            <a:ext cx="0" cy="3474720"/>
-          </a:xfrm>
-          <a:prstGeom prst="line">
-            <a:avLst/>
-          </a:prstGeom>
-          <a:ln w="19050">
+            <a:off x="1348740" y="6876288"/>
+            <a:ext cx="6771132" cy="0"/>
+          </a:xfrm>
+          <a:prstGeom prst="bentConnector3">
+            <a:avLst/>
+          </a:prstGeom>
+          <a:ln w="12700">
             <a:solidFill>
               <a:srgbClr val="000000"/>
             </a:solidFill>
-            <a:tailEnd type="triangle" w="med" len="med"/>
           </a:ln>
+          <a:effectLst/>
         </p:spPr>
         <p:style>
           <a:lnRef idx="2">
@@ -4768,25 +5944,69 @@
           </a:fontRef>
         </p:style>
       </p:cxnSp>
+      <p:sp>
+        <p:nvSpPr>
+          <p:cNvPr id="72" name="Oval 71"/>
+          <p:cNvSpPr/>
+          <p:nvPr/>
+        </p:nvSpPr>
+        <p:spPr>
+          <a:xfrm>
+            <a:off x="1330452" y="4370832"/>
+            <a:ext cx="36576" cy="36576"/>
+          </a:xfrm>
+          <a:prstGeom prst="ellipse">
+            <a:avLst/>
+          </a:prstGeom>
+          <a:noFill/>
+          <a:ln>
+            <a:noFill/>
+          </a:ln>
+          <a:effectLst/>
+        </p:spPr>
+        <p:style>
+          <a:lnRef idx="1">
+            <a:schemeClr val="accent1"/>
+          </a:lnRef>
+          <a:fillRef idx="3">
+            <a:schemeClr val="accent1"/>
+          </a:fillRef>
+          <a:effectRef idx="2">
+            <a:schemeClr val="accent1"/>
+          </a:effectRef>
+          <a:fontRef idx="minor">
+            <a:schemeClr val="lt1"/>
+          </a:fontRef>
+        </p:style>
+        <p:txBody>
+          <a:bodyPr rtlCol="0" anchor="ctr"/>
+          <a:lstStyle/>
+          <a:p>
+            <a:pPr algn="ctr"/>
+          </a:p>
+        </p:txBody>
+      </p:sp>
       <p:cxnSp>
         <p:nvCxnSpPr>
-          <p:cNvPr id="46" name="Connector 45"/>
+          <p:cNvPr id="73" name="Connector 72"/>
           <p:cNvCxnSpPr/>
           <p:nvPr/>
         </p:nvCxnSpPr>
         <p:spPr>
-          <a:xfrm>
-            <a:off x="15087600" y="1280160"/>
-            <a:ext cx="0" cy="5029200"/>
-          </a:xfrm>
-          <a:prstGeom prst="line">
-            <a:avLst/>
-          </a:prstGeom>
-          <a:ln w="19050">
+          <a:xfrm flipV="1">
+            <a:off x="1348740" y="4389120"/>
+            <a:ext cx="0" cy="2487168"/>
+          </a:xfrm>
+          <a:prstGeom prst="bentConnector3">
+            <a:avLst/>
+          </a:prstGeom>
+          <a:ln w="12700">
             <a:solidFill>
               <a:srgbClr val="000000"/>
             </a:solidFill>
+            <a:tailEnd type="triangle" w="med" len="med"/>
           </a:ln>
+          <a:effectLst/>
         </p:spPr>
         <p:style>
           <a:lnRef idx="2">
@@ -4803,25 +6023,69 @@
           </a:fontRef>
         </p:style>
       </p:cxnSp>
+      <p:sp>
+        <p:nvSpPr>
+          <p:cNvPr id="74" name="Oval 73"/>
+          <p:cNvSpPr/>
+          <p:nvPr/>
+        </p:nvSpPr>
+        <p:spPr>
+          <a:xfrm>
+            <a:off x="5952744" y="4370832"/>
+            <a:ext cx="36576" cy="36576"/>
+          </a:xfrm>
+          <a:prstGeom prst="ellipse">
+            <a:avLst/>
+          </a:prstGeom>
+          <a:noFill/>
+          <a:ln>
+            <a:noFill/>
+          </a:ln>
+          <a:effectLst/>
+        </p:spPr>
+        <p:style>
+          <a:lnRef idx="1">
+            <a:schemeClr val="accent1"/>
+          </a:lnRef>
+          <a:fillRef idx="3">
+            <a:schemeClr val="accent1"/>
+          </a:fillRef>
+          <a:effectRef idx="2">
+            <a:schemeClr val="accent1"/>
+          </a:effectRef>
+          <a:fontRef idx="minor">
+            <a:schemeClr val="lt1"/>
+          </a:fontRef>
+        </p:style>
+        <p:txBody>
+          <a:bodyPr rtlCol="0" anchor="ctr"/>
+          <a:lstStyle/>
+          <a:p>
+            <a:pPr algn="ctr"/>
+          </a:p>
+        </p:txBody>
+      </p:sp>
       <p:cxnSp>
         <p:nvCxnSpPr>
-          <p:cNvPr id="47" name="Connector 46"/>
+          <p:cNvPr id="75" name="Connector 74"/>
           <p:cNvCxnSpPr/>
           <p:nvPr/>
         </p:nvCxnSpPr>
         <p:spPr>
-          <a:xfrm>
-            <a:off x="15087600" y="6309360"/>
-            <a:ext cx="2194560" cy="0"/>
-          </a:xfrm>
-          <a:prstGeom prst="line">
-            <a:avLst/>
-          </a:prstGeom>
-          <a:ln w="19050">
+          <a:xfrm flipV="1">
+            <a:off x="5971031" y="4389120"/>
+            <a:ext cx="0" cy="2487168"/>
+          </a:xfrm>
+          <a:prstGeom prst="bentConnector3">
+            <a:avLst/>
+          </a:prstGeom>
+          <a:ln w="12700">
             <a:solidFill>
               <a:srgbClr val="000000"/>
             </a:solidFill>
+            <a:tailEnd type="triangle" w="med" len="med"/>
           </a:ln>
+          <a:effectLst/>
         </p:spPr>
         <p:style>
           <a:lnRef idx="2">
@@ -4838,26 +6102,69 @@
           </a:fontRef>
         </p:style>
       </p:cxnSp>
+      <p:sp>
+        <p:nvSpPr>
+          <p:cNvPr id="76" name="Oval 75"/>
+          <p:cNvSpPr/>
+          <p:nvPr/>
+        </p:nvSpPr>
+        <p:spPr>
+          <a:xfrm>
+            <a:off x="7342632" y="2770632"/>
+            <a:ext cx="36576" cy="36576"/>
+          </a:xfrm>
+          <a:prstGeom prst="ellipse">
+            <a:avLst/>
+          </a:prstGeom>
+          <a:noFill/>
+          <a:ln>
+            <a:noFill/>
+          </a:ln>
+          <a:effectLst/>
+        </p:spPr>
+        <p:style>
+          <a:lnRef idx="1">
+            <a:schemeClr val="accent1"/>
+          </a:lnRef>
+          <a:fillRef idx="3">
+            <a:schemeClr val="accent1"/>
+          </a:fillRef>
+          <a:effectRef idx="2">
+            <a:schemeClr val="accent1"/>
+          </a:effectRef>
+          <a:fontRef idx="minor">
+            <a:schemeClr val="lt1"/>
+          </a:fontRef>
+        </p:style>
+        <p:txBody>
+          <a:bodyPr rtlCol="0" anchor="ctr"/>
+          <a:lstStyle/>
+          <a:p>
+            <a:pPr algn="ctr"/>
+          </a:p>
+        </p:txBody>
+      </p:sp>
       <p:cxnSp>
         <p:nvCxnSpPr>
-          <p:cNvPr id="48" name="Connector 47"/>
+          <p:cNvPr id="77" name="Connector 76"/>
           <p:cNvCxnSpPr/>
           <p:nvPr/>
         </p:nvCxnSpPr>
         <p:spPr>
-          <a:xfrm>
-            <a:off x="17282160" y="6309360"/>
-            <a:ext cx="0" cy="457200"/>
-          </a:xfrm>
-          <a:prstGeom prst="line">
-            <a:avLst/>
-          </a:prstGeom>
-          <a:ln w="19050">
+          <a:xfrm flipV="1">
+            <a:off x="7360920" y="2788920"/>
+            <a:ext cx="0" cy="4087368"/>
+          </a:xfrm>
+          <a:prstGeom prst="bentConnector3">
+            <a:avLst/>
+          </a:prstGeom>
+          <a:ln w="12700">
             <a:solidFill>
               <a:srgbClr val="000000"/>
             </a:solidFill>
             <a:tailEnd type="triangle" w="med" len="med"/>
           </a:ln>
+          <a:effectLst/>
         </p:spPr>
         <p:style>
           <a:lnRef idx="2">
@@ -4874,25 +6181,69 @@
           </a:fontRef>
         </p:style>
       </p:cxnSp>
+      <p:sp>
+        <p:nvSpPr>
+          <p:cNvPr id="78" name="Oval 77"/>
+          <p:cNvSpPr/>
+          <p:nvPr/>
+        </p:nvSpPr>
+        <p:spPr>
+          <a:xfrm>
+            <a:off x="8101584" y="5925312"/>
+            <a:ext cx="36576" cy="36576"/>
+          </a:xfrm>
+          <a:prstGeom prst="ellipse">
+            <a:avLst/>
+          </a:prstGeom>
+          <a:noFill/>
+          <a:ln>
+            <a:noFill/>
+          </a:ln>
+          <a:effectLst/>
+        </p:spPr>
+        <p:style>
+          <a:lnRef idx="1">
+            <a:schemeClr val="accent1"/>
+          </a:lnRef>
+          <a:fillRef idx="3">
+            <a:schemeClr val="accent1"/>
+          </a:fillRef>
+          <a:effectRef idx="2">
+            <a:schemeClr val="accent1"/>
+          </a:effectRef>
+          <a:fontRef idx="minor">
+            <a:schemeClr val="lt1"/>
+          </a:fontRef>
+        </p:style>
+        <p:txBody>
+          <a:bodyPr rtlCol="0" anchor="ctr"/>
+          <a:lstStyle/>
+          <a:p>
+            <a:pPr algn="ctr"/>
+          </a:p>
+        </p:txBody>
+      </p:sp>
       <p:cxnSp>
         <p:nvCxnSpPr>
-          <p:cNvPr id="49" name="Connector 48"/>
+          <p:cNvPr id="79" name="Connector 78"/>
           <p:cNvCxnSpPr/>
           <p:nvPr/>
         </p:nvCxnSpPr>
         <p:spPr>
-          <a:xfrm>
-            <a:off x="17647920" y="1005840"/>
-            <a:ext cx="0" cy="365760"/>
-          </a:xfrm>
-          <a:prstGeom prst="line">
-            <a:avLst/>
-          </a:prstGeom>
-          <a:ln w="19050">
+          <a:xfrm flipV="1">
+            <a:off x="8119872" y="5943600"/>
+            <a:ext cx="0" cy="932688"/>
+          </a:xfrm>
+          <a:prstGeom prst="bentConnector3">
+            <a:avLst/>
+          </a:prstGeom>
+          <a:ln w="12700">
             <a:solidFill>
               <a:srgbClr val="000000"/>
             </a:solidFill>
+            <a:tailEnd type="triangle" w="med" len="med"/>
           </a:ln>
+          <a:effectLst/>
         </p:spPr>
         <p:style>
           <a:lnRef idx="2">
@@ -4909,25 +6260,61 @@
           </a:fontRef>
         </p:style>
       </p:cxnSp>
+      <p:sp>
+        <p:nvSpPr>
+          <p:cNvPr id="80" name="TextBox 79"/>
+          <p:cNvSpPr txBox="1"/>
+          <p:nvPr/>
+        </p:nvSpPr>
+        <p:spPr>
+          <a:xfrm>
+            <a:off x="384048" y="7223760"/>
+            <a:ext cx="2377440" cy="201168"/>
+          </a:xfrm>
+          <a:prstGeom prst="rect">
+            <a:avLst/>
+          </a:prstGeom>
+          <a:noFill/>
+        </p:spPr>
+        <p:txBody>
+          <a:bodyPr wrap="square" anchor="t" lIns="0" rIns="0" tIns="0" bIns="0">
+            <a:spAutoFit/>
+          </a:bodyPr>
+          <a:lstStyle/>
+          <a:p>
+            <a:pPr algn="l"/>
+            <a:r>
+              <a:rPr sz="1000" b="0">
+                <a:solidFill>
+                  <a:srgbClr val="000000"/>
+                </a:solidFill>
+                <a:latin typeface="Arial"/>
+              </a:rPr>
+              <a:t>M1 Platforms hosting ATMOS node compute</a:t>
+            </a:r>
+          </a:p>
+        </p:txBody>
+      </p:sp>
       <p:cxnSp>
         <p:nvCxnSpPr>
-          <p:cNvPr id="50" name="Connector 49"/>
+          <p:cNvPr id="81" name="Connector 80"/>
           <p:cNvCxnSpPr/>
           <p:nvPr/>
         </p:nvCxnSpPr>
         <p:spPr>
-          <a:xfrm flipH="1">
-            <a:off x="15910559" y="1371600"/>
-            <a:ext cx="1737361" cy="0"/>
-          </a:xfrm>
-          <a:prstGeom prst="line">
-            <a:avLst/>
-          </a:prstGeom>
-          <a:ln w="19050">
+          <a:xfrm>
+            <a:off x="3223260" y="6656832"/>
+            <a:ext cx="1554480" cy="0"/>
+          </a:xfrm>
+          <a:prstGeom prst="bentConnector3">
+            <a:avLst/>
+          </a:prstGeom>
+          <a:ln w="12700">
             <a:solidFill>
               <a:srgbClr val="000000"/>
             </a:solidFill>
           </a:ln>
+          <a:effectLst/>
         </p:spPr>
         <p:style>
           <a:lnRef idx="2">
@@ -4944,26 +6331,69 @@
           </a:fontRef>
         </p:style>
       </p:cxnSp>
+      <p:sp>
+        <p:nvSpPr>
+          <p:cNvPr id="82" name="Oval 81"/>
+          <p:cNvSpPr/>
+          <p:nvPr/>
+        </p:nvSpPr>
+        <p:spPr>
+          <a:xfrm>
+            <a:off x="3204972" y="2770632"/>
+            <a:ext cx="36576" cy="36576"/>
+          </a:xfrm>
+          <a:prstGeom prst="ellipse">
+            <a:avLst/>
+          </a:prstGeom>
+          <a:noFill/>
+          <a:ln>
+            <a:noFill/>
+          </a:ln>
+          <a:effectLst/>
+        </p:spPr>
+        <p:style>
+          <a:lnRef idx="1">
+            <a:schemeClr val="accent1"/>
+          </a:lnRef>
+          <a:fillRef idx="3">
+            <a:schemeClr val="accent1"/>
+          </a:fillRef>
+          <a:effectRef idx="2">
+            <a:schemeClr val="accent1"/>
+          </a:effectRef>
+          <a:fontRef idx="minor">
+            <a:schemeClr val="lt1"/>
+          </a:fontRef>
+        </p:style>
+        <p:txBody>
+          <a:bodyPr rtlCol="0" anchor="ctr"/>
+          <a:lstStyle/>
+          <a:p>
+            <a:pPr algn="ctr"/>
+          </a:p>
+        </p:txBody>
+      </p:sp>
       <p:cxnSp>
         <p:nvCxnSpPr>
-          <p:cNvPr id="51" name="Connector 50"/>
+          <p:cNvPr id="83" name="Connector 82"/>
           <p:cNvCxnSpPr/>
           <p:nvPr/>
         </p:nvCxnSpPr>
         <p:spPr>
-          <a:xfrm>
-            <a:off x="17647920" y="1371600"/>
-            <a:ext cx="0" cy="1371600"/>
-          </a:xfrm>
-          <a:prstGeom prst="line">
-            <a:avLst/>
-          </a:prstGeom>
-          <a:ln w="19050">
+          <a:xfrm flipV="1">
+            <a:off x="3223260" y="2788920"/>
+            <a:ext cx="0" cy="3867912"/>
+          </a:xfrm>
+          <a:prstGeom prst="bentConnector3">
+            <a:avLst/>
+          </a:prstGeom>
+          <a:ln w="12700">
             <a:solidFill>
               <a:srgbClr val="000000"/>
             </a:solidFill>
             <a:tailEnd type="triangle" w="med" len="med"/>
           </a:ln>
+          <a:effectLst/>
         </p:spPr>
         <p:style>
           <a:lnRef idx="2">
@@ -4980,25 +6410,69 @@
           </a:fontRef>
         </p:style>
       </p:cxnSp>
+      <p:sp>
+        <p:nvSpPr>
+          <p:cNvPr id="84" name="Oval 83"/>
+          <p:cNvSpPr/>
+          <p:nvPr/>
+        </p:nvSpPr>
+        <p:spPr>
+          <a:xfrm>
+            <a:off x="4759452" y="5925312"/>
+            <a:ext cx="36576" cy="36576"/>
+          </a:xfrm>
+          <a:prstGeom prst="ellipse">
+            <a:avLst/>
+          </a:prstGeom>
+          <a:noFill/>
+          <a:ln>
+            <a:noFill/>
+          </a:ln>
+          <a:effectLst/>
+        </p:spPr>
+        <p:style>
+          <a:lnRef idx="1">
+            <a:schemeClr val="accent1"/>
+          </a:lnRef>
+          <a:fillRef idx="3">
+            <a:schemeClr val="accent1"/>
+          </a:fillRef>
+          <a:effectRef idx="2">
+            <a:schemeClr val="accent1"/>
+          </a:effectRef>
+          <a:fontRef idx="minor">
+            <a:schemeClr val="lt1"/>
+          </a:fontRef>
+        </p:style>
+        <p:txBody>
+          <a:bodyPr rtlCol="0" anchor="ctr"/>
+          <a:lstStyle/>
+          <a:p>
+            <a:pPr algn="ctr"/>
+          </a:p>
+        </p:txBody>
+      </p:sp>
       <p:cxnSp>
         <p:nvCxnSpPr>
-          <p:cNvPr id="52" name="Connector 51"/>
+          <p:cNvPr id="85" name="Connector 84"/>
           <p:cNvCxnSpPr/>
           <p:nvPr/>
         </p:nvCxnSpPr>
         <p:spPr>
-          <a:xfrm>
-            <a:off x="15910559" y="1371600"/>
-            <a:ext cx="0" cy="5120640"/>
-          </a:xfrm>
-          <a:prstGeom prst="line">
-            <a:avLst/>
-          </a:prstGeom>
-          <a:ln w="19050">
+          <a:xfrm flipV="1">
+            <a:off x="4777740" y="5943600"/>
+            <a:ext cx="0" cy="713232"/>
+          </a:xfrm>
+          <a:prstGeom prst="bentConnector3">
+            <a:avLst/>
+          </a:prstGeom>
+          <a:ln w="12700">
             <a:solidFill>
               <a:srgbClr val="000000"/>
             </a:solidFill>
+            <a:tailEnd type="triangle" w="med" len="med"/>
           </a:ln>
+          <a:effectLst/>
         </p:spPr>
         <p:style>
           <a:lnRef idx="2">
@@ -5015,25 +6489,61 @@
           </a:fontRef>
         </p:style>
       </p:cxnSp>
+      <p:sp>
+        <p:nvSpPr>
+          <p:cNvPr id="86" name="TextBox 85"/>
+          <p:cNvSpPr txBox="1"/>
+          <p:nvPr/>
+        </p:nvSpPr>
+        <p:spPr>
+          <a:xfrm>
+            <a:off x="2971800" y="6455664"/>
+            <a:ext cx="2103120" cy="201168"/>
+          </a:xfrm>
+          <a:prstGeom prst="rect">
+            <a:avLst/>
+          </a:prstGeom>
+          <a:noFill/>
+        </p:spPr>
+        <p:txBody>
+          <a:bodyPr wrap="square" anchor="t" lIns="0" rIns="0" tIns="0" bIns="0">
+            <a:spAutoFit/>
+          </a:bodyPr>
+          <a:lstStyle/>
+          <a:p>
+            <a:pPr algn="l"/>
+            <a:r>
+              <a:rPr sz="1000" b="0">
+                <a:solidFill>
+                  <a:srgbClr val="000000"/>
+                </a:solidFill>
+                <a:latin typeface="Arial"/>
+              </a:rPr>
+              <a:t>M2 ABLE-LBM / reduced models</a:t>
+            </a:r>
+          </a:p>
+        </p:txBody>
+      </p:sp>
       <p:cxnSp>
         <p:nvCxnSpPr>
-          <p:cNvPr id="53" name="Connector 52"/>
+          <p:cNvPr id="87" name="Connector 86"/>
           <p:cNvCxnSpPr/>
           <p:nvPr/>
         </p:nvCxnSpPr>
         <p:spPr>
           <a:xfrm>
-            <a:off x="15910559" y="6492240"/>
-            <a:ext cx="2011681" cy="0"/>
-          </a:xfrm>
-          <a:prstGeom prst="line">
-            <a:avLst/>
-          </a:prstGeom>
-          <a:ln w="19050">
+            <a:off x="6437376" y="7095744"/>
+            <a:ext cx="1947672" cy="0"/>
+          </a:xfrm>
+          <a:prstGeom prst="bentConnector3">
+            <a:avLst/>
+          </a:prstGeom>
+          <a:ln w="12700">
             <a:solidFill>
               <a:srgbClr val="000000"/>
             </a:solidFill>
           </a:ln>
+          <a:effectLst/>
         </p:spPr>
         <p:style>
           <a:lnRef idx="2">
@@ -5050,26 +6560,69 @@
           </a:fontRef>
         </p:style>
       </p:cxnSp>
+      <p:sp>
+        <p:nvSpPr>
+          <p:cNvPr id="88" name="Oval 87"/>
+          <p:cNvSpPr/>
+          <p:nvPr/>
+        </p:nvSpPr>
+        <p:spPr>
+          <a:xfrm>
+            <a:off x="6419088" y="4370832"/>
+            <a:ext cx="36576" cy="36576"/>
+          </a:xfrm>
+          <a:prstGeom prst="ellipse">
+            <a:avLst/>
+          </a:prstGeom>
+          <a:noFill/>
+          <a:ln>
+            <a:noFill/>
+          </a:ln>
+          <a:effectLst/>
+        </p:spPr>
+        <p:style>
+          <a:lnRef idx="1">
+            <a:schemeClr val="accent1"/>
+          </a:lnRef>
+          <a:fillRef idx="3">
+            <a:schemeClr val="accent1"/>
+          </a:fillRef>
+          <a:effectRef idx="2">
+            <a:schemeClr val="accent1"/>
+          </a:effectRef>
+          <a:fontRef idx="minor">
+            <a:schemeClr val="lt1"/>
+          </a:fontRef>
+        </p:style>
+        <p:txBody>
+          <a:bodyPr rtlCol="0" anchor="ctr"/>
+          <a:lstStyle/>
+          <a:p>
+            <a:pPr algn="ctr"/>
+          </a:p>
+        </p:txBody>
+      </p:sp>
       <p:cxnSp>
         <p:nvCxnSpPr>
-          <p:cNvPr id="54" name="Connector 53"/>
+          <p:cNvPr id="89" name="Connector 88"/>
           <p:cNvCxnSpPr/>
           <p:nvPr/>
         </p:nvCxnSpPr>
         <p:spPr>
-          <a:xfrm>
-            <a:off x="17922240" y="6492240"/>
-            <a:ext cx="0" cy="274320"/>
-          </a:xfrm>
-          <a:prstGeom prst="line">
-            <a:avLst/>
-          </a:prstGeom>
-          <a:ln w="19050">
+          <a:xfrm flipV="1">
+            <a:off x="6437376" y="4389120"/>
+            <a:ext cx="0" cy="2706624"/>
+          </a:xfrm>
+          <a:prstGeom prst="bentConnector3">
+            <a:avLst/>
+          </a:prstGeom>
+          <a:ln w="12700">
             <a:solidFill>
               <a:srgbClr val="000000"/>
             </a:solidFill>
             <a:tailEnd type="triangle" w="med" len="med"/>
           </a:ln>
+          <a:effectLst/>
         </p:spPr>
         <p:style>
           <a:lnRef idx="2">
@@ -5088,129 +6641,67 @@
       </p:cxnSp>
       <p:sp>
         <p:nvSpPr>
-          <p:cNvPr id="55" name="TextBox 54"/>
-          <p:cNvSpPr txBox="1"/>
-          <p:nvPr/>
-        </p:nvSpPr>
-        <p:spPr>
-          <a:xfrm>
-            <a:off x="9601200" y="603504"/>
-            <a:ext cx="2377440" cy="310896"/>
-          </a:xfrm>
-          <a:prstGeom prst="rect">
+          <p:cNvPr id="90" name="Oval 89"/>
+          <p:cNvSpPr/>
+          <p:nvPr/>
+        </p:nvSpPr>
+        <p:spPr>
+          <a:xfrm>
+            <a:off x="7479792" y="2770632"/>
+            <a:ext cx="36576" cy="36576"/>
+          </a:xfrm>
+          <a:prstGeom prst="ellipse">
             <a:avLst/>
           </a:prstGeom>
           <a:noFill/>
-        </p:spPr>
-        <p:txBody>
-          <a:bodyPr wrap="square" anchor="t" lIns="12700" rIns="12700" tIns="12700" bIns="12700">
-            <a:spAutoFit/>
-          </a:bodyPr>
+          <a:ln>
+            <a:noFill/>
+          </a:ln>
+          <a:effectLst/>
+        </p:spPr>
+        <p:style>
+          <a:lnRef idx="1">
+            <a:schemeClr val="accent1"/>
+          </a:lnRef>
+          <a:fillRef idx="3">
+            <a:schemeClr val="accent1"/>
+          </a:fillRef>
+          <a:effectRef idx="2">
+            <a:schemeClr val="accent1"/>
+          </a:effectRef>
+          <a:fontRef idx="minor">
+            <a:schemeClr val="lt1"/>
+          </a:fontRef>
+        </p:style>
+        <p:txBody>
+          <a:bodyPr rtlCol="0" anchor="ctr"/>
           <a:lstStyle/>
           <a:p>
             <a:pPr algn="ctr"/>
-            <a:r>
-              <a:rPr sz="900" b="0">
-                <a:solidFill>
-                  <a:srgbClr val="000000"/>
-                </a:solidFill>
-                <a:latin typeface="Arial"/>
-              </a:rPr>
-              <a:t>C3 Network availability and DDS QoS policies</a:t>
-            </a:r>
-          </a:p>
-        </p:txBody>
-      </p:sp>
-      <p:sp>
-        <p:nvSpPr>
-          <p:cNvPr id="56" name="TextBox 55"/>
-          <p:cNvSpPr txBox="1"/>
-          <p:nvPr/>
-        </p:nvSpPr>
-        <p:spPr>
-          <a:xfrm>
-            <a:off x="12435840" y="603504"/>
-            <a:ext cx="2286000" cy="310896"/>
-          </a:xfrm>
-          <a:prstGeom prst="rect">
-            <a:avLst/>
-          </a:prstGeom>
-          <a:noFill/>
-        </p:spPr>
-        <p:txBody>
-          <a:bodyPr wrap="square" anchor="t" lIns="12700" rIns="12700" tIns="12700" bIns="12700">
-            <a:spAutoFit/>
-          </a:bodyPr>
-          <a:lstStyle/>
-          <a:p>
-            <a:pPr algn="ctr"/>
-            <a:r>
-              <a:rPr sz="900" b="0">
-                <a:solidFill>
-                  <a:srgbClr val="000000"/>
-                </a:solidFill>
-                <a:latin typeface="Arial"/>
-              </a:rPr>
-              <a:t>C2 OPSEC / classification guidance</a:t>
-            </a:r>
-          </a:p>
-        </p:txBody>
-      </p:sp>
-      <p:sp>
-        <p:nvSpPr>
-          <p:cNvPr id="57" name="TextBox 56"/>
-          <p:cNvSpPr txBox="1"/>
-          <p:nvPr/>
-        </p:nvSpPr>
-        <p:spPr>
-          <a:xfrm>
-            <a:off x="15453359" y="603504"/>
-            <a:ext cx="2834640" cy="310896"/>
-          </a:xfrm>
-          <a:prstGeom prst="rect">
-            <a:avLst/>
-          </a:prstGeom>
-          <a:noFill/>
-        </p:spPr>
-        <p:txBody>
-          <a:bodyPr wrap="square" anchor="t" lIns="12700" rIns="12700" tIns="12700" bIns="12700">
-            <a:spAutoFit/>
-          </a:bodyPr>
-          <a:lstStyle/>
-          <a:p>
-            <a:pPr algn="ctr"/>
-            <a:r>
-              <a:rPr sz="900" b="0">
-                <a:solidFill>
-                  <a:srgbClr val="000000"/>
-                </a:solidFill>
-                <a:latin typeface="Arial"/>
-              </a:rPr>
-              <a:t>C1 Mission objectives and operational constraints</a:t>
-            </a:r>
           </a:p>
         </p:txBody>
       </p:sp>
       <p:cxnSp>
         <p:nvCxnSpPr>
-          <p:cNvPr id="58" name="Connector 57"/>
+          <p:cNvPr id="91" name="Connector 90"/>
           <p:cNvCxnSpPr/>
           <p:nvPr/>
         </p:nvCxnSpPr>
         <p:spPr>
-          <a:xfrm>
-            <a:off x="13807440" y="5349240"/>
-            <a:ext cx="5852160" cy="0"/>
-          </a:xfrm>
-          <a:prstGeom prst="line">
-            <a:avLst/>
-          </a:prstGeom>
-          <a:ln w="19050">
+          <a:xfrm flipV="1">
+            <a:off x="7498079" y="2788920"/>
+            <a:ext cx="0" cy="4306824"/>
+          </a:xfrm>
+          <a:prstGeom prst="bentConnector3">
+            <a:avLst/>
+          </a:prstGeom>
+          <a:ln w="12700">
             <a:solidFill>
               <a:srgbClr val="000000"/>
             </a:solidFill>
             <a:tailEnd type="triangle" w="med" len="med"/>
           </a:ln>
+          <a:effectLst/>
         </p:spPr>
         <p:style>
           <a:lnRef idx="2">
@@ -5227,26 +6718,69 @@
           </a:fontRef>
         </p:style>
       </p:cxnSp>
+      <p:sp>
+        <p:nvSpPr>
+          <p:cNvPr id="92" name="Oval 91"/>
+          <p:cNvSpPr/>
+          <p:nvPr/>
+        </p:nvSpPr>
+        <p:spPr>
+          <a:xfrm>
+            <a:off x="8366760" y="5925312"/>
+            <a:ext cx="36576" cy="36576"/>
+          </a:xfrm>
+          <a:prstGeom prst="ellipse">
+            <a:avLst/>
+          </a:prstGeom>
+          <a:noFill/>
+          <a:ln>
+            <a:noFill/>
+          </a:ln>
+          <a:effectLst/>
+        </p:spPr>
+        <p:style>
+          <a:lnRef idx="1">
+            <a:schemeClr val="accent1"/>
+          </a:lnRef>
+          <a:fillRef idx="3">
+            <a:schemeClr val="accent1"/>
+          </a:fillRef>
+          <a:effectRef idx="2">
+            <a:schemeClr val="accent1"/>
+          </a:effectRef>
+          <a:fontRef idx="minor">
+            <a:schemeClr val="lt1"/>
+          </a:fontRef>
+        </p:style>
+        <p:txBody>
+          <a:bodyPr rtlCol="0" anchor="ctr"/>
+          <a:lstStyle/>
+          <a:p>
+            <a:pPr algn="ctr"/>
+          </a:p>
+        </p:txBody>
+      </p:sp>
       <p:cxnSp>
         <p:nvCxnSpPr>
-          <p:cNvPr id="59" name="Connector 58"/>
+          <p:cNvPr id="93" name="Connector 92"/>
           <p:cNvCxnSpPr/>
           <p:nvPr/>
         </p:nvCxnSpPr>
         <p:spPr>
-          <a:xfrm>
-            <a:off x="19019520" y="3337560"/>
-            <a:ext cx="640080" cy="0"/>
-          </a:xfrm>
-          <a:prstGeom prst="line">
-            <a:avLst/>
-          </a:prstGeom>
-          <a:ln w="19050">
+          <a:xfrm flipV="1">
+            <a:off x="8385048" y="5943600"/>
+            <a:ext cx="0" cy="1152144"/>
+          </a:xfrm>
+          <a:prstGeom prst="bentConnector3">
+            <a:avLst/>
+          </a:prstGeom>
+          <a:ln w="12700">
             <a:solidFill>
               <a:srgbClr val="000000"/>
             </a:solidFill>
             <a:tailEnd type="triangle" w="med" len="med"/>
           </a:ln>
+          <a:effectLst/>
         </p:spPr>
         <p:style>
           <a:lnRef idx="2">
@@ -5263,52 +6797,16 @@
           </a:fontRef>
         </p:style>
       </p:cxnSp>
-      <p:cxnSp>
-        <p:nvCxnSpPr>
-          <p:cNvPr id="60" name="Connector 59"/>
-          <p:cNvCxnSpPr/>
-          <p:nvPr/>
-        </p:nvCxnSpPr>
-        <p:spPr>
-          <a:xfrm>
-            <a:off x="19019520" y="7360920"/>
-            <a:ext cx="640080" cy="0"/>
-          </a:xfrm>
-          <a:prstGeom prst="line">
-            <a:avLst/>
-          </a:prstGeom>
-          <a:ln w="19050">
-            <a:solidFill>
-              <a:srgbClr val="000000"/>
-            </a:solidFill>
-            <a:tailEnd type="triangle" w="med" len="med"/>
-          </a:ln>
-        </p:spPr>
-        <p:style>
-          <a:lnRef idx="2">
-            <a:schemeClr val="accent1"/>
-          </a:lnRef>
-          <a:fillRef idx="0">
-            <a:schemeClr val="accent1"/>
-          </a:fillRef>
-          <a:effectRef idx="1">
-            <a:schemeClr val="accent1"/>
-          </a:effectRef>
-          <a:fontRef idx="minor">
-            <a:schemeClr val="tx1"/>
-          </a:fontRef>
-        </p:style>
-      </p:cxnSp>
-      <p:sp>
-        <p:nvSpPr>
-          <p:cNvPr id="61" name="TextBox 60"/>
+      <p:sp>
+        <p:nvSpPr>
+          <p:cNvPr id="94" name="TextBox 93"/>
           <p:cNvSpPr txBox="1"/>
           <p:nvPr/>
         </p:nvSpPr>
         <p:spPr>
           <a:xfrm>
-            <a:off x="19751040" y="5120640"/>
-            <a:ext cx="2103120" cy="457200"/>
+            <a:off x="5440680" y="7223760"/>
+            <a:ext cx="2926080" cy="201168"/>
           </a:xfrm>
           <a:prstGeom prst="rect">
             <a:avLst/>
@@ -5316,829 +6814,14 @@
           <a:noFill/>
         </p:spPr>
         <p:txBody>
-          <a:bodyPr wrap="square" anchor="t" lIns="12700" rIns="12700" tIns="12700" bIns="12700">
+          <a:bodyPr wrap="square" anchor="t" lIns="0" rIns="0" tIns="0" bIns="0">
             <a:spAutoFit/>
           </a:bodyPr>
           <a:lstStyle/>
           <a:p>
             <a:pPr algn="l"/>
             <a:r>
-              <a:rPr sz="900" b="0">
-                <a:solidFill>
-                  <a:srgbClr val="000000"/>
-                </a:solidFill>
-                <a:latin typeface="Arial"/>
-              </a:rPr>
-              <a:t>O1 Fused COWP State</a:t>
-            </a:r>
-          </a:p>
-        </p:txBody>
-      </p:sp>
-      <p:sp>
-        <p:nvSpPr>
-          <p:cNvPr id="62" name="TextBox 61"/>
-          <p:cNvSpPr txBox="1"/>
-          <p:nvPr/>
-        </p:nvSpPr>
-        <p:spPr>
-          <a:xfrm>
-            <a:off x="19751040" y="3108960"/>
-            <a:ext cx="2103120" cy="457200"/>
-          </a:xfrm>
-          <a:prstGeom prst="rect">
-            <a:avLst/>
-          </a:prstGeom>
-          <a:noFill/>
-        </p:spPr>
-        <p:txBody>
-          <a:bodyPr wrap="square" anchor="t" lIns="12700" rIns="12700" tIns="12700" bIns="12700">
-            <a:spAutoFit/>
-          </a:bodyPr>
-          <a:lstStyle/>
-          <a:p>
-            <a:pPr algn="l"/>
-            <a:r>
-              <a:rPr sz="900" b="0">
-                <a:solidFill>
-                  <a:srgbClr val="000000"/>
-                </a:solidFill>
-                <a:latin typeface="Arial"/>
-              </a:rPr>
-              <a:t>O3 Weather State Change Notifications</a:t>
-            </a:r>
-          </a:p>
-        </p:txBody>
-      </p:sp>
-      <p:sp>
-        <p:nvSpPr>
-          <p:cNvPr id="63" name="TextBox 62"/>
-          <p:cNvSpPr txBox="1"/>
-          <p:nvPr/>
-        </p:nvSpPr>
-        <p:spPr>
-          <a:xfrm>
-            <a:off x="19751040" y="7132320"/>
-            <a:ext cx="2103120" cy="457200"/>
-          </a:xfrm>
-          <a:prstGeom prst="rect">
-            <a:avLst/>
-          </a:prstGeom>
-          <a:noFill/>
-        </p:spPr>
-        <p:txBody>
-          <a:bodyPr wrap="square" anchor="t" lIns="12700" rIns="12700" tIns="12700" bIns="12700">
-            <a:spAutoFit/>
-          </a:bodyPr>
-          <a:lstStyle/>
-          <a:p>
-            <a:pPr algn="l"/>
-            <a:r>
-              <a:rPr sz="900" b="0">
-                <a:solidFill>
-                  <a:srgbClr val="000000"/>
-                </a:solidFill>
-                <a:latin typeface="Arial"/>
-              </a:rPr>
-              <a:t>O2 Mission-Tailored COWP Excerpts</a:t>
-            </a:r>
-          </a:p>
-        </p:txBody>
-      </p:sp>
-      <p:cxnSp>
-        <p:nvCxnSpPr>
-          <p:cNvPr id="64" name="Connector 63"/>
-          <p:cNvCxnSpPr/>
-          <p:nvPr/>
-        </p:nvCxnSpPr>
-        <p:spPr>
-          <a:xfrm flipV="1">
-            <a:off x="3657600" y="9601200"/>
-            <a:ext cx="0" cy="1188720"/>
-          </a:xfrm>
-          <a:prstGeom prst="line">
-            <a:avLst/>
-          </a:prstGeom>
-          <a:ln w="19050">
-            <a:solidFill>
-              <a:srgbClr val="000000"/>
-            </a:solidFill>
-          </a:ln>
-        </p:spPr>
-        <p:style>
-          <a:lnRef idx="2">
-            <a:schemeClr val="accent1"/>
-          </a:lnRef>
-          <a:fillRef idx="0">
-            <a:schemeClr val="accent1"/>
-          </a:fillRef>
-          <a:effectRef idx="1">
-            <a:schemeClr val="accent1"/>
-          </a:effectRef>
-          <a:fontRef idx="minor">
-            <a:schemeClr val="tx1"/>
-          </a:fontRef>
-        </p:style>
-      </p:cxnSp>
-      <p:cxnSp>
-        <p:nvCxnSpPr>
-          <p:cNvPr id="65" name="Connector 64"/>
-          <p:cNvCxnSpPr/>
-          <p:nvPr/>
-        </p:nvCxnSpPr>
-        <p:spPr>
-          <a:xfrm>
-            <a:off x="3383280" y="9601200"/>
-            <a:ext cx="14538960" cy="0"/>
-          </a:xfrm>
-          <a:prstGeom prst="line">
-            <a:avLst/>
-          </a:prstGeom>
-          <a:ln w="19050">
-            <a:solidFill>
-              <a:srgbClr val="000000"/>
-            </a:solidFill>
-          </a:ln>
-        </p:spPr>
-        <p:style>
-          <a:lnRef idx="2">
-            <a:schemeClr val="accent1"/>
-          </a:lnRef>
-          <a:fillRef idx="0">
-            <a:schemeClr val="accent1"/>
-          </a:fillRef>
-          <a:effectRef idx="1">
-            <a:schemeClr val="accent1"/>
-          </a:effectRef>
-          <a:fontRef idx="minor">
-            <a:schemeClr val="tx1"/>
-          </a:fontRef>
-        </p:style>
-      </p:cxnSp>
-      <p:cxnSp>
-        <p:nvCxnSpPr>
-          <p:cNvPr id="66" name="Connector 65"/>
-          <p:cNvCxnSpPr/>
-          <p:nvPr/>
-        </p:nvCxnSpPr>
-        <p:spPr>
-          <a:xfrm flipV="1">
-            <a:off x="3383280" y="5943600"/>
-            <a:ext cx="0" cy="3657600"/>
-          </a:xfrm>
-          <a:prstGeom prst="line">
-            <a:avLst/>
-          </a:prstGeom>
-          <a:ln w="19050">
-            <a:solidFill>
-              <a:srgbClr val="000000"/>
-            </a:solidFill>
-            <a:tailEnd type="triangle" w="med" len="med"/>
-          </a:ln>
-        </p:spPr>
-        <p:style>
-          <a:lnRef idx="2">
-            <a:schemeClr val="accent1"/>
-          </a:lnRef>
-          <a:fillRef idx="0">
-            <a:schemeClr val="accent1"/>
-          </a:fillRef>
-          <a:effectRef idx="1">
-            <a:schemeClr val="accent1"/>
-          </a:effectRef>
-          <a:fontRef idx="minor">
-            <a:schemeClr val="tx1"/>
-          </a:fontRef>
-        </p:style>
-      </p:cxnSp>
-      <p:cxnSp>
-        <p:nvCxnSpPr>
-          <p:cNvPr id="67" name="Connector 66"/>
-          <p:cNvCxnSpPr/>
-          <p:nvPr/>
-        </p:nvCxnSpPr>
-        <p:spPr>
-          <a:xfrm flipV="1">
-            <a:off x="6035040" y="5943600"/>
-            <a:ext cx="0" cy="3657600"/>
-          </a:xfrm>
-          <a:prstGeom prst="line">
-            <a:avLst/>
-          </a:prstGeom>
-          <a:ln w="19050">
-            <a:solidFill>
-              <a:srgbClr val="000000"/>
-            </a:solidFill>
-            <a:tailEnd type="triangle" w="med" len="med"/>
-          </a:ln>
-        </p:spPr>
-        <p:style>
-          <a:lnRef idx="2">
-            <a:schemeClr val="accent1"/>
-          </a:lnRef>
-          <a:fillRef idx="0">
-            <a:schemeClr val="accent1"/>
-          </a:fillRef>
-          <a:effectRef idx="1">
-            <a:schemeClr val="accent1"/>
-          </a:effectRef>
-          <a:fontRef idx="minor">
-            <a:schemeClr val="tx1"/>
-          </a:fontRef>
-        </p:style>
-      </p:cxnSp>
-      <p:cxnSp>
-        <p:nvCxnSpPr>
-          <p:cNvPr id="68" name="Connector 67"/>
-          <p:cNvCxnSpPr/>
-          <p:nvPr/>
-        </p:nvCxnSpPr>
-        <p:spPr>
-          <a:xfrm flipV="1">
-            <a:off x="9052560" y="5943600"/>
-            <a:ext cx="0" cy="3657600"/>
-          </a:xfrm>
-          <a:prstGeom prst="line">
-            <a:avLst/>
-          </a:prstGeom>
-          <a:ln w="19050">
-            <a:solidFill>
-              <a:srgbClr val="000000"/>
-            </a:solidFill>
-            <a:tailEnd type="triangle" w="med" len="med"/>
-          </a:ln>
-        </p:spPr>
-        <p:style>
-          <a:lnRef idx="2">
-            <a:schemeClr val="accent1"/>
-          </a:lnRef>
-          <a:fillRef idx="0">
-            <a:schemeClr val="accent1"/>
-          </a:fillRef>
-          <a:effectRef idx="1">
-            <a:schemeClr val="accent1"/>
-          </a:effectRef>
-          <a:fontRef idx="minor">
-            <a:schemeClr val="tx1"/>
-          </a:fontRef>
-        </p:style>
-      </p:cxnSp>
-      <p:cxnSp>
-        <p:nvCxnSpPr>
-          <p:cNvPr id="69" name="Connector 68"/>
-          <p:cNvCxnSpPr/>
-          <p:nvPr/>
-        </p:nvCxnSpPr>
-        <p:spPr>
-          <a:xfrm flipV="1">
-            <a:off x="11704320" y="5943600"/>
-            <a:ext cx="0" cy="3657600"/>
-          </a:xfrm>
-          <a:prstGeom prst="line">
-            <a:avLst/>
-          </a:prstGeom>
-          <a:ln w="19050">
-            <a:solidFill>
-              <a:srgbClr val="000000"/>
-            </a:solidFill>
-            <a:tailEnd type="triangle" w="med" len="med"/>
-          </a:ln>
-        </p:spPr>
-        <p:style>
-          <a:lnRef idx="2">
-            <a:schemeClr val="accent1"/>
-          </a:lnRef>
-          <a:fillRef idx="0">
-            <a:schemeClr val="accent1"/>
-          </a:fillRef>
-          <a:effectRef idx="1">
-            <a:schemeClr val="accent1"/>
-          </a:effectRef>
-          <a:fontRef idx="minor">
-            <a:schemeClr val="tx1"/>
-          </a:fontRef>
-        </p:style>
-      </p:cxnSp>
-      <p:cxnSp>
-        <p:nvCxnSpPr>
-          <p:cNvPr id="70" name="Connector 69"/>
-          <p:cNvCxnSpPr/>
-          <p:nvPr/>
-        </p:nvCxnSpPr>
-        <p:spPr>
-          <a:xfrm flipV="1">
-            <a:off x="17373600" y="7955279"/>
-            <a:ext cx="0" cy="1645921"/>
-          </a:xfrm>
-          <a:prstGeom prst="line">
-            <a:avLst/>
-          </a:prstGeom>
-          <a:ln w="19050">
-            <a:solidFill>
-              <a:srgbClr val="000000"/>
-            </a:solidFill>
-            <a:tailEnd type="triangle" w="med" len="med"/>
-          </a:ln>
-        </p:spPr>
-        <p:style>
-          <a:lnRef idx="2">
-            <a:schemeClr val="accent1"/>
-          </a:lnRef>
-          <a:fillRef idx="0">
-            <a:schemeClr val="accent1"/>
-          </a:fillRef>
-          <a:effectRef idx="1">
-            <a:schemeClr val="accent1"/>
-          </a:effectRef>
-          <a:fontRef idx="minor">
-            <a:schemeClr val="tx1"/>
-          </a:fontRef>
-        </p:style>
-      </p:cxnSp>
-      <p:cxnSp>
-        <p:nvCxnSpPr>
-          <p:cNvPr id="71" name="Connector 70"/>
-          <p:cNvCxnSpPr/>
-          <p:nvPr/>
-        </p:nvCxnSpPr>
-        <p:spPr>
-          <a:xfrm flipV="1">
-            <a:off x="15544800" y="5394960"/>
-            <a:ext cx="0" cy="4206240"/>
-          </a:xfrm>
-          <a:prstGeom prst="line">
-            <a:avLst/>
-          </a:prstGeom>
-          <a:ln w="19050">
-            <a:solidFill>
-              <a:srgbClr val="000000"/>
-            </a:solidFill>
-          </a:ln>
-        </p:spPr>
-        <p:style>
-          <a:lnRef idx="2">
-            <a:schemeClr val="accent1"/>
-          </a:lnRef>
-          <a:fillRef idx="0">
-            <a:schemeClr val="accent1"/>
-          </a:fillRef>
-          <a:effectRef idx="1">
-            <a:schemeClr val="accent1"/>
-          </a:effectRef>
-          <a:fontRef idx="minor">
-            <a:schemeClr val="tx1"/>
-          </a:fontRef>
-        </p:style>
-      </p:cxnSp>
-      <p:cxnSp>
-        <p:nvCxnSpPr>
-          <p:cNvPr id="72" name="Connector 71"/>
-          <p:cNvCxnSpPr/>
-          <p:nvPr/>
-        </p:nvCxnSpPr>
-        <p:spPr>
-          <a:xfrm>
-            <a:off x="15544800" y="5394960"/>
-            <a:ext cx="2103120" cy="0"/>
-          </a:xfrm>
-          <a:prstGeom prst="line">
-            <a:avLst/>
-          </a:prstGeom>
-          <a:ln w="19050">
-            <a:solidFill>
-              <a:srgbClr val="000000"/>
-            </a:solidFill>
-          </a:ln>
-        </p:spPr>
-        <p:style>
-          <a:lnRef idx="2">
-            <a:schemeClr val="accent1"/>
-          </a:lnRef>
-          <a:fillRef idx="0">
-            <a:schemeClr val="accent1"/>
-          </a:fillRef>
-          <a:effectRef idx="1">
-            <a:schemeClr val="accent1"/>
-          </a:effectRef>
-          <a:fontRef idx="minor">
-            <a:schemeClr val="tx1"/>
-          </a:fontRef>
-        </p:style>
-      </p:cxnSp>
-      <p:cxnSp>
-        <p:nvCxnSpPr>
-          <p:cNvPr id="73" name="Connector 72"/>
-          <p:cNvCxnSpPr/>
-          <p:nvPr/>
-        </p:nvCxnSpPr>
-        <p:spPr>
-          <a:xfrm flipV="1">
-            <a:off x="17647920" y="3931920"/>
-            <a:ext cx="0" cy="1463040"/>
-          </a:xfrm>
-          <a:prstGeom prst="line">
-            <a:avLst/>
-          </a:prstGeom>
-          <a:ln w="19050">
-            <a:solidFill>
-              <a:srgbClr val="000000"/>
-            </a:solidFill>
-            <a:tailEnd type="triangle" w="med" len="med"/>
-          </a:ln>
-        </p:spPr>
-        <p:style>
-          <a:lnRef idx="2">
-            <a:schemeClr val="accent1"/>
-          </a:lnRef>
-          <a:fillRef idx="0">
-            <a:schemeClr val="accent1"/>
-          </a:fillRef>
-          <a:effectRef idx="1">
-            <a:schemeClr val="accent1"/>
-          </a:effectRef>
-          <a:fontRef idx="minor">
-            <a:schemeClr val="tx1"/>
-          </a:fontRef>
-        </p:style>
-      </p:cxnSp>
-      <p:cxnSp>
-        <p:nvCxnSpPr>
-          <p:cNvPr id="74" name="Connector 73"/>
-          <p:cNvCxnSpPr/>
-          <p:nvPr/>
-        </p:nvCxnSpPr>
-        <p:spPr>
-          <a:xfrm flipV="1">
-            <a:off x="6400800" y="9966960"/>
-            <a:ext cx="0" cy="822960"/>
-          </a:xfrm>
-          <a:prstGeom prst="line">
-            <a:avLst/>
-          </a:prstGeom>
-          <a:ln w="19050">
-            <a:solidFill>
-              <a:srgbClr val="000000"/>
-            </a:solidFill>
-          </a:ln>
-        </p:spPr>
-        <p:style>
-          <a:lnRef idx="2">
-            <a:schemeClr val="accent1"/>
-          </a:lnRef>
-          <a:fillRef idx="0">
-            <a:schemeClr val="accent1"/>
-          </a:fillRef>
-          <a:effectRef idx="1">
-            <a:schemeClr val="accent1"/>
-          </a:effectRef>
-          <a:fontRef idx="minor">
-            <a:schemeClr val="tx1"/>
-          </a:fontRef>
-        </p:style>
-      </p:cxnSp>
-      <p:cxnSp>
-        <p:nvCxnSpPr>
-          <p:cNvPr id="75" name="Connector 74"/>
-          <p:cNvCxnSpPr/>
-          <p:nvPr/>
-        </p:nvCxnSpPr>
-        <p:spPr>
-          <a:xfrm>
-            <a:off x="6675120" y="9966960"/>
-            <a:ext cx="3017520" cy="0"/>
-          </a:xfrm>
-          <a:prstGeom prst="line">
-            <a:avLst/>
-          </a:prstGeom>
-          <a:ln w="19050">
-            <a:solidFill>
-              <a:srgbClr val="000000"/>
-            </a:solidFill>
-          </a:ln>
-        </p:spPr>
-        <p:style>
-          <a:lnRef idx="2">
-            <a:schemeClr val="accent1"/>
-          </a:lnRef>
-          <a:fillRef idx="0">
-            <a:schemeClr val="accent1"/>
-          </a:fillRef>
-          <a:effectRef idx="1">
-            <a:schemeClr val="accent1"/>
-          </a:effectRef>
-          <a:fontRef idx="minor">
-            <a:schemeClr val="tx1"/>
-          </a:fontRef>
-        </p:style>
-      </p:cxnSp>
-      <p:cxnSp>
-        <p:nvCxnSpPr>
-          <p:cNvPr id="76" name="Connector 75"/>
-          <p:cNvCxnSpPr/>
-          <p:nvPr/>
-        </p:nvCxnSpPr>
-        <p:spPr>
-          <a:xfrm flipV="1">
-            <a:off x="6675120" y="5943600"/>
-            <a:ext cx="0" cy="4023360"/>
-          </a:xfrm>
-          <a:prstGeom prst="line">
-            <a:avLst/>
-          </a:prstGeom>
-          <a:ln w="19050">
-            <a:solidFill>
-              <a:srgbClr val="000000"/>
-            </a:solidFill>
-            <a:tailEnd type="triangle" w="med" len="med"/>
-          </a:ln>
-        </p:spPr>
-        <p:style>
-          <a:lnRef idx="2">
-            <a:schemeClr val="accent1"/>
-          </a:lnRef>
-          <a:fillRef idx="0">
-            <a:schemeClr val="accent1"/>
-          </a:fillRef>
-          <a:effectRef idx="1">
-            <a:schemeClr val="accent1"/>
-          </a:effectRef>
-          <a:fontRef idx="minor">
-            <a:schemeClr val="tx1"/>
-          </a:fontRef>
-        </p:style>
-      </p:cxnSp>
-      <p:cxnSp>
-        <p:nvCxnSpPr>
-          <p:cNvPr id="77" name="Connector 76"/>
-          <p:cNvCxnSpPr/>
-          <p:nvPr/>
-        </p:nvCxnSpPr>
-        <p:spPr>
-          <a:xfrm flipV="1">
-            <a:off x="9692640" y="5943600"/>
-            <a:ext cx="0" cy="4023360"/>
-          </a:xfrm>
-          <a:prstGeom prst="line">
-            <a:avLst/>
-          </a:prstGeom>
-          <a:ln w="19050">
-            <a:solidFill>
-              <a:srgbClr val="000000"/>
-            </a:solidFill>
-            <a:tailEnd type="triangle" w="med" len="med"/>
-          </a:ln>
-        </p:spPr>
-        <p:style>
-          <a:lnRef idx="2">
-            <a:schemeClr val="accent1"/>
-          </a:lnRef>
-          <a:fillRef idx="0">
-            <a:schemeClr val="accent1"/>
-          </a:fillRef>
-          <a:effectRef idx="1">
-            <a:schemeClr val="accent1"/>
-          </a:effectRef>
-          <a:fontRef idx="minor">
-            <a:schemeClr val="tx1"/>
-          </a:fontRef>
-        </p:style>
-      </p:cxnSp>
-      <p:cxnSp>
-        <p:nvCxnSpPr>
-          <p:cNvPr id="78" name="Connector 77"/>
-          <p:cNvCxnSpPr/>
-          <p:nvPr/>
-        </p:nvCxnSpPr>
-        <p:spPr>
-          <a:xfrm flipV="1">
-            <a:off x="13533120" y="10149840"/>
-            <a:ext cx="0" cy="640080"/>
-          </a:xfrm>
-          <a:prstGeom prst="line">
-            <a:avLst/>
-          </a:prstGeom>
-          <a:ln w="19050">
-            <a:solidFill>
-              <a:srgbClr val="000000"/>
-            </a:solidFill>
-          </a:ln>
-        </p:spPr>
-        <p:style>
-          <a:lnRef idx="2">
-            <a:schemeClr val="accent1"/>
-          </a:lnRef>
-          <a:fillRef idx="0">
-            <a:schemeClr val="accent1"/>
-          </a:fillRef>
-          <a:effectRef idx="1">
-            <a:schemeClr val="accent1"/>
-          </a:effectRef>
-          <a:fontRef idx="minor">
-            <a:schemeClr val="tx1"/>
-          </a:fontRef>
-        </p:style>
-      </p:cxnSp>
-      <p:cxnSp>
-        <p:nvCxnSpPr>
-          <p:cNvPr id="79" name="Connector 78"/>
-          <p:cNvCxnSpPr/>
-          <p:nvPr/>
-        </p:nvCxnSpPr>
-        <p:spPr>
-          <a:xfrm>
-            <a:off x="13350240" y="10149840"/>
-            <a:ext cx="4572000" cy="0"/>
-          </a:xfrm>
-          <a:prstGeom prst="line">
-            <a:avLst/>
-          </a:prstGeom>
-          <a:ln w="19050">
-            <a:solidFill>
-              <a:srgbClr val="000000"/>
-            </a:solidFill>
-          </a:ln>
-        </p:spPr>
-        <p:style>
-          <a:lnRef idx="2">
-            <a:schemeClr val="accent1"/>
-          </a:lnRef>
-          <a:fillRef idx="0">
-            <a:schemeClr val="accent1"/>
-          </a:fillRef>
-          <a:effectRef idx="1">
-            <a:schemeClr val="accent1"/>
-          </a:effectRef>
-          <a:fontRef idx="minor">
-            <a:schemeClr val="tx1"/>
-          </a:fontRef>
-        </p:style>
-      </p:cxnSp>
-      <p:cxnSp>
-        <p:nvCxnSpPr>
-          <p:cNvPr id="80" name="Connector 79"/>
-          <p:cNvCxnSpPr/>
-          <p:nvPr/>
-        </p:nvCxnSpPr>
-        <p:spPr>
-          <a:xfrm flipV="1">
-            <a:off x="13350240" y="5943600"/>
-            <a:ext cx="0" cy="4206240"/>
-          </a:xfrm>
-          <a:prstGeom prst="line">
-            <a:avLst/>
-          </a:prstGeom>
-          <a:ln w="19050">
-            <a:solidFill>
-              <a:srgbClr val="000000"/>
-            </a:solidFill>
-            <a:tailEnd type="triangle" w="med" len="med"/>
-          </a:ln>
-        </p:spPr>
-        <p:style>
-          <a:lnRef idx="2">
-            <a:schemeClr val="accent1"/>
-          </a:lnRef>
-          <a:fillRef idx="0">
-            <a:schemeClr val="accent1"/>
-          </a:fillRef>
-          <a:effectRef idx="1">
-            <a:schemeClr val="accent1"/>
-          </a:effectRef>
-          <a:fontRef idx="minor">
-            <a:schemeClr val="tx1"/>
-          </a:fontRef>
-        </p:style>
-      </p:cxnSp>
-      <p:cxnSp>
-        <p:nvCxnSpPr>
-          <p:cNvPr id="81" name="Connector 80"/>
-          <p:cNvCxnSpPr/>
-          <p:nvPr/>
-        </p:nvCxnSpPr>
-        <p:spPr>
-          <a:xfrm flipV="1">
-            <a:off x="17922240" y="7955279"/>
-            <a:ext cx="0" cy="2194561"/>
-          </a:xfrm>
-          <a:prstGeom prst="line">
-            <a:avLst/>
-          </a:prstGeom>
-          <a:ln w="19050">
-            <a:solidFill>
-              <a:srgbClr val="000000"/>
-            </a:solidFill>
-            <a:tailEnd type="triangle" w="med" len="med"/>
-          </a:ln>
-        </p:spPr>
-        <p:style>
-          <a:lnRef idx="2">
-            <a:schemeClr val="accent1"/>
-          </a:lnRef>
-          <a:fillRef idx="0">
-            <a:schemeClr val="accent1"/>
-          </a:fillRef>
-          <a:effectRef idx="1">
-            <a:schemeClr val="accent1"/>
-          </a:effectRef>
-          <a:fontRef idx="minor">
-            <a:schemeClr val="tx1"/>
-          </a:fontRef>
-        </p:style>
-      </p:cxnSp>
-      <p:sp>
-        <p:nvSpPr>
-          <p:cNvPr id="82" name="TextBox 81"/>
-          <p:cNvSpPr txBox="1"/>
-          <p:nvPr/>
-        </p:nvSpPr>
-        <p:spPr>
-          <a:xfrm>
-            <a:off x="1828800" y="10881360"/>
-            <a:ext cx="2926080" cy="292608"/>
-          </a:xfrm>
-          <a:prstGeom prst="rect">
-            <a:avLst/>
-          </a:prstGeom>
-          <a:noFill/>
-        </p:spPr>
-        <p:txBody>
-          <a:bodyPr wrap="square" anchor="t" lIns="12700" rIns="12700" tIns="12700" bIns="12700">
-            <a:spAutoFit/>
-          </a:bodyPr>
-          <a:lstStyle/>
-          <a:p>
-            <a:pPr algn="ctr"/>
-            <a:r>
-              <a:rPr sz="900" b="0">
-                <a:solidFill>
-                  <a:srgbClr val="000000"/>
-                </a:solidFill>
-                <a:latin typeface="Arial"/>
-              </a:rPr>
-              <a:t>M1 Platforms hosting ATMOS node compute</a:t>
-            </a:r>
-          </a:p>
-        </p:txBody>
-      </p:sp>
-      <p:sp>
-        <p:nvSpPr>
-          <p:cNvPr id="83" name="TextBox 82"/>
-          <p:cNvSpPr txBox="1"/>
-          <p:nvPr/>
-        </p:nvSpPr>
-        <p:spPr>
-          <a:xfrm>
-            <a:off x="5303520" y="10881360"/>
-            <a:ext cx="2743200" cy="292608"/>
-          </a:xfrm>
-          <a:prstGeom prst="rect">
-            <a:avLst/>
-          </a:prstGeom>
-          <a:noFill/>
-        </p:spPr>
-        <p:txBody>
-          <a:bodyPr wrap="square" anchor="t" lIns="12700" rIns="12700" tIns="12700" bIns="12700">
-            <a:spAutoFit/>
-          </a:bodyPr>
-          <a:lstStyle/>
-          <a:p>
-            <a:pPr algn="ctr"/>
-            <a:r>
-              <a:rPr sz="900" b="0">
-                <a:solidFill>
-                  <a:srgbClr val="000000"/>
-                </a:solidFill>
-                <a:latin typeface="Arial"/>
-              </a:rPr>
-              <a:t>M2 ABLE-LBM / reduced models</a:t>
-            </a:r>
-          </a:p>
-        </p:txBody>
-      </p:sp>
-      <p:sp>
-        <p:nvSpPr>
-          <p:cNvPr id="84" name="TextBox 83"/>
-          <p:cNvSpPr txBox="1"/>
-          <p:nvPr/>
-        </p:nvSpPr>
-        <p:spPr>
-          <a:xfrm>
-            <a:off x="11338560" y="10881360"/>
-            <a:ext cx="3108960" cy="292608"/>
-          </a:xfrm>
-          <a:prstGeom prst="rect">
-            <a:avLst/>
-          </a:prstGeom>
-          <a:noFill/>
-        </p:spPr>
-        <p:txBody>
-          <a:bodyPr wrap="square" anchor="t" lIns="12700" rIns="12700" tIns="12700" bIns="12700">
-            <a:spAutoFit/>
-          </a:bodyPr>
-          <a:lstStyle/>
-          <a:p>
-            <a:pPr algn="ctr"/>
-            <a:r>
-              <a:rPr sz="900" b="0">
+              <a:rPr sz="1000" b="0">
                 <a:solidFill>
                   <a:srgbClr val="000000"/>
                 </a:solidFill>

--- a/ATMOS_A0_native.pptx
+++ b/ATMOS_A0_native.pptx
@@ -3096,8 +3096,86 @@
         </p:nvSpPr>
         <p:spPr>
           <a:xfrm>
-            <a:off x="274320" y="274320"/>
-            <a:ext cx="9509760" cy="7223760"/>
+            <a:off x="320040" y="502920"/>
+            <a:ext cx="9418320" cy="6812280"/>
+          </a:xfrm>
+          <a:prstGeom prst="rect">
+            <a:avLst/>
+          </a:prstGeom>
+          <a:noFill/>
+          <a:ln w="15875">
+            <a:solidFill>
+              <a:srgbClr val="000000"/>
+            </a:solidFill>
+          </a:ln>
+          <a:effectLst/>
+        </p:spPr>
+        <p:style>
+          <a:lnRef idx="1">
+            <a:schemeClr val="accent1"/>
+          </a:lnRef>
+          <a:fillRef idx="3">
+            <a:schemeClr val="accent1"/>
+          </a:fillRef>
+          <a:effectRef idx="2">
+            <a:schemeClr val="accent1"/>
+          </a:effectRef>
+          <a:fontRef idx="minor">
+            <a:schemeClr val="lt1"/>
+          </a:fontRef>
+        </p:style>
+        <p:txBody>
+          <a:bodyPr rtlCol="0" anchor="ctr"/>
+          <a:lstStyle/>
+          <a:p>
+            <a:pPr algn="ctr"/>
+          </a:p>
+        </p:txBody>
+      </p:sp>
+      <p:sp>
+        <p:nvSpPr>
+          <p:cNvPr id="3" name="TextBox 2"/>
+          <p:cNvSpPr txBox="1"/>
+          <p:nvPr/>
+        </p:nvSpPr>
+        <p:spPr>
+          <a:xfrm>
+            <a:off x="320040" y="548640"/>
+            <a:ext cx="9418320" cy="310896"/>
+          </a:xfrm>
+          <a:prstGeom prst="rect">
+            <a:avLst/>
+          </a:prstGeom>
+          <a:noFill/>
+        </p:spPr>
+        <p:txBody>
+          <a:bodyPr wrap="square" anchor="t" lIns="12700" rIns="12700" tIns="12700" bIns="12700">
+            <a:spAutoFit/>
+          </a:bodyPr>
+          <a:lstStyle/>
+          <a:p>
+            <a:pPr algn="ctr"/>
+            <a:r>
+              <a:rPr sz="1500" b="1">
+                <a:solidFill>
+                  <a:srgbClr val="000000"/>
+                </a:solidFill>
+              </a:rPr>
+              <a:t>A0 — Decompose Conduct Air-Focused Weather Exploitation Operations</a:t>
+            </a:r>
+          </a:p>
+        </p:txBody>
+      </p:sp>
+      <p:sp>
+        <p:nvSpPr>
+          <p:cNvPr id="4" name="Rectangle 3"/>
+          <p:cNvSpPr/>
+          <p:nvPr/>
+        </p:nvSpPr>
+        <p:spPr>
+          <a:xfrm>
+            <a:off x="8321040" y="6967728"/>
+            <a:ext cx="1325880" cy="274320"/>
           </a:xfrm>
           <a:prstGeom prst="rect">
             <a:avLst/>
@@ -3129,54 +3207,841 @@
           <a:lstStyle/>
           <a:p>
             <a:pPr algn="ctr"/>
-          </a:p>
-        </p:txBody>
-      </p:sp>
-      <p:sp>
-        <p:nvSpPr>
-          <p:cNvPr id="3" name="TextBox 2"/>
-          <p:cNvSpPr txBox="1"/>
-          <p:nvPr/>
-        </p:nvSpPr>
-        <p:spPr>
-          <a:xfrm>
-            <a:off x="274320" y="310896"/>
-            <a:ext cx="9509760" cy="292608"/>
-          </a:xfrm>
-          <a:prstGeom prst="rect">
-            <a:avLst/>
-          </a:prstGeom>
-          <a:noFill/>
-        </p:spPr>
-        <p:txBody>
-          <a:bodyPr wrap="square" anchor="t" lIns="0" rIns="0" tIns="0" bIns="0">
-            <a:spAutoFit/>
-          </a:bodyPr>
-          <a:lstStyle/>
-          <a:p>
-            <a:pPr algn="ctr"/>
-            <a:r>
-              <a:rPr sz="1400" b="1">
+            <a:r>
+              <a:rPr sz="1100" b="1">
                 <a:solidFill>
                   <a:srgbClr val="000000"/>
                 </a:solidFill>
-                <a:latin typeface="Arial"/>
               </a:rPr>
-              <a:t>A0 — Decompose Conduct Air-Focused Weather Exploitation Operations</a:t>
-            </a:r>
-          </a:p>
-        </p:txBody>
-      </p:sp>
-      <p:sp>
-        <p:nvSpPr>
-          <p:cNvPr id="4" name="TextBox 3"/>
+              <a:t>Node: A0</a:t>
+            </a:r>
+          </a:p>
+        </p:txBody>
+      </p:sp>
+      <p:sp>
+        <p:nvSpPr>
+          <p:cNvPr id="5" name="Rectangle 4"/>
+          <p:cNvSpPr/>
+          <p:nvPr/>
+        </p:nvSpPr>
+        <p:spPr>
+          <a:xfrm>
+            <a:off x="1051560" y="3383280"/>
+            <a:ext cx="1234440" cy="685800"/>
+          </a:xfrm>
+          <a:prstGeom prst="rect">
+            <a:avLst/>
+          </a:prstGeom>
+          <a:solidFill>
+            <a:srgbClr val="FFFFFF"/>
+          </a:solidFill>
+          <a:ln w="19050">
+            <a:solidFill>
+              <a:srgbClr val="000000"/>
+            </a:solidFill>
+          </a:ln>
+          <a:effectLst/>
+        </p:spPr>
+        <p:style>
+          <a:lnRef idx="1">
+            <a:schemeClr val="accent1"/>
+          </a:lnRef>
+          <a:fillRef idx="3">
+            <a:schemeClr val="accent1"/>
+          </a:fillRef>
+          <a:effectRef idx="2">
+            <a:schemeClr val="accent1"/>
+          </a:effectRef>
+          <a:fontRef idx="minor">
+            <a:schemeClr val="lt1"/>
+          </a:fontRef>
+        </p:style>
+        <p:txBody>
+          <a:bodyPr rtlCol="0" anchor="ctr" wrap="square" lIns="25400" rIns="25400" tIns="12700" bIns="12700"/>
+          <a:lstStyle/>
+          <a:p>
+            <a:pPr algn="ctr"/>
+            <a:r>
+              <a:rPr sz="1200" b="1">
+                <a:solidFill>
+                  <a:srgbClr val="000000"/>
+                </a:solidFill>
+              </a:rPr>
+              <a:t>A1</a:t>
+            </a:r>
+          </a:p>
+          <a:p>
+            <a:pPr algn="ctr"/>
+            <a:r>
+              <a:rPr sz="1000">
+                <a:solidFill>
+                  <a:srgbClr val="000000"/>
+                </a:solidFill>
+              </a:rPr>
+              <a:t>Acquire Micro-Weather Observations</a:t>
+            </a:r>
+          </a:p>
+        </p:txBody>
+      </p:sp>
+      <p:sp>
+        <p:nvSpPr>
+          <p:cNvPr id="6" name="Rectangle 5"/>
+          <p:cNvSpPr/>
+          <p:nvPr/>
+        </p:nvSpPr>
+        <p:spPr>
+          <a:xfrm>
+            <a:off x="2560320" y="3383280"/>
+            <a:ext cx="1234440" cy="685800"/>
+          </a:xfrm>
+          <a:prstGeom prst="rect">
+            <a:avLst/>
+          </a:prstGeom>
+          <a:solidFill>
+            <a:srgbClr val="FFFFFF"/>
+          </a:solidFill>
+          <a:ln w="19050">
+            <a:solidFill>
+              <a:srgbClr val="000000"/>
+            </a:solidFill>
+          </a:ln>
+          <a:effectLst/>
+        </p:spPr>
+        <p:style>
+          <a:lnRef idx="1">
+            <a:schemeClr val="accent1"/>
+          </a:lnRef>
+          <a:fillRef idx="3">
+            <a:schemeClr val="accent1"/>
+          </a:fillRef>
+          <a:effectRef idx="2">
+            <a:schemeClr val="accent1"/>
+          </a:effectRef>
+          <a:fontRef idx="minor">
+            <a:schemeClr val="lt1"/>
+          </a:fontRef>
+        </p:style>
+        <p:txBody>
+          <a:bodyPr rtlCol="0" anchor="ctr" wrap="square" lIns="25400" rIns="25400" tIns="12700" bIns="12700"/>
+          <a:lstStyle/>
+          <a:p>
+            <a:pPr algn="ctr"/>
+            <a:r>
+              <a:rPr sz="1200" b="1">
+                <a:solidFill>
+                  <a:srgbClr val="000000"/>
+                </a:solidFill>
+              </a:rPr>
+              <a:t>A2</a:t>
+            </a:r>
+          </a:p>
+          <a:p>
+            <a:pPr algn="ctr"/>
+            <a:r>
+              <a:rPr sz="1000">
+                <a:solidFill>
+                  <a:srgbClr val="000000"/>
+                </a:solidFill>
+              </a:rPr>
+              <a:t>Generate Local Weather State</a:t>
+            </a:r>
+          </a:p>
+        </p:txBody>
+      </p:sp>
+      <p:sp>
+        <p:nvSpPr>
+          <p:cNvPr id="7" name="Rectangle 6"/>
+          <p:cNvSpPr/>
+          <p:nvPr/>
+        </p:nvSpPr>
+        <p:spPr>
+          <a:xfrm>
+            <a:off x="4069080" y="3383280"/>
+            <a:ext cx="1234440" cy="685800"/>
+          </a:xfrm>
+          <a:prstGeom prst="rect">
+            <a:avLst/>
+          </a:prstGeom>
+          <a:solidFill>
+            <a:srgbClr val="FFFFFF"/>
+          </a:solidFill>
+          <a:ln w="19050">
+            <a:solidFill>
+              <a:srgbClr val="000000"/>
+            </a:solidFill>
+          </a:ln>
+          <a:effectLst/>
+        </p:spPr>
+        <p:style>
+          <a:lnRef idx="1">
+            <a:schemeClr val="accent1"/>
+          </a:lnRef>
+          <a:fillRef idx="3">
+            <a:schemeClr val="accent1"/>
+          </a:fillRef>
+          <a:effectRef idx="2">
+            <a:schemeClr val="accent1"/>
+          </a:effectRef>
+          <a:fontRef idx="minor">
+            <a:schemeClr val="lt1"/>
+          </a:fontRef>
+        </p:style>
+        <p:txBody>
+          <a:bodyPr rtlCol="0" anchor="ctr" wrap="square" lIns="25400" rIns="25400" tIns="12700" bIns="12700"/>
+          <a:lstStyle/>
+          <a:p>
+            <a:pPr algn="ctr"/>
+            <a:r>
+              <a:rPr sz="1200" b="1">
+                <a:solidFill>
+                  <a:srgbClr val="000000"/>
+                </a:solidFill>
+              </a:rPr>
+              <a:t>A3</a:t>
+            </a:r>
+          </a:p>
+          <a:p>
+            <a:pPr algn="ctr"/>
+            <a:r>
+              <a:rPr sz="1000">
+                <a:solidFill>
+                  <a:srgbClr val="000000"/>
+                </a:solidFill>
+              </a:rPr>
+              <a:t>Quantify Uncertainty</a:t>
+            </a:r>
+          </a:p>
+        </p:txBody>
+      </p:sp>
+      <p:sp>
+        <p:nvSpPr>
+          <p:cNvPr id="8" name="Rectangle 7"/>
+          <p:cNvSpPr/>
+          <p:nvPr/>
+        </p:nvSpPr>
+        <p:spPr>
+          <a:xfrm>
+            <a:off x="5532120" y="3383280"/>
+            <a:ext cx="1417320" cy="685800"/>
+          </a:xfrm>
+          <a:prstGeom prst="rect">
+            <a:avLst/>
+          </a:prstGeom>
+          <a:solidFill>
+            <a:srgbClr val="FFFFFF"/>
+          </a:solidFill>
+          <a:ln w="19050">
+            <a:solidFill>
+              <a:srgbClr val="000000"/>
+            </a:solidFill>
+          </a:ln>
+          <a:effectLst/>
+        </p:spPr>
+        <p:style>
+          <a:lnRef idx="1">
+            <a:schemeClr val="accent1"/>
+          </a:lnRef>
+          <a:fillRef idx="3">
+            <a:schemeClr val="accent1"/>
+          </a:fillRef>
+          <a:effectRef idx="2">
+            <a:schemeClr val="accent1"/>
+          </a:effectRef>
+          <a:fontRef idx="minor">
+            <a:schemeClr val="lt1"/>
+          </a:fontRef>
+        </p:style>
+        <p:txBody>
+          <a:bodyPr rtlCol="0" anchor="ctr" wrap="square" lIns="25400" rIns="25400" tIns="12700" bIns="12700"/>
+          <a:lstStyle/>
+          <a:p>
+            <a:pPr algn="ctr"/>
+            <a:r>
+              <a:rPr sz="1200" b="1">
+                <a:solidFill>
+                  <a:srgbClr val="000000"/>
+                </a:solidFill>
+              </a:rPr>
+              <a:t>A4</a:t>
+            </a:r>
+          </a:p>
+          <a:p>
+            <a:pPr algn="ctr"/>
+            <a:r>
+              <a:rPr sz="1000">
+                <a:solidFill>
+                  <a:srgbClr val="000000"/>
+                </a:solidFill>
+              </a:rPr>
+              <a:t>Federate and Maintain Federated Weather Context</a:t>
+            </a:r>
+          </a:p>
+        </p:txBody>
+      </p:sp>
+      <p:sp>
+        <p:nvSpPr>
+          <p:cNvPr id="9" name="Rectangle 8"/>
+          <p:cNvSpPr/>
+          <p:nvPr/>
+        </p:nvSpPr>
+        <p:spPr>
+          <a:xfrm>
+            <a:off x="7543800" y="2148840"/>
+            <a:ext cx="1371600" cy="685800"/>
+          </a:xfrm>
+          <a:prstGeom prst="rect">
+            <a:avLst/>
+          </a:prstGeom>
+          <a:solidFill>
+            <a:srgbClr val="FFFFFF"/>
+          </a:solidFill>
+          <a:ln w="19050">
+            <a:solidFill>
+              <a:srgbClr val="000000"/>
+            </a:solidFill>
+          </a:ln>
+          <a:effectLst/>
+        </p:spPr>
+        <p:style>
+          <a:lnRef idx="1">
+            <a:schemeClr val="accent1"/>
+          </a:lnRef>
+          <a:fillRef idx="3">
+            <a:schemeClr val="accent1"/>
+          </a:fillRef>
+          <a:effectRef idx="2">
+            <a:schemeClr val="accent1"/>
+          </a:effectRef>
+          <a:fontRef idx="minor">
+            <a:schemeClr val="lt1"/>
+          </a:fontRef>
+        </p:style>
+        <p:txBody>
+          <a:bodyPr rtlCol="0" anchor="ctr" wrap="square" lIns="25400" rIns="25400" tIns="12700" bIns="12700"/>
+          <a:lstStyle/>
+          <a:p>
+            <a:pPr algn="ctr"/>
+            <a:r>
+              <a:rPr sz="1200" b="1">
+                <a:solidFill>
+                  <a:srgbClr val="000000"/>
+                </a:solidFill>
+              </a:rPr>
+              <a:t>A5</a:t>
+            </a:r>
+          </a:p>
+          <a:p>
+            <a:pPr algn="ctr"/>
+            <a:r>
+              <a:rPr sz="1000">
+                <a:solidFill>
+                  <a:srgbClr val="000000"/>
+                </a:solidFill>
+              </a:rPr>
+              <a:t>Detect Threshold Crossings (Descriptive Support)</a:t>
+            </a:r>
+          </a:p>
+        </p:txBody>
+      </p:sp>
+      <p:sp>
+        <p:nvSpPr>
+          <p:cNvPr id="10" name="Rectangle 9"/>
+          <p:cNvSpPr/>
+          <p:nvPr/>
+        </p:nvSpPr>
+        <p:spPr>
+          <a:xfrm>
+            <a:off x="7543800" y="4800600"/>
+            <a:ext cx="1371600" cy="685800"/>
+          </a:xfrm>
+          <a:prstGeom prst="rect">
+            <a:avLst/>
+          </a:prstGeom>
+          <a:solidFill>
+            <a:srgbClr val="FFFFFF"/>
+          </a:solidFill>
+          <a:ln w="19050">
+            <a:solidFill>
+              <a:srgbClr val="000000"/>
+            </a:solidFill>
+          </a:ln>
+          <a:effectLst/>
+        </p:spPr>
+        <p:style>
+          <a:lnRef idx="1">
+            <a:schemeClr val="accent1"/>
+          </a:lnRef>
+          <a:fillRef idx="3">
+            <a:schemeClr val="accent1"/>
+          </a:fillRef>
+          <a:effectRef idx="2">
+            <a:schemeClr val="accent1"/>
+          </a:effectRef>
+          <a:fontRef idx="minor">
+            <a:schemeClr val="lt1"/>
+          </a:fontRef>
+        </p:style>
+        <p:txBody>
+          <a:bodyPr rtlCol="0" anchor="ctr" wrap="square" lIns="25400" rIns="25400" tIns="12700" bIns="12700"/>
+          <a:lstStyle/>
+          <a:p>
+            <a:pPr algn="ctr"/>
+            <a:r>
+              <a:rPr sz="1200" b="1">
+                <a:solidFill>
+                  <a:srgbClr val="000000"/>
+                </a:solidFill>
+              </a:rPr>
+              <a:t>A6</a:t>
+            </a:r>
+          </a:p>
+          <a:p>
+            <a:pPr algn="ctr"/>
+            <a:r>
+              <a:rPr sz="1000">
+                <a:solidFill>
+                  <a:srgbClr val="000000"/>
+                </a:solidFill>
+              </a:rPr>
+              <a:t>Produce Mission-Tailored Weather Context</a:t>
+            </a:r>
+          </a:p>
+        </p:txBody>
+      </p:sp>
+      <p:cxnSp>
+        <p:nvCxnSpPr>
+          <p:cNvPr id="11" name="Connector 10"/>
+          <p:cNvCxnSpPr/>
+          <p:nvPr/>
+        </p:nvCxnSpPr>
+        <p:spPr>
+          <a:xfrm>
+            <a:off x="502920" y="3566160"/>
+            <a:ext cx="548640" cy="0"/>
+          </a:xfrm>
+          <a:prstGeom prst="bentConnector3">
+            <a:avLst/>
+          </a:prstGeom>
+          <a:ln w="15875">
+            <a:solidFill>
+              <a:srgbClr val="000000"/>
+            </a:solidFill>
+            <a:tailEnd type="triangle" w="med" len="med"/>
+          </a:ln>
+          <a:effectLst/>
+        </p:spPr>
+        <p:style>
+          <a:lnRef idx="2">
+            <a:schemeClr val="accent1"/>
+          </a:lnRef>
+          <a:fillRef idx="0">
+            <a:schemeClr val="accent1"/>
+          </a:fillRef>
+          <a:effectRef idx="1">
+            <a:schemeClr val="accent1"/>
+          </a:effectRef>
+          <a:fontRef idx="minor">
+            <a:schemeClr val="tx1"/>
+          </a:fontRef>
+        </p:style>
+      </p:cxnSp>
+      <p:sp>
+        <p:nvSpPr>
+          <p:cNvPr id="12" name="Rectangle 11"/>
+          <p:cNvSpPr/>
+          <p:nvPr/>
+        </p:nvSpPr>
+        <p:spPr>
+          <a:xfrm>
+            <a:off x="1035557" y="3550158"/>
+            <a:ext cx="32004" cy="32004"/>
+          </a:xfrm>
+          <a:prstGeom prst="rect">
+            <a:avLst/>
+          </a:prstGeom>
+          <a:noFill/>
+          <a:ln>
+            <a:noFill/>
+          </a:ln>
+          <a:effectLst/>
+        </p:spPr>
+        <p:style>
+          <a:lnRef idx="1">
+            <a:schemeClr val="accent1"/>
+          </a:lnRef>
+          <a:fillRef idx="3">
+            <a:schemeClr val="accent1"/>
+          </a:fillRef>
+          <a:effectRef idx="2">
+            <a:schemeClr val="accent1"/>
+          </a:effectRef>
+          <a:fontRef idx="minor">
+            <a:schemeClr val="lt1"/>
+          </a:fontRef>
+        </p:style>
+        <p:txBody>
+          <a:bodyPr rtlCol="0" anchor="ctr"/>
+          <a:lstStyle/>
+          <a:p>
+            <a:pPr algn="ctr"/>
+          </a:p>
+        </p:txBody>
+      </p:sp>
+      <p:cxnSp>
+        <p:nvCxnSpPr>
+          <p:cNvPr id="13" name="Connector 12"/>
+          <p:cNvCxnSpPr/>
+          <p:nvPr/>
+        </p:nvCxnSpPr>
+        <p:spPr>
+          <a:xfrm>
+            <a:off x="502920" y="3913632"/>
+            <a:ext cx="548640" cy="0"/>
+          </a:xfrm>
+          <a:prstGeom prst="bentConnector3">
+            <a:avLst/>
+          </a:prstGeom>
+          <a:ln w="15875">
+            <a:solidFill>
+              <a:srgbClr val="000000"/>
+            </a:solidFill>
+            <a:tailEnd type="triangle" w="med" len="med"/>
+          </a:ln>
+          <a:effectLst/>
+        </p:spPr>
+        <p:style>
+          <a:lnRef idx="2">
+            <a:schemeClr val="accent1"/>
+          </a:lnRef>
+          <a:fillRef idx="0">
+            <a:schemeClr val="accent1"/>
+          </a:fillRef>
+          <a:effectRef idx="1">
+            <a:schemeClr val="accent1"/>
+          </a:effectRef>
+          <a:fontRef idx="minor">
+            <a:schemeClr val="tx1"/>
+          </a:fontRef>
+        </p:style>
+      </p:cxnSp>
+      <p:sp>
+        <p:nvSpPr>
+          <p:cNvPr id="14" name="Rectangle 13"/>
+          <p:cNvSpPr/>
+          <p:nvPr/>
+        </p:nvSpPr>
+        <p:spPr>
+          <a:xfrm>
+            <a:off x="1035557" y="3897630"/>
+            <a:ext cx="32004" cy="32004"/>
+          </a:xfrm>
+          <a:prstGeom prst="rect">
+            <a:avLst/>
+          </a:prstGeom>
+          <a:noFill/>
+          <a:ln>
+            <a:noFill/>
+          </a:ln>
+          <a:effectLst/>
+        </p:spPr>
+        <p:style>
+          <a:lnRef idx="1">
+            <a:schemeClr val="accent1"/>
+          </a:lnRef>
+          <a:fillRef idx="3">
+            <a:schemeClr val="accent1"/>
+          </a:fillRef>
+          <a:effectRef idx="2">
+            <a:schemeClr val="accent1"/>
+          </a:effectRef>
+          <a:fontRef idx="minor">
+            <a:schemeClr val="lt1"/>
+          </a:fontRef>
+        </p:style>
+        <p:txBody>
+          <a:bodyPr rtlCol="0" anchor="ctr"/>
+          <a:lstStyle/>
+          <a:p>
+            <a:pPr algn="ctr"/>
+          </a:p>
+        </p:txBody>
+      </p:sp>
+      <p:cxnSp>
+        <p:nvCxnSpPr>
+          <p:cNvPr id="15" name="Connector 14"/>
+          <p:cNvCxnSpPr/>
+          <p:nvPr/>
+        </p:nvCxnSpPr>
+        <p:spPr>
+          <a:xfrm>
+            <a:off x="502920" y="2103120"/>
+            <a:ext cx="6812280" cy="0"/>
+          </a:xfrm>
+          <a:prstGeom prst="bentConnector3">
+            <a:avLst/>
+          </a:prstGeom>
+          <a:ln w="15875">
+            <a:solidFill>
+              <a:srgbClr val="000000"/>
+            </a:solidFill>
+          </a:ln>
+          <a:effectLst/>
+        </p:spPr>
+        <p:style>
+          <a:lnRef idx="2">
+            <a:schemeClr val="accent1"/>
+          </a:lnRef>
+          <a:fillRef idx="0">
+            <a:schemeClr val="accent1"/>
+          </a:fillRef>
+          <a:effectRef idx="1">
+            <a:schemeClr val="accent1"/>
+          </a:effectRef>
+          <a:fontRef idx="minor">
+            <a:schemeClr val="tx1"/>
+          </a:fontRef>
+        </p:style>
+      </p:cxnSp>
+      <p:cxnSp>
+        <p:nvCxnSpPr>
+          <p:cNvPr id="16" name="Connector 15"/>
+          <p:cNvCxnSpPr/>
+          <p:nvPr/>
+        </p:nvCxnSpPr>
+        <p:spPr>
+          <a:xfrm>
+            <a:off x="7315200" y="2103120"/>
+            <a:ext cx="0" cy="548640"/>
+          </a:xfrm>
+          <a:prstGeom prst="bentConnector3">
+            <a:avLst/>
+          </a:prstGeom>
+          <a:ln w="15875">
+            <a:solidFill>
+              <a:srgbClr val="000000"/>
+            </a:solidFill>
+          </a:ln>
+          <a:effectLst/>
+        </p:spPr>
+        <p:style>
+          <a:lnRef idx="2">
+            <a:schemeClr val="accent1"/>
+          </a:lnRef>
+          <a:fillRef idx="0">
+            <a:schemeClr val="accent1"/>
+          </a:fillRef>
+          <a:effectRef idx="1">
+            <a:schemeClr val="accent1"/>
+          </a:effectRef>
+          <a:fontRef idx="minor">
+            <a:schemeClr val="tx1"/>
+          </a:fontRef>
+        </p:style>
+      </p:cxnSp>
+      <p:cxnSp>
+        <p:nvCxnSpPr>
+          <p:cNvPr id="17" name="Connector 16"/>
+          <p:cNvCxnSpPr/>
+          <p:nvPr/>
+        </p:nvCxnSpPr>
+        <p:spPr>
+          <a:xfrm>
+            <a:off x="7315200" y="2651760"/>
+            <a:ext cx="228600" cy="0"/>
+          </a:xfrm>
+          <a:prstGeom prst="bentConnector3">
+            <a:avLst/>
+          </a:prstGeom>
+          <a:ln w="15875">
+            <a:solidFill>
+              <a:srgbClr val="000000"/>
+            </a:solidFill>
+            <a:tailEnd type="triangle" w="med" len="med"/>
+          </a:ln>
+          <a:effectLst/>
+        </p:spPr>
+        <p:style>
+          <a:lnRef idx="2">
+            <a:schemeClr val="accent1"/>
+          </a:lnRef>
+          <a:fillRef idx="0">
+            <a:schemeClr val="accent1"/>
+          </a:fillRef>
+          <a:effectRef idx="1">
+            <a:schemeClr val="accent1"/>
+          </a:effectRef>
+          <a:fontRef idx="minor">
+            <a:schemeClr val="tx1"/>
+          </a:fontRef>
+        </p:style>
+      </p:cxnSp>
+      <p:sp>
+        <p:nvSpPr>
+          <p:cNvPr id="18" name="Rectangle 17"/>
+          <p:cNvSpPr/>
+          <p:nvPr/>
+        </p:nvSpPr>
+        <p:spPr>
+          <a:xfrm>
+            <a:off x="7527798" y="2635758"/>
+            <a:ext cx="32004" cy="32004"/>
+          </a:xfrm>
+          <a:prstGeom prst="rect">
+            <a:avLst/>
+          </a:prstGeom>
+          <a:noFill/>
+          <a:ln>
+            <a:noFill/>
+          </a:ln>
+          <a:effectLst/>
+        </p:spPr>
+        <p:style>
+          <a:lnRef idx="1">
+            <a:schemeClr val="accent1"/>
+          </a:lnRef>
+          <a:fillRef idx="3">
+            <a:schemeClr val="accent1"/>
+          </a:fillRef>
+          <a:effectRef idx="2">
+            <a:schemeClr val="accent1"/>
+          </a:effectRef>
+          <a:fontRef idx="minor">
+            <a:schemeClr val="lt1"/>
+          </a:fontRef>
+        </p:style>
+        <p:txBody>
+          <a:bodyPr rtlCol="0" anchor="ctr"/>
+          <a:lstStyle/>
+          <a:p>
+            <a:pPr algn="ctr"/>
+          </a:p>
+        </p:txBody>
+      </p:sp>
+      <p:cxnSp>
+        <p:nvCxnSpPr>
+          <p:cNvPr id="19" name="Connector 18"/>
+          <p:cNvCxnSpPr/>
+          <p:nvPr/>
+        </p:nvCxnSpPr>
+        <p:spPr>
+          <a:xfrm>
+            <a:off x="7315200" y="2103120"/>
+            <a:ext cx="0" cy="3200400"/>
+          </a:xfrm>
+          <a:prstGeom prst="bentConnector3">
+            <a:avLst/>
+          </a:prstGeom>
+          <a:ln w="15875">
+            <a:solidFill>
+              <a:srgbClr val="000000"/>
+            </a:solidFill>
+          </a:ln>
+          <a:effectLst/>
+        </p:spPr>
+        <p:style>
+          <a:lnRef idx="2">
+            <a:schemeClr val="accent1"/>
+          </a:lnRef>
+          <a:fillRef idx="0">
+            <a:schemeClr val="accent1"/>
+          </a:fillRef>
+          <a:effectRef idx="1">
+            <a:schemeClr val="accent1"/>
+          </a:effectRef>
+          <a:fontRef idx="minor">
+            <a:schemeClr val="tx1"/>
+          </a:fontRef>
+        </p:style>
+      </p:cxnSp>
+      <p:cxnSp>
+        <p:nvCxnSpPr>
+          <p:cNvPr id="20" name="Connector 19"/>
+          <p:cNvCxnSpPr/>
+          <p:nvPr/>
+        </p:nvCxnSpPr>
+        <p:spPr>
+          <a:xfrm>
+            <a:off x="7315200" y="5303520"/>
+            <a:ext cx="228600" cy="0"/>
+          </a:xfrm>
+          <a:prstGeom prst="bentConnector3">
+            <a:avLst/>
+          </a:prstGeom>
+          <a:ln w="15875">
+            <a:solidFill>
+              <a:srgbClr val="000000"/>
+            </a:solidFill>
+            <a:tailEnd type="triangle" w="med" len="med"/>
+          </a:ln>
+          <a:effectLst/>
+        </p:spPr>
+        <p:style>
+          <a:lnRef idx="2">
+            <a:schemeClr val="accent1"/>
+          </a:lnRef>
+          <a:fillRef idx="0">
+            <a:schemeClr val="accent1"/>
+          </a:fillRef>
+          <a:effectRef idx="1">
+            <a:schemeClr val="accent1"/>
+          </a:effectRef>
+          <a:fontRef idx="minor">
+            <a:schemeClr val="tx1"/>
+          </a:fontRef>
+        </p:style>
+      </p:cxnSp>
+      <p:sp>
+        <p:nvSpPr>
+          <p:cNvPr id="21" name="Rectangle 20"/>
+          <p:cNvSpPr/>
+          <p:nvPr/>
+        </p:nvSpPr>
+        <p:spPr>
+          <a:xfrm>
+            <a:off x="7527798" y="5287518"/>
+            <a:ext cx="32004" cy="32004"/>
+          </a:xfrm>
+          <a:prstGeom prst="rect">
+            <a:avLst/>
+          </a:prstGeom>
+          <a:noFill/>
+          <a:ln>
+            <a:noFill/>
+          </a:ln>
+          <a:effectLst/>
+        </p:spPr>
+        <p:style>
+          <a:lnRef idx="1">
+            <a:schemeClr val="accent1"/>
+          </a:lnRef>
+          <a:fillRef idx="3">
+            <a:schemeClr val="accent1"/>
+          </a:fillRef>
+          <a:effectRef idx="2">
+            <a:schemeClr val="accent1"/>
+          </a:effectRef>
+          <a:fontRef idx="minor">
+            <a:schemeClr val="lt1"/>
+          </a:fontRef>
+        </p:style>
+        <p:txBody>
+          <a:bodyPr rtlCol="0" anchor="ctr"/>
+          <a:lstStyle/>
+          <a:p>
+            <a:pPr algn="ctr"/>
+          </a:p>
+        </p:txBody>
+      </p:sp>
+      <p:sp>
+        <p:nvSpPr>
+          <p:cNvPr id="22" name="TextBox 21"/>
           <p:cNvSpPr txBox="1"/>
           <p:nvPr/>
         </p:nvSpPr>
         <p:spPr>
           <a:xfrm>
-            <a:off x="384048" y="640080"/>
-            <a:ext cx="6035040" cy="201168"/>
+            <a:off x="411480" y="3054096"/>
+            <a:ext cx="1828800" cy="274320"/>
           </a:xfrm>
           <a:prstGeom prst="rect">
             <a:avLst/>
@@ -3184,7 +4049,7 @@
           <a:noFill/>
         </p:spPr>
         <p:txBody>
-          <a:bodyPr wrap="square" anchor="t" lIns="0" rIns="0" tIns="0" bIns="0">
+          <a:bodyPr wrap="square" anchor="t" lIns="12700" rIns="12700" tIns="12700" bIns="12700">
             <a:spAutoFit/>
           </a:bodyPr>
           <a:lstStyle/>
@@ -3195,23 +4060,22 @@
                 <a:solidFill>
                   <a:srgbClr val="000000"/>
                 </a:solidFill>
-                <a:latin typeface="Arial"/>
               </a:rPr>
-              <a:t>Parent: A-0 Conduct Air-Focused Weather Exploitation Operations</a:t>
-            </a:r>
-          </a:p>
-        </p:txBody>
-      </p:sp>
-      <p:sp>
-        <p:nvSpPr>
-          <p:cNvPr id="5" name="TextBox 4"/>
+              <a:t>I1 Collocated Atmospheric Observations</a:t>
+            </a:r>
+          </a:p>
+        </p:txBody>
+      </p:sp>
+      <p:sp>
+        <p:nvSpPr>
+          <p:cNvPr id="23" name="TextBox 22"/>
           <p:cNvSpPr txBox="1"/>
           <p:nvPr/>
         </p:nvSpPr>
         <p:spPr>
           <a:xfrm>
-            <a:off x="7680960" y="640080"/>
-            <a:ext cx="2011680" cy="201168"/>
+            <a:off x="384048" y="4160520"/>
+            <a:ext cx="960120" cy="365760"/>
           </a:xfrm>
           <a:prstGeom prst="rect">
             <a:avLst/>
@@ -3219,34 +4083,33 @@
           <a:noFill/>
         </p:spPr>
         <p:txBody>
-          <a:bodyPr wrap="square" anchor="t" lIns="0" rIns="0" tIns="0" bIns="0">
+          <a:bodyPr wrap="square" anchor="t" lIns="12700" rIns="12700" tIns="12700" bIns="12700">
             <a:spAutoFit/>
           </a:bodyPr>
           <a:lstStyle/>
           <a:p>
-            <a:pPr algn="r"/>
+            <a:pPr algn="l"/>
             <a:r>
               <a:rPr sz="1000" b="0">
                 <a:solidFill>
                   <a:srgbClr val="000000"/>
                 </a:solidFill>
-                <a:latin typeface="Arial"/>
               </a:rPr>
-              <a:t>Distribution Statement C</a:t>
-            </a:r>
-          </a:p>
-        </p:txBody>
-      </p:sp>
-      <p:sp>
-        <p:nvSpPr>
-          <p:cNvPr id="6" name="TextBox 5"/>
+              <a:t>I2 Peer Platform Weather Observations</a:t>
+            </a:r>
+          </a:p>
+        </p:txBody>
+      </p:sp>
+      <p:sp>
+        <p:nvSpPr>
+          <p:cNvPr id="24" name="TextBox 23"/>
           <p:cNvSpPr txBox="1"/>
           <p:nvPr/>
         </p:nvSpPr>
         <p:spPr>
           <a:xfrm>
-            <a:off x="8229600" y="7242048"/>
-            <a:ext cx="1444752" cy="201168"/>
+            <a:off x="384048" y="1847088"/>
+            <a:ext cx="1874519" cy="237744"/>
           </a:xfrm>
           <a:prstGeom prst="rect">
             <a:avLst/>
@@ -3254,41 +4117,37 @@
           <a:noFill/>
         </p:spPr>
         <p:txBody>
-          <a:bodyPr wrap="square" anchor="t" lIns="0" rIns="0" tIns="0" bIns="0">
+          <a:bodyPr wrap="square" anchor="t" lIns="12700" rIns="12700" tIns="12700" bIns="12700">
             <a:spAutoFit/>
           </a:bodyPr>
           <a:lstStyle/>
           <a:p>
-            <a:pPr algn="r"/>
+            <a:pPr algn="l"/>
             <a:r>
               <a:rPr sz="1000" b="0">
                 <a:solidFill>
                   <a:srgbClr val="000000"/>
                 </a:solidFill>
-                <a:latin typeface="Arial"/>
               </a:rPr>
-              <a:t>Node: A0</a:t>
-            </a:r>
-          </a:p>
-        </p:txBody>
-      </p:sp>
-      <p:sp>
-        <p:nvSpPr>
-          <p:cNvPr id="7" name="Rectangle 6"/>
-          <p:cNvSpPr/>
-          <p:nvPr/>
-        </p:nvSpPr>
-        <p:spPr>
-          <a:xfrm>
-            <a:off x="640080" y="3429000"/>
-            <a:ext cx="1417320" cy="960120"/>
-          </a:xfrm>
-          <a:prstGeom prst="rect">
-            <a:avLst/>
-          </a:prstGeom>
-          <a:solidFill>
-            <a:srgbClr val="FFFFFF"/>
-          </a:solidFill>
+              <a:t>I3 Mission Weather Threshold Definitions</a:t>
+            </a:r>
+          </a:p>
+        </p:txBody>
+      </p:sp>
+      <p:cxnSp>
+        <p:nvCxnSpPr>
+          <p:cNvPr id="25" name="Connector 24"/>
+          <p:cNvCxnSpPr/>
+          <p:nvPr/>
+        </p:nvCxnSpPr>
+        <p:spPr>
+          <a:xfrm>
+            <a:off x="1920240" y="1188720"/>
+            <a:ext cx="0" cy="91440"/>
+          </a:xfrm>
+          <a:prstGeom prst="bentConnector3">
+            <a:avLst/>
+          </a:prstGeom>
           <a:ln w="15875">
             <a:solidFill>
               <a:srgbClr val="000000"/>
@@ -3297,65 +4156,34 @@
           <a:effectLst/>
         </p:spPr>
         <p:style>
-          <a:lnRef idx="1">
-            <a:schemeClr val="accent1"/>
-          </a:lnRef>
-          <a:fillRef idx="3">
-            <a:schemeClr val="accent1"/>
-          </a:fillRef>
-          <a:effectRef idx="2">
-            <a:schemeClr val="accent1"/>
-          </a:effectRef>
-          <a:fontRef idx="minor">
-            <a:schemeClr val="lt1"/>
-          </a:fontRef>
-        </p:style>
-        <p:txBody>
-          <a:bodyPr rtlCol="0" anchor="ctr" wrap="square" lIns="36576" rIns="36576" tIns="36576" bIns="36576"/>
-          <a:lstStyle/>
-          <a:p>
-            <a:pPr algn="ctr"/>
-            <a:r>
-              <a:rPr sz="1100" b="1">
-                <a:solidFill>
-                  <a:srgbClr val="000000"/>
-                </a:solidFill>
-                <a:latin typeface="Arial"/>
-              </a:rPr>
-              <a:t>A1</a:t>
-            </a:r>
-          </a:p>
-          <a:p>
-            <a:pPr algn="ctr"/>
-            <a:r>
-              <a:rPr sz="1000">
-                <a:solidFill>
-                  <a:srgbClr val="000000"/>
-                </a:solidFill>
-                <a:latin typeface="Arial"/>
-              </a:rPr>
-              <a:t>Acquire Micro-Weather Observations</a:t>
-            </a:r>
-          </a:p>
-        </p:txBody>
-      </p:sp>
-      <p:sp>
-        <p:nvSpPr>
-          <p:cNvPr id="8" name="Rectangle 7"/>
-          <p:cNvSpPr/>
-          <p:nvPr/>
-        </p:nvSpPr>
-        <p:spPr>
-          <a:xfrm>
-            <a:off x="2514600" y="1828800"/>
-            <a:ext cx="1417320" cy="960120"/>
-          </a:xfrm>
-          <a:prstGeom prst="rect">
-            <a:avLst/>
-          </a:prstGeom>
-          <a:solidFill>
-            <a:srgbClr val="FFFFFF"/>
-          </a:solidFill>
+          <a:lnRef idx="2">
+            <a:schemeClr val="accent1"/>
+          </a:lnRef>
+          <a:fillRef idx="0">
+            <a:schemeClr val="accent1"/>
+          </a:fillRef>
+          <a:effectRef idx="1">
+            <a:schemeClr val="accent1"/>
+          </a:effectRef>
+          <a:fontRef idx="minor">
+            <a:schemeClr val="tx1"/>
+          </a:fontRef>
+        </p:style>
+      </p:cxnSp>
+      <p:cxnSp>
+        <p:nvCxnSpPr>
+          <p:cNvPr id="26" name="Connector 25"/>
+          <p:cNvCxnSpPr/>
+          <p:nvPr/>
+        </p:nvCxnSpPr>
+        <p:spPr>
+          <a:xfrm>
+            <a:off x="1920240" y="1280160"/>
+            <a:ext cx="7635240" cy="0"/>
+          </a:xfrm>
+          <a:prstGeom prst="bentConnector3">
+            <a:avLst/>
+          </a:prstGeom>
           <a:ln w="15875">
             <a:solidFill>
               <a:srgbClr val="000000"/>
@@ -3364,69 +4192,74 @@
           <a:effectLst/>
         </p:spPr>
         <p:style>
-          <a:lnRef idx="1">
-            <a:schemeClr val="accent1"/>
-          </a:lnRef>
-          <a:fillRef idx="3">
-            <a:schemeClr val="accent1"/>
-          </a:fillRef>
-          <a:effectRef idx="2">
-            <a:schemeClr val="accent1"/>
-          </a:effectRef>
-          <a:fontRef idx="minor">
-            <a:schemeClr val="lt1"/>
-          </a:fontRef>
-        </p:style>
-        <p:txBody>
-          <a:bodyPr rtlCol="0" anchor="ctr" wrap="square" lIns="36576" rIns="36576" tIns="36576" bIns="36576"/>
-          <a:lstStyle/>
-          <a:p>
-            <a:pPr algn="ctr"/>
-            <a:r>
-              <a:rPr sz="1100" b="1">
-                <a:solidFill>
-                  <a:srgbClr val="000000"/>
-                </a:solidFill>
-                <a:latin typeface="Arial"/>
-              </a:rPr>
-              <a:t>A2</a:t>
-            </a:r>
-          </a:p>
-          <a:p>
-            <a:pPr algn="ctr"/>
-            <a:r>
-              <a:rPr sz="1000">
-                <a:solidFill>
-                  <a:srgbClr val="000000"/>
-                </a:solidFill>
-                <a:latin typeface="Arial"/>
-              </a:rPr>
-              <a:t>Generate Local Weather State</a:t>
-            </a:r>
-          </a:p>
-        </p:txBody>
-      </p:sp>
-      <p:sp>
-        <p:nvSpPr>
-          <p:cNvPr id="9" name="Rectangle 8"/>
-          <p:cNvSpPr/>
-          <p:nvPr/>
-        </p:nvSpPr>
-        <p:spPr>
-          <a:xfrm>
-            <a:off x="4069080" y="4983480"/>
-            <a:ext cx="1417320" cy="960120"/>
-          </a:xfrm>
-          <a:prstGeom prst="rect">
-            <a:avLst/>
-          </a:prstGeom>
-          <a:solidFill>
-            <a:srgbClr val="FFFFFF"/>
-          </a:solidFill>
+          <a:lnRef idx="2">
+            <a:schemeClr val="accent1"/>
+          </a:lnRef>
+          <a:fillRef idx="0">
+            <a:schemeClr val="accent1"/>
+          </a:fillRef>
+          <a:effectRef idx="1">
+            <a:schemeClr val="accent1"/>
+          </a:effectRef>
+          <a:fontRef idx="minor">
+            <a:schemeClr val="tx1"/>
+          </a:fontRef>
+        </p:style>
+      </p:cxnSp>
+      <p:cxnSp>
+        <p:nvCxnSpPr>
+          <p:cNvPr id="27" name="Connector 26"/>
+          <p:cNvCxnSpPr/>
+          <p:nvPr/>
+        </p:nvCxnSpPr>
+        <p:spPr>
+          <a:xfrm>
+            <a:off x="7955279" y="1280160"/>
+            <a:ext cx="0" cy="868680"/>
+          </a:xfrm>
+          <a:prstGeom prst="bentConnector3">
+            <a:avLst/>
+          </a:prstGeom>
           <a:ln w="15875">
             <a:solidFill>
               <a:srgbClr val="000000"/>
             </a:solidFill>
+            <a:tailEnd type="triangle" w="med" len="med"/>
+          </a:ln>
+          <a:effectLst/>
+        </p:spPr>
+        <p:style>
+          <a:lnRef idx="2">
+            <a:schemeClr val="accent1"/>
+          </a:lnRef>
+          <a:fillRef idx="0">
+            <a:schemeClr val="accent1"/>
+          </a:fillRef>
+          <a:effectRef idx="1">
+            <a:schemeClr val="accent1"/>
+          </a:effectRef>
+          <a:fontRef idx="minor">
+            <a:schemeClr val="tx1"/>
+          </a:fontRef>
+        </p:style>
+      </p:cxnSp>
+      <p:sp>
+        <p:nvSpPr>
+          <p:cNvPr id="28" name="Rectangle 27"/>
+          <p:cNvSpPr/>
+          <p:nvPr/>
+        </p:nvSpPr>
+        <p:spPr>
+          <a:xfrm>
+            <a:off x="7939277" y="2132838"/>
+            <a:ext cx="32004" cy="32004"/>
+          </a:xfrm>
+          <a:prstGeom prst="rect">
+            <a:avLst/>
+          </a:prstGeom>
+          <a:noFill/>
+          <a:ln>
+            <a:noFill/>
           </a:ln>
           <a:effectLst/>
         </p:spPr>
@@ -3445,51 +4278,27 @@
           </a:fontRef>
         </p:style>
         <p:txBody>
-          <a:bodyPr rtlCol="0" anchor="ctr" wrap="square" lIns="36576" rIns="36576" tIns="36576" bIns="36576"/>
+          <a:bodyPr rtlCol="0" anchor="ctr"/>
           <a:lstStyle/>
           <a:p>
             <a:pPr algn="ctr"/>
-            <a:r>
-              <a:rPr sz="1100" b="1">
-                <a:solidFill>
-                  <a:srgbClr val="000000"/>
-                </a:solidFill>
-                <a:latin typeface="Arial"/>
-              </a:rPr>
-              <a:t>A3</a:t>
-            </a:r>
-          </a:p>
-          <a:p>
-            <a:pPr algn="ctr"/>
-            <a:r>
-              <a:rPr sz="1000">
-                <a:solidFill>
-                  <a:srgbClr val="000000"/>
-                </a:solidFill>
-                <a:latin typeface="Arial"/>
-              </a:rPr>
-              <a:t>Quantify Uncertainty</a:t>
-            </a:r>
-          </a:p>
-        </p:txBody>
-      </p:sp>
-      <p:sp>
-        <p:nvSpPr>
-          <p:cNvPr id="10" name="Rectangle 9"/>
-          <p:cNvSpPr/>
-          <p:nvPr/>
-        </p:nvSpPr>
-        <p:spPr>
-          <a:xfrm>
-            <a:off x="5532120" y="3429000"/>
-            <a:ext cx="1371600" cy="960120"/>
-          </a:xfrm>
-          <a:prstGeom prst="rect">
-            <a:avLst/>
-          </a:prstGeom>
-          <a:solidFill>
-            <a:srgbClr val="FFFFFF"/>
-          </a:solidFill>
+          </a:p>
+        </p:txBody>
+      </p:sp>
+      <p:cxnSp>
+        <p:nvCxnSpPr>
+          <p:cNvPr id="29" name="Connector 28"/>
+          <p:cNvCxnSpPr/>
+          <p:nvPr/>
+        </p:nvCxnSpPr>
+        <p:spPr>
+          <a:xfrm>
+            <a:off x="9555480" y="1280160"/>
+            <a:ext cx="0" cy="3383280"/>
+          </a:xfrm>
+          <a:prstGeom prst="bentConnector3">
+            <a:avLst/>
+          </a:prstGeom>
           <a:ln w="15875">
             <a:solidFill>
               <a:srgbClr val="000000"/>
@@ -3498,65 +4307,34 @@
           <a:effectLst/>
         </p:spPr>
         <p:style>
-          <a:lnRef idx="1">
-            <a:schemeClr val="accent1"/>
-          </a:lnRef>
-          <a:fillRef idx="3">
-            <a:schemeClr val="accent1"/>
-          </a:fillRef>
-          <a:effectRef idx="2">
-            <a:schemeClr val="accent1"/>
-          </a:effectRef>
-          <a:fontRef idx="minor">
-            <a:schemeClr val="lt1"/>
-          </a:fontRef>
-        </p:style>
-        <p:txBody>
-          <a:bodyPr rtlCol="0" anchor="ctr" wrap="square" lIns="36576" rIns="36576" tIns="36576" bIns="36576"/>
-          <a:lstStyle/>
-          <a:p>
-            <a:pPr algn="ctr"/>
-            <a:r>
-              <a:rPr sz="1100" b="1">
-                <a:solidFill>
-                  <a:srgbClr val="000000"/>
-                </a:solidFill>
-                <a:latin typeface="Arial"/>
-              </a:rPr>
-              <a:t>A4</a:t>
-            </a:r>
-          </a:p>
-          <a:p>
-            <a:pPr algn="ctr"/>
-            <a:r>
-              <a:rPr sz="1000">
-                <a:solidFill>
-                  <a:srgbClr val="000000"/>
-                </a:solidFill>
-                <a:latin typeface="Arial"/>
-              </a:rPr>
-              <a:t>Federate and Maintain Federated Weather Context</a:t>
-            </a:r>
-          </a:p>
-        </p:txBody>
-      </p:sp>
-      <p:sp>
-        <p:nvSpPr>
-          <p:cNvPr id="11" name="Rectangle 10"/>
-          <p:cNvSpPr/>
-          <p:nvPr/>
-        </p:nvSpPr>
-        <p:spPr>
-          <a:xfrm>
-            <a:off x="7132320" y="1828800"/>
-            <a:ext cx="1325880" cy="960120"/>
-          </a:xfrm>
-          <a:prstGeom prst="rect">
-            <a:avLst/>
-          </a:prstGeom>
-          <a:solidFill>
-            <a:srgbClr val="FFFFFF"/>
-          </a:solidFill>
+          <a:lnRef idx="2">
+            <a:schemeClr val="accent1"/>
+          </a:lnRef>
+          <a:fillRef idx="0">
+            <a:schemeClr val="accent1"/>
+          </a:fillRef>
+          <a:effectRef idx="1">
+            <a:schemeClr val="accent1"/>
+          </a:effectRef>
+          <a:fontRef idx="minor">
+            <a:schemeClr val="tx1"/>
+          </a:fontRef>
+        </p:style>
+      </p:cxnSp>
+      <p:cxnSp>
+        <p:nvCxnSpPr>
+          <p:cNvPr id="30" name="Connector 29"/>
+          <p:cNvCxnSpPr/>
+          <p:nvPr/>
+        </p:nvCxnSpPr>
+        <p:spPr>
+          <a:xfrm flipH="1">
+            <a:off x="7955279" y="4663440"/>
+            <a:ext cx="1600201" cy="0"/>
+          </a:xfrm>
+          <a:prstGeom prst="bentConnector3">
+            <a:avLst/>
+          </a:prstGeom>
           <a:ln w="15875">
             <a:solidFill>
               <a:srgbClr val="000000"/>
@@ -3565,127 +4343,69 @@
           <a:effectLst/>
         </p:spPr>
         <p:style>
-          <a:lnRef idx="1">
-            <a:schemeClr val="accent1"/>
-          </a:lnRef>
-          <a:fillRef idx="3">
-            <a:schemeClr val="accent1"/>
-          </a:fillRef>
-          <a:effectRef idx="2">
-            <a:schemeClr val="accent1"/>
-          </a:effectRef>
-          <a:fontRef idx="minor">
-            <a:schemeClr val="lt1"/>
-          </a:fontRef>
-        </p:style>
-        <p:txBody>
-          <a:bodyPr rtlCol="0" anchor="ctr" wrap="square" lIns="36576" rIns="36576" tIns="36576" bIns="36576"/>
-          <a:lstStyle/>
-          <a:p>
-            <a:pPr algn="ctr"/>
-            <a:r>
-              <a:rPr sz="1100" b="1">
-                <a:solidFill>
-                  <a:srgbClr val="000000"/>
-                </a:solidFill>
-                <a:latin typeface="Arial"/>
-              </a:rPr>
-              <a:t>A5</a:t>
-            </a:r>
-          </a:p>
-          <a:p>
-            <a:pPr algn="ctr"/>
-            <a:r>
-              <a:rPr sz="1000">
-                <a:solidFill>
-                  <a:srgbClr val="000000"/>
-                </a:solidFill>
-                <a:latin typeface="Arial"/>
-              </a:rPr>
-              <a:t>Detect Threshold Crossings (Descriptive Support)</a:t>
-            </a:r>
-          </a:p>
-        </p:txBody>
-      </p:sp>
-      <p:sp>
-        <p:nvSpPr>
-          <p:cNvPr id="12" name="Rectangle 11"/>
-          <p:cNvSpPr/>
-          <p:nvPr/>
-        </p:nvSpPr>
-        <p:spPr>
-          <a:xfrm>
-            <a:off x="7589520" y="4983480"/>
-            <a:ext cx="1325880" cy="960120"/>
-          </a:xfrm>
-          <a:prstGeom prst="rect">
-            <a:avLst/>
-          </a:prstGeom>
-          <a:solidFill>
-            <a:srgbClr val="FFFFFF"/>
-          </a:solidFill>
+          <a:lnRef idx="2">
+            <a:schemeClr val="accent1"/>
+          </a:lnRef>
+          <a:fillRef idx="0">
+            <a:schemeClr val="accent1"/>
+          </a:fillRef>
+          <a:effectRef idx="1">
+            <a:schemeClr val="accent1"/>
+          </a:effectRef>
+          <a:fontRef idx="minor">
+            <a:schemeClr val="tx1"/>
+          </a:fontRef>
+        </p:style>
+      </p:cxnSp>
+      <p:cxnSp>
+        <p:nvCxnSpPr>
+          <p:cNvPr id="31" name="Connector 30"/>
+          <p:cNvCxnSpPr/>
+          <p:nvPr/>
+        </p:nvCxnSpPr>
+        <p:spPr>
+          <a:xfrm>
+            <a:off x="7955279" y="4663440"/>
+            <a:ext cx="0" cy="137160"/>
+          </a:xfrm>
+          <a:prstGeom prst="bentConnector3">
+            <a:avLst/>
+          </a:prstGeom>
           <a:ln w="15875">
             <a:solidFill>
               <a:srgbClr val="000000"/>
             </a:solidFill>
-          </a:ln>
-          <a:effectLst/>
-        </p:spPr>
-        <p:style>
-          <a:lnRef idx="1">
-            <a:schemeClr val="accent1"/>
-          </a:lnRef>
-          <a:fillRef idx="3">
-            <a:schemeClr val="accent1"/>
-          </a:fillRef>
-          <a:effectRef idx="2">
-            <a:schemeClr val="accent1"/>
-          </a:effectRef>
-          <a:fontRef idx="minor">
-            <a:schemeClr val="lt1"/>
-          </a:fontRef>
-        </p:style>
-        <p:txBody>
-          <a:bodyPr rtlCol="0" anchor="ctr" wrap="square" lIns="36576" rIns="36576" tIns="36576" bIns="36576"/>
-          <a:lstStyle/>
-          <a:p>
-            <a:pPr algn="ctr"/>
-            <a:r>
-              <a:rPr sz="1100" b="1">
-                <a:solidFill>
-                  <a:srgbClr val="000000"/>
-                </a:solidFill>
-                <a:latin typeface="Arial"/>
-              </a:rPr>
-              <a:t>A6</a:t>
-            </a:r>
-          </a:p>
-          <a:p>
-            <a:pPr algn="ctr"/>
-            <a:r>
-              <a:rPr sz="1000">
-                <a:solidFill>
-                  <a:srgbClr val="000000"/>
-                </a:solidFill>
-                <a:latin typeface="Arial"/>
-              </a:rPr>
-              <a:t>Produce Mission-Tailored Weather Context</a:t>
-            </a:r>
-          </a:p>
-        </p:txBody>
-      </p:sp>
-      <p:sp>
-        <p:nvSpPr>
-          <p:cNvPr id="13" name="Oval 12"/>
+            <a:tailEnd type="triangle" w="med" len="med"/>
+          </a:ln>
+          <a:effectLst/>
+        </p:spPr>
+        <p:style>
+          <a:lnRef idx="2">
+            <a:schemeClr val="accent1"/>
+          </a:lnRef>
+          <a:fillRef idx="0">
+            <a:schemeClr val="accent1"/>
+          </a:fillRef>
+          <a:effectRef idx="1">
+            <a:schemeClr val="accent1"/>
+          </a:effectRef>
+          <a:fontRef idx="minor">
+            <a:schemeClr val="tx1"/>
+          </a:fontRef>
+        </p:style>
+      </p:cxnSp>
+      <p:sp>
+        <p:nvSpPr>
+          <p:cNvPr id="32" name="Rectangle 31"/>
           <p:cNvSpPr/>
           <p:nvPr/>
         </p:nvSpPr>
         <p:spPr>
           <a:xfrm>
-            <a:off x="621792" y="3727551"/>
-            <a:ext cx="36576" cy="36576"/>
-          </a:xfrm>
-          <a:prstGeom prst="ellipse">
+            <a:off x="7939277" y="4784598"/>
+            <a:ext cx="32004" cy="32004"/>
+          </a:xfrm>
+          <a:prstGeom prst="rect">
             <a:avLst/>
           </a:prstGeom>
           <a:noFill/>
@@ -3716,63 +4436,93 @@
           </a:p>
         </p:txBody>
       </p:sp>
-      <p:sp>
-        <p:nvSpPr>
-          <p:cNvPr id="14" name="Oval 13"/>
-          <p:cNvSpPr/>
-          <p:nvPr/>
-        </p:nvSpPr>
-        <p:spPr>
-          <a:xfrm>
-            <a:off x="621792" y="4053992"/>
-            <a:ext cx="36576" cy="36576"/>
-          </a:xfrm>
-          <a:prstGeom prst="ellipse">
-            <a:avLst/>
-          </a:prstGeom>
-          <a:noFill/>
-          <a:ln>
-            <a:noFill/>
-          </a:ln>
-          <a:effectLst/>
-        </p:spPr>
-        <p:style>
-          <a:lnRef idx="1">
-            <a:schemeClr val="accent1"/>
-          </a:lnRef>
-          <a:fillRef idx="3">
-            <a:schemeClr val="accent1"/>
-          </a:fillRef>
-          <a:effectRef idx="2">
-            <a:schemeClr val="accent1"/>
-          </a:effectRef>
-          <a:fontRef idx="minor">
-            <a:schemeClr val="lt1"/>
-          </a:fontRef>
-        </p:style>
-        <p:txBody>
-          <a:bodyPr rtlCol="0" anchor="ctr"/>
-          <a:lstStyle/>
-          <a:p>
-            <a:pPr algn="ctr"/>
-          </a:p>
-        </p:txBody>
-      </p:sp>
       <p:cxnSp>
         <p:nvCxnSpPr>
-          <p:cNvPr id="15" name="Connector 14"/>
+          <p:cNvPr id="33" name="Connector 32"/>
           <p:cNvCxnSpPr/>
           <p:nvPr/>
         </p:nvCxnSpPr>
         <p:spPr>
           <a:xfrm>
-            <a:off x="502920" y="3745839"/>
-            <a:ext cx="137160" cy="0"/>
+            <a:off x="4754880" y="1188720"/>
+            <a:ext cx="0" cy="320040"/>
           </a:xfrm>
           <a:prstGeom prst="bentConnector3">
             <a:avLst/>
           </a:prstGeom>
-          <a:ln w="12700">
+          <a:ln w="15875">
+            <a:solidFill>
+              <a:srgbClr val="000000"/>
+            </a:solidFill>
+          </a:ln>
+          <a:effectLst/>
+        </p:spPr>
+        <p:style>
+          <a:lnRef idx="2">
+            <a:schemeClr val="accent1"/>
+          </a:lnRef>
+          <a:fillRef idx="0">
+            <a:schemeClr val="accent1"/>
+          </a:fillRef>
+          <a:effectRef idx="1">
+            <a:schemeClr val="accent1"/>
+          </a:effectRef>
+          <a:fontRef idx="minor">
+            <a:schemeClr val="tx1"/>
+          </a:fontRef>
+        </p:style>
+      </p:cxnSp>
+      <p:cxnSp>
+        <p:nvCxnSpPr>
+          <p:cNvPr id="34" name="Connector 33"/>
+          <p:cNvCxnSpPr/>
+          <p:nvPr/>
+        </p:nvCxnSpPr>
+        <p:spPr>
+          <a:xfrm>
+            <a:off x="4754880" y="1508760"/>
+            <a:ext cx="4919472" cy="0"/>
+          </a:xfrm>
+          <a:prstGeom prst="bentConnector3">
+            <a:avLst/>
+          </a:prstGeom>
+          <a:ln w="15875">
+            <a:solidFill>
+              <a:srgbClr val="000000"/>
+            </a:solidFill>
+          </a:ln>
+          <a:effectLst/>
+        </p:spPr>
+        <p:style>
+          <a:lnRef idx="2">
+            <a:schemeClr val="accent1"/>
+          </a:lnRef>
+          <a:fillRef idx="0">
+            <a:schemeClr val="accent1"/>
+          </a:fillRef>
+          <a:effectRef idx="1">
+            <a:schemeClr val="accent1"/>
+          </a:effectRef>
+          <a:fontRef idx="minor">
+            <a:schemeClr val="tx1"/>
+          </a:fontRef>
+        </p:style>
+      </p:cxnSp>
+      <p:cxnSp>
+        <p:nvCxnSpPr>
+          <p:cNvPr id="35" name="Connector 34"/>
+          <p:cNvCxnSpPr/>
+          <p:nvPr/>
+        </p:nvCxnSpPr>
+        <p:spPr>
+          <a:xfrm>
+            <a:off x="5897880" y="1508760"/>
+            <a:ext cx="0" cy="1874520"/>
+          </a:xfrm>
+          <a:prstGeom prst="bentConnector3">
+            <a:avLst/>
+          </a:prstGeom>
+          <a:ln w="15875">
             <a:solidFill>
               <a:srgbClr val="000000"/>
             </a:solidFill>
@@ -3797,14 +4547,437 @@
       </p:cxnSp>
       <p:sp>
         <p:nvSpPr>
-          <p:cNvPr id="16" name="TextBox 15"/>
+          <p:cNvPr id="36" name="Rectangle 35"/>
+          <p:cNvSpPr/>
+          <p:nvPr/>
+        </p:nvSpPr>
+        <p:spPr>
+          <a:xfrm>
+            <a:off x="5881878" y="3367278"/>
+            <a:ext cx="32004" cy="32004"/>
+          </a:xfrm>
+          <a:prstGeom prst="rect">
+            <a:avLst/>
+          </a:prstGeom>
+          <a:noFill/>
+          <a:ln>
+            <a:noFill/>
+          </a:ln>
+          <a:effectLst/>
+        </p:spPr>
+        <p:style>
+          <a:lnRef idx="1">
+            <a:schemeClr val="accent1"/>
+          </a:lnRef>
+          <a:fillRef idx="3">
+            <a:schemeClr val="accent1"/>
+          </a:fillRef>
+          <a:effectRef idx="2">
+            <a:schemeClr val="accent1"/>
+          </a:effectRef>
+          <a:fontRef idx="minor">
+            <a:schemeClr val="lt1"/>
+          </a:fontRef>
+        </p:style>
+        <p:txBody>
+          <a:bodyPr rtlCol="0" anchor="ctr"/>
+          <a:lstStyle/>
+          <a:p>
+            <a:pPr algn="ctr"/>
+          </a:p>
+        </p:txBody>
+      </p:sp>
+      <p:cxnSp>
+        <p:nvCxnSpPr>
+          <p:cNvPr id="37" name="Connector 36"/>
+          <p:cNvCxnSpPr/>
+          <p:nvPr/>
+        </p:nvCxnSpPr>
+        <p:spPr>
+          <a:xfrm>
+            <a:off x="8595360" y="1508760"/>
+            <a:ext cx="0" cy="640080"/>
+          </a:xfrm>
+          <a:prstGeom prst="bentConnector3">
+            <a:avLst/>
+          </a:prstGeom>
+          <a:ln w="15875">
+            <a:solidFill>
+              <a:srgbClr val="000000"/>
+            </a:solidFill>
+            <a:tailEnd type="triangle" w="med" len="med"/>
+          </a:ln>
+          <a:effectLst/>
+        </p:spPr>
+        <p:style>
+          <a:lnRef idx="2">
+            <a:schemeClr val="accent1"/>
+          </a:lnRef>
+          <a:fillRef idx="0">
+            <a:schemeClr val="accent1"/>
+          </a:fillRef>
+          <a:effectRef idx="1">
+            <a:schemeClr val="accent1"/>
+          </a:effectRef>
+          <a:fontRef idx="minor">
+            <a:schemeClr val="tx1"/>
+          </a:fontRef>
+        </p:style>
+      </p:cxnSp>
+      <p:sp>
+        <p:nvSpPr>
+          <p:cNvPr id="38" name="Rectangle 37"/>
+          <p:cNvSpPr/>
+          <p:nvPr/>
+        </p:nvSpPr>
+        <p:spPr>
+          <a:xfrm>
+            <a:off x="8579358" y="2132838"/>
+            <a:ext cx="32004" cy="32004"/>
+          </a:xfrm>
+          <a:prstGeom prst="rect">
+            <a:avLst/>
+          </a:prstGeom>
+          <a:noFill/>
+          <a:ln>
+            <a:noFill/>
+          </a:ln>
+          <a:effectLst/>
+        </p:spPr>
+        <p:style>
+          <a:lnRef idx="1">
+            <a:schemeClr val="accent1"/>
+          </a:lnRef>
+          <a:fillRef idx="3">
+            <a:schemeClr val="accent1"/>
+          </a:fillRef>
+          <a:effectRef idx="2">
+            <a:schemeClr val="accent1"/>
+          </a:effectRef>
+          <a:fontRef idx="minor">
+            <a:schemeClr val="lt1"/>
+          </a:fontRef>
+        </p:style>
+        <p:txBody>
+          <a:bodyPr rtlCol="0" anchor="ctr"/>
+          <a:lstStyle/>
+          <a:p>
+            <a:pPr algn="ctr"/>
+          </a:p>
+        </p:txBody>
+      </p:sp>
+      <p:cxnSp>
+        <p:nvCxnSpPr>
+          <p:cNvPr id="39" name="Connector 38"/>
+          <p:cNvCxnSpPr/>
+          <p:nvPr/>
+        </p:nvCxnSpPr>
+        <p:spPr>
+          <a:xfrm>
+            <a:off x="9674352" y="1508760"/>
+            <a:ext cx="0" cy="3063240"/>
+          </a:xfrm>
+          <a:prstGeom prst="bentConnector3">
+            <a:avLst/>
+          </a:prstGeom>
+          <a:ln w="15875">
+            <a:solidFill>
+              <a:srgbClr val="000000"/>
+            </a:solidFill>
+          </a:ln>
+          <a:effectLst/>
+        </p:spPr>
+        <p:style>
+          <a:lnRef idx="2">
+            <a:schemeClr val="accent1"/>
+          </a:lnRef>
+          <a:fillRef idx="0">
+            <a:schemeClr val="accent1"/>
+          </a:fillRef>
+          <a:effectRef idx="1">
+            <a:schemeClr val="accent1"/>
+          </a:effectRef>
+          <a:fontRef idx="minor">
+            <a:schemeClr val="tx1"/>
+          </a:fontRef>
+        </p:style>
+      </p:cxnSp>
+      <p:cxnSp>
+        <p:nvCxnSpPr>
+          <p:cNvPr id="40" name="Connector 39"/>
+          <p:cNvCxnSpPr/>
+          <p:nvPr/>
+        </p:nvCxnSpPr>
+        <p:spPr>
+          <a:xfrm flipH="1">
+            <a:off x="8595360" y="4572000"/>
+            <a:ext cx="1078992" cy="0"/>
+          </a:xfrm>
+          <a:prstGeom prst="bentConnector3">
+            <a:avLst/>
+          </a:prstGeom>
+          <a:ln w="15875">
+            <a:solidFill>
+              <a:srgbClr val="000000"/>
+            </a:solidFill>
+          </a:ln>
+          <a:effectLst/>
+        </p:spPr>
+        <p:style>
+          <a:lnRef idx="2">
+            <a:schemeClr val="accent1"/>
+          </a:lnRef>
+          <a:fillRef idx="0">
+            <a:schemeClr val="accent1"/>
+          </a:fillRef>
+          <a:effectRef idx="1">
+            <a:schemeClr val="accent1"/>
+          </a:effectRef>
+          <a:fontRef idx="minor">
+            <a:schemeClr val="tx1"/>
+          </a:fontRef>
+        </p:style>
+      </p:cxnSp>
+      <p:cxnSp>
+        <p:nvCxnSpPr>
+          <p:cNvPr id="41" name="Connector 40"/>
+          <p:cNvCxnSpPr/>
+          <p:nvPr/>
+        </p:nvCxnSpPr>
+        <p:spPr>
+          <a:xfrm>
+            <a:off x="8595360" y="4572000"/>
+            <a:ext cx="0" cy="228600"/>
+          </a:xfrm>
+          <a:prstGeom prst="bentConnector3">
+            <a:avLst/>
+          </a:prstGeom>
+          <a:ln w="15875">
+            <a:solidFill>
+              <a:srgbClr val="000000"/>
+            </a:solidFill>
+            <a:tailEnd type="triangle" w="med" len="med"/>
+          </a:ln>
+          <a:effectLst/>
+        </p:spPr>
+        <p:style>
+          <a:lnRef idx="2">
+            <a:schemeClr val="accent1"/>
+          </a:lnRef>
+          <a:fillRef idx="0">
+            <a:schemeClr val="accent1"/>
+          </a:fillRef>
+          <a:effectRef idx="1">
+            <a:schemeClr val="accent1"/>
+          </a:effectRef>
+          <a:fontRef idx="minor">
+            <a:schemeClr val="tx1"/>
+          </a:fontRef>
+        </p:style>
+      </p:cxnSp>
+      <p:sp>
+        <p:nvSpPr>
+          <p:cNvPr id="42" name="Rectangle 41"/>
+          <p:cNvSpPr/>
+          <p:nvPr/>
+        </p:nvSpPr>
+        <p:spPr>
+          <a:xfrm>
+            <a:off x="8579358" y="4784598"/>
+            <a:ext cx="32004" cy="32004"/>
+          </a:xfrm>
+          <a:prstGeom prst="rect">
+            <a:avLst/>
+          </a:prstGeom>
+          <a:noFill/>
+          <a:ln>
+            <a:noFill/>
+          </a:ln>
+          <a:effectLst/>
+        </p:spPr>
+        <p:style>
+          <a:lnRef idx="1">
+            <a:schemeClr val="accent1"/>
+          </a:lnRef>
+          <a:fillRef idx="3">
+            <a:schemeClr val="accent1"/>
+          </a:fillRef>
+          <a:effectRef idx="2">
+            <a:schemeClr val="accent1"/>
+          </a:effectRef>
+          <a:fontRef idx="minor">
+            <a:schemeClr val="lt1"/>
+          </a:fontRef>
+        </p:style>
+        <p:txBody>
+          <a:bodyPr rtlCol="0" anchor="ctr"/>
+          <a:lstStyle/>
+          <a:p>
+            <a:pPr algn="ctr"/>
+          </a:p>
+        </p:txBody>
+      </p:sp>
+      <p:cxnSp>
+        <p:nvCxnSpPr>
+          <p:cNvPr id="43" name="Connector 42"/>
+          <p:cNvCxnSpPr/>
+          <p:nvPr/>
+        </p:nvCxnSpPr>
+        <p:spPr>
+          <a:xfrm>
+            <a:off x="7315200" y="1188720"/>
+            <a:ext cx="0" cy="548640"/>
+          </a:xfrm>
+          <a:prstGeom prst="bentConnector3">
+            <a:avLst/>
+          </a:prstGeom>
+          <a:ln w="15875">
+            <a:solidFill>
+              <a:srgbClr val="000000"/>
+            </a:solidFill>
+          </a:ln>
+          <a:effectLst/>
+        </p:spPr>
+        <p:style>
+          <a:lnRef idx="2">
+            <a:schemeClr val="accent1"/>
+          </a:lnRef>
+          <a:fillRef idx="0">
+            <a:schemeClr val="accent1"/>
+          </a:fillRef>
+          <a:effectRef idx="1">
+            <a:schemeClr val="accent1"/>
+          </a:effectRef>
+          <a:fontRef idx="minor">
+            <a:schemeClr val="tx1"/>
+          </a:fontRef>
+        </p:style>
+      </p:cxnSp>
+      <p:cxnSp>
+        <p:nvCxnSpPr>
+          <p:cNvPr id="44" name="Connector 43"/>
+          <p:cNvCxnSpPr/>
+          <p:nvPr/>
+        </p:nvCxnSpPr>
+        <p:spPr>
+          <a:xfrm>
+            <a:off x="6537960" y="1737360"/>
+            <a:ext cx="777240" cy="0"/>
+          </a:xfrm>
+          <a:prstGeom prst="bentConnector3">
+            <a:avLst/>
+          </a:prstGeom>
+          <a:ln w="15875">
+            <a:solidFill>
+              <a:srgbClr val="000000"/>
+            </a:solidFill>
+          </a:ln>
+          <a:effectLst/>
+        </p:spPr>
+        <p:style>
+          <a:lnRef idx="2">
+            <a:schemeClr val="accent1"/>
+          </a:lnRef>
+          <a:fillRef idx="0">
+            <a:schemeClr val="accent1"/>
+          </a:fillRef>
+          <a:effectRef idx="1">
+            <a:schemeClr val="accent1"/>
+          </a:effectRef>
+          <a:fontRef idx="minor">
+            <a:schemeClr val="tx1"/>
+          </a:fontRef>
+        </p:style>
+      </p:cxnSp>
+      <p:cxnSp>
+        <p:nvCxnSpPr>
+          <p:cNvPr id="45" name="Connector 44"/>
+          <p:cNvCxnSpPr/>
+          <p:nvPr/>
+        </p:nvCxnSpPr>
+        <p:spPr>
+          <a:xfrm>
+            <a:off x="6537960" y="1737360"/>
+            <a:ext cx="0" cy="1645920"/>
+          </a:xfrm>
+          <a:prstGeom prst="bentConnector3">
+            <a:avLst/>
+          </a:prstGeom>
+          <a:ln w="15875">
+            <a:solidFill>
+              <a:srgbClr val="000000"/>
+            </a:solidFill>
+            <a:tailEnd type="triangle" w="med" len="med"/>
+          </a:ln>
+          <a:effectLst/>
+        </p:spPr>
+        <p:style>
+          <a:lnRef idx="2">
+            <a:schemeClr val="accent1"/>
+          </a:lnRef>
+          <a:fillRef idx="0">
+            <a:schemeClr val="accent1"/>
+          </a:fillRef>
+          <a:effectRef idx="1">
+            <a:schemeClr val="accent1"/>
+          </a:effectRef>
+          <a:fontRef idx="minor">
+            <a:schemeClr val="tx1"/>
+          </a:fontRef>
+        </p:style>
+      </p:cxnSp>
+      <p:sp>
+        <p:nvSpPr>
+          <p:cNvPr id="46" name="Rectangle 45"/>
+          <p:cNvSpPr/>
+          <p:nvPr/>
+        </p:nvSpPr>
+        <p:spPr>
+          <a:xfrm>
+            <a:off x="6521958" y="3367278"/>
+            <a:ext cx="32004" cy="32004"/>
+          </a:xfrm>
+          <a:prstGeom prst="rect">
+            <a:avLst/>
+          </a:prstGeom>
+          <a:noFill/>
+          <a:ln>
+            <a:noFill/>
+          </a:ln>
+          <a:effectLst/>
+        </p:spPr>
+        <p:style>
+          <a:lnRef idx="1">
+            <a:schemeClr val="accent1"/>
+          </a:lnRef>
+          <a:fillRef idx="3">
+            <a:schemeClr val="accent1"/>
+          </a:fillRef>
+          <a:effectRef idx="2">
+            <a:schemeClr val="accent1"/>
+          </a:effectRef>
+          <a:fontRef idx="minor">
+            <a:schemeClr val="lt1"/>
+          </a:fontRef>
+        </p:style>
+        <p:txBody>
+          <a:bodyPr rtlCol="0" anchor="ctr"/>
+          <a:lstStyle/>
+          <a:p>
+            <a:pPr algn="ctr"/>
+          </a:p>
+        </p:txBody>
+      </p:sp>
+      <p:sp>
+        <p:nvSpPr>
+          <p:cNvPr id="47" name="TextBox 46"/>
           <p:cNvSpPr txBox="1"/>
           <p:nvPr/>
         </p:nvSpPr>
         <p:spPr>
           <a:xfrm>
-            <a:off x="365760" y="3471519"/>
-            <a:ext cx="1463040" cy="246888"/>
+            <a:off x="502920" y="932688"/>
+            <a:ext cx="3017520" cy="256032"/>
           </a:xfrm>
           <a:prstGeom prst="rect">
             <a:avLst/>
@@ -3812,7 +4985,7 @@
           <a:noFill/>
         </p:spPr>
         <p:txBody>
-          <a:bodyPr wrap="square" anchor="t" lIns="0" rIns="0" tIns="0" bIns="0">
+          <a:bodyPr wrap="square" anchor="t" lIns="12700" rIns="12700" tIns="12700" bIns="12700">
             <a:spAutoFit/>
           </a:bodyPr>
           <a:lstStyle/>
@@ -3823,28 +4996,95 @@
                 <a:solidFill>
                   <a:srgbClr val="000000"/>
                 </a:solidFill>
-                <a:latin typeface="Arial"/>
               </a:rPr>
-              <a:t>I1 Collocated Atmospheric Observations</a:t>
+              <a:t>C1 Mission objectives and operational constraints</a:t>
+            </a:r>
+          </a:p>
+        </p:txBody>
+      </p:sp>
+      <p:sp>
+        <p:nvSpPr>
+          <p:cNvPr id="48" name="TextBox 47"/>
+          <p:cNvSpPr txBox="1"/>
+          <p:nvPr/>
+        </p:nvSpPr>
+        <p:spPr>
+          <a:xfrm>
+            <a:off x="3611880" y="932688"/>
+            <a:ext cx="2331720" cy="256032"/>
+          </a:xfrm>
+          <a:prstGeom prst="rect">
+            <a:avLst/>
+          </a:prstGeom>
+          <a:noFill/>
+        </p:spPr>
+        <p:txBody>
+          <a:bodyPr wrap="square" anchor="t" lIns="12700" rIns="12700" tIns="12700" bIns="12700">
+            <a:spAutoFit/>
+          </a:bodyPr>
+          <a:lstStyle/>
+          <a:p>
+            <a:pPr algn="l"/>
+            <a:r>
+              <a:rPr sz="1000" b="0">
+                <a:solidFill>
+                  <a:srgbClr val="000000"/>
+                </a:solidFill>
+              </a:rPr>
+              <a:t>C2 OPSEC / classification guidance</a:t>
+            </a:r>
+          </a:p>
+        </p:txBody>
+      </p:sp>
+      <p:sp>
+        <p:nvSpPr>
+          <p:cNvPr id="49" name="TextBox 48"/>
+          <p:cNvSpPr txBox="1"/>
+          <p:nvPr/>
+        </p:nvSpPr>
+        <p:spPr>
+          <a:xfrm>
+            <a:off x="5989320" y="932688"/>
+            <a:ext cx="3200400" cy="256032"/>
+          </a:xfrm>
+          <a:prstGeom prst="rect">
+            <a:avLst/>
+          </a:prstGeom>
+          <a:noFill/>
+        </p:spPr>
+        <p:txBody>
+          <a:bodyPr wrap="square" anchor="t" lIns="12700" rIns="12700" tIns="12700" bIns="12700">
+            <a:spAutoFit/>
+          </a:bodyPr>
+          <a:lstStyle/>
+          <a:p>
+            <a:pPr algn="l"/>
+            <a:r>
+              <a:rPr sz="1000" b="0">
+                <a:solidFill>
+                  <a:srgbClr val="000000"/>
+                </a:solidFill>
+              </a:rPr>
+              <a:t>C3 Network availability and DDS QoS policies</a:t>
             </a:r>
           </a:p>
         </p:txBody>
       </p:sp>
       <p:cxnSp>
         <p:nvCxnSpPr>
-          <p:cNvPr id="17" name="Connector 16"/>
+          <p:cNvPr id="50" name="Connector 49"/>
           <p:cNvCxnSpPr/>
           <p:nvPr/>
         </p:nvCxnSpPr>
         <p:spPr>
           <a:xfrm>
-            <a:off x="502920" y="4072280"/>
-            <a:ext cx="137160" cy="0"/>
+            <a:off x="2286000" y="3726180"/>
+            <a:ext cx="274320" cy="0"/>
           </a:xfrm>
           <a:prstGeom prst="bentConnector3">
             <a:avLst/>
           </a:prstGeom>
-          <a:ln w="12700">
+          <a:ln w="15875">
             <a:solidFill>
               <a:srgbClr val="000000"/>
             </a:solidFill>
@@ -3869,22 +5109,529 @@
       </p:cxnSp>
       <p:sp>
         <p:nvSpPr>
-          <p:cNvPr id="18" name="TextBox 17"/>
+          <p:cNvPr id="51" name="Rectangle 50"/>
+          <p:cNvSpPr/>
+          <p:nvPr/>
+        </p:nvSpPr>
+        <p:spPr>
+          <a:xfrm>
+            <a:off x="2544318" y="3710178"/>
+            <a:ext cx="32004" cy="32004"/>
+          </a:xfrm>
+          <a:prstGeom prst="rect">
+            <a:avLst/>
+          </a:prstGeom>
+          <a:noFill/>
+          <a:ln>
+            <a:noFill/>
+          </a:ln>
+          <a:effectLst/>
+        </p:spPr>
+        <p:style>
+          <a:lnRef idx="1">
+            <a:schemeClr val="accent1"/>
+          </a:lnRef>
+          <a:fillRef idx="3">
+            <a:schemeClr val="accent1"/>
+          </a:fillRef>
+          <a:effectRef idx="2">
+            <a:schemeClr val="accent1"/>
+          </a:effectRef>
+          <a:fontRef idx="minor">
+            <a:schemeClr val="lt1"/>
+          </a:fontRef>
+        </p:style>
+        <p:txBody>
+          <a:bodyPr rtlCol="0" anchor="ctr"/>
+          <a:lstStyle/>
+          <a:p>
+            <a:pPr algn="ctr"/>
+          </a:p>
+        </p:txBody>
+      </p:sp>
+      <p:cxnSp>
+        <p:nvCxnSpPr>
+          <p:cNvPr id="52" name="Connector 51"/>
+          <p:cNvCxnSpPr/>
+          <p:nvPr/>
+        </p:nvCxnSpPr>
+        <p:spPr>
+          <a:xfrm>
+            <a:off x="3794760" y="3726180"/>
+            <a:ext cx="274320" cy="0"/>
+          </a:xfrm>
+          <a:prstGeom prst="bentConnector3">
+            <a:avLst/>
+          </a:prstGeom>
+          <a:ln w="15875">
+            <a:solidFill>
+              <a:srgbClr val="000000"/>
+            </a:solidFill>
+            <a:tailEnd type="triangle" w="med" len="med"/>
+          </a:ln>
+          <a:effectLst/>
+        </p:spPr>
+        <p:style>
+          <a:lnRef idx="2">
+            <a:schemeClr val="accent1"/>
+          </a:lnRef>
+          <a:fillRef idx="0">
+            <a:schemeClr val="accent1"/>
+          </a:fillRef>
+          <a:effectRef idx="1">
+            <a:schemeClr val="accent1"/>
+          </a:effectRef>
+          <a:fontRef idx="minor">
+            <a:schemeClr val="tx1"/>
+          </a:fontRef>
+        </p:style>
+      </p:cxnSp>
+      <p:sp>
+        <p:nvSpPr>
+          <p:cNvPr id="53" name="Rectangle 52"/>
+          <p:cNvSpPr/>
+          <p:nvPr/>
+        </p:nvSpPr>
+        <p:spPr>
+          <a:xfrm>
+            <a:off x="4053078" y="3710178"/>
+            <a:ext cx="32004" cy="32004"/>
+          </a:xfrm>
+          <a:prstGeom prst="rect">
+            <a:avLst/>
+          </a:prstGeom>
+          <a:noFill/>
+          <a:ln>
+            <a:noFill/>
+          </a:ln>
+          <a:effectLst/>
+        </p:spPr>
+        <p:style>
+          <a:lnRef idx="1">
+            <a:schemeClr val="accent1"/>
+          </a:lnRef>
+          <a:fillRef idx="3">
+            <a:schemeClr val="accent1"/>
+          </a:fillRef>
+          <a:effectRef idx="2">
+            <a:schemeClr val="accent1"/>
+          </a:effectRef>
+          <a:fontRef idx="minor">
+            <a:schemeClr val="lt1"/>
+          </a:fontRef>
+        </p:style>
+        <p:txBody>
+          <a:bodyPr rtlCol="0" anchor="ctr"/>
+          <a:lstStyle/>
+          <a:p>
+            <a:pPr algn="ctr"/>
+          </a:p>
+        </p:txBody>
+      </p:sp>
+      <p:cxnSp>
+        <p:nvCxnSpPr>
+          <p:cNvPr id="54" name="Connector 53"/>
+          <p:cNvCxnSpPr/>
+          <p:nvPr/>
+        </p:nvCxnSpPr>
+        <p:spPr>
+          <a:xfrm>
+            <a:off x="5303520" y="3726180"/>
+            <a:ext cx="228600" cy="0"/>
+          </a:xfrm>
+          <a:prstGeom prst="bentConnector3">
+            <a:avLst/>
+          </a:prstGeom>
+          <a:ln w="15875">
+            <a:solidFill>
+              <a:srgbClr val="000000"/>
+            </a:solidFill>
+            <a:tailEnd type="triangle" w="med" len="med"/>
+          </a:ln>
+          <a:effectLst/>
+        </p:spPr>
+        <p:style>
+          <a:lnRef idx="2">
+            <a:schemeClr val="accent1"/>
+          </a:lnRef>
+          <a:fillRef idx="0">
+            <a:schemeClr val="accent1"/>
+          </a:fillRef>
+          <a:effectRef idx="1">
+            <a:schemeClr val="accent1"/>
+          </a:effectRef>
+          <a:fontRef idx="minor">
+            <a:schemeClr val="tx1"/>
+          </a:fontRef>
+        </p:style>
+      </p:cxnSp>
+      <p:sp>
+        <p:nvSpPr>
+          <p:cNvPr id="55" name="Rectangle 54"/>
+          <p:cNvSpPr/>
+          <p:nvPr/>
+        </p:nvSpPr>
+        <p:spPr>
+          <a:xfrm>
+            <a:off x="5516118" y="3710178"/>
+            <a:ext cx="32004" cy="32004"/>
+          </a:xfrm>
+          <a:prstGeom prst="rect">
+            <a:avLst/>
+          </a:prstGeom>
+          <a:noFill/>
+          <a:ln>
+            <a:noFill/>
+          </a:ln>
+          <a:effectLst/>
+        </p:spPr>
+        <p:style>
+          <a:lnRef idx="1">
+            <a:schemeClr val="accent1"/>
+          </a:lnRef>
+          <a:fillRef idx="3">
+            <a:schemeClr val="accent1"/>
+          </a:fillRef>
+          <a:effectRef idx="2">
+            <a:schemeClr val="accent1"/>
+          </a:effectRef>
+          <a:fontRef idx="minor">
+            <a:schemeClr val="lt1"/>
+          </a:fontRef>
+        </p:style>
+        <p:txBody>
+          <a:bodyPr rtlCol="0" anchor="ctr"/>
+          <a:lstStyle/>
+          <a:p>
+            <a:pPr algn="ctr"/>
+          </a:p>
+        </p:txBody>
+      </p:sp>
+      <p:cxnSp>
+        <p:nvCxnSpPr>
+          <p:cNvPr id="56" name="Connector 55"/>
+          <p:cNvCxnSpPr/>
+          <p:nvPr/>
+        </p:nvCxnSpPr>
+        <p:spPr>
+          <a:xfrm>
+            <a:off x="6949440" y="3566160"/>
+            <a:ext cx="274320" cy="0"/>
+          </a:xfrm>
+          <a:prstGeom prst="bentConnector3">
+            <a:avLst/>
+          </a:prstGeom>
+          <a:ln w="15875">
+            <a:solidFill>
+              <a:srgbClr val="000000"/>
+            </a:solidFill>
+          </a:ln>
+          <a:effectLst/>
+        </p:spPr>
+        <p:style>
+          <a:lnRef idx="2">
+            <a:schemeClr val="accent1"/>
+          </a:lnRef>
+          <a:fillRef idx="0">
+            <a:schemeClr val="accent1"/>
+          </a:fillRef>
+          <a:effectRef idx="1">
+            <a:schemeClr val="accent1"/>
+          </a:effectRef>
+          <a:fontRef idx="minor">
+            <a:schemeClr val="tx1"/>
+          </a:fontRef>
+        </p:style>
+      </p:cxnSp>
+      <p:cxnSp>
+        <p:nvCxnSpPr>
+          <p:cNvPr id="57" name="Connector 56"/>
+          <p:cNvCxnSpPr/>
+          <p:nvPr/>
+        </p:nvCxnSpPr>
+        <p:spPr>
+          <a:xfrm flipV="1">
+            <a:off x="7223760" y="2423160"/>
+            <a:ext cx="0" cy="1143000"/>
+          </a:xfrm>
+          <a:prstGeom prst="bentConnector3">
+            <a:avLst/>
+          </a:prstGeom>
+          <a:ln w="15875">
+            <a:solidFill>
+              <a:srgbClr val="000000"/>
+            </a:solidFill>
+          </a:ln>
+          <a:effectLst/>
+        </p:spPr>
+        <p:style>
+          <a:lnRef idx="2">
+            <a:schemeClr val="accent1"/>
+          </a:lnRef>
+          <a:fillRef idx="0">
+            <a:schemeClr val="accent1"/>
+          </a:fillRef>
+          <a:effectRef idx="1">
+            <a:schemeClr val="accent1"/>
+          </a:effectRef>
+          <a:fontRef idx="minor">
+            <a:schemeClr val="tx1"/>
+          </a:fontRef>
+        </p:style>
+      </p:cxnSp>
+      <p:cxnSp>
+        <p:nvCxnSpPr>
+          <p:cNvPr id="58" name="Connector 57"/>
+          <p:cNvCxnSpPr/>
+          <p:nvPr/>
+        </p:nvCxnSpPr>
+        <p:spPr>
+          <a:xfrm>
+            <a:off x="7223760" y="2423160"/>
+            <a:ext cx="320040" cy="0"/>
+          </a:xfrm>
+          <a:prstGeom prst="bentConnector3">
+            <a:avLst/>
+          </a:prstGeom>
+          <a:ln w="15875">
+            <a:solidFill>
+              <a:srgbClr val="000000"/>
+            </a:solidFill>
+            <a:tailEnd type="triangle" w="med" len="med"/>
+          </a:ln>
+          <a:effectLst/>
+        </p:spPr>
+        <p:style>
+          <a:lnRef idx="2">
+            <a:schemeClr val="accent1"/>
+          </a:lnRef>
+          <a:fillRef idx="0">
+            <a:schemeClr val="accent1"/>
+          </a:fillRef>
+          <a:effectRef idx="1">
+            <a:schemeClr val="accent1"/>
+          </a:effectRef>
+          <a:fontRef idx="minor">
+            <a:schemeClr val="tx1"/>
+          </a:fontRef>
+        </p:style>
+      </p:cxnSp>
+      <p:sp>
+        <p:nvSpPr>
+          <p:cNvPr id="59" name="Rectangle 58"/>
+          <p:cNvSpPr/>
+          <p:nvPr/>
+        </p:nvSpPr>
+        <p:spPr>
+          <a:xfrm>
+            <a:off x="7527798" y="2407158"/>
+            <a:ext cx="32004" cy="32004"/>
+          </a:xfrm>
+          <a:prstGeom prst="rect">
+            <a:avLst/>
+          </a:prstGeom>
+          <a:noFill/>
+          <a:ln>
+            <a:noFill/>
+          </a:ln>
+          <a:effectLst/>
+        </p:spPr>
+        <p:style>
+          <a:lnRef idx="1">
+            <a:schemeClr val="accent1"/>
+          </a:lnRef>
+          <a:fillRef idx="3">
+            <a:schemeClr val="accent1"/>
+          </a:fillRef>
+          <a:effectRef idx="2">
+            <a:schemeClr val="accent1"/>
+          </a:effectRef>
+          <a:fontRef idx="minor">
+            <a:schemeClr val="lt1"/>
+          </a:fontRef>
+        </p:style>
+        <p:txBody>
+          <a:bodyPr rtlCol="0" anchor="ctr"/>
+          <a:lstStyle/>
+          <a:p>
+            <a:pPr algn="ctr"/>
+          </a:p>
+        </p:txBody>
+      </p:sp>
+      <p:cxnSp>
+        <p:nvCxnSpPr>
+          <p:cNvPr id="60" name="Connector 59"/>
+          <p:cNvCxnSpPr/>
+          <p:nvPr/>
+        </p:nvCxnSpPr>
+        <p:spPr>
+          <a:xfrm>
+            <a:off x="6949440" y="3913632"/>
+            <a:ext cx="274320" cy="0"/>
+          </a:xfrm>
+          <a:prstGeom prst="bentConnector3">
+            <a:avLst/>
+          </a:prstGeom>
+          <a:ln w="15875">
+            <a:solidFill>
+              <a:srgbClr val="000000"/>
+            </a:solidFill>
+          </a:ln>
+          <a:effectLst/>
+        </p:spPr>
+        <p:style>
+          <a:lnRef idx="2">
+            <a:schemeClr val="accent1"/>
+          </a:lnRef>
+          <a:fillRef idx="0">
+            <a:schemeClr val="accent1"/>
+          </a:fillRef>
+          <a:effectRef idx="1">
+            <a:schemeClr val="accent1"/>
+          </a:effectRef>
+          <a:fontRef idx="minor">
+            <a:schemeClr val="tx1"/>
+          </a:fontRef>
+        </p:style>
+      </p:cxnSp>
+      <p:cxnSp>
+        <p:nvCxnSpPr>
+          <p:cNvPr id="61" name="Connector 60"/>
+          <p:cNvCxnSpPr/>
+          <p:nvPr/>
+        </p:nvCxnSpPr>
+        <p:spPr>
+          <a:xfrm>
+            <a:off x="7223760" y="3913632"/>
+            <a:ext cx="0" cy="1161288"/>
+          </a:xfrm>
+          <a:prstGeom prst="bentConnector3">
+            <a:avLst/>
+          </a:prstGeom>
+          <a:ln w="15875">
+            <a:solidFill>
+              <a:srgbClr val="000000"/>
+            </a:solidFill>
+          </a:ln>
+          <a:effectLst/>
+        </p:spPr>
+        <p:style>
+          <a:lnRef idx="2">
+            <a:schemeClr val="accent1"/>
+          </a:lnRef>
+          <a:fillRef idx="0">
+            <a:schemeClr val="accent1"/>
+          </a:fillRef>
+          <a:effectRef idx="1">
+            <a:schemeClr val="accent1"/>
+          </a:effectRef>
+          <a:fontRef idx="minor">
+            <a:schemeClr val="tx1"/>
+          </a:fontRef>
+        </p:style>
+      </p:cxnSp>
+      <p:cxnSp>
+        <p:nvCxnSpPr>
+          <p:cNvPr id="62" name="Connector 61"/>
+          <p:cNvCxnSpPr/>
+          <p:nvPr/>
+        </p:nvCxnSpPr>
+        <p:spPr>
+          <a:xfrm>
+            <a:off x="7223760" y="5074920"/>
+            <a:ext cx="320040" cy="0"/>
+          </a:xfrm>
+          <a:prstGeom prst="bentConnector3">
+            <a:avLst/>
+          </a:prstGeom>
+          <a:ln w="15875">
+            <a:solidFill>
+              <a:srgbClr val="000000"/>
+            </a:solidFill>
+            <a:tailEnd type="triangle" w="med" len="med"/>
+          </a:ln>
+          <a:effectLst/>
+        </p:spPr>
+        <p:style>
+          <a:lnRef idx="2">
+            <a:schemeClr val="accent1"/>
+          </a:lnRef>
+          <a:fillRef idx="0">
+            <a:schemeClr val="accent1"/>
+          </a:fillRef>
+          <a:effectRef idx="1">
+            <a:schemeClr val="accent1"/>
+          </a:effectRef>
+          <a:fontRef idx="minor">
+            <a:schemeClr val="tx1"/>
+          </a:fontRef>
+        </p:style>
+      </p:cxnSp>
+      <p:sp>
+        <p:nvSpPr>
+          <p:cNvPr id="63" name="Rectangle 62"/>
+          <p:cNvSpPr/>
+          <p:nvPr/>
+        </p:nvSpPr>
+        <p:spPr>
+          <a:xfrm>
+            <a:off x="7527798" y="5058918"/>
+            <a:ext cx="32004" cy="32004"/>
+          </a:xfrm>
+          <a:prstGeom prst="rect">
+            <a:avLst/>
+          </a:prstGeom>
+          <a:noFill/>
+          <a:ln>
+            <a:noFill/>
+          </a:ln>
+          <a:effectLst/>
+        </p:spPr>
+        <p:style>
+          <a:lnRef idx="1">
+            <a:schemeClr val="accent1"/>
+          </a:lnRef>
+          <a:fillRef idx="3">
+            <a:schemeClr val="accent1"/>
+          </a:fillRef>
+          <a:effectRef idx="2">
+            <a:schemeClr val="accent1"/>
+          </a:effectRef>
+          <a:fontRef idx="minor">
+            <a:schemeClr val="lt1"/>
+          </a:fontRef>
+        </p:style>
+        <p:txBody>
+          <a:bodyPr rtlCol="0" anchor="ctr"/>
+          <a:lstStyle/>
+          <a:p>
+            <a:pPr algn="ctr"/>
+          </a:p>
+        </p:txBody>
+      </p:sp>
+      <p:sp>
+        <p:nvSpPr>
+          <p:cNvPr id="64" name="TextBox 63"/>
           <p:cNvSpPr txBox="1"/>
           <p:nvPr/>
         </p:nvSpPr>
         <p:spPr>
           <a:xfrm>
-            <a:off x="365760" y="4108856"/>
-            <a:ext cx="1463040" cy="246888"/>
+            <a:off x="1691640" y="2798064"/>
+            <a:ext cx="1463040" cy="530352"/>
           </a:xfrm>
           <a:prstGeom prst="rect">
             <a:avLst/>
           </a:prstGeom>
-          <a:noFill/>
-        </p:spPr>
-        <p:txBody>
-          <a:bodyPr wrap="square" anchor="t" lIns="0" rIns="0" tIns="0" bIns="0">
+          <a:solidFill>
+            <a:srgbClr val="FFFFFF"/>
+          </a:solidFill>
+          <a:ln>
+            <a:noFill/>
+          </a:ln>
+        </p:spPr>
+        <p:txBody>
+          <a:bodyPr wrap="square" anchor="t" lIns="12700" rIns="12700" tIns="12700" bIns="12700">
             <a:spAutoFit/>
           </a:bodyPr>
           <a:lstStyle/>
@@ -3895,112 +5642,183 @@
                 <a:solidFill>
                   <a:srgbClr val="000000"/>
                 </a:solidFill>
-                <a:latin typeface="Arial"/>
               </a:rPr>
-              <a:t>I2 Peer Platform Weather Observations</a:t>
-            </a:r>
-          </a:p>
-        </p:txBody>
-      </p:sp>
-      <p:sp>
-        <p:nvSpPr>
-          <p:cNvPr id="19" name="Oval 18"/>
-          <p:cNvSpPr/>
-          <p:nvPr/>
-        </p:nvSpPr>
-        <p:spPr>
-          <a:xfrm>
-            <a:off x="2039112" y="3890772"/>
-            <a:ext cx="36576" cy="36576"/>
-          </a:xfrm>
-          <a:prstGeom prst="ellipse">
-            <a:avLst/>
-          </a:prstGeom>
-          <a:noFill/>
+              <a:t>F1 Time/Geo-Tagged, Quality-Checked Observations (IER-03)</a:t>
+            </a:r>
+          </a:p>
+        </p:txBody>
+      </p:sp>
+      <p:sp>
+        <p:nvSpPr>
+          <p:cNvPr id="65" name="TextBox 64"/>
+          <p:cNvSpPr txBox="1"/>
+          <p:nvPr/>
+        </p:nvSpPr>
+        <p:spPr>
+          <a:xfrm>
+            <a:off x="3200400" y="2798064"/>
+            <a:ext cx="1463040" cy="530352"/>
+          </a:xfrm>
+          <a:prstGeom prst="rect">
+            <a:avLst/>
+          </a:prstGeom>
+          <a:solidFill>
+            <a:srgbClr val="FFFFFF"/>
+          </a:solidFill>
           <a:ln>
             <a:noFill/>
           </a:ln>
-          <a:effectLst/>
-        </p:spPr>
-        <p:style>
-          <a:lnRef idx="1">
-            <a:schemeClr val="accent1"/>
-          </a:lnRef>
-          <a:fillRef idx="3">
-            <a:schemeClr val="accent1"/>
-          </a:fillRef>
-          <a:effectRef idx="2">
-            <a:schemeClr val="accent1"/>
-          </a:effectRef>
-          <a:fontRef idx="minor">
-            <a:schemeClr val="lt1"/>
-          </a:fontRef>
-        </p:style>
-        <p:txBody>
-          <a:bodyPr rtlCol="0" anchor="ctr"/>
-          <a:lstStyle/>
-          <a:p>
-            <a:pPr algn="ctr"/>
-          </a:p>
-        </p:txBody>
-      </p:sp>
-      <p:sp>
-        <p:nvSpPr>
-          <p:cNvPr id="20" name="Oval 19"/>
-          <p:cNvSpPr/>
-          <p:nvPr/>
-        </p:nvSpPr>
-        <p:spPr>
-          <a:xfrm>
-            <a:off x="2496312" y="2290572"/>
-            <a:ext cx="36576" cy="36576"/>
-          </a:xfrm>
-          <a:prstGeom prst="ellipse">
-            <a:avLst/>
-          </a:prstGeom>
-          <a:noFill/>
+        </p:spPr>
+        <p:txBody>
+          <a:bodyPr wrap="square" anchor="t" lIns="12700" rIns="12700" tIns="12700" bIns="12700">
+            <a:spAutoFit/>
+          </a:bodyPr>
+          <a:lstStyle/>
+          <a:p>
+            <a:pPr algn="l"/>
+            <a:r>
+              <a:rPr sz="1000" b="0">
+                <a:solidFill>
+                  <a:srgbClr val="000000"/>
+                </a:solidFill>
+              </a:rPr>
+              <a:t>F2 Local Micro-Weather State Estimate (IER-05)</a:t>
+            </a:r>
+          </a:p>
+        </p:txBody>
+      </p:sp>
+      <p:sp>
+        <p:nvSpPr>
+          <p:cNvPr id="66" name="TextBox 65"/>
+          <p:cNvSpPr txBox="1"/>
+          <p:nvPr/>
+        </p:nvSpPr>
+        <p:spPr>
+          <a:xfrm>
+            <a:off x="4690872" y="2798064"/>
+            <a:ext cx="1463040" cy="530352"/>
+          </a:xfrm>
+          <a:prstGeom prst="rect">
+            <a:avLst/>
+          </a:prstGeom>
+          <a:solidFill>
+            <a:srgbClr val="FFFFFF"/>
+          </a:solidFill>
           <a:ln>
             <a:noFill/>
           </a:ln>
-          <a:effectLst/>
-        </p:spPr>
-        <p:style>
-          <a:lnRef idx="1">
-            <a:schemeClr val="accent1"/>
-          </a:lnRef>
-          <a:fillRef idx="3">
-            <a:schemeClr val="accent1"/>
-          </a:fillRef>
-          <a:effectRef idx="2">
-            <a:schemeClr val="accent1"/>
-          </a:effectRef>
-          <a:fontRef idx="minor">
-            <a:schemeClr val="lt1"/>
-          </a:fontRef>
-        </p:style>
-        <p:txBody>
-          <a:bodyPr rtlCol="0" anchor="ctr"/>
-          <a:lstStyle/>
-          <a:p>
-            <a:pPr algn="ctr"/>
+        </p:spPr>
+        <p:txBody>
+          <a:bodyPr wrap="square" anchor="t" lIns="12700" rIns="12700" tIns="12700" bIns="12700">
+            <a:spAutoFit/>
+          </a:bodyPr>
+          <a:lstStyle/>
+          <a:p>
+            <a:pPr algn="l"/>
+            <a:r>
+              <a:rPr sz="1000" b="0">
+                <a:solidFill>
+                  <a:srgbClr val="000000"/>
+                </a:solidFill>
+              </a:rPr>
+              <a:t>F3 Confidence Bounds &amp; Risk Envelopes (IER-09)</a:t>
+            </a:r>
+          </a:p>
+        </p:txBody>
+      </p:sp>
+      <p:sp>
+        <p:nvSpPr>
+          <p:cNvPr id="67" name="TextBox 66"/>
+          <p:cNvSpPr txBox="1"/>
+          <p:nvPr/>
+        </p:nvSpPr>
+        <p:spPr>
+          <a:xfrm>
+            <a:off x="6967728" y="2962656"/>
+            <a:ext cx="1783080" cy="384048"/>
+          </a:xfrm>
+          <a:prstGeom prst="rect">
+            <a:avLst/>
+          </a:prstGeom>
+          <a:solidFill>
+            <a:srgbClr val="FFFFFF"/>
+          </a:solidFill>
+          <a:ln>
+            <a:noFill/>
+          </a:ln>
+        </p:spPr>
+        <p:txBody>
+          <a:bodyPr wrap="square" anchor="t" lIns="12700" rIns="12700" tIns="12700" bIns="12700">
+            <a:spAutoFit/>
+          </a:bodyPr>
+          <a:lstStyle/>
+          <a:p>
+            <a:pPr algn="l"/>
+            <a:r>
+              <a:rPr sz="1000" b="0">
+                <a:solidFill>
+                  <a:srgbClr val="000000"/>
+                </a:solidFill>
+              </a:rPr>
+              <a:t>F4 Federated Weather Context / COWP State</a:t>
+            </a:r>
+          </a:p>
+        </p:txBody>
+      </p:sp>
+      <p:sp>
+        <p:nvSpPr>
+          <p:cNvPr id="68" name="TextBox 67"/>
+          <p:cNvSpPr txBox="1"/>
+          <p:nvPr/>
+        </p:nvSpPr>
+        <p:spPr>
+          <a:xfrm>
+            <a:off x="6967728" y="4187952"/>
+            <a:ext cx="1783080" cy="384048"/>
+          </a:xfrm>
+          <a:prstGeom prst="rect">
+            <a:avLst/>
+          </a:prstGeom>
+          <a:solidFill>
+            <a:srgbClr val="FFFFFF"/>
+          </a:solidFill>
+          <a:ln>
+            <a:noFill/>
+          </a:ln>
+        </p:spPr>
+        <p:txBody>
+          <a:bodyPr wrap="square" anchor="t" lIns="12700" rIns="12700" tIns="12700" bIns="12700">
+            <a:spAutoFit/>
+          </a:bodyPr>
+          <a:lstStyle/>
+          <a:p>
+            <a:pPr algn="l"/>
+            <a:r>
+              <a:rPr sz="1000" b="0">
+                <a:solidFill>
+                  <a:srgbClr val="000000"/>
+                </a:solidFill>
+              </a:rPr>
+              <a:t>F5 Federated Weather Context / COWP State</a:t>
+            </a:r>
           </a:p>
         </p:txBody>
       </p:sp>
       <p:cxnSp>
         <p:nvCxnSpPr>
-          <p:cNvPr id="21" name="Connector 20"/>
+          <p:cNvPr id="69" name="Connector 68"/>
           <p:cNvCxnSpPr/>
           <p:nvPr/>
         </p:nvCxnSpPr>
         <p:spPr>
-          <a:xfrm flipV="1">
-            <a:off x="2057400" y="2308860"/>
-            <a:ext cx="457200" cy="1600200"/>
+          <a:xfrm>
+            <a:off x="6949440" y="3726180"/>
+            <a:ext cx="2697480" cy="0"/>
           </a:xfrm>
           <a:prstGeom prst="bentConnector3">
             <a:avLst/>
           </a:prstGeom>
-          <a:ln w="12700">
+          <a:ln w="15875">
             <a:solidFill>
               <a:srgbClr val="000000"/>
             </a:solidFill>
@@ -4025,22 +5843,227 @@
       </p:cxnSp>
       <p:sp>
         <p:nvSpPr>
-          <p:cNvPr id="22" name="TextBox 21"/>
+          <p:cNvPr id="70" name="Rectangle 69"/>
+          <p:cNvSpPr/>
+          <p:nvPr/>
+        </p:nvSpPr>
+        <p:spPr>
+          <a:xfrm>
+            <a:off x="9630918" y="3710178"/>
+            <a:ext cx="32004" cy="32004"/>
+          </a:xfrm>
+          <a:prstGeom prst="rect">
+            <a:avLst/>
+          </a:prstGeom>
+          <a:noFill/>
+          <a:ln>
+            <a:noFill/>
+          </a:ln>
+          <a:effectLst/>
+        </p:spPr>
+        <p:style>
+          <a:lnRef idx="1">
+            <a:schemeClr val="accent1"/>
+          </a:lnRef>
+          <a:fillRef idx="3">
+            <a:schemeClr val="accent1"/>
+          </a:fillRef>
+          <a:effectRef idx="2">
+            <a:schemeClr val="accent1"/>
+          </a:effectRef>
+          <a:fontRef idx="minor">
+            <a:schemeClr val="lt1"/>
+          </a:fontRef>
+        </p:style>
+        <p:txBody>
+          <a:bodyPr rtlCol="0" anchor="ctr"/>
+          <a:lstStyle/>
+          <a:p>
+            <a:pPr algn="ctr"/>
+          </a:p>
+        </p:txBody>
+      </p:sp>
+      <p:cxnSp>
+        <p:nvCxnSpPr>
+          <p:cNvPr id="71" name="Connector 70"/>
+          <p:cNvCxnSpPr/>
+          <p:nvPr/>
+        </p:nvCxnSpPr>
+        <p:spPr>
+          <a:xfrm>
+            <a:off x="8915400" y="2491740"/>
+            <a:ext cx="731520" cy="0"/>
+          </a:xfrm>
+          <a:prstGeom prst="bentConnector3">
+            <a:avLst/>
+          </a:prstGeom>
+          <a:ln w="15875">
+            <a:solidFill>
+              <a:srgbClr val="000000"/>
+            </a:solidFill>
+            <a:tailEnd type="triangle" w="med" len="med"/>
+          </a:ln>
+          <a:effectLst/>
+        </p:spPr>
+        <p:style>
+          <a:lnRef idx="2">
+            <a:schemeClr val="accent1"/>
+          </a:lnRef>
+          <a:fillRef idx="0">
+            <a:schemeClr val="accent1"/>
+          </a:fillRef>
+          <a:effectRef idx="1">
+            <a:schemeClr val="accent1"/>
+          </a:effectRef>
+          <a:fontRef idx="minor">
+            <a:schemeClr val="tx1"/>
+          </a:fontRef>
+        </p:style>
+      </p:cxnSp>
+      <p:sp>
+        <p:nvSpPr>
+          <p:cNvPr id="72" name="Rectangle 71"/>
+          <p:cNvSpPr/>
+          <p:nvPr/>
+        </p:nvSpPr>
+        <p:spPr>
+          <a:xfrm>
+            <a:off x="9630918" y="2475738"/>
+            <a:ext cx="32004" cy="32004"/>
+          </a:xfrm>
+          <a:prstGeom prst="rect">
+            <a:avLst/>
+          </a:prstGeom>
+          <a:noFill/>
+          <a:ln>
+            <a:noFill/>
+          </a:ln>
+          <a:effectLst/>
+        </p:spPr>
+        <p:style>
+          <a:lnRef idx="1">
+            <a:schemeClr val="accent1"/>
+          </a:lnRef>
+          <a:fillRef idx="3">
+            <a:schemeClr val="accent1"/>
+          </a:fillRef>
+          <a:effectRef idx="2">
+            <a:schemeClr val="accent1"/>
+          </a:effectRef>
+          <a:fontRef idx="minor">
+            <a:schemeClr val="lt1"/>
+          </a:fontRef>
+        </p:style>
+        <p:txBody>
+          <a:bodyPr rtlCol="0" anchor="ctr"/>
+          <a:lstStyle/>
+          <a:p>
+            <a:pPr algn="ctr"/>
+          </a:p>
+        </p:txBody>
+      </p:sp>
+      <p:cxnSp>
+        <p:nvCxnSpPr>
+          <p:cNvPr id="73" name="Connector 72"/>
+          <p:cNvCxnSpPr/>
+          <p:nvPr/>
+        </p:nvCxnSpPr>
+        <p:spPr>
+          <a:xfrm>
+            <a:off x="8915400" y="5143500"/>
+            <a:ext cx="731520" cy="0"/>
+          </a:xfrm>
+          <a:prstGeom prst="bentConnector3">
+            <a:avLst/>
+          </a:prstGeom>
+          <a:ln w="15875">
+            <a:solidFill>
+              <a:srgbClr val="000000"/>
+            </a:solidFill>
+            <a:tailEnd type="triangle" w="med" len="med"/>
+          </a:ln>
+          <a:effectLst/>
+        </p:spPr>
+        <p:style>
+          <a:lnRef idx="2">
+            <a:schemeClr val="accent1"/>
+          </a:lnRef>
+          <a:fillRef idx="0">
+            <a:schemeClr val="accent1"/>
+          </a:fillRef>
+          <a:effectRef idx="1">
+            <a:schemeClr val="accent1"/>
+          </a:effectRef>
+          <a:fontRef idx="minor">
+            <a:schemeClr val="tx1"/>
+          </a:fontRef>
+        </p:style>
+      </p:cxnSp>
+      <p:sp>
+        <p:nvSpPr>
+          <p:cNvPr id="74" name="Rectangle 73"/>
+          <p:cNvSpPr/>
+          <p:nvPr/>
+        </p:nvSpPr>
+        <p:spPr>
+          <a:xfrm>
+            <a:off x="9630918" y="5127498"/>
+            <a:ext cx="32004" cy="32004"/>
+          </a:xfrm>
+          <a:prstGeom prst="rect">
+            <a:avLst/>
+          </a:prstGeom>
+          <a:noFill/>
+          <a:ln>
+            <a:noFill/>
+          </a:ln>
+          <a:effectLst/>
+        </p:spPr>
+        <p:style>
+          <a:lnRef idx="1">
+            <a:schemeClr val="accent1"/>
+          </a:lnRef>
+          <a:fillRef idx="3">
+            <a:schemeClr val="accent1"/>
+          </a:fillRef>
+          <a:effectRef idx="2">
+            <a:schemeClr val="accent1"/>
+          </a:effectRef>
+          <a:fontRef idx="minor">
+            <a:schemeClr val="lt1"/>
+          </a:fontRef>
+        </p:style>
+        <p:txBody>
+          <a:bodyPr rtlCol="0" anchor="ctr"/>
+          <a:lstStyle/>
+          <a:p>
+            <a:pPr algn="ctr"/>
+          </a:p>
+        </p:txBody>
+      </p:sp>
+      <p:sp>
+        <p:nvSpPr>
+          <p:cNvPr id="75" name="TextBox 74"/>
           <p:cNvSpPr txBox="1"/>
           <p:nvPr/>
         </p:nvSpPr>
         <p:spPr>
           <a:xfrm>
-            <a:off x="2084831" y="2633472"/>
-            <a:ext cx="1417320" cy="246888"/>
+            <a:off x="7589520" y="3474720"/>
+            <a:ext cx="1783080" cy="237744"/>
           </a:xfrm>
           <a:prstGeom prst="rect">
             <a:avLst/>
           </a:prstGeom>
-          <a:noFill/>
-        </p:spPr>
-        <p:txBody>
-          <a:bodyPr wrap="square" anchor="t" lIns="0" rIns="0" tIns="0" bIns="0">
+          <a:solidFill>
+            <a:srgbClr val="FFFFFF"/>
+          </a:solidFill>
+          <a:ln>
+            <a:noFill/>
+          </a:ln>
+        </p:spPr>
+        <p:txBody>
+          <a:bodyPr wrap="square" anchor="t" lIns="12700" rIns="12700" tIns="12700" bIns="12700">
             <a:spAutoFit/>
           </a:bodyPr>
           <a:lstStyle/>
@@ -4051,154 +6074,213 @@
                 <a:solidFill>
                   <a:srgbClr val="000000"/>
                 </a:solidFill>
-                <a:latin typeface="Arial"/>
               </a:rPr>
-              <a:t>Quality-Checked Observations</a:t>
-            </a:r>
-          </a:p>
-        </p:txBody>
-      </p:sp>
-      <p:sp>
-        <p:nvSpPr>
-          <p:cNvPr id="23" name="Oval 22"/>
-          <p:cNvSpPr/>
-          <p:nvPr/>
-        </p:nvSpPr>
-        <p:spPr>
-          <a:xfrm>
-            <a:off x="3913632" y="2444191"/>
-            <a:ext cx="36576" cy="36576"/>
-          </a:xfrm>
-          <a:prstGeom prst="ellipse">
-            <a:avLst/>
-          </a:prstGeom>
-          <a:noFill/>
+              <a:t>O1 Fused COWP State</a:t>
+            </a:r>
+          </a:p>
+        </p:txBody>
+      </p:sp>
+      <p:sp>
+        <p:nvSpPr>
+          <p:cNvPr id="76" name="TextBox 75"/>
+          <p:cNvSpPr txBox="1"/>
+          <p:nvPr/>
+        </p:nvSpPr>
+        <p:spPr>
+          <a:xfrm>
+            <a:off x="8942832" y="1938528"/>
+            <a:ext cx="768096" cy="502920"/>
+          </a:xfrm>
+          <a:prstGeom prst="rect">
+            <a:avLst/>
+          </a:prstGeom>
+          <a:solidFill>
+            <a:srgbClr val="FFFFFF"/>
+          </a:solidFill>
           <a:ln>
             <a:noFill/>
           </a:ln>
-          <a:effectLst/>
-        </p:spPr>
-        <p:style>
-          <a:lnRef idx="1">
-            <a:schemeClr val="accent1"/>
-          </a:lnRef>
-          <a:fillRef idx="3">
-            <a:schemeClr val="accent1"/>
-          </a:fillRef>
-          <a:effectRef idx="2">
-            <a:schemeClr val="accent1"/>
-          </a:effectRef>
-          <a:fontRef idx="minor">
-            <a:schemeClr val="lt1"/>
-          </a:fontRef>
-        </p:style>
-        <p:txBody>
-          <a:bodyPr rtlCol="0" anchor="ctr"/>
-          <a:lstStyle/>
-          <a:p>
-            <a:pPr algn="ctr"/>
-          </a:p>
-        </p:txBody>
-      </p:sp>
-      <p:sp>
-        <p:nvSpPr>
-          <p:cNvPr id="24" name="Oval 23"/>
-          <p:cNvSpPr/>
-          <p:nvPr/>
-        </p:nvSpPr>
-        <p:spPr>
-          <a:xfrm>
-            <a:off x="3913632" y="2136952"/>
-            <a:ext cx="36576" cy="36576"/>
-          </a:xfrm>
-          <a:prstGeom prst="ellipse">
-            <a:avLst/>
-          </a:prstGeom>
-          <a:noFill/>
+        </p:spPr>
+        <p:txBody>
+          <a:bodyPr wrap="square" anchor="t" lIns="12700" rIns="12700" tIns="12700" bIns="12700">
+            <a:spAutoFit/>
+          </a:bodyPr>
+          <a:lstStyle/>
+          <a:p>
+            <a:pPr algn="l"/>
+            <a:r>
+              <a:rPr sz="1000" b="0">
+                <a:solidFill>
+                  <a:srgbClr val="000000"/>
+                </a:solidFill>
+              </a:rPr>
+              <a:t>O3 Weather State Change Notifications</a:t>
+            </a:r>
+          </a:p>
+        </p:txBody>
+      </p:sp>
+      <p:sp>
+        <p:nvSpPr>
+          <p:cNvPr id="77" name="TextBox 76"/>
+          <p:cNvSpPr txBox="1"/>
+          <p:nvPr/>
+        </p:nvSpPr>
+        <p:spPr>
+          <a:xfrm>
+            <a:off x="8942832" y="5230368"/>
+            <a:ext cx="768096" cy="502920"/>
+          </a:xfrm>
+          <a:prstGeom prst="rect">
+            <a:avLst/>
+          </a:prstGeom>
+          <a:solidFill>
+            <a:srgbClr val="FFFFFF"/>
+          </a:solidFill>
           <a:ln>
             <a:noFill/>
           </a:ln>
-          <a:effectLst/>
-        </p:spPr>
-        <p:style>
-          <a:lnRef idx="1">
-            <a:schemeClr val="accent1"/>
-          </a:lnRef>
-          <a:fillRef idx="3">
-            <a:schemeClr val="accent1"/>
-          </a:fillRef>
-          <a:effectRef idx="2">
-            <a:schemeClr val="accent1"/>
-          </a:effectRef>
-          <a:fontRef idx="minor">
-            <a:schemeClr val="lt1"/>
-          </a:fontRef>
-        </p:style>
-        <p:txBody>
-          <a:bodyPr rtlCol="0" anchor="ctr"/>
-          <a:lstStyle/>
-          <a:p>
-            <a:pPr algn="ctr"/>
-          </a:p>
-        </p:txBody>
-      </p:sp>
-      <p:sp>
-        <p:nvSpPr>
-          <p:cNvPr id="25" name="Oval 24"/>
-          <p:cNvSpPr/>
-          <p:nvPr/>
-        </p:nvSpPr>
-        <p:spPr>
-          <a:xfrm>
-            <a:off x="4050792" y="5445252"/>
-            <a:ext cx="36576" cy="36576"/>
-          </a:xfrm>
-          <a:prstGeom prst="ellipse">
-            <a:avLst/>
-          </a:prstGeom>
-          <a:noFill/>
-          <a:ln>
-            <a:noFill/>
-          </a:ln>
-          <a:effectLst/>
-        </p:spPr>
-        <p:style>
-          <a:lnRef idx="1">
-            <a:schemeClr val="accent1"/>
-          </a:lnRef>
-          <a:fillRef idx="3">
-            <a:schemeClr val="accent1"/>
-          </a:fillRef>
-          <a:effectRef idx="2">
-            <a:schemeClr val="accent1"/>
-          </a:effectRef>
-          <a:fontRef idx="minor">
-            <a:schemeClr val="lt1"/>
-          </a:fontRef>
-        </p:style>
-        <p:txBody>
-          <a:bodyPr rtlCol="0" anchor="ctr"/>
-          <a:lstStyle/>
-          <a:p>
-            <a:pPr algn="ctr"/>
+        </p:spPr>
+        <p:txBody>
+          <a:bodyPr wrap="square" anchor="t" lIns="12700" rIns="12700" tIns="12700" bIns="12700">
+            <a:spAutoFit/>
+          </a:bodyPr>
+          <a:lstStyle/>
+          <a:p>
+            <a:pPr algn="l"/>
+            <a:r>
+              <a:rPr sz="1000" b="0">
+                <a:solidFill>
+                  <a:srgbClr val="000000"/>
+                </a:solidFill>
+              </a:rPr>
+              <a:t>O2 Mission-Tailored COWP Excerpts</a:t>
+            </a:r>
           </a:p>
         </p:txBody>
       </p:sp>
       <p:cxnSp>
         <p:nvCxnSpPr>
-          <p:cNvPr id="26" name="Connector 25"/>
+          <p:cNvPr id="78" name="Connector 77"/>
           <p:cNvCxnSpPr/>
           <p:nvPr/>
         </p:nvCxnSpPr>
         <p:spPr>
           <a:xfrm>
-            <a:off x="3931920" y="2462479"/>
-            <a:ext cx="137160" cy="3001061"/>
+            <a:off x="1417320" y="6126480"/>
+            <a:ext cx="7680960" cy="0"/>
           </a:xfrm>
           <a:prstGeom prst="bentConnector3">
             <a:avLst/>
           </a:prstGeom>
-          <a:ln w="12700">
+          <a:ln w="15875">
+            <a:solidFill>
+              <a:srgbClr val="000000"/>
+            </a:solidFill>
+          </a:ln>
+          <a:effectLst/>
+        </p:spPr>
+        <p:style>
+          <a:lnRef idx="2">
+            <a:schemeClr val="accent1"/>
+          </a:lnRef>
+          <a:fillRef idx="0">
+            <a:schemeClr val="accent1"/>
+          </a:fillRef>
+          <a:effectRef idx="1">
+            <a:schemeClr val="accent1"/>
+          </a:effectRef>
+          <a:fontRef idx="minor">
+            <a:schemeClr val="tx1"/>
+          </a:fontRef>
+        </p:style>
+      </p:cxnSp>
+      <p:cxnSp>
+        <p:nvCxnSpPr>
+          <p:cNvPr id="79" name="Connector 78"/>
+          <p:cNvCxnSpPr/>
+          <p:nvPr/>
+        </p:nvCxnSpPr>
+        <p:spPr>
+          <a:xfrm>
+            <a:off x="3429000" y="6446520"/>
+            <a:ext cx="1554480" cy="0"/>
+          </a:xfrm>
+          <a:prstGeom prst="bentConnector3">
+            <a:avLst/>
+          </a:prstGeom>
+          <a:ln w="15875">
+            <a:solidFill>
+              <a:srgbClr val="000000"/>
+            </a:solidFill>
+          </a:ln>
+          <a:effectLst/>
+        </p:spPr>
+        <p:style>
+          <a:lnRef idx="2">
+            <a:schemeClr val="accent1"/>
+          </a:lnRef>
+          <a:fillRef idx="0">
+            <a:schemeClr val="accent1"/>
+          </a:fillRef>
+          <a:effectRef idx="1">
+            <a:schemeClr val="accent1"/>
+          </a:effectRef>
+          <a:fontRef idx="minor">
+            <a:schemeClr val="tx1"/>
+          </a:fontRef>
+        </p:style>
+      </p:cxnSp>
+      <p:cxnSp>
+        <p:nvCxnSpPr>
+          <p:cNvPr id="80" name="Connector 79"/>
+          <p:cNvCxnSpPr/>
+          <p:nvPr/>
+        </p:nvCxnSpPr>
+        <p:spPr>
+          <a:xfrm>
+            <a:off x="1920240" y="6766560"/>
+            <a:ext cx="7360920" cy="0"/>
+          </a:xfrm>
+          <a:prstGeom prst="bentConnector3">
+            <a:avLst/>
+          </a:prstGeom>
+          <a:ln w="15875">
+            <a:solidFill>
+              <a:srgbClr val="000000"/>
+            </a:solidFill>
+          </a:ln>
+          <a:effectLst/>
+        </p:spPr>
+        <p:style>
+          <a:lnRef idx="2">
+            <a:schemeClr val="accent1"/>
+          </a:lnRef>
+          <a:fillRef idx="0">
+            <a:schemeClr val="accent1"/>
+          </a:fillRef>
+          <a:effectRef idx="1">
+            <a:schemeClr val="accent1"/>
+          </a:effectRef>
+          <a:fontRef idx="minor">
+            <a:schemeClr val="tx1"/>
+          </a:fontRef>
+        </p:style>
+      </p:cxnSp>
+      <p:cxnSp>
+        <p:nvCxnSpPr>
+          <p:cNvPr id="81" name="Connector 80"/>
+          <p:cNvCxnSpPr/>
+          <p:nvPr/>
+        </p:nvCxnSpPr>
+        <p:spPr>
+          <a:xfrm flipV="1">
+            <a:off x="1417320" y="4069080"/>
+            <a:ext cx="0" cy="2057400"/>
+          </a:xfrm>
+          <a:prstGeom prst="bentConnector3">
+            <a:avLst/>
+          </a:prstGeom>
+          <a:ln w="15875">
             <a:solidFill>
               <a:srgbClr val="000000"/>
             </a:solidFill>
@@ -4223,14 +6305,1069 @@
       </p:cxnSp>
       <p:sp>
         <p:nvSpPr>
-          <p:cNvPr id="27" name="TextBox 26"/>
+          <p:cNvPr id="82" name="Rectangle 81"/>
+          <p:cNvSpPr/>
+          <p:nvPr/>
+        </p:nvSpPr>
+        <p:spPr>
+          <a:xfrm>
+            <a:off x="1401318" y="4053078"/>
+            <a:ext cx="32004" cy="32004"/>
+          </a:xfrm>
+          <a:prstGeom prst="rect">
+            <a:avLst/>
+          </a:prstGeom>
+          <a:noFill/>
+          <a:ln>
+            <a:noFill/>
+          </a:ln>
+          <a:effectLst/>
+        </p:spPr>
+        <p:style>
+          <a:lnRef idx="1">
+            <a:schemeClr val="accent1"/>
+          </a:lnRef>
+          <a:fillRef idx="3">
+            <a:schemeClr val="accent1"/>
+          </a:fillRef>
+          <a:effectRef idx="2">
+            <a:schemeClr val="accent1"/>
+          </a:effectRef>
+          <a:fontRef idx="minor">
+            <a:schemeClr val="lt1"/>
+          </a:fontRef>
+        </p:style>
+        <p:txBody>
+          <a:bodyPr rtlCol="0" anchor="ctr"/>
+          <a:lstStyle/>
+          <a:p>
+            <a:pPr algn="ctr"/>
+          </a:p>
+        </p:txBody>
+      </p:sp>
+      <p:cxnSp>
+        <p:nvCxnSpPr>
+          <p:cNvPr id="83" name="Connector 82"/>
+          <p:cNvCxnSpPr/>
+          <p:nvPr/>
+        </p:nvCxnSpPr>
+        <p:spPr>
+          <a:xfrm flipV="1">
+            <a:off x="2880360" y="4069080"/>
+            <a:ext cx="0" cy="2057400"/>
+          </a:xfrm>
+          <a:prstGeom prst="bentConnector3">
+            <a:avLst/>
+          </a:prstGeom>
+          <a:ln w="15875">
+            <a:solidFill>
+              <a:srgbClr val="000000"/>
+            </a:solidFill>
+            <a:tailEnd type="triangle" w="med" len="med"/>
+          </a:ln>
+          <a:effectLst/>
+        </p:spPr>
+        <p:style>
+          <a:lnRef idx="2">
+            <a:schemeClr val="accent1"/>
+          </a:lnRef>
+          <a:fillRef idx="0">
+            <a:schemeClr val="accent1"/>
+          </a:fillRef>
+          <a:effectRef idx="1">
+            <a:schemeClr val="accent1"/>
+          </a:effectRef>
+          <a:fontRef idx="minor">
+            <a:schemeClr val="tx1"/>
+          </a:fontRef>
+        </p:style>
+      </p:cxnSp>
+      <p:sp>
+        <p:nvSpPr>
+          <p:cNvPr id="84" name="Rectangle 83"/>
+          <p:cNvSpPr/>
+          <p:nvPr/>
+        </p:nvSpPr>
+        <p:spPr>
+          <a:xfrm>
+            <a:off x="2864358" y="4053078"/>
+            <a:ext cx="32004" cy="32004"/>
+          </a:xfrm>
+          <a:prstGeom prst="rect">
+            <a:avLst/>
+          </a:prstGeom>
+          <a:noFill/>
+          <a:ln>
+            <a:noFill/>
+          </a:ln>
+          <a:effectLst/>
+        </p:spPr>
+        <p:style>
+          <a:lnRef idx="1">
+            <a:schemeClr val="accent1"/>
+          </a:lnRef>
+          <a:fillRef idx="3">
+            <a:schemeClr val="accent1"/>
+          </a:fillRef>
+          <a:effectRef idx="2">
+            <a:schemeClr val="accent1"/>
+          </a:effectRef>
+          <a:fontRef idx="minor">
+            <a:schemeClr val="lt1"/>
+          </a:fontRef>
+        </p:style>
+        <p:txBody>
+          <a:bodyPr rtlCol="0" anchor="ctr"/>
+          <a:lstStyle/>
+          <a:p>
+            <a:pPr algn="ctr"/>
+          </a:p>
+        </p:txBody>
+      </p:sp>
+      <p:cxnSp>
+        <p:nvCxnSpPr>
+          <p:cNvPr id="85" name="Connector 84"/>
+          <p:cNvCxnSpPr/>
+          <p:nvPr/>
+        </p:nvCxnSpPr>
+        <p:spPr>
+          <a:xfrm flipV="1">
+            <a:off x="4434840" y="4069080"/>
+            <a:ext cx="0" cy="2057400"/>
+          </a:xfrm>
+          <a:prstGeom prst="bentConnector3">
+            <a:avLst/>
+          </a:prstGeom>
+          <a:ln w="15875">
+            <a:solidFill>
+              <a:srgbClr val="000000"/>
+            </a:solidFill>
+            <a:tailEnd type="triangle" w="med" len="med"/>
+          </a:ln>
+          <a:effectLst/>
+        </p:spPr>
+        <p:style>
+          <a:lnRef idx="2">
+            <a:schemeClr val="accent1"/>
+          </a:lnRef>
+          <a:fillRef idx="0">
+            <a:schemeClr val="accent1"/>
+          </a:fillRef>
+          <a:effectRef idx="1">
+            <a:schemeClr val="accent1"/>
+          </a:effectRef>
+          <a:fontRef idx="minor">
+            <a:schemeClr val="tx1"/>
+          </a:fontRef>
+        </p:style>
+      </p:cxnSp>
+      <p:sp>
+        <p:nvSpPr>
+          <p:cNvPr id="86" name="Rectangle 85"/>
+          <p:cNvSpPr/>
+          <p:nvPr/>
+        </p:nvSpPr>
+        <p:spPr>
+          <a:xfrm>
+            <a:off x="4418838" y="4053078"/>
+            <a:ext cx="32004" cy="32004"/>
+          </a:xfrm>
+          <a:prstGeom prst="rect">
+            <a:avLst/>
+          </a:prstGeom>
+          <a:noFill/>
+          <a:ln>
+            <a:noFill/>
+          </a:ln>
+          <a:effectLst/>
+        </p:spPr>
+        <p:style>
+          <a:lnRef idx="1">
+            <a:schemeClr val="accent1"/>
+          </a:lnRef>
+          <a:fillRef idx="3">
+            <a:schemeClr val="accent1"/>
+          </a:fillRef>
+          <a:effectRef idx="2">
+            <a:schemeClr val="accent1"/>
+          </a:effectRef>
+          <a:fontRef idx="minor">
+            <a:schemeClr val="lt1"/>
+          </a:fontRef>
+        </p:style>
+        <p:txBody>
+          <a:bodyPr rtlCol="0" anchor="ctr"/>
+          <a:lstStyle/>
+          <a:p>
+            <a:pPr algn="ctr"/>
+          </a:p>
+        </p:txBody>
+      </p:sp>
+      <p:cxnSp>
+        <p:nvCxnSpPr>
+          <p:cNvPr id="87" name="Connector 86"/>
+          <p:cNvCxnSpPr/>
+          <p:nvPr/>
+        </p:nvCxnSpPr>
+        <p:spPr>
+          <a:xfrm flipV="1">
+            <a:off x="5897880" y="4069080"/>
+            <a:ext cx="0" cy="2057400"/>
+          </a:xfrm>
+          <a:prstGeom prst="bentConnector3">
+            <a:avLst/>
+          </a:prstGeom>
+          <a:ln w="15875">
+            <a:solidFill>
+              <a:srgbClr val="000000"/>
+            </a:solidFill>
+            <a:tailEnd type="triangle" w="med" len="med"/>
+          </a:ln>
+          <a:effectLst/>
+        </p:spPr>
+        <p:style>
+          <a:lnRef idx="2">
+            <a:schemeClr val="accent1"/>
+          </a:lnRef>
+          <a:fillRef idx="0">
+            <a:schemeClr val="accent1"/>
+          </a:fillRef>
+          <a:effectRef idx="1">
+            <a:schemeClr val="accent1"/>
+          </a:effectRef>
+          <a:fontRef idx="minor">
+            <a:schemeClr val="tx1"/>
+          </a:fontRef>
+        </p:style>
+      </p:cxnSp>
+      <p:sp>
+        <p:nvSpPr>
+          <p:cNvPr id="88" name="Rectangle 87"/>
+          <p:cNvSpPr/>
+          <p:nvPr/>
+        </p:nvSpPr>
+        <p:spPr>
+          <a:xfrm>
+            <a:off x="5881878" y="4053078"/>
+            <a:ext cx="32004" cy="32004"/>
+          </a:xfrm>
+          <a:prstGeom prst="rect">
+            <a:avLst/>
+          </a:prstGeom>
+          <a:noFill/>
+          <a:ln>
+            <a:noFill/>
+          </a:ln>
+          <a:effectLst/>
+        </p:spPr>
+        <p:style>
+          <a:lnRef idx="1">
+            <a:schemeClr val="accent1"/>
+          </a:lnRef>
+          <a:fillRef idx="3">
+            <a:schemeClr val="accent1"/>
+          </a:fillRef>
+          <a:effectRef idx="2">
+            <a:schemeClr val="accent1"/>
+          </a:effectRef>
+          <a:fontRef idx="minor">
+            <a:schemeClr val="lt1"/>
+          </a:fontRef>
+        </p:style>
+        <p:txBody>
+          <a:bodyPr rtlCol="0" anchor="ctr"/>
+          <a:lstStyle/>
+          <a:p>
+            <a:pPr algn="ctr"/>
+          </a:p>
+        </p:txBody>
+      </p:sp>
+      <p:cxnSp>
+        <p:nvCxnSpPr>
+          <p:cNvPr id="89" name="Connector 88"/>
+          <p:cNvCxnSpPr/>
+          <p:nvPr/>
+        </p:nvCxnSpPr>
+        <p:spPr>
+          <a:xfrm flipV="1">
+            <a:off x="7955279" y="5486400"/>
+            <a:ext cx="0" cy="640080"/>
+          </a:xfrm>
+          <a:prstGeom prst="bentConnector3">
+            <a:avLst/>
+          </a:prstGeom>
+          <a:ln w="15875">
+            <a:solidFill>
+              <a:srgbClr val="000000"/>
+            </a:solidFill>
+            <a:tailEnd type="triangle" w="med" len="med"/>
+          </a:ln>
+          <a:effectLst/>
+        </p:spPr>
+        <p:style>
+          <a:lnRef idx="2">
+            <a:schemeClr val="accent1"/>
+          </a:lnRef>
+          <a:fillRef idx="0">
+            <a:schemeClr val="accent1"/>
+          </a:fillRef>
+          <a:effectRef idx="1">
+            <a:schemeClr val="accent1"/>
+          </a:effectRef>
+          <a:fontRef idx="minor">
+            <a:schemeClr val="tx1"/>
+          </a:fontRef>
+        </p:style>
+      </p:cxnSp>
+      <p:sp>
+        <p:nvSpPr>
+          <p:cNvPr id="90" name="Rectangle 89"/>
+          <p:cNvSpPr/>
+          <p:nvPr/>
+        </p:nvSpPr>
+        <p:spPr>
+          <a:xfrm>
+            <a:off x="7939277" y="5470398"/>
+            <a:ext cx="32004" cy="32004"/>
+          </a:xfrm>
+          <a:prstGeom prst="rect">
+            <a:avLst/>
+          </a:prstGeom>
+          <a:noFill/>
+          <a:ln>
+            <a:noFill/>
+          </a:ln>
+          <a:effectLst/>
+        </p:spPr>
+        <p:style>
+          <a:lnRef idx="1">
+            <a:schemeClr val="accent1"/>
+          </a:lnRef>
+          <a:fillRef idx="3">
+            <a:schemeClr val="accent1"/>
+          </a:fillRef>
+          <a:effectRef idx="2">
+            <a:schemeClr val="accent1"/>
+          </a:effectRef>
+          <a:fontRef idx="minor">
+            <a:schemeClr val="lt1"/>
+          </a:fontRef>
+        </p:style>
+        <p:txBody>
+          <a:bodyPr rtlCol="0" anchor="ctr"/>
+          <a:lstStyle/>
+          <a:p>
+            <a:pPr algn="ctr"/>
+          </a:p>
+        </p:txBody>
+      </p:sp>
+      <p:cxnSp>
+        <p:nvCxnSpPr>
+          <p:cNvPr id="91" name="Connector 90"/>
+          <p:cNvCxnSpPr/>
+          <p:nvPr/>
+        </p:nvCxnSpPr>
+        <p:spPr>
+          <a:xfrm flipV="1">
+            <a:off x="9098280" y="3291840"/>
+            <a:ext cx="0" cy="2834640"/>
+          </a:xfrm>
+          <a:prstGeom prst="bentConnector3">
+            <a:avLst/>
+          </a:prstGeom>
+          <a:ln w="15875">
+            <a:solidFill>
+              <a:srgbClr val="000000"/>
+            </a:solidFill>
+          </a:ln>
+          <a:effectLst/>
+        </p:spPr>
+        <p:style>
+          <a:lnRef idx="2">
+            <a:schemeClr val="accent1"/>
+          </a:lnRef>
+          <a:fillRef idx="0">
+            <a:schemeClr val="accent1"/>
+          </a:fillRef>
+          <a:effectRef idx="1">
+            <a:schemeClr val="accent1"/>
+          </a:effectRef>
+          <a:fontRef idx="minor">
+            <a:schemeClr val="tx1"/>
+          </a:fontRef>
+        </p:style>
+      </p:cxnSp>
+      <p:cxnSp>
+        <p:nvCxnSpPr>
+          <p:cNvPr id="92" name="Connector 91"/>
+          <p:cNvCxnSpPr/>
+          <p:nvPr/>
+        </p:nvCxnSpPr>
+        <p:spPr>
+          <a:xfrm flipH="1">
+            <a:off x="7955279" y="3291840"/>
+            <a:ext cx="1143001" cy="0"/>
+          </a:xfrm>
+          <a:prstGeom prst="bentConnector3">
+            <a:avLst/>
+          </a:prstGeom>
+          <a:ln w="15875">
+            <a:solidFill>
+              <a:srgbClr val="000000"/>
+            </a:solidFill>
+          </a:ln>
+          <a:effectLst/>
+        </p:spPr>
+        <p:style>
+          <a:lnRef idx="2">
+            <a:schemeClr val="accent1"/>
+          </a:lnRef>
+          <a:fillRef idx="0">
+            <a:schemeClr val="accent1"/>
+          </a:fillRef>
+          <a:effectRef idx="1">
+            <a:schemeClr val="accent1"/>
+          </a:effectRef>
+          <a:fontRef idx="minor">
+            <a:schemeClr val="tx1"/>
+          </a:fontRef>
+        </p:style>
+      </p:cxnSp>
+      <p:cxnSp>
+        <p:nvCxnSpPr>
+          <p:cNvPr id="93" name="Connector 92"/>
+          <p:cNvCxnSpPr/>
+          <p:nvPr/>
+        </p:nvCxnSpPr>
+        <p:spPr>
+          <a:xfrm flipV="1">
+            <a:off x="7955279" y="2834640"/>
+            <a:ext cx="0" cy="457200"/>
+          </a:xfrm>
+          <a:prstGeom prst="bentConnector3">
+            <a:avLst/>
+          </a:prstGeom>
+          <a:ln w="15875">
+            <a:solidFill>
+              <a:srgbClr val="000000"/>
+            </a:solidFill>
+            <a:tailEnd type="triangle" w="med" len="med"/>
+          </a:ln>
+          <a:effectLst/>
+        </p:spPr>
+        <p:style>
+          <a:lnRef idx="2">
+            <a:schemeClr val="accent1"/>
+          </a:lnRef>
+          <a:fillRef idx="0">
+            <a:schemeClr val="accent1"/>
+          </a:fillRef>
+          <a:effectRef idx="1">
+            <a:schemeClr val="accent1"/>
+          </a:effectRef>
+          <a:fontRef idx="minor">
+            <a:schemeClr val="tx1"/>
+          </a:fontRef>
+        </p:style>
+      </p:cxnSp>
+      <p:sp>
+        <p:nvSpPr>
+          <p:cNvPr id="94" name="Rectangle 93"/>
+          <p:cNvSpPr/>
+          <p:nvPr/>
+        </p:nvSpPr>
+        <p:spPr>
+          <a:xfrm>
+            <a:off x="7939277" y="2818638"/>
+            <a:ext cx="32004" cy="32004"/>
+          </a:xfrm>
+          <a:prstGeom prst="rect">
+            <a:avLst/>
+          </a:prstGeom>
+          <a:noFill/>
+          <a:ln>
+            <a:noFill/>
+          </a:ln>
+          <a:effectLst/>
+        </p:spPr>
+        <p:style>
+          <a:lnRef idx="1">
+            <a:schemeClr val="accent1"/>
+          </a:lnRef>
+          <a:fillRef idx="3">
+            <a:schemeClr val="accent1"/>
+          </a:fillRef>
+          <a:effectRef idx="2">
+            <a:schemeClr val="accent1"/>
+          </a:effectRef>
+          <a:fontRef idx="minor">
+            <a:schemeClr val="lt1"/>
+          </a:fontRef>
+        </p:style>
+        <p:txBody>
+          <a:bodyPr rtlCol="0" anchor="ctr"/>
+          <a:lstStyle/>
+          <a:p>
+            <a:pPr algn="ctr"/>
+          </a:p>
+        </p:txBody>
+      </p:sp>
+      <p:cxnSp>
+        <p:nvCxnSpPr>
+          <p:cNvPr id="95" name="Connector 94"/>
+          <p:cNvCxnSpPr/>
+          <p:nvPr/>
+        </p:nvCxnSpPr>
+        <p:spPr>
+          <a:xfrm flipV="1">
+            <a:off x="3429000" y="4069080"/>
+            <a:ext cx="0" cy="2377440"/>
+          </a:xfrm>
+          <a:prstGeom prst="bentConnector3">
+            <a:avLst/>
+          </a:prstGeom>
+          <a:ln w="15875">
+            <a:solidFill>
+              <a:srgbClr val="000000"/>
+            </a:solidFill>
+            <a:tailEnd type="triangle" w="med" len="med"/>
+          </a:ln>
+          <a:effectLst/>
+        </p:spPr>
+        <p:style>
+          <a:lnRef idx="2">
+            <a:schemeClr val="accent1"/>
+          </a:lnRef>
+          <a:fillRef idx="0">
+            <a:schemeClr val="accent1"/>
+          </a:fillRef>
+          <a:effectRef idx="1">
+            <a:schemeClr val="accent1"/>
+          </a:effectRef>
+          <a:fontRef idx="minor">
+            <a:schemeClr val="tx1"/>
+          </a:fontRef>
+        </p:style>
+      </p:cxnSp>
+      <p:sp>
+        <p:nvSpPr>
+          <p:cNvPr id="96" name="Rectangle 95"/>
+          <p:cNvSpPr/>
+          <p:nvPr/>
+        </p:nvSpPr>
+        <p:spPr>
+          <a:xfrm>
+            <a:off x="3412998" y="4053078"/>
+            <a:ext cx="32004" cy="32004"/>
+          </a:xfrm>
+          <a:prstGeom prst="rect">
+            <a:avLst/>
+          </a:prstGeom>
+          <a:noFill/>
+          <a:ln>
+            <a:noFill/>
+          </a:ln>
+          <a:effectLst/>
+        </p:spPr>
+        <p:style>
+          <a:lnRef idx="1">
+            <a:schemeClr val="accent1"/>
+          </a:lnRef>
+          <a:fillRef idx="3">
+            <a:schemeClr val="accent1"/>
+          </a:fillRef>
+          <a:effectRef idx="2">
+            <a:schemeClr val="accent1"/>
+          </a:effectRef>
+          <a:fontRef idx="minor">
+            <a:schemeClr val="lt1"/>
+          </a:fontRef>
+        </p:style>
+        <p:txBody>
+          <a:bodyPr rtlCol="0" anchor="ctr"/>
+          <a:lstStyle/>
+          <a:p>
+            <a:pPr algn="ctr"/>
+          </a:p>
+        </p:txBody>
+      </p:sp>
+      <p:cxnSp>
+        <p:nvCxnSpPr>
+          <p:cNvPr id="97" name="Connector 96"/>
+          <p:cNvCxnSpPr/>
+          <p:nvPr/>
+        </p:nvCxnSpPr>
+        <p:spPr>
+          <a:xfrm flipV="1">
+            <a:off x="4983480" y="4069080"/>
+            <a:ext cx="0" cy="2377440"/>
+          </a:xfrm>
+          <a:prstGeom prst="bentConnector3">
+            <a:avLst/>
+          </a:prstGeom>
+          <a:ln w="15875">
+            <a:solidFill>
+              <a:srgbClr val="000000"/>
+            </a:solidFill>
+            <a:tailEnd type="triangle" w="med" len="med"/>
+          </a:ln>
+          <a:effectLst/>
+        </p:spPr>
+        <p:style>
+          <a:lnRef idx="2">
+            <a:schemeClr val="accent1"/>
+          </a:lnRef>
+          <a:fillRef idx="0">
+            <a:schemeClr val="accent1"/>
+          </a:fillRef>
+          <a:effectRef idx="1">
+            <a:schemeClr val="accent1"/>
+          </a:effectRef>
+          <a:fontRef idx="minor">
+            <a:schemeClr val="tx1"/>
+          </a:fontRef>
+        </p:style>
+      </p:cxnSp>
+      <p:sp>
+        <p:nvSpPr>
+          <p:cNvPr id="98" name="Rectangle 97"/>
+          <p:cNvSpPr/>
+          <p:nvPr/>
+        </p:nvSpPr>
+        <p:spPr>
+          <a:xfrm>
+            <a:off x="4967478" y="4053078"/>
+            <a:ext cx="32004" cy="32004"/>
+          </a:xfrm>
+          <a:prstGeom prst="rect">
+            <a:avLst/>
+          </a:prstGeom>
+          <a:noFill/>
+          <a:ln>
+            <a:noFill/>
+          </a:ln>
+          <a:effectLst/>
+        </p:spPr>
+        <p:style>
+          <a:lnRef idx="1">
+            <a:schemeClr val="accent1"/>
+          </a:lnRef>
+          <a:fillRef idx="3">
+            <a:schemeClr val="accent1"/>
+          </a:fillRef>
+          <a:effectRef idx="2">
+            <a:schemeClr val="accent1"/>
+          </a:effectRef>
+          <a:fontRef idx="minor">
+            <a:schemeClr val="lt1"/>
+          </a:fontRef>
+        </p:style>
+        <p:txBody>
+          <a:bodyPr rtlCol="0" anchor="ctr"/>
+          <a:lstStyle/>
+          <a:p>
+            <a:pPr algn="ctr"/>
+          </a:p>
+        </p:txBody>
+      </p:sp>
+      <p:cxnSp>
+        <p:nvCxnSpPr>
+          <p:cNvPr id="99" name="Connector 98"/>
+          <p:cNvCxnSpPr/>
+          <p:nvPr/>
+        </p:nvCxnSpPr>
+        <p:spPr>
+          <a:xfrm flipV="1">
+            <a:off x="1920240" y="4069080"/>
+            <a:ext cx="0" cy="2697480"/>
+          </a:xfrm>
+          <a:prstGeom prst="bentConnector3">
+            <a:avLst/>
+          </a:prstGeom>
+          <a:ln w="15875">
+            <a:solidFill>
+              <a:srgbClr val="000000"/>
+            </a:solidFill>
+            <a:tailEnd type="triangle" w="med" len="med"/>
+          </a:ln>
+          <a:effectLst/>
+        </p:spPr>
+        <p:style>
+          <a:lnRef idx="2">
+            <a:schemeClr val="accent1"/>
+          </a:lnRef>
+          <a:fillRef idx="0">
+            <a:schemeClr val="accent1"/>
+          </a:fillRef>
+          <a:effectRef idx="1">
+            <a:schemeClr val="accent1"/>
+          </a:effectRef>
+          <a:fontRef idx="minor">
+            <a:schemeClr val="tx1"/>
+          </a:fontRef>
+        </p:style>
+      </p:cxnSp>
+      <p:sp>
+        <p:nvSpPr>
+          <p:cNvPr id="100" name="Rectangle 99"/>
+          <p:cNvSpPr/>
+          <p:nvPr/>
+        </p:nvSpPr>
+        <p:spPr>
+          <a:xfrm>
+            <a:off x="1904238" y="4053078"/>
+            <a:ext cx="32004" cy="32004"/>
+          </a:xfrm>
+          <a:prstGeom prst="rect">
+            <a:avLst/>
+          </a:prstGeom>
+          <a:noFill/>
+          <a:ln>
+            <a:noFill/>
+          </a:ln>
+          <a:effectLst/>
+        </p:spPr>
+        <p:style>
+          <a:lnRef idx="1">
+            <a:schemeClr val="accent1"/>
+          </a:lnRef>
+          <a:fillRef idx="3">
+            <a:schemeClr val="accent1"/>
+          </a:fillRef>
+          <a:effectRef idx="2">
+            <a:schemeClr val="accent1"/>
+          </a:effectRef>
+          <a:fontRef idx="minor">
+            <a:schemeClr val="lt1"/>
+          </a:fontRef>
+        </p:style>
+        <p:txBody>
+          <a:bodyPr rtlCol="0" anchor="ctr"/>
+          <a:lstStyle/>
+          <a:p>
+            <a:pPr algn="ctr"/>
+          </a:p>
+        </p:txBody>
+      </p:sp>
+      <p:cxnSp>
+        <p:nvCxnSpPr>
+          <p:cNvPr id="101" name="Connector 100"/>
+          <p:cNvCxnSpPr/>
+          <p:nvPr/>
+        </p:nvCxnSpPr>
+        <p:spPr>
+          <a:xfrm flipV="1">
+            <a:off x="6537960" y="4069080"/>
+            <a:ext cx="0" cy="2697480"/>
+          </a:xfrm>
+          <a:prstGeom prst="bentConnector3">
+            <a:avLst/>
+          </a:prstGeom>
+          <a:ln w="15875">
+            <a:solidFill>
+              <a:srgbClr val="000000"/>
+            </a:solidFill>
+            <a:tailEnd type="triangle" w="med" len="med"/>
+          </a:ln>
+          <a:effectLst/>
+        </p:spPr>
+        <p:style>
+          <a:lnRef idx="2">
+            <a:schemeClr val="accent1"/>
+          </a:lnRef>
+          <a:fillRef idx="0">
+            <a:schemeClr val="accent1"/>
+          </a:fillRef>
+          <a:effectRef idx="1">
+            <a:schemeClr val="accent1"/>
+          </a:effectRef>
+          <a:fontRef idx="minor">
+            <a:schemeClr val="tx1"/>
+          </a:fontRef>
+        </p:style>
+      </p:cxnSp>
+      <p:sp>
+        <p:nvSpPr>
+          <p:cNvPr id="102" name="Rectangle 101"/>
+          <p:cNvSpPr/>
+          <p:nvPr/>
+        </p:nvSpPr>
+        <p:spPr>
+          <a:xfrm>
+            <a:off x="6521958" y="4053078"/>
+            <a:ext cx="32004" cy="32004"/>
+          </a:xfrm>
+          <a:prstGeom prst="rect">
+            <a:avLst/>
+          </a:prstGeom>
+          <a:noFill/>
+          <a:ln>
+            <a:noFill/>
+          </a:ln>
+          <a:effectLst/>
+        </p:spPr>
+        <p:style>
+          <a:lnRef idx="1">
+            <a:schemeClr val="accent1"/>
+          </a:lnRef>
+          <a:fillRef idx="3">
+            <a:schemeClr val="accent1"/>
+          </a:fillRef>
+          <a:effectRef idx="2">
+            <a:schemeClr val="accent1"/>
+          </a:effectRef>
+          <a:fontRef idx="minor">
+            <a:schemeClr val="lt1"/>
+          </a:fontRef>
+        </p:style>
+        <p:txBody>
+          <a:bodyPr rtlCol="0" anchor="ctr"/>
+          <a:lstStyle/>
+          <a:p>
+            <a:pPr algn="ctr"/>
+          </a:p>
+        </p:txBody>
+      </p:sp>
+      <p:cxnSp>
+        <p:nvCxnSpPr>
+          <p:cNvPr id="103" name="Connector 102"/>
+          <p:cNvCxnSpPr/>
+          <p:nvPr/>
+        </p:nvCxnSpPr>
+        <p:spPr>
+          <a:xfrm flipV="1">
+            <a:off x="8595360" y="5486400"/>
+            <a:ext cx="0" cy="1280160"/>
+          </a:xfrm>
+          <a:prstGeom prst="bentConnector3">
+            <a:avLst/>
+          </a:prstGeom>
+          <a:ln w="15875">
+            <a:solidFill>
+              <a:srgbClr val="000000"/>
+            </a:solidFill>
+            <a:tailEnd type="triangle" w="med" len="med"/>
+          </a:ln>
+          <a:effectLst/>
+        </p:spPr>
+        <p:style>
+          <a:lnRef idx="2">
+            <a:schemeClr val="accent1"/>
+          </a:lnRef>
+          <a:fillRef idx="0">
+            <a:schemeClr val="accent1"/>
+          </a:fillRef>
+          <a:effectRef idx="1">
+            <a:schemeClr val="accent1"/>
+          </a:effectRef>
+          <a:fontRef idx="minor">
+            <a:schemeClr val="tx1"/>
+          </a:fontRef>
+        </p:style>
+      </p:cxnSp>
+      <p:sp>
+        <p:nvSpPr>
+          <p:cNvPr id="104" name="Rectangle 103"/>
+          <p:cNvSpPr/>
+          <p:nvPr/>
+        </p:nvSpPr>
+        <p:spPr>
+          <a:xfrm>
+            <a:off x="8579358" y="5470398"/>
+            <a:ext cx="32004" cy="32004"/>
+          </a:xfrm>
+          <a:prstGeom prst="rect">
+            <a:avLst/>
+          </a:prstGeom>
+          <a:noFill/>
+          <a:ln>
+            <a:noFill/>
+          </a:ln>
+          <a:effectLst/>
+        </p:spPr>
+        <p:style>
+          <a:lnRef idx="1">
+            <a:schemeClr val="accent1"/>
+          </a:lnRef>
+          <a:fillRef idx="3">
+            <a:schemeClr val="accent1"/>
+          </a:fillRef>
+          <a:effectRef idx="2">
+            <a:schemeClr val="accent1"/>
+          </a:effectRef>
+          <a:fontRef idx="minor">
+            <a:schemeClr val="lt1"/>
+          </a:fontRef>
+        </p:style>
+        <p:txBody>
+          <a:bodyPr rtlCol="0" anchor="ctr"/>
+          <a:lstStyle/>
+          <a:p>
+            <a:pPr algn="ctr"/>
+          </a:p>
+        </p:txBody>
+      </p:sp>
+      <p:cxnSp>
+        <p:nvCxnSpPr>
+          <p:cNvPr id="105" name="Connector 104"/>
+          <p:cNvCxnSpPr/>
+          <p:nvPr/>
+        </p:nvCxnSpPr>
+        <p:spPr>
+          <a:xfrm flipV="1">
+            <a:off x="9281160" y="3429000"/>
+            <a:ext cx="0" cy="3337560"/>
+          </a:xfrm>
+          <a:prstGeom prst="bentConnector3">
+            <a:avLst/>
+          </a:prstGeom>
+          <a:ln w="15875">
+            <a:solidFill>
+              <a:srgbClr val="000000"/>
+            </a:solidFill>
+          </a:ln>
+          <a:effectLst/>
+        </p:spPr>
+        <p:style>
+          <a:lnRef idx="2">
+            <a:schemeClr val="accent1"/>
+          </a:lnRef>
+          <a:fillRef idx="0">
+            <a:schemeClr val="accent1"/>
+          </a:fillRef>
+          <a:effectRef idx="1">
+            <a:schemeClr val="accent1"/>
+          </a:effectRef>
+          <a:fontRef idx="minor">
+            <a:schemeClr val="tx1"/>
+          </a:fontRef>
+        </p:style>
+      </p:cxnSp>
+      <p:cxnSp>
+        <p:nvCxnSpPr>
+          <p:cNvPr id="106" name="Connector 105"/>
+          <p:cNvCxnSpPr/>
+          <p:nvPr/>
+        </p:nvCxnSpPr>
+        <p:spPr>
+          <a:xfrm flipH="1">
+            <a:off x="8595360" y="3429000"/>
+            <a:ext cx="685800" cy="0"/>
+          </a:xfrm>
+          <a:prstGeom prst="bentConnector3">
+            <a:avLst/>
+          </a:prstGeom>
+          <a:ln w="15875">
+            <a:solidFill>
+              <a:srgbClr val="000000"/>
+            </a:solidFill>
+          </a:ln>
+          <a:effectLst/>
+        </p:spPr>
+        <p:style>
+          <a:lnRef idx="2">
+            <a:schemeClr val="accent1"/>
+          </a:lnRef>
+          <a:fillRef idx="0">
+            <a:schemeClr val="accent1"/>
+          </a:fillRef>
+          <a:effectRef idx="1">
+            <a:schemeClr val="accent1"/>
+          </a:effectRef>
+          <a:fontRef idx="minor">
+            <a:schemeClr val="tx1"/>
+          </a:fontRef>
+        </p:style>
+      </p:cxnSp>
+      <p:cxnSp>
+        <p:nvCxnSpPr>
+          <p:cNvPr id="107" name="Connector 106"/>
+          <p:cNvCxnSpPr/>
+          <p:nvPr/>
+        </p:nvCxnSpPr>
+        <p:spPr>
+          <a:xfrm flipV="1">
+            <a:off x="8595360" y="2834640"/>
+            <a:ext cx="0" cy="594360"/>
+          </a:xfrm>
+          <a:prstGeom prst="bentConnector3">
+            <a:avLst/>
+          </a:prstGeom>
+          <a:ln w="15875">
+            <a:solidFill>
+              <a:srgbClr val="000000"/>
+            </a:solidFill>
+            <a:tailEnd type="triangle" w="med" len="med"/>
+          </a:ln>
+          <a:effectLst/>
+        </p:spPr>
+        <p:style>
+          <a:lnRef idx="2">
+            <a:schemeClr val="accent1"/>
+          </a:lnRef>
+          <a:fillRef idx="0">
+            <a:schemeClr val="accent1"/>
+          </a:fillRef>
+          <a:effectRef idx="1">
+            <a:schemeClr val="accent1"/>
+          </a:effectRef>
+          <a:fontRef idx="minor">
+            <a:schemeClr val="tx1"/>
+          </a:fontRef>
+        </p:style>
+      </p:cxnSp>
+      <p:sp>
+        <p:nvSpPr>
+          <p:cNvPr id="108" name="Rectangle 107"/>
+          <p:cNvSpPr/>
+          <p:nvPr/>
+        </p:nvSpPr>
+        <p:spPr>
+          <a:xfrm>
+            <a:off x="8579358" y="2818638"/>
+            <a:ext cx="32004" cy="32004"/>
+          </a:xfrm>
+          <a:prstGeom prst="rect">
+            <a:avLst/>
+          </a:prstGeom>
+          <a:noFill/>
+          <a:ln>
+            <a:noFill/>
+          </a:ln>
+          <a:effectLst/>
+        </p:spPr>
+        <p:style>
+          <a:lnRef idx="1">
+            <a:schemeClr val="accent1"/>
+          </a:lnRef>
+          <a:fillRef idx="3">
+            <a:schemeClr val="accent1"/>
+          </a:fillRef>
+          <a:effectRef idx="2">
+            <a:schemeClr val="accent1"/>
+          </a:effectRef>
+          <a:fontRef idx="minor">
+            <a:schemeClr val="lt1"/>
+          </a:fontRef>
+        </p:style>
+        <p:txBody>
+          <a:bodyPr rtlCol="0" anchor="ctr"/>
+          <a:lstStyle/>
+          <a:p>
+            <a:pPr algn="ctr"/>
+          </a:p>
+        </p:txBody>
+      </p:sp>
+      <p:sp>
+        <p:nvSpPr>
+          <p:cNvPr id="109" name="TextBox 108"/>
           <p:cNvSpPr txBox="1"/>
           <p:nvPr/>
         </p:nvSpPr>
         <p:spPr>
           <a:xfrm>
-            <a:off x="3246120" y="4160520"/>
-            <a:ext cx="1417320" cy="246888"/>
+            <a:off x="914400" y="6903720"/>
+            <a:ext cx="2560320" cy="237744"/>
           </a:xfrm>
           <a:prstGeom prst="rect">
             <a:avLst/>
@@ -4238,7 +7375,7 @@
           <a:noFill/>
         </p:spPr>
         <p:txBody>
-          <a:bodyPr wrap="square" anchor="t" lIns="0" rIns="0" tIns="0" bIns="0">
+          <a:bodyPr wrap="square" anchor="t" lIns="12700" rIns="12700" tIns="12700" bIns="12700">
             <a:spAutoFit/>
           </a:bodyPr>
           <a:lstStyle/>
@@ -4249,110 +7386,30 @@
                 <a:solidFill>
                   <a:srgbClr val="000000"/>
                 </a:solidFill>
-                <a:latin typeface="Arial"/>
               </a:rPr>
-              <a:t>Local Weather State</a:t>
-            </a:r>
-          </a:p>
-        </p:txBody>
-      </p:sp>
-      <p:sp>
-        <p:nvSpPr>
-          <p:cNvPr id="28" name="Oval 27"/>
-          <p:cNvSpPr/>
-          <p:nvPr/>
-        </p:nvSpPr>
-        <p:spPr>
-          <a:xfrm>
-            <a:off x="5513832" y="3698748"/>
-            <a:ext cx="36576" cy="36576"/>
-          </a:xfrm>
-          <a:prstGeom prst="ellipse">
+              <a:t>M1 Platforms hosting ATMOS node compute</a:t>
+            </a:r>
+          </a:p>
+        </p:txBody>
+      </p:sp>
+      <p:sp>
+        <p:nvSpPr>
+          <p:cNvPr id="110" name="TextBox 109"/>
+          <p:cNvSpPr txBox="1"/>
+          <p:nvPr/>
+        </p:nvSpPr>
+        <p:spPr>
+          <a:xfrm>
+            <a:off x="3657600" y="6903720"/>
+            <a:ext cx="2240280" cy="237744"/>
+          </a:xfrm>
+          <a:prstGeom prst="rect">
             <a:avLst/>
           </a:prstGeom>
           <a:noFill/>
-          <a:ln>
-            <a:noFill/>
-          </a:ln>
-          <a:effectLst/>
-        </p:spPr>
-        <p:style>
-          <a:lnRef idx="1">
-            <a:schemeClr val="accent1"/>
-          </a:lnRef>
-          <a:fillRef idx="3">
-            <a:schemeClr val="accent1"/>
-          </a:fillRef>
-          <a:effectRef idx="2">
-            <a:schemeClr val="accent1"/>
-          </a:effectRef>
-          <a:fontRef idx="minor">
-            <a:schemeClr val="lt1"/>
-          </a:fontRef>
-        </p:style>
-        <p:txBody>
-          <a:bodyPr rtlCol="0" anchor="ctr"/>
-          <a:lstStyle/>
-          <a:p>
-            <a:pPr algn="ctr"/>
-          </a:p>
-        </p:txBody>
-      </p:sp>
-      <p:cxnSp>
-        <p:nvCxnSpPr>
-          <p:cNvPr id="29" name="Connector 28"/>
-          <p:cNvCxnSpPr/>
-          <p:nvPr/>
-        </p:nvCxnSpPr>
-        <p:spPr>
-          <a:xfrm>
-            <a:off x="3931920" y="2155240"/>
-            <a:ext cx="1600200" cy="1561795"/>
-          </a:xfrm>
-          <a:prstGeom prst="bentConnector3">
-            <a:avLst/>
-          </a:prstGeom>
-          <a:ln w="12700">
-            <a:solidFill>
-              <a:srgbClr val="000000"/>
-            </a:solidFill>
-            <a:tailEnd type="triangle" w="med" len="med"/>
-          </a:ln>
-          <a:effectLst/>
-        </p:spPr>
-        <p:style>
-          <a:lnRef idx="2">
-            <a:schemeClr val="accent1"/>
-          </a:lnRef>
-          <a:fillRef idx="0">
-            <a:schemeClr val="accent1"/>
-          </a:fillRef>
-          <a:effectRef idx="1">
-            <a:schemeClr val="accent1"/>
-          </a:effectRef>
-          <a:fontRef idx="minor">
-            <a:schemeClr val="tx1"/>
-          </a:fontRef>
-        </p:style>
-      </p:cxnSp>
-      <p:sp>
-        <p:nvSpPr>
-          <p:cNvPr id="30" name="TextBox 29"/>
-          <p:cNvSpPr txBox="1"/>
-          <p:nvPr/>
-        </p:nvSpPr>
-        <p:spPr>
-          <a:xfrm>
-            <a:off x="4315968" y="2852928"/>
-            <a:ext cx="1325880" cy="365760"/>
-          </a:xfrm>
-          <a:prstGeom prst="rect">
-            <a:avLst/>
-          </a:prstGeom>
-          <a:noFill/>
-        </p:spPr>
-        <p:txBody>
-          <a:bodyPr wrap="square" anchor="t" lIns="0" rIns="0" tIns="0" bIns="0">
+        </p:spPr>
+        <p:txBody>
+          <a:bodyPr wrap="square" anchor="t" lIns="12700" rIns="12700" tIns="12700" bIns="12700">
             <a:spAutoFit/>
           </a:bodyPr>
           <a:lstStyle/>
@@ -4363,152 +7420,30 @@
                 <a:solidFill>
                   <a:srgbClr val="000000"/>
                 </a:solidFill>
-                <a:latin typeface="Arial"/>
               </a:rPr>
-              <a:t>Local Weather State Publication</a:t>
-            </a:r>
-          </a:p>
-        </p:txBody>
-      </p:sp>
-      <p:sp>
-        <p:nvSpPr>
-          <p:cNvPr id="31" name="Oval 30"/>
-          <p:cNvSpPr/>
-          <p:nvPr/>
-        </p:nvSpPr>
-        <p:spPr>
-          <a:xfrm>
-            <a:off x="5468112" y="5445252"/>
-            <a:ext cx="36576" cy="36576"/>
-          </a:xfrm>
-          <a:prstGeom prst="ellipse">
+              <a:t>M2 ABLE-LBM / reduced models</a:t>
+            </a:r>
+          </a:p>
+        </p:txBody>
+      </p:sp>
+      <p:sp>
+        <p:nvSpPr>
+          <p:cNvPr id="111" name="TextBox 110"/>
+          <p:cNvSpPr txBox="1"/>
+          <p:nvPr/>
+        </p:nvSpPr>
+        <p:spPr>
+          <a:xfrm>
+            <a:off x="5943600" y="6903720"/>
+            <a:ext cx="2240280" cy="237744"/>
+          </a:xfrm>
+          <a:prstGeom prst="rect">
             <a:avLst/>
           </a:prstGeom>
           <a:noFill/>
-          <a:ln>
-            <a:noFill/>
-          </a:ln>
-          <a:effectLst/>
-        </p:spPr>
-        <p:style>
-          <a:lnRef idx="1">
-            <a:schemeClr val="accent1"/>
-          </a:lnRef>
-          <a:fillRef idx="3">
-            <a:schemeClr val="accent1"/>
-          </a:fillRef>
-          <a:effectRef idx="2">
-            <a:schemeClr val="accent1"/>
-          </a:effectRef>
-          <a:fontRef idx="minor">
-            <a:schemeClr val="lt1"/>
-          </a:fontRef>
-        </p:style>
-        <p:txBody>
-          <a:bodyPr rtlCol="0" anchor="ctr"/>
-          <a:lstStyle/>
-          <a:p>
-            <a:pPr algn="ctr"/>
-          </a:p>
-        </p:txBody>
-      </p:sp>
-      <p:sp>
-        <p:nvSpPr>
-          <p:cNvPr id="32" name="Oval 31"/>
-          <p:cNvSpPr/>
-          <p:nvPr/>
-        </p:nvSpPr>
-        <p:spPr>
-          <a:xfrm>
-            <a:off x="5513832" y="4082796"/>
-            <a:ext cx="36576" cy="36576"/>
-          </a:xfrm>
-          <a:prstGeom prst="ellipse">
-            <a:avLst/>
-          </a:prstGeom>
-          <a:noFill/>
-          <a:ln>
-            <a:noFill/>
-          </a:ln>
-          <a:effectLst/>
-        </p:spPr>
-        <p:style>
-          <a:lnRef idx="1">
-            <a:schemeClr val="accent1"/>
-          </a:lnRef>
-          <a:fillRef idx="3">
-            <a:schemeClr val="accent1"/>
-          </a:fillRef>
-          <a:effectRef idx="2">
-            <a:schemeClr val="accent1"/>
-          </a:effectRef>
-          <a:fontRef idx="minor">
-            <a:schemeClr val="lt1"/>
-          </a:fontRef>
-        </p:style>
-        <p:txBody>
-          <a:bodyPr rtlCol="0" anchor="ctr"/>
-          <a:lstStyle/>
-          <a:p>
-            <a:pPr algn="ctr"/>
-          </a:p>
-        </p:txBody>
-      </p:sp>
-      <p:cxnSp>
-        <p:nvCxnSpPr>
-          <p:cNvPr id="33" name="Connector 32"/>
-          <p:cNvCxnSpPr/>
-          <p:nvPr/>
-        </p:nvCxnSpPr>
-        <p:spPr>
-          <a:xfrm flipV="1">
-            <a:off x="5486400" y="4101083"/>
-            <a:ext cx="45720" cy="1362457"/>
-          </a:xfrm>
-          <a:prstGeom prst="bentConnector3">
-            <a:avLst/>
-          </a:prstGeom>
-          <a:ln w="12700">
-            <a:solidFill>
-              <a:srgbClr val="000000"/>
-            </a:solidFill>
-            <a:tailEnd type="triangle" w="med" len="med"/>
-          </a:ln>
-          <a:effectLst/>
-        </p:spPr>
-        <p:style>
-          <a:lnRef idx="2">
-            <a:schemeClr val="accent1"/>
-          </a:lnRef>
-          <a:fillRef idx="0">
-            <a:schemeClr val="accent1"/>
-          </a:fillRef>
-          <a:effectRef idx="1">
-            <a:schemeClr val="accent1"/>
-          </a:effectRef>
-          <a:fontRef idx="minor">
-            <a:schemeClr val="tx1"/>
-          </a:fontRef>
-        </p:style>
-      </p:cxnSp>
-      <p:sp>
-        <p:nvSpPr>
-          <p:cNvPr id="34" name="TextBox 33"/>
-          <p:cNvSpPr txBox="1"/>
-          <p:nvPr/>
-        </p:nvSpPr>
-        <p:spPr>
-          <a:xfrm>
-            <a:off x="4160520" y="5989320"/>
-            <a:ext cx="1463040" cy="365760"/>
-          </a:xfrm>
-          <a:prstGeom prst="rect">
-            <a:avLst/>
-          </a:prstGeom>
-          <a:noFill/>
-        </p:spPr>
-        <p:txBody>
-          <a:bodyPr wrap="square" anchor="t" lIns="0" rIns="0" tIns="0" bIns="0">
+        </p:spPr>
+        <p:txBody>
+          <a:bodyPr wrap="square" anchor="t" lIns="12700" rIns="12700" tIns="12700" bIns="12700">
             <a:spAutoFit/>
           </a:bodyPr>
           <a:lstStyle/>
@@ -4519,2313 +7454,6 @@
                 <a:solidFill>
                   <a:srgbClr val="000000"/>
                 </a:solidFill>
-                <a:latin typeface="Arial"/>
-              </a:rPr>
-              <a:t>Confidence Bounds &amp; Risk Envelopes</a:t>
-            </a:r>
-          </a:p>
-        </p:txBody>
-      </p:sp>
-      <p:sp>
-        <p:nvSpPr>
-          <p:cNvPr id="35" name="Oval 34"/>
-          <p:cNvSpPr/>
-          <p:nvPr/>
-        </p:nvSpPr>
-        <p:spPr>
-          <a:xfrm>
-            <a:off x="6885432" y="3621938"/>
-            <a:ext cx="36576" cy="36576"/>
-          </a:xfrm>
-          <a:prstGeom prst="ellipse">
-            <a:avLst/>
-          </a:prstGeom>
-          <a:noFill/>
-          <a:ln>
-            <a:noFill/>
-          </a:ln>
-          <a:effectLst/>
-        </p:spPr>
-        <p:style>
-          <a:lnRef idx="1">
-            <a:schemeClr val="accent1"/>
-          </a:lnRef>
-          <a:fillRef idx="3">
-            <a:schemeClr val="accent1"/>
-          </a:fillRef>
-          <a:effectRef idx="2">
-            <a:schemeClr val="accent1"/>
-          </a:effectRef>
-          <a:fontRef idx="minor">
-            <a:schemeClr val="lt1"/>
-          </a:fontRef>
-        </p:style>
-        <p:txBody>
-          <a:bodyPr rtlCol="0" anchor="ctr"/>
-          <a:lstStyle/>
-          <a:p>
-            <a:pPr algn="ctr"/>
-          </a:p>
-        </p:txBody>
-      </p:sp>
-      <p:sp>
-        <p:nvSpPr>
-          <p:cNvPr id="36" name="Oval 35"/>
-          <p:cNvSpPr/>
-          <p:nvPr/>
-        </p:nvSpPr>
-        <p:spPr>
-          <a:xfrm>
-            <a:off x="6885432" y="3890772"/>
-            <a:ext cx="36576" cy="36576"/>
-          </a:xfrm>
-          <a:prstGeom prst="ellipse">
-            <a:avLst/>
-          </a:prstGeom>
-          <a:noFill/>
-          <a:ln>
-            <a:noFill/>
-          </a:ln>
-          <a:effectLst/>
-        </p:spPr>
-        <p:style>
-          <a:lnRef idx="1">
-            <a:schemeClr val="accent1"/>
-          </a:lnRef>
-          <a:fillRef idx="3">
-            <a:schemeClr val="accent1"/>
-          </a:fillRef>
-          <a:effectRef idx="2">
-            <a:schemeClr val="accent1"/>
-          </a:effectRef>
-          <a:fontRef idx="minor">
-            <a:schemeClr val="lt1"/>
-          </a:fontRef>
-        </p:style>
-        <p:txBody>
-          <a:bodyPr rtlCol="0" anchor="ctr"/>
-          <a:lstStyle/>
-          <a:p>
-            <a:pPr algn="ctr"/>
-          </a:p>
-        </p:txBody>
-      </p:sp>
-      <p:sp>
-        <p:nvSpPr>
-          <p:cNvPr id="37" name="Oval 36"/>
-          <p:cNvSpPr/>
-          <p:nvPr/>
-        </p:nvSpPr>
-        <p:spPr>
-          <a:xfrm>
-            <a:off x="6885432" y="4159605"/>
-            <a:ext cx="36576" cy="36576"/>
-          </a:xfrm>
-          <a:prstGeom prst="ellipse">
-            <a:avLst/>
-          </a:prstGeom>
-          <a:noFill/>
-          <a:ln>
-            <a:noFill/>
-          </a:ln>
-          <a:effectLst/>
-        </p:spPr>
-        <p:style>
-          <a:lnRef idx="1">
-            <a:schemeClr val="accent1"/>
-          </a:lnRef>
-          <a:fillRef idx="3">
-            <a:schemeClr val="accent1"/>
-          </a:fillRef>
-          <a:effectRef idx="2">
-            <a:schemeClr val="accent1"/>
-          </a:effectRef>
-          <a:fontRef idx="minor">
-            <a:schemeClr val="lt1"/>
-          </a:fontRef>
-        </p:style>
-        <p:txBody>
-          <a:bodyPr rtlCol="0" anchor="ctr"/>
-          <a:lstStyle/>
-          <a:p>
-            <a:pPr algn="ctr"/>
-          </a:p>
-        </p:txBody>
-      </p:sp>
-      <p:sp>
-        <p:nvSpPr>
-          <p:cNvPr id="38" name="Oval 37"/>
-          <p:cNvSpPr/>
-          <p:nvPr/>
-        </p:nvSpPr>
-        <p:spPr>
-          <a:xfrm>
-            <a:off x="7114032" y="2290572"/>
-            <a:ext cx="36576" cy="36576"/>
-          </a:xfrm>
-          <a:prstGeom prst="ellipse">
-            <a:avLst/>
-          </a:prstGeom>
-          <a:noFill/>
-          <a:ln>
-            <a:noFill/>
-          </a:ln>
-          <a:effectLst/>
-        </p:spPr>
-        <p:style>
-          <a:lnRef idx="1">
-            <a:schemeClr val="accent1"/>
-          </a:lnRef>
-          <a:fillRef idx="3">
-            <a:schemeClr val="accent1"/>
-          </a:fillRef>
-          <a:effectRef idx="2">
-            <a:schemeClr val="accent1"/>
-          </a:effectRef>
-          <a:fontRef idx="minor">
-            <a:schemeClr val="lt1"/>
-          </a:fontRef>
-        </p:style>
-        <p:txBody>
-          <a:bodyPr rtlCol="0" anchor="ctr"/>
-          <a:lstStyle/>
-          <a:p>
-            <a:pPr algn="ctr"/>
-          </a:p>
-        </p:txBody>
-      </p:sp>
-      <p:cxnSp>
-        <p:nvCxnSpPr>
-          <p:cNvPr id="39" name="Connector 38"/>
-          <p:cNvCxnSpPr/>
-          <p:nvPr/>
-        </p:nvCxnSpPr>
-        <p:spPr>
-          <a:xfrm flipV="1">
-            <a:off x="6903720" y="2308860"/>
-            <a:ext cx="228600" cy="1331366"/>
-          </a:xfrm>
-          <a:prstGeom prst="bentConnector3">
-            <a:avLst/>
-          </a:prstGeom>
-          <a:ln w="12700">
-            <a:solidFill>
-              <a:srgbClr val="000000"/>
-            </a:solidFill>
-            <a:tailEnd type="triangle" w="med" len="med"/>
-          </a:ln>
-          <a:effectLst/>
-        </p:spPr>
-        <p:style>
-          <a:lnRef idx="2">
-            <a:schemeClr val="accent1"/>
-          </a:lnRef>
-          <a:fillRef idx="0">
-            <a:schemeClr val="accent1"/>
-          </a:fillRef>
-          <a:effectRef idx="1">
-            <a:schemeClr val="accent1"/>
-          </a:effectRef>
-          <a:fontRef idx="minor">
-            <a:schemeClr val="tx1"/>
-          </a:fontRef>
-        </p:style>
-      </p:cxnSp>
-      <p:sp>
-        <p:nvSpPr>
-          <p:cNvPr id="40" name="TextBox 39"/>
-          <p:cNvSpPr txBox="1"/>
-          <p:nvPr/>
-        </p:nvSpPr>
-        <p:spPr>
-          <a:xfrm>
-            <a:off x="5532120" y="2697480"/>
-            <a:ext cx="1325880" cy="310896"/>
-          </a:xfrm>
-          <a:prstGeom prst="rect">
-            <a:avLst/>
-          </a:prstGeom>
-          <a:noFill/>
-        </p:spPr>
-        <p:txBody>
-          <a:bodyPr wrap="square" anchor="t" lIns="0" rIns="0" tIns="0" bIns="0">
-            <a:spAutoFit/>
-          </a:bodyPr>
-          <a:lstStyle/>
-          <a:p>
-            <a:pPr algn="l"/>
-            <a:r>
-              <a:rPr sz="1000" b="0">
-                <a:solidFill>
-                  <a:srgbClr val="000000"/>
-                </a:solidFill>
-                <a:latin typeface="Arial"/>
-              </a:rPr>
-              <a:t>Federated Weather Context / COWP State</a:t>
-            </a:r>
-          </a:p>
-        </p:txBody>
-      </p:sp>
-      <p:sp>
-        <p:nvSpPr>
-          <p:cNvPr id="41" name="Oval 40"/>
-          <p:cNvSpPr/>
-          <p:nvPr/>
-        </p:nvSpPr>
-        <p:spPr>
-          <a:xfrm>
-            <a:off x="7571232" y="5445252"/>
-            <a:ext cx="36576" cy="36576"/>
-          </a:xfrm>
-          <a:prstGeom prst="ellipse">
-            <a:avLst/>
-          </a:prstGeom>
-          <a:noFill/>
-          <a:ln>
-            <a:noFill/>
-          </a:ln>
-          <a:effectLst/>
-        </p:spPr>
-        <p:style>
-          <a:lnRef idx="1">
-            <a:schemeClr val="accent1"/>
-          </a:lnRef>
-          <a:fillRef idx="3">
-            <a:schemeClr val="accent1"/>
-          </a:fillRef>
-          <a:effectRef idx="2">
-            <a:schemeClr val="accent1"/>
-          </a:effectRef>
-          <a:fontRef idx="minor">
-            <a:schemeClr val="lt1"/>
-          </a:fontRef>
-        </p:style>
-        <p:txBody>
-          <a:bodyPr rtlCol="0" anchor="ctr"/>
-          <a:lstStyle/>
-          <a:p>
-            <a:pPr algn="ctr"/>
-          </a:p>
-        </p:txBody>
-      </p:sp>
-      <p:cxnSp>
-        <p:nvCxnSpPr>
-          <p:cNvPr id="42" name="Connector 41"/>
-          <p:cNvCxnSpPr/>
-          <p:nvPr/>
-        </p:nvCxnSpPr>
-        <p:spPr>
-          <a:xfrm>
-            <a:off x="6903720" y="4177893"/>
-            <a:ext cx="685800" cy="1285647"/>
-          </a:xfrm>
-          <a:prstGeom prst="bentConnector3">
-            <a:avLst/>
-          </a:prstGeom>
-          <a:ln w="12700">
-            <a:solidFill>
-              <a:srgbClr val="000000"/>
-            </a:solidFill>
-            <a:tailEnd type="triangle" w="med" len="med"/>
-          </a:ln>
-          <a:effectLst/>
-        </p:spPr>
-        <p:style>
-          <a:lnRef idx="2">
-            <a:schemeClr val="accent1"/>
-          </a:lnRef>
-          <a:fillRef idx="0">
-            <a:schemeClr val="accent1"/>
-          </a:fillRef>
-          <a:effectRef idx="1">
-            <a:schemeClr val="accent1"/>
-          </a:effectRef>
-          <a:fontRef idx="minor">
-            <a:schemeClr val="tx1"/>
-          </a:fontRef>
-        </p:style>
-      </p:cxnSp>
-      <p:sp>
-        <p:nvSpPr>
-          <p:cNvPr id="43" name="TextBox 42"/>
-          <p:cNvSpPr txBox="1"/>
-          <p:nvPr/>
-        </p:nvSpPr>
-        <p:spPr>
-          <a:xfrm>
-            <a:off x="5532120" y="4617720"/>
-            <a:ext cx="1325880" cy="310896"/>
-          </a:xfrm>
-          <a:prstGeom prst="rect">
-            <a:avLst/>
-          </a:prstGeom>
-          <a:noFill/>
-        </p:spPr>
-        <p:txBody>
-          <a:bodyPr wrap="square" anchor="t" lIns="0" rIns="0" tIns="0" bIns="0">
-            <a:spAutoFit/>
-          </a:bodyPr>
-          <a:lstStyle/>
-          <a:p>
-            <a:pPr algn="l"/>
-            <a:r>
-              <a:rPr sz="1000" b="0">
-                <a:solidFill>
-                  <a:srgbClr val="000000"/>
-                </a:solidFill>
-                <a:latin typeface="Arial"/>
-              </a:rPr>
-              <a:t>Federated Weather Context / COWP State</a:t>
-            </a:r>
-          </a:p>
-        </p:txBody>
-      </p:sp>
-      <p:sp>
-        <p:nvSpPr>
-          <p:cNvPr id="44" name="Oval 43"/>
-          <p:cNvSpPr/>
-          <p:nvPr/>
-        </p:nvSpPr>
-        <p:spPr>
-          <a:xfrm>
-            <a:off x="6885432" y="3890772"/>
-            <a:ext cx="36576" cy="36576"/>
-          </a:xfrm>
-          <a:prstGeom prst="ellipse">
-            <a:avLst/>
-          </a:prstGeom>
-          <a:noFill/>
-          <a:ln>
-            <a:noFill/>
-          </a:ln>
-          <a:effectLst/>
-        </p:spPr>
-        <p:style>
-          <a:lnRef idx="1">
-            <a:schemeClr val="accent1"/>
-          </a:lnRef>
-          <a:fillRef idx="3">
-            <a:schemeClr val="accent1"/>
-          </a:fillRef>
-          <a:effectRef idx="2">
-            <a:schemeClr val="accent1"/>
-          </a:effectRef>
-          <a:fontRef idx="minor">
-            <a:schemeClr val="lt1"/>
-          </a:fontRef>
-        </p:style>
-        <p:txBody>
-          <a:bodyPr rtlCol="0" anchor="ctr"/>
-          <a:lstStyle/>
-          <a:p>
-            <a:pPr algn="ctr"/>
-          </a:p>
-        </p:txBody>
-      </p:sp>
-      <p:cxnSp>
-        <p:nvCxnSpPr>
-          <p:cNvPr id="45" name="Connector 44"/>
-          <p:cNvCxnSpPr/>
-          <p:nvPr/>
-        </p:nvCxnSpPr>
-        <p:spPr>
-          <a:xfrm>
-            <a:off x="6903720" y="3909060"/>
-            <a:ext cx="2770632" cy="0"/>
-          </a:xfrm>
-          <a:prstGeom prst="bentConnector3">
-            <a:avLst/>
-          </a:prstGeom>
-          <a:ln w="12700">
-            <a:solidFill>
-              <a:srgbClr val="000000"/>
-            </a:solidFill>
-            <a:tailEnd type="triangle" w="med" len="med"/>
-          </a:ln>
-          <a:effectLst/>
-        </p:spPr>
-        <p:style>
-          <a:lnRef idx="2">
-            <a:schemeClr val="accent1"/>
-          </a:lnRef>
-          <a:fillRef idx="0">
-            <a:schemeClr val="accent1"/>
-          </a:fillRef>
-          <a:effectRef idx="1">
-            <a:schemeClr val="accent1"/>
-          </a:effectRef>
-          <a:fontRef idx="minor">
-            <a:schemeClr val="tx1"/>
-          </a:fontRef>
-        </p:style>
-      </p:cxnSp>
-      <p:sp>
-        <p:nvSpPr>
-          <p:cNvPr id="46" name="TextBox 45"/>
-          <p:cNvSpPr txBox="1"/>
-          <p:nvPr/>
-        </p:nvSpPr>
-        <p:spPr>
-          <a:xfrm>
-            <a:off x="8732520" y="3634740"/>
-            <a:ext cx="914400" cy="246888"/>
-          </a:xfrm>
-          <a:prstGeom prst="rect">
-            <a:avLst/>
-          </a:prstGeom>
-          <a:noFill/>
-        </p:spPr>
-        <p:txBody>
-          <a:bodyPr wrap="square" anchor="t" lIns="0" rIns="0" tIns="0" bIns="0">
-            <a:spAutoFit/>
-          </a:bodyPr>
-          <a:lstStyle/>
-          <a:p>
-            <a:pPr algn="l"/>
-            <a:r>
-              <a:rPr sz="1000" b="0">
-                <a:solidFill>
-                  <a:srgbClr val="000000"/>
-                </a:solidFill>
-                <a:latin typeface="Arial"/>
-              </a:rPr>
-              <a:t>O1 Fused COWP State</a:t>
-            </a:r>
-          </a:p>
-        </p:txBody>
-      </p:sp>
-      <p:sp>
-        <p:nvSpPr>
-          <p:cNvPr id="47" name="Oval 46"/>
-          <p:cNvSpPr/>
-          <p:nvPr/>
-        </p:nvSpPr>
-        <p:spPr>
-          <a:xfrm>
-            <a:off x="8439912" y="2290572"/>
-            <a:ext cx="36576" cy="36576"/>
-          </a:xfrm>
-          <a:prstGeom prst="ellipse">
-            <a:avLst/>
-          </a:prstGeom>
-          <a:noFill/>
-          <a:ln>
-            <a:noFill/>
-          </a:ln>
-          <a:effectLst/>
-        </p:spPr>
-        <p:style>
-          <a:lnRef idx="1">
-            <a:schemeClr val="accent1"/>
-          </a:lnRef>
-          <a:fillRef idx="3">
-            <a:schemeClr val="accent1"/>
-          </a:fillRef>
-          <a:effectRef idx="2">
-            <a:schemeClr val="accent1"/>
-          </a:effectRef>
-          <a:fontRef idx="minor">
-            <a:schemeClr val="lt1"/>
-          </a:fontRef>
-        </p:style>
-        <p:txBody>
-          <a:bodyPr rtlCol="0" anchor="ctr"/>
-          <a:lstStyle/>
-          <a:p>
-            <a:pPr algn="ctr"/>
-          </a:p>
-        </p:txBody>
-      </p:sp>
-      <p:cxnSp>
-        <p:nvCxnSpPr>
-          <p:cNvPr id="48" name="Connector 47"/>
-          <p:cNvCxnSpPr/>
-          <p:nvPr/>
-        </p:nvCxnSpPr>
-        <p:spPr>
-          <a:xfrm>
-            <a:off x="8458200" y="2308860"/>
-            <a:ext cx="1216152" cy="0"/>
-          </a:xfrm>
-          <a:prstGeom prst="bentConnector3">
-            <a:avLst/>
-          </a:prstGeom>
-          <a:ln w="12700">
-            <a:solidFill>
-              <a:srgbClr val="000000"/>
-            </a:solidFill>
-            <a:tailEnd type="triangle" w="med" len="med"/>
-          </a:ln>
-          <a:effectLst/>
-        </p:spPr>
-        <p:style>
-          <a:lnRef idx="2">
-            <a:schemeClr val="accent1"/>
-          </a:lnRef>
-          <a:fillRef idx="0">
-            <a:schemeClr val="accent1"/>
-          </a:fillRef>
-          <a:effectRef idx="1">
-            <a:schemeClr val="accent1"/>
-          </a:effectRef>
-          <a:fontRef idx="minor">
-            <a:schemeClr val="tx1"/>
-          </a:fontRef>
-        </p:style>
-      </p:cxnSp>
-      <p:sp>
-        <p:nvSpPr>
-          <p:cNvPr id="49" name="TextBox 48"/>
-          <p:cNvSpPr txBox="1"/>
-          <p:nvPr/>
-        </p:nvSpPr>
-        <p:spPr>
-          <a:xfrm>
-            <a:off x="8942832" y="1595628"/>
-            <a:ext cx="731520" cy="676656"/>
-          </a:xfrm>
-          <a:prstGeom prst="rect">
-            <a:avLst/>
-          </a:prstGeom>
-          <a:noFill/>
-        </p:spPr>
-        <p:txBody>
-          <a:bodyPr wrap="square" anchor="t" lIns="0" rIns="0" tIns="0" bIns="0">
-            <a:spAutoFit/>
-          </a:bodyPr>
-          <a:lstStyle/>
-          <a:p>
-            <a:pPr algn="l"/>
-            <a:r>
-              <a:rPr sz="1000" b="0">
-                <a:solidFill>
-                  <a:srgbClr val="000000"/>
-                </a:solidFill>
-                <a:latin typeface="Arial"/>
-              </a:rPr>
-              <a:t>O3 Weather State Change Notifications</a:t>
-            </a:r>
-          </a:p>
-        </p:txBody>
-      </p:sp>
-      <p:sp>
-        <p:nvSpPr>
-          <p:cNvPr id="50" name="Oval 49"/>
-          <p:cNvSpPr/>
-          <p:nvPr/>
-        </p:nvSpPr>
-        <p:spPr>
-          <a:xfrm>
-            <a:off x="8897112" y="5445252"/>
-            <a:ext cx="36576" cy="36576"/>
-          </a:xfrm>
-          <a:prstGeom prst="ellipse">
-            <a:avLst/>
-          </a:prstGeom>
-          <a:noFill/>
-          <a:ln>
-            <a:noFill/>
-          </a:ln>
-          <a:effectLst/>
-        </p:spPr>
-        <p:style>
-          <a:lnRef idx="1">
-            <a:schemeClr val="accent1"/>
-          </a:lnRef>
-          <a:fillRef idx="3">
-            <a:schemeClr val="accent1"/>
-          </a:fillRef>
-          <a:effectRef idx="2">
-            <a:schemeClr val="accent1"/>
-          </a:effectRef>
-          <a:fontRef idx="minor">
-            <a:schemeClr val="lt1"/>
-          </a:fontRef>
-        </p:style>
-        <p:txBody>
-          <a:bodyPr rtlCol="0" anchor="ctr"/>
-          <a:lstStyle/>
-          <a:p>
-            <a:pPr algn="ctr"/>
-          </a:p>
-        </p:txBody>
-      </p:sp>
-      <p:cxnSp>
-        <p:nvCxnSpPr>
-          <p:cNvPr id="51" name="Connector 50"/>
-          <p:cNvCxnSpPr/>
-          <p:nvPr/>
-        </p:nvCxnSpPr>
-        <p:spPr>
-          <a:xfrm>
-            <a:off x="8915400" y="5463540"/>
-            <a:ext cx="758952" cy="0"/>
-          </a:xfrm>
-          <a:prstGeom prst="bentConnector3">
-            <a:avLst/>
-          </a:prstGeom>
-          <a:ln w="12700">
-            <a:solidFill>
-              <a:srgbClr val="000000"/>
-            </a:solidFill>
-            <a:tailEnd type="triangle" w="med" len="med"/>
-          </a:ln>
-          <a:effectLst/>
-        </p:spPr>
-        <p:style>
-          <a:lnRef idx="2">
-            <a:schemeClr val="accent1"/>
-          </a:lnRef>
-          <a:fillRef idx="0">
-            <a:schemeClr val="accent1"/>
-          </a:fillRef>
-          <a:effectRef idx="1">
-            <a:schemeClr val="accent1"/>
-          </a:effectRef>
-          <a:fontRef idx="minor">
-            <a:schemeClr val="tx1"/>
-          </a:fontRef>
-        </p:style>
-      </p:cxnSp>
-      <p:sp>
-        <p:nvSpPr>
-          <p:cNvPr id="52" name="TextBox 51"/>
-          <p:cNvSpPr txBox="1"/>
-          <p:nvPr/>
-        </p:nvSpPr>
-        <p:spPr>
-          <a:xfrm>
-            <a:off x="8979408" y="4750307"/>
-            <a:ext cx="694944" cy="676656"/>
-          </a:xfrm>
-          <a:prstGeom prst="rect">
-            <a:avLst/>
-          </a:prstGeom>
-          <a:noFill/>
-        </p:spPr>
-        <p:txBody>
-          <a:bodyPr wrap="square" anchor="t" lIns="0" rIns="0" tIns="0" bIns="0">
-            <a:spAutoFit/>
-          </a:bodyPr>
-          <a:lstStyle/>
-          <a:p>
-            <a:pPr algn="l"/>
-            <a:r>
-              <a:rPr sz="1000" b="0">
-                <a:solidFill>
-                  <a:srgbClr val="000000"/>
-                </a:solidFill>
-                <a:latin typeface="Arial"/>
-              </a:rPr>
-              <a:t>O2 Mission-Tailored COWP Excerpts</a:t>
-            </a:r>
-          </a:p>
-        </p:txBody>
-      </p:sp>
-      <p:cxnSp>
-        <p:nvCxnSpPr>
-          <p:cNvPr id="53" name="Connector 52"/>
-          <p:cNvCxnSpPr/>
-          <p:nvPr/>
-        </p:nvCxnSpPr>
-        <p:spPr>
-          <a:xfrm>
-            <a:off x="5998464" y="1554480"/>
-            <a:ext cx="2810865" cy="0"/>
-          </a:xfrm>
-          <a:prstGeom prst="bentConnector3">
-            <a:avLst/>
-          </a:prstGeom>
-          <a:ln w="12700">
-            <a:solidFill>
-              <a:srgbClr val="000000"/>
-            </a:solidFill>
-          </a:ln>
-          <a:effectLst/>
-        </p:spPr>
-        <p:style>
-          <a:lnRef idx="2">
-            <a:schemeClr val="accent1"/>
-          </a:lnRef>
-          <a:fillRef idx="0">
-            <a:schemeClr val="accent1"/>
-          </a:fillRef>
-          <a:effectRef idx="1">
-            <a:schemeClr val="accent1"/>
-          </a:effectRef>
-          <a:fontRef idx="minor">
-            <a:schemeClr val="tx1"/>
-          </a:fontRef>
-        </p:style>
-      </p:cxnSp>
-      <p:sp>
-        <p:nvSpPr>
-          <p:cNvPr id="54" name="Oval 53"/>
-          <p:cNvSpPr/>
-          <p:nvPr/>
-        </p:nvSpPr>
-        <p:spPr>
-          <a:xfrm>
-            <a:off x="5980176" y="3410712"/>
-            <a:ext cx="36576" cy="36576"/>
-          </a:xfrm>
-          <a:prstGeom prst="ellipse">
-            <a:avLst/>
-          </a:prstGeom>
-          <a:noFill/>
-          <a:ln>
-            <a:noFill/>
-          </a:ln>
-          <a:effectLst/>
-        </p:spPr>
-        <p:style>
-          <a:lnRef idx="1">
-            <a:schemeClr val="accent1"/>
-          </a:lnRef>
-          <a:fillRef idx="3">
-            <a:schemeClr val="accent1"/>
-          </a:fillRef>
-          <a:effectRef idx="2">
-            <a:schemeClr val="accent1"/>
-          </a:effectRef>
-          <a:fontRef idx="minor">
-            <a:schemeClr val="lt1"/>
-          </a:fontRef>
-        </p:style>
-        <p:txBody>
-          <a:bodyPr rtlCol="0" anchor="ctr"/>
-          <a:lstStyle/>
-          <a:p>
-            <a:pPr algn="ctr"/>
-          </a:p>
-        </p:txBody>
-      </p:sp>
-      <p:cxnSp>
-        <p:nvCxnSpPr>
-          <p:cNvPr id="55" name="Connector 54"/>
-          <p:cNvCxnSpPr/>
-          <p:nvPr/>
-        </p:nvCxnSpPr>
-        <p:spPr>
-          <a:xfrm>
-            <a:off x="5998464" y="1554480"/>
-            <a:ext cx="0" cy="1874520"/>
-          </a:xfrm>
-          <a:prstGeom prst="bentConnector3">
-            <a:avLst/>
-          </a:prstGeom>
-          <a:ln w="12700">
-            <a:solidFill>
-              <a:srgbClr val="000000"/>
-            </a:solidFill>
-            <a:tailEnd type="triangle" w="med" len="med"/>
-          </a:ln>
-          <a:effectLst/>
-        </p:spPr>
-        <p:style>
-          <a:lnRef idx="2">
-            <a:schemeClr val="accent1"/>
-          </a:lnRef>
-          <a:fillRef idx="0">
-            <a:schemeClr val="accent1"/>
-          </a:fillRef>
-          <a:effectRef idx="1">
-            <a:schemeClr val="accent1"/>
-          </a:effectRef>
-          <a:fontRef idx="minor">
-            <a:schemeClr val="tx1"/>
-          </a:fontRef>
-        </p:style>
-      </p:cxnSp>
-      <p:sp>
-        <p:nvSpPr>
-          <p:cNvPr id="56" name="Oval 55"/>
-          <p:cNvSpPr/>
-          <p:nvPr/>
-        </p:nvSpPr>
-        <p:spPr>
-          <a:xfrm>
-            <a:off x="8791041" y="4965192"/>
-            <a:ext cx="36576" cy="36576"/>
-          </a:xfrm>
-          <a:prstGeom prst="ellipse">
-            <a:avLst/>
-          </a:prstGeom>
-          <a:noFill/>
-          <a:ln>
-            <a:noFill/>
-          </a:ln>
-          <a:effectLst/>
-        </p:spPr>
-        <p:style>
-          <a:lnRef idx="1">
-            <a:schemeClr val="accent1"/>
-          </a:lnRef>
-          <a:fillRef idx="3">
-            <a:schemeClr val="accent1"/>
-          </a:fillRef>
-          <a:effectRef idx="2">
-            <a:schemeClr val="accent1"/>
-          </a:effectRef>
-          <a:fontRef idx="minor">
-            <a:schemeClr val="lt1"/>
-          </a:fontRef>
-        </p:style>
-        <p:txBody>
-          <a:bodyPr rtlCol="0" anchor="ctr"/>
-          <a:lstStyle/>
-          <a:p>
-            <a:pPr algn="ctr"/>
-          </a:p>
-        </p:txBody>
-      </p:sp>
-      <p:cxnSp>
-        <p:nvCxnSpPr>
-          <p:cNvPr id="57" name="Connector 56"/>
-          <p:cNvCxnSpPr/>
-          <p:nvPr/>
-        </p:nvCxnSpPr>
-        <p:spPr>
-          <a:xfrm>
-            <a:off x="8809329" y="1554480"/>
-            <a:ext cx="0" cy="3429000"/>
-          </a:xfrm>
-          <a:prstGeom prst="bentConnector3">
-            <a:avLst/>
-          </a:prstGeom>
-          <a:ln w="12700">
-            <a:solidFill>
-              <a:srgbClr val="000000"/>
-            </a:solidFill>
-            <a:tailEnd type="triangle" w="med" len="med"/>
-          </a:ln>
-          <a:effectLst/>
-        </p:spPr>
-        <p:style>
-          <a:lnRef idx="2">
-            <a:schemeClr val="accent1"/>
-          </a:lnRef>
-          <a:fillRef idx="0">
-            <a:schemeClr val="accent1"/>
-          </a:fillRef>
-          <a:effectRef idx="1">
-            <a:schemeClr val="accent1"/>
-          </a:effectRef>
-          <a:fontRef idx="minor">
-            <a:schemeClr val="tx1"/>
-          </a:fontRef>
-        </p:style>
-      </p:cxnSp>
-      <p:sp>
-        <p:nvSpPr>
-          <p:cNvPr id="58" name="TextBox 57"/>
-          <p:cNvSpPr txBox="1"/>
-          <p:nvPr/>
-        </p:nvSpPr>
-        <p:spPr>
-          <a:xfrm>
-            <a:off x="5074920" y="475488"/>
-            <a:ext cx="1371600" cy="402336"/>
-          </a:xfrm>
-          <a:prstGeom prst="rect">
-            <a:avLst/>
-          </a:prstGeom>
-          <a:noFill/>
-        </p:spPr>
-        <p:txBody>
-          <a:bodyPr wrap="square" anchor="t" lIns="0" rIns="0" tIns="0" bIns="0">
-            <a:spAutoFit/>
-          </a:bodyPr>
-          <a:lstStyle/>
-          <a:p>
-            <a:pPr algn="ctr"/>
-            <a:r>
-              <a:rPr sz="1000" b="0">
-                <a:solidFill>
-                  <a:srgbClr val="000000"/>
-                </a:solidFill>
-                <a:latin typeface="Arial"/>
-              </a:rPr>
-              <a:t>C2 OPSEC / classification guidance</a:t>
-            </a:r>
-          </a:p>
-        </p:txBody>
-      </p:sp>
-      <p:sp>
-        <p:nvSpPr>
-          <p:cNvPr id="59" name="Oval 58"/>
-          <p:cNvSpPr/>
-          <p:nvPr/>
-        </p:nvSpPr>
-        <p:spPr>
-          <a:xfrm>
-            <a:off x="6419088" y="3410712"/>
-            <a:ext cx="36576" cy="36576"/>
-          </a:xfrm>
-          <a:prstGeom prst="ellipse">
-            <a:avLst/>
-          </a:prstGeom>
-          <a:noFill/>
-          <a:ln>
-            <a:noFill/>
-          </a:ln>
-          <a:effectLst/>
-        </p:spPr>
-        <p:style>
-          <a:lnRef idx="1">
-            <a:schemeClr val="accent1"/>
-          </a:lnRef>
-          <a:fillRef idx="3">
-            <a:schemeClr val="accent1"/>
-          </a:fillRef>
-          <a:effectRef idx="2">
-            <a:schemeClr val="accent1"/>
-          </a:effectRef>
-          <a:fontRef idx="minor">
-            <a:schemeClr val="lt1"/>
-          </a:fontRef>
-        </p:style>
-        <p:txBody>
-          <a:bodyPr rtlCol="0" anchor="ctr"/>
-          <a:lstStyle/>
-          <a:p>
-            <a:pPr algn="ctr"/>
-          </a:p>
-        </p:txBody>
-      </p:sp>
-      <p:cxnSp>
-        <p:nvCxnSpPr>
-          <p:cNvPr id="60" name="Connector 59"/>
-          <p:cNvCxnSpPr/>
-          <p:nvPr/>
-        </p:nvCxnSpPr>
-        <p:spPr>
-          <a:xfrm>
-            <a:off x="6437376" y="1554480"/>
-            <a:ext cx="0" cy="1874520"/>
-          </a:xfrm>
-          <a:prstGeom prst="bentConnector3">
-            <a:avLst/>
-          </a:prstGeom>
-          <a:ln w="12700">
-            <a:solidFill>
-              <a:srgbClr val="000000"/>
-            </a:solidFill>
-            <a:tailEnd type="triangle" w="med" len="med"/>
-          </a:ln>
-          <a:effectLst/>
-        </p:spPr>
-        <p:style>
-          <a:lnRef idx="2">
-            <a:schemeClr val="accent1"/>
-          </a:lnRef>
-          <a:fillRef idx="0">
-            <a:schemeClr val="accent1"/>
-          </a:fillRef>
-          <a:effectRef idx="1">
-            <a:schemeClr val="accent1"/>
-          </a:effectRef>
-          <a:fontRef idx="minor">
-            <a:schemeClr val="tx1"/>
-          </a:fontRef>
-        </p:style>
-      </p:cxnSp>
-      <p:sp>
-        <p:nvSpPr>
-          <p:cNvPr id="61" name="TextBox 60"/>
-          <p:cNvSpPr txBox="1"/>
-          <p:nvPr/>
-        </p:nvSpPr>
-        <p:spPr>
-          <a:xfrm>
-            <a:off x="5989320" y="914400"/>
-            <a:ext cx="1417320" cy="402336"/>
-          </a:xfrm>
-          <a:prstGeom prst="rect">
-            <a:avLst/>
-          </a:prstGeom>
-          <a:noFill/>
-        </p:spPr>
-        <p:txBody>
-          <a:bodyPr wrap="square" anchor="t" lIns="0" rIns="0" tIns="0" bIns="0">
-            <a:spAutoFit/>
-          </a:bodyPr>
-          <a:lstStyle/>
-          <a:p>
-            <a:pPr algn="ctr"/>
-            <a:r>
-              <a:rPr sz="1000" b="0">
-                <a:solidFill>
-                  <a:srgbClr val="000000"/>
-                </a:solidFill>
-                <a:latin typeface="Arial"/>
-              </a:rPr>
-              <a:t>C3 Network availability and DDS QoS policies</a:t>
-            </a:r>
-          </a:p>
-        </p:txBody>
-      </p:sp>
-      <p:sp>
-        <p:nvSpPr>
-          <p:cNvPr id="62" name="Oval 61"/>
-          <p:cNvSpPr/>
-          <p:nvPr/>
-        </p:nvSpPr>
-        <p:spPr>
-          <a:xfrm>
-            <a:off x="7511796" y="1810512"/>
-            <a:ext cx="36576" cy="36576"/>
-          </a:xfrm>
-          <a:prstGeom prst="ellipse">
-            <a:avLst/>
-          </a:prstGeom>
-          <a:noFill/>
-          <a:ln>
-            <a:noFill/>
-          </a:ln>
-          <a:effectLst/>
-        </p:spPr>
-        <p:style>
-          <a:lnRef idx="1">
-            <a:schemeClr val="accent1"/>
-          </a:lnRef>
-          <a:fillRef idx="3">
-            <a:schemeClr val="accent1"/>
-          </a:fillRef>
-          <a:effectRef idx="2">
-            <a:schemeClr val="accent1"/>
-          </a:effectRef>
-          <a:fontRef idx="minor">
-            <a:schemeClr val="lt1"/>
-          </a:fontRef>
-        </p:style>
-        <p:txBody>
-          <a:bodyPr rtlCol="0" anchor="ctr"/>
-          <a:lstStyle/>
-          <a:p>
-            <a:pPr algn="ctr"/>
-          </a:p>
-        </p:txBody>
-      </p:sp>
-      <p:cxnSp>
-        <p:nvCxnSpPr>
-          <p:cNvPr id="63" name="Connector 62"/>
-          <p:cNvCxnSpPr/>
-          <p:nvPr/>
-        </p:nvCxnSpPr>
-        <p:spPr>
-          <a:xfrm>
-            <a:off x="7530083" y="1554480"/>
-            <a:ext cx="0" cy="274320"/>
-          </a:xfrm>
-          <a:prstGeom prst="bentConnector3">
-            <a:avLst/>
-          </a:prstGeom>
-          <a:ln w="12700">
-            <a:solidFill>
-              <a:srgbClr val="000000"/>
-            </a:solidFill>
-            <a:tailEnd type="triangle" w="med" len="med"/>
-          </a:ln>
-          <a:effectLst/>
-        </p:spPr>
-        <p:style>
-          <a:lnRef idx="2">
-            <a:schemeClr val="accent1"/>
-          </a:lnRef>
-          <a:fillRef idx="0">
-            <a:schemeClr val="accent1"/>
-          </a:fillRef>
-          <a:effectRef idx="1">
-            <a:schemeClr val="accent1"/>
-          </a:effectRef>
-          <a:fontRef idx="minor">
-            <a:schemeClr val="tx1"/>
-          </a:fontRef>
-        </p:style>
-      </p:cxnSp>
-      <p:sp>
-        <p:nvSpPr>
-          <p:cNvPr id="64" name="TextBox 63"/>
-          <p:cNvSpPr txBox="1"/>
-          <p:nvPr/>
-        </p:nvSpPr>
-        <p:spPr>
-          <a:xfrm>
-            <a:off x="6812280" y="475488"/>
-            <a:ext cx="1280160" cy="402336"/>
-          </a:xfrm>
-          <a:prstGeom prst="rect">
-            <a:avLst/>
-          </a:prstGeom>
-          <a:noFill/>
-        </p:spPr>
-        <p:txBody>
-          <a:bodyPr wrap="square" anchor="t" lIns="0" rIns="0" tIns="0" bIns="0">
-            <a:spAutoFit/>
-          </a:bodyPr>
-          <a:lstStyle/>
-          <a:p>
-            <a:pPr algn="ctr"/>
-            <a:r>
-              <a:rPr sz="1000" b="0">
-                <a:solidFill>
-                  <a:srgbClr val="000000"/>
-                </a:solidFill>
-                <a:latin typeface="Arial"/>
-              </a:rPr>
-              <a:t>I3 Mission Weather Threshold Definitions</a:t>
-            </a:r>
-          </a:p>
-        </p:txBody>
-      </p:sp>
-      <p:cxnSp>
-        <p:nvCxnSpPr>
-          <p:cNvPr id="65" name="Connector 64"/>
-          <p:cNvCxnSpPr/>
-          <p:nvPr/>
-        </p:nvCxnSpPr>
-        <p:spPr>
-          <a:xfrm>
-            <a:off x="8060436" y="1682496"/>
-            <a:ext cx="510235" cy="0"/>
-          </a:xfrm>
-          <a:prstGeom prst="bentConnector3">
-            <a:avLst/>
-          </a:prstGeom>
-          <a:ln w="12700">
-            <a:solidFill>
-              <a:srgbClr val="000000"/>
-            </a:solidFill>
-          </a:ln>
-          <a:effectLst/>
-        </p:spPr>
-        <p:style>
-          <a:lnRef idx="2">
-            <a:schemeClr val="accent1"/>
-          </a:lnRef>
-          <a:fillRef idx="0">
-            <a:schemeClr val="accent1"/>
-          </a:fillRef>
-          <a:effectRef idx="1">
-            <a:schemeClr val="accent1"/>
-          </a:effectRef>
-          <a:fontRef idx="minor">
-            <a:schemeClr val="tx1"/>
-          </a:fontRef>
-        </p:style>
-      </p:cxnSp>
-      <p:sp>
-        <p:nvSpPr>
-          <p:cNvPr id="66" name="Oval 65"/>
-          <p:cNvSpPr/>
-          <p:nvPr/>
-        </p:nvSpPr>
-        <p:spPr>
-          <a:xfrm>
-            <a:off x="8042148" y="1810512"/>
-            <a:ext cx="36576" cy="36576"/>
-          </a:xfrm>
-          <a:prstGeom prst="ellipse">
-            <a:avLst/>
-          </a:prstGeom>
-          <a:noFill/>
-          <a:ln>
-            <a:noFill/>
-          </a:ln>
-          <a:effectLst/>
-        </p:spPr>
-        <p:style>
-          <a:lnRef idx="1">
-            <a:schemeClr val="accent1"/>
-          </a:lnRef>
-          <a:fillRef idx="3">
-            <a:schemeClr val="accent1"/>
-          </a:fillRef>
-          <a:effectRef idx="2">
-            <a:schemeClr val="accent1"/>
-          </a:effectRef>
-          <a:fontRef idx="minor">
-            <a:schemeClr val="lt1"/>
-          </a:fontRef>
-        </p:style>
-        <p:txBody>
-          <a:bodyPr rtlCol="0" anchor="ctr"/>
-          <a:lstStyle/>
-          <a:p>
-            <a:pPr algn="ctr"/>
-          </a:p>
-        </p:txBody>
-      </p:sp>
-      <p:cxnSp>
-        <p:nvCxnSpPr>
-          <p:cNvPr id="67" name="Connector 66"/>
-          <p:cNvCxnSpPr/>
-          <p:nvPr/>
-        </p:nvCxnSpPr>
-        <p:spPr>
-          <a:xfrm>
-            <a:off x="8060436" y="1682496"/>
-            <a:ext cx="0" cy="146304"/>
-          </a:xfrm>
-          <a:prstGeom prst="bentConnector3">
-            <a:avLst/>
-          </a:prstGeom>
-          <a:ln w="12700">
-            <a:solidFill>
-              <a:srgbClr val="000000"/>
-            </a:solidFill>
-            <a:tailEnd type="triangle" w="med" len="med"/>
-          </a:ln>
-          <a:effectLst/>
-        </p:spPr>
-        <p:style>
-          <a:lnRef idx="2">
-            <a:schemeClr val="accent1"/>
-          </a:lnRef>
-          <a:fillRef idx="0">
-            <a:schemeClr val="accent1"/>
-          </a:fillRef>
-          <a:effectRef idx="1">
-            <a:schemeClr val="accent1"/>
-          </a:effectRef>
-          <a:fontRef idx="minor">
-            <a:schemeClr val="tx1"/>
-          </a:fontRef>
-        </p:style>
-      </p:cxnSp>
-      <p:sp>
-        <p:nvSpPr>
-          <p:cNvPr id="68" name="Oval 67"/>
-          <p:cNvSpPr/>
-          <p:nvPr/>
-        </p:nvSpPr>
-        <p:spPr>
-          <a:xfrm>
-            <a:off x="8552383" y="4965192"/>
-            <a:ext cx="36576" cy="36576"/>
-          </a:xfrm>
-          <a:prstGeom prst="ellipse">
-            <a:avLst/>
-          </a:prstGeom>
-          <a:noFill/>
-          <a:ln>
-            <a:noFill/>
-          </a:ln>
-          <a:effectLst/>
-        </p:spPr>
-        <p:style>
-          <a:lnRef idx="1">
-            <a:schemeClr val="accent1"/>
-          </a:lnRef>
-          <a:fillRef idx="3">
-            <a:schemeClr val="accent1"/>
-          </a:fillRef>
-          <a:effectRef idx="2">
-            <a:schemeClr val="accent1"/>
-          </a:effectRef>
-          <a:fontRef idx="minor">
-            <a:schemeClr val="lt1"/>
-          </a:fontRef>
-        </p:style>
-        <p:txBody>
-          <a:bodyPr rtlCol="0" anchor="ctr"/>
-          <a:lstStyle/>
-          <a:p>
-            <a:pPr algn="ctr"/>
-          </a:p>
-        </p:txBody>
-      </p:sp>
-      <p:cxnSp>
-        <p:nvCxnSpPr>
-          <p:cNvPr id="69" name="Connector 68"/>
-          <p:cNvCxnSpPr/>
-          <p:nvPr/>
-        </p:nvCxnSpPr>
-        <p:spPr>
-          <a:xfrm>
-            <a:off x="8570671" y="1682496"/>
-            <a:ext cx="0" cy="3300984"/>
-          </a:xfrm>
-          <a:prstGeom prst="bentConnector3">
-            <a:avLst/>
-          </a:prstGeom>
-          <a:ln w="12700">
-            <a:solidFill>
-              <a:srgbClr val="000000"/>
-            </a:solidFill>
-            <a:tailEnd type="triangle" w="med" len="med"/>
-          </a:ln>
-          <a:effectLst/>
-        </p:spPr>
-        <p:style>
-          <a:lnRef idx="2">
-            <a:schemeClr val="accent1"/>
-          </a:lnRef>
-          <a:fillRef idx="0">
-            <a:schemeClr val="accent1"/>
-          </a:fillRef>
-          <a:effectRef idx="1">
-            <a:schemeClr val="accent1"/>
-          </a:effectRef>
-          <a:fontRef idx="minor">
-            <a:schemeClr val="tx1"/>
-          </a:fontRef>
-        </p:style>
-      </p:cxnSp>
-      <p:sp>
-        <p:nvSpPr>
-          <p:cNvPr id="70" name="TextBox 69"/>
-          <p:cNvSpPr txBox="1"/>
-          <p:nvPr/>
-        </p:nvSpPr>
-        <p:spPr>
-          <a:xfrm>
-            <a:off x="7818120" y="914400"/>
-            <a:ext cx="1325880" cy="402336"/>
-          </a:xfrm>
-          <a:prstGeom prst="rect">
-            <a:avLst/>
-          </a:prstGeom>
-          <a:noFill/>
-        </p:spPr>
-        <p:txBody>
-          <a:bodyPr wrap="square" anchor="t" lIns="0" rIns="0" tIns="0" bIns="0">
-            <a:spAutoFit/>
-          </a:bodyPr>
-          <a:lstStyle/>
-          <a:p>
-            <a:pPr algn="ctr"/>
-            <a:r>
-              <a:rPr sz="1000" b="0">
-                <a:solidFill>
-                  <a:srgbClr val="000000"/>
-                </a:solidFill>
-                <a:latin typeface="Arial"/>
-              </a:rPr>
-              <a:t>C1 Mission objectives and operational constraints</a:t>
-            </a:r>
-          </a:p>
-        </p:txBody>
-      </p:sp>
-      <p:cxnSp>
-        <p:nvCxnSpPr>
-          <p:cNvPr id="71" name="Connector 70"/>
-          <p:cNvCxnSpPr/>
-          <p:nvPr/>
-        </p:nvCxnSpPr>
-        <p:spPr>
-          <a:xfrm>
-            <a:off x="1348740" y="6876288"/>
-            <a:ext cx="6771132" cy="0"/>
-          </a:xfrm>
-          <a:prstGeom prst="bentConnector3">
-            <a:avLst/>
-          </a:prstGeom>
-          <a:ln w="12700">
-            <a:solidFill>
-              <a:srgbClr val="000000"/>
-            </a:solidFill>
-          </a:ln>
-          <a:effectLst/>
-        </p:spPr>
-        <p:style>
-          <a:lnRef idx="2">
-            <a:schemeClr val="accent1"/>
-          </a:lnRef>
-          <a:fillRef idx="0">
-            <a:schemeClr val="accent1"/>
-          </a:fillRef>
-          <a:effectRef idx="1">
-            <a:schemeClr val="accent1"/>
-          </a:effectRef>
-          <a:fontRef idx="minor">
-            <a:schemeClr val="tx1"/>
-          </a:fontRef>
-        </p:style>
-      </p:cxnSp>
-      <p:sp>
-        <p:nvSpPr>
-          <p:cNvPr id="72" name="Oval 71"/>
-          <p:cNvSpPr/>
-          <p:nvPr/>
-        </p:nvSpPr>
-        <p:spPr>
-          <a:xfrm>
-            <a:off x="1330452" y="4370832"/>
-            <a:ext cx="36576" cy="36576"/>
-          </a:xfrm>
-          <a:prstGeom prst="ellipse">
-            <a:avLst/>
-          </a:prstGeom>
-          <a:noFill/>
-          <a:ln>
-            <a:noFill/>
-          </a:ln>
-          <a:effectLst/>
-        </p:spPr>
-        <p:style>
-          <a:lnRef idx="1">
-            <a:schemeClr val="accent1"/>
-          </a:lnRef>
-          <a:fillRef idx="3">
-            <a:schemeClr val="accent1"/>
-          </a:fillRef>
-          <a:effectRef idx="2">
-            <a:schemeClr val="accent1"/>
-          </a:effectRef>
-          <a:fontRef idx="minor">
-            <a:schemeClr val="lt1"/>
-          </a:fontRef>
-        </p:style>
-        <p:txBody>
-          <a:bodyPr rtlCol="0" anchor="ctr"/>
-          <a:lstStyle/>
-          <a:p>
-            <a:pPr algn="ctr"/>
-          </a:p>
-        </p:txBody>
-      </p:sp>
-      <p:cxnSp>
-        <p:nvCxnSpPr>
-          <p:cNvPr id="73" name="Connector 72"/>
-          <p:cNvCxnSpPr/>
-          <p:nvPr/>
-        </p:nvCxnSpPr>
-        <p:spPr>
-          <a:xfrm flipV="1">
-            <a:off x="1348740" y="4389120"/>
-            <a:ext cx="0" cy="2487168"/>
-          </a:xfrm>
-          <a:prstGeom prst="bentConnector3">
-            <a:avLst/>
-          </a:prstGeom>
-          <a:ln w="12700">
-            <a:solidFill>
-              <a:srgbClr val="000000"/>
-            </a:solidFill>
-            <a:tailEnd type="triangle" w="med" len="med"/>
-          </a:ln>
-          <a:effectLst/>
-        </p:spPr>
-        <p:style>
-          <a:lnRef idx="2">
-            <a:schemeClr val="accent1"/>
-          </a:lnRef>
-          <a:fillRef idx="0">
-            <a:schemeClr val="accent1"/>
-          </a:fillRef>
-          <a:effectRef idx="1">
-            <a:schemeClr val="accent1"/>
-          </a:effectRef>
-          <a:fontRef idx="minor">
-            <a:schemeClr val="tx1"/>
-          </a:fontRef>
-        </p:style>
-      </p:cxnSp>
-      <p:sp>
-        <p:nvSpPr>
-          <p:cNvPr id="74" name="Oval 73"/>
-          <p:cNvSpPr/>
-          <p:nvPr/>
-        </p:nvSpPr>
-        <p:spPr>
-          <a:xfrm>
-            <a:off x="5952744" y="4370832"/>
-            <a:ext cx="36576" cy="36576"/>
-          </a:xfrm>
-          <a:prstGeom prst="ellipse">
-            <a:avLst/>
-          </a:prstGeom>
-          <a:noFill/>
-          <a:ln>
-            <a:noFill/>
-          </a:ln>
-          <a:effectLst/>
-        </p:spPr>
-        <p:style>
-          <a:lnRef idx="1">
-            <a:schemeClr val="accent1"/>
-          </a:lnRef>
-          <a:fillRef idx="3">
-            <a:schemeClr val="accent1"/>
-          </a:fillRef>
-          <a:effectRef idx="2">
-            <a:schemeClr val="accent1"/>
-          </a:effectRef>
-          <a:fontRef idx="minor">
-            <a:schemeClr val="lt1"/>
-          </a:fontRef>
-        </p:style>
-        <p:txBody>
-          <a:bodyPr rtlCol="0" anchor="ctr"/>
-          <a:lstStyle/>
-          <a:p>
-            <a:pPr algn="ctr"/>
-          </a:p>
-        </p:txBody>
-      </p:sp>
-      <p:cxnSp>
-        <p:nvCxnSpPr>
-          <p:cNvPr id="75" name="Connector 74"/>
-          <p:cNvCxnSpPr/>
-          <p:nvPr/>
-        </p:nvCxnSpPr>
-        <p:spPr>
-          <a:xfrm flipV="1">
-            <a:off x="5971031" y="4389120"/>
-            <a:ext cx="0" cy="2487168"/>
-          </a:xfrm>
-          <a:prstGeom prst="bentConnector3">
-            <a:avLst/>
-          </a:prstGeom>
-          <a:ln w="12700">
-            <a:solidFill>
-              <a:srgbClr val="000000"/>
-            </a:solidFill>
-            <a:tailEnd type="triangle" w="med" len="med"/>
-          </a:ln>
-          <a:effectLst/>
-        </p:spPr>
-        <p:style>
-          <a:lnRef idx="2">
-            <a:schemeClr val="accent1"/>
-          </a:lnRef>
-          <a:fillRef idx="0">
-            <a:schemeClr val="accent1"/>
-          </a:fillRef>
-          <a:effectRef idx="1">
-            <a:schemeClr val="accent1"/>
-          </a:effectRef>
-          <a:fontRef idx="minor">
-            <a:schemeClr val="tx1"/>
-          </a:fontRef>
-        </p:style>
-      </p:cxnSp>
-      <p:sp>
-        <p:nvSpPr>
-          <p:cNvPr id="76" name="Oval 75"/>
-          <p:cNvSpPr/>
-          <p:nvPr/>
-        </p:nvSpPr>
-        <p:spPr>
-          <a:xfrm>
-            <a:off x="7342632" y="2770632"/>
-            <a:ext cx="36576" cy="36576"/>
-          </a:xfrm>
-          <a:prstGeom prst="ellipse">
-            <a:avLst/>
-          </a:prstGeom>
-          <a:noFill/>
-          <a:ln>
-            <a:noFill/>
-          </a:ln>
-          <a:effectLst/>
-        </p:spPr>
-        <p:style>
-          <a:lnRef idx="1">
-            <a:schemeClr val="accent1"/>
-          </a:lnRef>
-          <a:fillRef idx="3">
-            <a:schemeClr val="accent1"/>
-          </a:fillRef>
-          <a:effectRef idx="2">
-            <a:schemeClr val="accent1"/>
-          </a:effectRef>
-          <a:fontRef idx="minor">
-            <a:schemeClr val="lt1"/>
-          </a:fontRef>
-        </p:style>
-        <p:txBody>
-          <a:bodyPr rtlCol="0" anchor="ctr"/>
-          <a:lstStyle/>
-          <a:p>
-            <a:pPr algn="ctr"/>
-          </a:p>
-        </p:txBody>
-      </p:sp>
-      <p:cxnSp>
-        <p:nvCxnSpPr>
-          <p:cNvPr id="77" name="Connector 76"/>
-          <p:cNvCxnSpPr/>
-          <p:nvPr/>
-        </p:nvCxnSpPr>
-        <p:spPr>
-          <a:xfrm flipV="1">
-            <a:off x="7360920" y="2788920"/>
-            <a:ext cx="0" cy="4087368"/>
-          </a:xfrm>
-          <a:prstGeom prst="bentConnector3">
-            <a:avLst/>
-          </a:prstGeom>
-          <a:ln w="12700">
-            <a:solidFill>
-              <a:srgbClr val="000000"/>
-            </a:solidFill>
-            <a:tailEnd type="triangle" w="med" len="med"/>
-          </a:ln>
-          <a:effectLst/>
-        </p:spPr>
-        <p:style>
-          <a:lnRef idx="2">
-            <a:schemeClr val="accent1"/>
-          </a:lnRef>
-          <a:fillRef idx="0">
-            <a:schemeClr val="accent1"/>
-          </a:fillRef>
-          <a:effectRef idx="1">
-            <a:schemeClr val="accent1"/>
-          </a:effectRef>
-          <a:fontRef idx="minor">
-            <a:schemeClr val="tx1"/>
-          </a:fontRef>
-        </p:style>
-      </p:cxnSp>
-      <p:sp>
-        <p:nvSpPr>
-          <p:cNvPr id="78" name="Oval 77"/>
-          <p:cNvSpPr/>
-          <p:nvPr/>
-        </p:nvSpPr>
-        <p:spPr>
-          <a:xfrm>
-            <a:off x="8101584" y="5925312"/>
-            <a:ext cx="36576" cy="36576"/>
-          </a:xfrm>
-          <a:prstGeom prst="ellipse">
-            <a:avLst/>
-          </a:prstGeom>
-          <a:noFill/>
-          <a:ln>
-            <a:noFill/>
-          </a:ln>
-          <a:effectLst/>
-        </p:spPr>
-        <p:style>
-          <a:lnRef idx="1">
-            <a:schemeClr val="accent1"/>
-          </a:lnRef>
-          <a:fillRef idx="3">
-            <a:schemeClr val="accent1"/>
-          </a:fillRef>
-          <a:effectRef idx="2">
-            <a:schemeClr val="accent1"/>
-          </a:effectRef>
-          <a:fontRef idx="minor">
-            <a:schemeClr val="lt1"/>
-          </a:fontRef>
-        </p:style>
-        <p:txBody>
-          <a:bodyPr rtlCol="0" anchor="ctr"/>
-          <a:lstStyle/>
-          <a:p>
-            <a:pPr algn="ctr"/>
-          </a:p>
-        </p:txBody>
-      </p:sp>
-      <p:cxnSp>
-        <p:nvCxnSpPr>
-          <p:cNvPr id="79" name="Connector 78"/>
-          <p:cNvCxnSpPr/>
-          <p:nvPr/>
-        </p:nvCxnSpPr>
-        <p:spPr>
-          <a:xfrm flipV="1">
-            <a:off x="8119872" y="5943600"/>
-            <a:ext cx="0" cy="932688"/>
-          </a:xfrm>
-          <a:prstGeom prst="bentConnector3">
-            <a:avLst/>
-          </a:prstGeom>
-          <a:ln w="12700">
-            <a:solidFill>
-              <a:srgbClr val="000000"/>
-            </a:solidFill>
-            <a:tailEnd type="triangle" w="med" len="med"/>
-          </a:ln>
-          <a:effectLst/>
-        </p:spPr>
-        <p:style>
-          <a:lnRef idx="2">
-            <a:schemeClr val="accent1"/>
-          </a:lnRef>
-          <a:fillRef idx="0">
-            <a:schemeClr val="accent1"/>
-          </a:fillRef>
-          <a:effectRef idx="1">
-            <a:schemeClr val="accent1"/>
-          </a:effectRef>
-          <a:fontRef idx="minor">
-            <a:schemeClr val="tx1"/>
-          </a:fontRef>
-        </p:style>
-      </p:cxnSp>
-      <p:sp>
-        <p:nvSpPr>
-          <p:cNvPr id="80" name="TextBox 79"/>
-          <p:cNvSpPr txBox="1"/>
-          <p:nvPr/>
-        </p:nvSpPr>
-        <p:spPr>
-          <a:xfrm>
-            <a:off x="384048" y="7223760"/>
-            <a:ext cx="2377440" cy="201168"/>
-          </a:xfrm>
-          <a:prstGeom prst="rect">
-            <a:avLst/>
-          </a:prstGeom>
-          <a:noFill/>
-        </p:spPr>
-        <p:txBody>
-          <a:bodyPr wrap="square" anchor="t" lIns="0" rIns="0" tIns="0" bIns="0">
-            <a:spAutoFit/>
-          </a:bodyPr>
-          <a:lstStyle/>
-          <a:p>
-            <a:pPr algn="l"/>
-            <a:r>
-              <a:rPr sz="1000" b="0">
-                <a:solidFill>
-                  <a:srgbClr val="000000"/>
-                </a:solidFill>
-                <a:latin typeface="Arial"/>
-              </a:rPr>
-              <a:t>M1 Platforms hosting ATMOS node compute</a:t>
-            </a:r>
-          </a:p>
-        </p:txBody>
-      </p:sp>
-      <p:cxnSp>
-        <p:nvCxnSpPr>
-          <p:cNvPr id="81" name="Connector 80"/>
-          <p:cNvCxnSpPr/>
-          <p:nvPr/>
-        </p:nvCxnSpPr>
-        <p:spPr>
-          <a:xfrm>
-            <a:off x="3223260" y="6656832"/>
-            <a:ext cx="1554480" cy="0"/>
-          </a:xfrm>
-          <a:prstGeom prst="bentConnector3">
-            <a:avLst/>
-          </a:prstGeom>
-          <a:ln w="12700">
-            <a:solidFill>
-              <a:srgbClr val="000000"/>
-            </a:solidFill>
-          </a:ln>
-          <a:effectLst/>
-        </p:spPr>
-        <p:style>
-          <a:lnRef idx="2">
-            <a:schemeClr val="accent1"/>
-          </a:lnRef>
-          <a:fillRef idx="0">
-            <a:schemeClr val="accent1"/>
-          </a:fillRef>
-          <a:effectRef idx="1">
-            <a:schemeClr val="accent1"/>
-          </a:effectRef>
-          <a:fontRef idx="minor">
-            <a:schemeClr val="tx1"/>
-          </a:fontRef>
-        </p:style>
-      </p:cxnSp>
-      <p:sp>
-        <p:nvSpPr>
-          <p:cNvPr id="82" name="Oval 81"/>
-          <p:cNvSpPr/>
-          <p:nvPr/>
-        </p:nvSpPr>
-        <p:spPr>
-          <a:xfrm>
-            <a:off x="3204972" y="2770632"/>
-            <a:ext cx="36576" cy="36576"/>
-          </a:xfrm>
-          <a:prstGeom prst="ellipse">
-            <a:avLst/>
-          </a:prstGeom>
-          <a:noFill/>
-          <a:ln>
-            <a:noFill/>
-          </a:ln>
-          <a:effectLst/>
-        </p:spPr>
-        <p:style>
-          <a:lnRef idx="1">
-            <a:schemeClr val="accent1"/>
-          </a:lnRef>
-          <a:fillRef idx="3">
-            <a:schemeClr val="accent1"/>
-          </a:fillRef>
-          <a:effectRef idx="2">
-            <a:schemeClr val="accent1"/>
-          </a:effectRef>
-          <a:fontRef idx="minor">
-            <a:schemeClr val="lt1"/>
-          </a:fontRef>
-        </p:style>
-        <p:txBody>
-          <a:bodyPr rtlCol="0" anchor="ctr"/>
-          <a:lstStyle/>
-          <a:p>
-            <a:pPr algn="ctr"/>
-          </a:p>
-        </p:txBody>
-      </p:sp>
-      <p:cxnSp>
-        <p:nvCxnSpPr>
-          <p:cNvPr id="83" name="Connector 82"/>
-          <p:cNvCxnSpPr/>
-          <p:nvPr/>
-        </p:nvCxnSpPr>
-        <p:spPr>
-          <a:xfrm flipV="1">
-            <a:off x="3223260" y="2788920"/>
-            <a:ext cx="0" cy="3867912"/>
-          </a:xfrm>
-          <a:prstGeom prst="bentConnector3">
-            <a:avLst/>
-          </a:prstGeom>
-          <a:ln w="12700">
-            <a:solidFill>
-              <a:srgbClr val="000000"/>
-            </a:solidFill>
-            <a:tailEnd type="triangle" w="med" len="med"/>
-          </a:ln>
-          <a:effectLst/>
-        </p:spPr>
-        <p:style>
-          <a:lnRef idx="2">
-            <a:schemeClr val="accent1"/>
-          </a:lnRef>
-          <a:fillRef idx="0">
-            <a:schemeClr val="accent1"/>
-          </a:fillRef>
-          <a:effectRef idx="1">
-            <a:schemeClr val="accent1"/>
-          </a:effectRef>
-          <a:fontRef idx="minor">
-            <a:schemeClr val="tx1"/>
-          </a:fontRef>
-        </p:style>
-      </p:cxnSp>
-      <p:sp>
-        <p:nvSpPr>
-          <p:cNvPr id="84" name="Oval 83"/>
-          <p:cNvSpPr/>
-          <p:nvPr/>
-        </p:nvSpPr>
-        <p:spPr>
-          <a:xfrm>
-            <a:off x="4759452" y="5925312"/>
-            <a:ext cx="36576" cy="36576"/>
-          </a:xfrm>
-          <a:prstGeom prst="ellipse">
-            <a:avLst/>
-          </a:prstGeom>
-          <a:noFill/>
-          <a:ln>
-            <a:noFill/>
-          </a:ln>
-          <a:effectLst/>
-        </p:spPr>
-        <p:style>
-          <a:lnRef idx="1">
-            <a:schemeClr val="accent1"/>
-          </a:lnRef>
-          <a:fillRef idx="3">
-            <a:schemeClr val="accent1"/>
-          </a:fillRef>
-          <a:effectRef idx="2">
-            <a:schemeClr val="accent1"/>
-          </a:effectRef>
-          <a:fontRef idx="minor">
-            <a:schemeClr val="lt1"/>
-          </a:fontRef>
-        </p:style>
-        <p:txBody>
-          <a:bodyPr rtlCol="0" anchor="ctr"/>
-          <a:lstStyle/>
-          <a:p>
-            <a:pPr algn="ctr"/>
-          </a:p>
-        </p:txBody>
-      </p:sp>
-      <p:cxnSp>
-        <p:nvCxnSpPr>
-          <p:cNvPr id="85" name="Connector 84"/>
-          <p:cNvCxnSpPr/>
-          <p:nvPr/>
-        </p:nvCxnSpPr>
-        <p:spPr>
-          <a:xfrm flipV="1">
-            <a:off x="4777740" y="5943600"/>
-            <a:ext cx="0" cy="713232"/>
-          </a:xfrm>
-          <a:prstGeom prst="bentConnector3">
-            <a:avLst/>
-          </a:prstGeom>
-          <a:ln w="12700">
-            <a:solidFill>
-              <a:srgbClr val="000000"/>
-            </a:solidFill>
-            <a:tailEnd type="triangle" w="med" len="med"/>
-          </a:ln>
-          <a:effectLst/>
-        </p:spPr>
-        <p:style>
-          <a:lnRef idx="2">
-            <a:schemeClr val="accent1"/>
-          </a:lnRef>
-          <a:fillRef idx="0">
-            <a:schemeClr val="accent1"/>
-          </a:fillRef>
-          <a:effectRef idx="1">
-            <a:schemeClr val="accent1"/>
-          </a:effectRef>
-          <a:fontRef idx="minor">
-            <a:schemeClr val="tx1"/>
-          </a:fontRef>
-        </p:style>
-      </p:cxnSp>
-      <p:sp>
-        <p:nvSpPr>
-          <p:cNvPr id="86" name="TextBox 85"/>
-          <p:cNvSpPr txBox="1"/>
-          <p:nvPr/>
-        </p:nvSpPr>
-        <p:spPr>
-          <a:xfrm>
-            <a:off x="2971800" y="6455664"/>
-            <a:ext cx="2103120" cy="201168"/>
-          </a:xfrm>
-          <a:prstGeom prst="rect">
-            <a:avLst/>
-          </a:prstGeom>
-          <a:noFill/>
-        </p:spPr>
-        <p:txBody>
-          <a:bodyPr wrap="square" anchor="t" lIns="0" rIns="0" tIns="0" bIns="0">
-            <a:spAutoFit/>
-          </a:bodyPr>
-          <a:lstStyle/>
-          <a:p>
-            <a:pPr algn="l"/>
-            <a:r>
-              <a:rPr sz="1000" b="0">
-                <a:solidFill>
-                  <a:srgbClr val="000000"/>
-                </a:solidFill>
-                <a:latin typeface="Arial"/>
-              </a:rPr>
-              <a:t>M2 ABLE-LBM / reduced models</a:t>
-            </a:r>
-          </a:p>
-        </p:txBody>
-      </p:sp>
-      <p:cxnSp>
-        <p:nvCxnSpPr>
-          <p:cNvPr id="87" name="Connector 86"/>
-          <p:cNvCxnSpPr/>
-          <p:nvPr/>
-        </p:nvCxnSpPr>
-        <p:spPr>
-          <a:xfrm>
-            <a:off x="6437376" y="7095744"/>
-            <a:ext cx="1947672" cy="0"/>
-          </a:xfrm>
-          <a:prstGeom prst="bentConnector3">
-            <a:avLst/>
-          </a:prstGeom>
-          <a:ln w="12700">
-            <a:solidFill>
-              <a:srgbClr val="000000"/>
-            </a:solidFill>
-          </a:ln>
-          <a:effectLst/>
-        </p:spPr>
-        <p:style>
-          <a:lnRef idx="2">
-            <a:schemeClr val="accent1"/>
-          </a:lnRef>
-          <a:fillRef idx="0">
-            <a:schemeClr val="accent1"/>
-          </a:fillRef>
-          <a:effectRef idx="1">
-            <a:schemeClr val="accent1"/>
-          </a:effectRef>
-          <a:fontRef idx="minor">
-            <a:schemeClr val="tx1"/>
-          </a:fontRef>
-        </p:style>
-      </p:cxnSp>
-      <p:sp>
-        <p:nvSpPr>
-          <p:cNvPr id="88" name="Oval 87"/>
-          <p:cNvSpPr/>
-          <p:nvPr/>
-        </p:nvSpPr>
-        <p:spPr>
-          <a:xfrm>
-            <a:off x="6419088" y="4370832"/>
-            <a:ext cx="36576" cy="36576"/>
-          </a:xfrm>
-          <a:prstGeom prst="ellipse">
-            <a:avLst/>
-          </a:prstGeom>
-          <a:noFill/>
-          <a:ln>
-            <a:noFill/>
-          </a:ln>
-          <a:effectLst/>
-        </p:spPr>
-        <p:style>
-          <a:lnRef idx="1">
-            <a:schemeClr val="accent1"/>
-          </a:lnRef>
-          <a:fillRef idx="3">
-            <a:schemeClr val="accent1"/>
-          </a:fillRef>
-          <a:effectRef idx="2">
-            <a:schemeClr val="accent1"/>
-          </a:effectRef>
-          <a:fontRef idx="minor">
-            <a:schemeClr val="lt1"/>
-          </a:fontRef>
-        </p:style>
-        <p:txBody>
-          <a:bodyPr rtlCol="0" anchor="ctr"/>
-          <a:lstStyle/>
-          <a:p>
-            <a:pPr algn="ctr"/>
-          </a:p>
-        </p:txBody>
-      </p:sp>
-      <p:cxnSp>
-        <p:nvCxnSpPr>
-          <p:cNvPr id="89" name="Connector 88"/>
-          <p:cNvCxnSpPr/>
-          <p:nvPr/>
-        </p:nvCxnSpPr>
-        <p:spPr>
-          <a:xfrm flipV="1">
-            <a:off x="6437376" y="4389120"/>
-            <a:ext cx="0" cy="2706624"/>
-          </a:xfrm>
-          <a:prstGeom prst="bentConnector3">
-            <a:avLst/>
-          </a:prstGeom>
-          <a:ln w="12700">
-            <a:solidFill>
-              <a:srgbClr val="000000"/>
-            </a:solidFill>
-            <a:tailEnd type="triangle" w="med" len="med"/>
-          </a:ln>
-          <a:effectLst/>
-        </p:spPr>
-        <p:style>
-          <a:lnRef idx="2">
-            <a:schemeClr val="accent1"/>
-          </a:lnRef>
-          <a:fillRef idx="0">
-            <a:schemeClr val="accent1"/>
-          </a:fillRef>
-          <a:effectRef idx="1">
-            <a:schemeClr val="accent1"/>
-          </a:effectRef>
-          <a:fontRef idx="minor">
-            <a:schemeClr val="tx1"/>
-          </a:fontRef>
-        </p:style>
-      </p:cxnSp>
-      <p:sp>
-        <p:nvSpPr>
-          <p:cNvPr id="90" name="Oval 89"/>
-          <p:cNvSpPr/>
-          <p:nvPr/>
-        </p:nvSpPr>
-        <p:spPr>
-          <a:xfrm>
-            <a:off x="7479792" y="2770632"/>
-            <a:ext cx="36576" cy="36576"/>
-          </a:xfrm>
-          <a:prstGeom prst="ellipse">
-            <a:avLst/>
-          </a:prstGeom>
-          <a:noFill/>
-          <a:ln>
-            <a:noFill/>
-          </a:ln>
-          <a:effectLst/>
-        </p:spPr>
-        <p:style>
-          <a:lnRef idx="1">
-            <a:schemeClr val="accent1"/>
-          </a:lnRef>
-          <a:fillRef idx="3">
-            <a:schemeClr val="accent1"/>
-          </a:fillRef>
-          <a:effectRef idx="2">
-            <a:schemeClr val="accent1"/>
-          </a:effectRef>
-          <a:fontRef idx="minor">
-            <a:schemeClr val="lt1"/>
-          </a:fontRef>
-        </p:style>
-        <p:txBody>
-          <a:bodyPr rtlCol="0" anchor="ctr"/>
-          <a:lstStyle/>
-          <a:p>
-            <a:pPr algn="ctr"/>
-          </a:p>
-        </p:txBody>
-      </p:sp>
-      <p:cxnSp>
-        <p:nvCxnSpPr>
-          <p:cNvPr id="91" name="Connector 90"/>
-          <p:cNvCxnSpPr/>
-          <p:nvPr/>
-        </p:nvCxnSpPr>
-        <p:spPr>
-          <a:xfrm flipV="1">
-            <a:off x="7498079" y="2788920"/>
-            <a:ext cx="0" cy="4306824"/>
-          </a:xfrm>
-          <a:prstGeom prst="bentConnector3">
-            <a:avLst/>
-          </a:prstGeom>
-          <a:ln w="12700">
-            <a:solidFill>
-              <a:srgbClr val="000000"/>
-            </a:solidFill>
-            <a:tailEnd type="triangle" w="med" len="med"/>
-          </a:ln>
-          <a:effectLst/>
-        </p:spPr>
-        <p:style>
-          <a:lnRef idx="2">
-            <a:schemeClr val="accent1"/>
-          </a:lnRef>
-          <a:fillRef idx="0">
-            <a:schemeClr val="accent1"/>
-          </a:fillRef>
-          <a:effectRef idx="1">
-            <a:schemeClr val="accent1"/>
-          </a:effectRef>
-          <a:fontRef idx="minor">
-            <a:schemeClr val="tx1"/>
-          </a:fontRef>
-        </p:style>
-      </p:cxnSp>
-      <p:sp>
-        <p:nvSpPr>
-          <p:cNvPr id="92" name="Oval 91"/>
-          <p:cNvSpPr/>
-          <p:nvPr/>
-        </p:nvSpPr>
-        <p:spPr>
-          <a:xfrm>
-            <a:off x="8366760" y="5925312"/>
-            <a:ext cx="36576" cy="36576"/>
-          </a:xfrm>
-          <a:prstGeom prst="ellipse">
-            <a:avLst/>
-          </a:prstGeom>
-          <a:noFill/>
-          <a:ln>
-            <a:noFill/>
-          </a:ln>
-          <a:effectLst/>
-        </p:spPr>
-        <p:style>
-          <a:lnRef idx="1">
-            <a:schemeClr val="accent1"/>
-          </a:lnRef>
-          <a:fillRef idx="3">
-            <a:schemeClr val="accent1"/>
-          </a:fillRef>
-          <a:effectRef idx="2">
-            <a:schemeClr val="accent1"/>
-          </a:effectRef>
-          <a:fontRef idx="minor">
-            <a:schemeClr val="lt1"/>
-          </a:fontRef>
-        </p:style>
-        <p:txBody>
-          <a:bodyPr rtlCol="0" anchor="ctr"/>
-          <a:lstStyle/>
-          <a:p>
-            <a:pPr algn="ctr"/>
-          </a:p>
-        </p:txBody>
-      </p:sp>
-      <p:cxnSp>
-        <p:nvCxnSpPr>
-          <p:cNvPr id="93" name="Connector 92"/>
-          <p:cNvCxnSpPr/>
-          <p:nvPr/>
-        </p:nvCxnSpPr>
-        <p:spPr>
-          <a:xfrm flipV="1">
-            <a:off x="8385048" y="5943600"/>
-            <a:ext cx="0" cy="1152144"/>
-          </a:xfrm>
-          <a:prstGeom prst="bentConnector3">
-            <a:avLst/>
-          </a:prstGeom>
-          <a:ln w="12700">
-            <a:solidFill>
-              <a:srgbClr val="000000"/>
-            </a:solidFill>
-            <a:tailEnd type="triangle" w="med" len="med"/>
-          </a:ln>
-          <a:effectLst/>
-        </p:spPr>
-        <p:style>
-          <a:lnRef idx="2">
-            <a:schemeClr val="accent1"/>
-          </a:lnRef>
-          <a:fillRef idx="0">
-            <a:schemeClr val="accent1"/>
-          </a:fillRef>
-          <a:effectRef idx="1">
-            <a:schemeClr val="accent1"/>
-          </a:effectRef>
-          <a:fontRef idx="minor">
-            <a:schemeClr val="tx1"/>
-          </a:fontRef>
-        </p:style>
-      </p:cxnSp>
-      <p:sp>
-        <p:nvSpPr>
-          <p:cNvPr id="94" name="TextBox 93"/>
-          <p:cNvSpPr txBox="1"/>
-          <p:nvPr/>
-        </p:nvSpPr>
-        <p:spPr>
-          <a:xfrm>
-            <a:off x="5440680" y="7223760"/>
-            <a:ext cx="2926080" cy="201168"/>
-          </a:xfrm>
-          <a:prstGeom prst="rect">
-            <a:avLst/>
-          </a:prstGeom>
-          <a:noFill/>
-        </p:spPr>
-        <p:txBody>
-          <a:bodyPr wrap="square" anchor="t" lIns="0" rIns="0" tIns="0" bIns="0">
-            <a:spAutoFit/>
-          </a:bodyPr>
-          <a:lstStyle/>
-          <a:p>
-            <a:pPr algn="l"/>
-            <a:r>
-              <a:rPr sz="1000" b="0">
-                <a:solidFill>
-                  <a:srgbClr val="000000"/>
-                </a:solidFill>
-                <a:latin typeface="Arial"/>
               </a:rPr>
               <a:t>M3 DDS middleware and communications links</a:t>
             </a:r>
